--- a/cloudflare-deploy/public/library/agency/agency-kr.pptx
+++ b/cloudflare-deploy/public/library/agency/agency-kr.pptx
@@ -29,6 +29,8 @@
     <p:sldId id="277" r:id="rId28"/>
     <p:sldId id="278" r:id="rId29"/>
     <p:sldId id="279" r:id="rId30"/>
+    <p:sldId id="280" r:id="rId31"/>
+    <p:sldId id="281" r:id="rId32"/>
   </p:sldIdLst>
   <p:sldSz cx="12191695" cy="6858000" type="screen4x3"/>
   <p:notesSz cx="6858000" cy="9144000"/>
@@ -12340,6 +12342,3359 @@
 </file>
 
 <file path=ppt/slides/slide19.xml><?xml version="1.0" encoding="utf-8"?>
+<p:sld xmlns:a="http://schemas.openxmlformats.org/drawingml/2006/main" xmlns:p="http://schemas.openxmlformats.org/presentationml/2006/main" xmlns:r="http://schemas.openxmlformats.org/officeDocument/2006/relationships">
+  <p:cSld>
+    <p:bg>
+      <p:bgPr>
+        <a:solidFill>
+          <a:srgbClr val="FFFFFF"/>
+        </a:solidFill>
+        <a:effectLst/>
+      </p:bgPr>
+    </p:bg>
+    <p:spTree>
+      <p:nvGrpSpPr>
+        <p:cNvPr id="1" name=""/>
+        <p:cNvGrpSpPr/>
+        <p:nvPr/>
+      </p:nvGrpSpPr>
+      <p:grpSpPr/>
+      <p:sp>
+        <p:nvSpPr>
+          <p:cNvPr id="2" name="Rectangle 1"/>
+          <p:cNvSpPr/>
+          <p:nvPr/>
+        </p:nvSpPr>
+        <p:spPr>
+          <a:xfrm>
+            <a:off x="0" y="0"/>
+            <a:ext cx="12191695" cy="566928"/>
+          </a:xfrm>
+          <a:prstGeom prst="rect">
+            <a:avLst/>
+          </a:prstGeom>
+          <a:solidFill>
+            <a:srgbClr val="E11D48"/>
+          </a:solidFill>
+          <a:ln>
+            <a:noFill/>
+          </a:ln>
+          <a:effectLst/>
+        </p:spPr>
+        <p:style>
+          <a:lnRef idx="1">
+            <a:schemeClr val="accent1"/>
+          </a:lnRef>
+          <a:fillRef idx="3">
+            <a:schemeClr val="accent1"/>
+          </a:fillRef>
+          <a:effectRef idx="2">
+            <a:schemeClr val="accent1"/>
+          </a:effectRef>
+          <a:fontRef idx="minor">
+            <a:schemeClr val="lt1"/>
+          </a:fontRef>
+        </p:style>
+        <p:txBody>
+          <a:bodyPr rtlCol="0" anchor="ctr"/>
+          <a:lstStyle/>
+          <a:p>
+            <a:pPr algn="ctr"/>
+          </a:p>
+        </p:txBody>
+      </p:sp>
+      <p:sp>
+        <p:nvSpPr>
+          <p:cNvPr id="3" name="Rectangle 2"/>
+          <p:cNvSpPr/>
+          <p:nvPr/>
+        </p:nvSpPr>
+        <p:spPr>
+          <a:xfrm>
+            <a:off x="0" y="566928"/>
+            <a:ext cx="12191695" cy="54864"/>
+          </a:xfrm>
+          <a:prstGeom prst="rect">
+            <a:avLst/>
+          </a:prstGeom>
+          <a:solidFill>
+            <a:srgbClr val="0EA5E9"/>
+          </a:solidFill>
+          <a:ln>
+            <a:noFill/>
+          </a:ln>
+          <a:effectLst/>
+        </p:spPr>
+        <p:style>
+          <a:lnRef idx="1">
+            <a:schemeClr val="accent1"/>
+          </a:lnRef>
+          <a:fillRef idx="3">
+            <a:schemeClr val="accent1"/>
+          </a:fillRef>
+          <a:effectRef idx="2">
+            <a:schemeClr val="accent1"/>
+          </a:effectRef>
+          <a:fontRef idx="minor">
+            <a:schemeClr val="lt1"/>
+          </a:fontRef>
+        </p:style>
+        <p:txBody>
+          <a:bodyPr rtlCol="0" anchor="ctr"/>
+          <a:lstStyle/>
+          <a:p>
+            <a:pPr algn="ctr"/>
+          </a:p>
+        </p:txBody>
+      </p:sp>
+      <p:sp>
+        <p:nvSpPr>
+          <p:cNvPr id="4" name="TextBox 3"/>
+          <p:cNvSpPr txBox="1"/>
+          <p:nvPr/>
+        </p:nvSpPr>
+        <p:spPr>
+          <a:xfrm>
+            <a:off x="365760" y="27432"/>
+            <a:ext cx="7315200" cy="502920"/>
+          </a:xfrm>
+          <a:prstGeom prst="rect">
+            <a:avLst/>
+          </a:prstGeom>
+          <a:noFill/>
+        </p:spPr>
+        <p:txBody>
+          <a:bodyPr wrap="square" anchor="ctr">
+            <a:spAutoFit/>
+          </a:bodyPr>
+          <a:lstStyle/>
+          <a:p>
+            <a:pPr algn="l">
+              <a:lnSpc>
+                <a:spcPct val="100000"/>
+              </a:lnSpc>
+            </a:pPr>
+            <a:r>
+              <a:rPr sz="1500" b="1">
+                <a:solidFill>
+                  <a:srgbClr val="FFFFFF"/>
+                </a:solidFill>
+                <a:latin typeface="Malgun Gothic"/>
+              </a:rPr>
+              <a:t>🤝 망고아이 대리점용 사용설명서</a:t>
+            </a:r>
+          </a:p>
+        </p:txBody>
+      </p:sp>
+      <p:sp>
+        <p:nvSpPr>
+          <p:cNvPr id="5" name="TextBox 4"/>
+          <p:cNvSpPr txBox="1"/>
+          <p:nvPr/>
+        </p:nvSpPr>
+        <p:spPr>
+          <a:xfrm>
+            <a:off x="8168335" y="27432"/>
+            <a:ext cx="3657600" cy="502920"/>
+          </a:xfrm>
+          <a:prstGeom prst="rect">
+            <a:avLst/>
+          </a:prstGeom>
+          <a:noFill/>
+        </p:spPr>
+        <p:txBody>
+          <a:bodyPr wrap="square" anchor="ctr">
+            <a:spAutoFit/>
+          </a:bodyPr>
+          <a:lstStyle/>
+          <a:p>
+            <a:pPr algn="r">
+              <a:lnSpc>
+                <a:spcPct val="100000"/>
+              </a:lnSpc>
+            </a:pPr>
+            <a:r>
+              <a:rPr sz="1300" b="1">
+                <a:solidFill>
+                  <a:srgbClr val="F1F5F9"/>
+                </a:solidFill>
+                <a:latin typeface="Malgun Gothic"/>
+              </a:rPr>
+              <a:t>주요 기능 사용법</a:t>
+            </a:r>
+          </a:p>
+        </p:txBody>
+      </p:sp>
+      <p:sp>
+        <p:nvSpPr>
+          <p:cNvPr id="6" name="Rounded Rectangle 5"/>
+          <p:cNvSpPr/>
+          <p:nvPr/>
+        </p:nvSpPr>
+        <p:spPr>
+          <a:xfrm>
+            <a:off x="365760" y="822960"/>
+            <a:ext cx="868680" cy="868680"/>
+          </a:xfrm>
+          <a:prstGeom prst="roundRect">
+            <a:avLst/>
+          </a:prstGeom>
+          <a:solidFill>
+            <a:srgbClr val="E11D48"/>
+          </a:solidFill>
+          <a:ln>
+            <a:noFill/>
+          </a:ln>
+          <a:effectLst/>
+        </p:spPr>
+        <p:style>
+          <a:lnRef idx="1">
+            <a:schemeClr val="accent1"/>
+          </a:lnRef>
+          <a:fillRef idx="3">
+            <a:schemeClr val="accent1"/>
+          </a:fillRef>
+          <a:effectRef idx="2">
+            <a:schemeClr val="accent1"/>
+          </a:effectRef>
+          <a:fontRef idx="minor">
+            <a:schemeClr val="lt1"/>
+          </a:fontRef>
+        </p:style>
+        <p:txBody>
+          <a:bodyPr rtlCol="0" anchor="ctr"/>
+          <a:lstStyle/>
+          <a:p>
+            <a:pPr algn="ctr"/>
+          </a:p>
+        </p:txBody>
+      </p:sp>
+      <p:sp>
+        <p:nvSpPr>
+          <p:cNvPr id="7" name="TextBox 6"/>
+          <p:cNvSpPr txBox="1"/>
+          <p:nvPr/>
+        </p:nvSpPr>
+        <p:spPr>
+          <a:xfrm>
+            <a:off x="365760" y="822960"/>
+            <a:ext cx="868680" cy="868680"/>
+          </a:xfrm>
+          <a:prstGeom prst="rect">
+            <a:avLst/>
+          </a:prstGeom>
+          <a:noFill/>
+        </p:spPr>
+        <p:txBody>
+          <a:bodyPr wrap="square" anchor="ctr">
+            <a:spAutoFit/>
+          </a:bodyPr>
+          <a:lstStyle/>
+          <a:p>
+            <a:pPr algn="ctr">
+              <a:lnSpc>
+                <a:spcPct val="100000"/>
+              </a:lnSpc>
+            </a:pPr>
+            <a:r>
+              <a:rPr sz="2600" b="1">
+                <a:solidFill>
+                  <a:srgbClr val="FFFFFF"/>
+                </a:solidFill>
+                <a:latin typeface="Malgun Gothic"/>
+              </a:rPr>
+              <a:t>17</a:t>
+            </a:r>
+          </a:p>
+        </p:txBody>
+      </p:sp>
+      <p:sp>
+        <p:nvSpPr>
+          <p:cNvPr id="8" name="TextBox 7"/>
+          <p:cNvSpPr txBox="1"/>
+          <p:nvPr/>
+        </p:nvSpPr>
+        <p:spPr>
+          <a:xfrm>
+            <a:off x="1371600" y="822960"/>
+            <a:ext cx="10424160" cy="502920"/>
+          </a:xfrm>
+          <a:prstGeom prst="rect">
+            <a:avLst/>
+          </a:prstGeom>
+          <a:noFill/>
+        </p:spPr>
+        <p:txBody>
+          <a:bodyPr wrap="square" anchor="t">
+            <a:spAutoFit/>
+          </a:bodyPr>
+          <a:lstStyle/>
+          <a:p>
+            <a:pPr algn="l">
+              <a:lnSpc>
+                <a:spcPct val="100000"/>
+              </a:lnSpc>
+            </a:pPr>
+            <a:r>
+              <a:rPr sz="2300" b="1">
+                <a:solidFill>
+                  <a:srgbClr val="1E2340"/>
+                </a:solidFill>
+                <a:latin typeface="Malgun Gothic"/>
+              </a:rPr>
+              <a:t>📢 공지 스튜디오 (포스터 + 팝업)</a:t>
+            </a:r>
+          </a:p>
+        </p:txBody>
+      </p:sp>
+      <p:sp>
+        <p:nvSpPr>
+          <p:cNvPr id="9" name="TextBox 8"/>
+          <p:cNvSpPr txBox="1"/>
+          <p:nvPr/>
+        </p:nvSpPr>
+        <p:spPr>
+          <a:xfrm>
+            <a:off x="1417320" y="1353312"/>
+            <a:ext cx="10424160" cy="320040"/>
+          </a:xfrm>
+          <a:prstGeom prst="rect">
+            <a:avLst/>
+          </a:prstGeom>
+          <a:noFill/>
+        </p:spPr>
+        <p:txBody>
+          <a:bodyPr wrap="square" anchor="t">
+            <a:spAutoFit/>
+          </a:bodyPr>
+          <a:lstStyle/>
+          <a:p>
+            <a:pPr algn="l">
+              <a:lnSpc>
+                <a:spcPct val="100000"/>
+              </a:lnSpc>
+            </a:pPr>
+            <a:r>
+              <a:rPr sz="1300" b="0">
+                <a:solidFill>
+                  <a:srgbClr val="64748B"/>
+                </a:solidFill>
+                <a:latin typeface="Malgun Gothic"/>
+              </a:rPr>
+              <a:t>공지·이벤트 포스터를 만들어 학생 앱 팝업으로</a:t>
+            </a:r>
+          </a:p>
+        </p:txBody>
+      </p:sp>
+      <p:sp>
+        <p:nvSpPr>
+          <p:cNvPr id="10" name="Rounded Rectangle 9"/>
+          <p:cNvSpPr/>
+          <p:nvPr/>
+        </p:nvSpPr>
+        <p:spPr>
+          <a:xfrm>
+            <a:off x="365760" y="1828800"/>
+            <a:ext cx="11430000" cy="777240"/>
+          </a:xfrm>
+          <a:prstGeom prst="roundRect">
+            <a:avLst/>
+          </a:prstGeom>
+          <a:solidFill>
+            <a:srgbClr val="FFF1F2"/>
+          </a:solidFill>
+          <a:ln>
+            <a:noFill/>
+          </a:ln>
+          <a:effectLst/>
+        </p:spPr>
+        <p:style>
+          <a:lnRef idx="1">
+            <a:schemeClr val="accent1"/>
+          </a:lnRef>
+          <a:fillRef idx="3">
+            <a:schemeClr val="accent1"/>
+          </a:fillRef>
+          <a:effectRef idx="2">
+            <a:schemeClr val="accent1"/>
+          </a:effectRef>
+          <a:fontRef idx="minor">
+            <a:schemeClr val="lt1"/>
+          </a:fontRef>
+        </p:style>
+        <p:txBody>
+          <a:bodyPr rtlCol="0" anchor="ctr"/>
+          <a:lstStyle/>
+          <a:p>
+            <a:pPr algn="ctr"/>
+          </a:p>
+        </p:txBody>
+      </p:sp>
+      <p:sp>
+        <p:nvSpPr>
+          <p:cNvPr id="11" name="TextBox 10"/>
+          <p:cNvSpPr txBox="1"/>
+          <p:nvPr/>
+        </p:nvSpPr>
+        <p:spPr>
+          <a:xfrm>
+            <a:off x="548640" y="1901952"/>
+            <a:ext cx="11064240" cy="640080"/>
+          </a:xfrm>
+          <a:prstGeom prst="rect">
+            <a:avLst/>
+          </a:prstGeom>
+          <a:noFill/>
+        </p:spPr>
+        <p:txBody>
+          <a:bodyPr wrap="square" anchor="t">
+            <a:spAutoFit/>
+          </a:bodyPr>
+          <a:lstStyle/>
+          <a:p>
+            <a:pPr algn="l">
+              <a:lnSpc>
+                <a:spcPct val="115000"/>
+              </a:lnSpc>
+            </a:pPr>
+            <a:r>
+              <a:rPr sz="1200" b="0">
+                <a:solidFill>
+                  <a:srgbClr val="334155"/>
+                </a:solidFill>
+                <a:latin typeface="Malgun Gothic"/>
+              </a:rPr>
+              <a:t>흩어져 있던 ‘포스터 만들기’와 ‘팝업 공지 관리’를 한 곳으로 통합한 기능이에요. ①만들기 탭에서 공지·이벤트 포스터를 디자인하고, 바로 ②게시·팝업 탭으로 넘겨 우리 대리점 학생 앱에 팝업으로 띄울 수 있어요.</a:t>
+            </a:r>
+          </a:p>
+        </p:txBody>
+      </p:sp>
+      <p:sp>
+        <p:nvSpPr>
+          <p:cNvPr id="12" name="TextBox 11"/>
+          <p:cNvSpPr txBox="1"/>
+          <p:nvPr/>
+        </p:nvSpPr>
+        <p:spPr>
+          <a:xfrm>
+            <a:off x="457200" y="2743200"/>
+            <a:ext cx="5669280" cy="320040"/>
+          </a:xfrm>
+          <a:prstGeom prst="rect">
+            <a:avLst/>
+          </a:prstGeom>
+          <a:noFill/>
+        </p:spPr>
+        <p:txBody>
+          <a:bodyPr wrap="square" anchor="t">
+            <a:spAutoFit/>
+          </a:bodyPr>
+          <a:lstStyle/>
+          <a:p>
+            <a:pPr algn="l">
+              <a:lnSpc>
+                <a:spcPct val="100000"/>
+              </a:lnSpc>
+            </a:pPr>
+            <a:r>
+              <a:rPr sz="1350" b="1">
+                <a:solidFill>
+                  <a:srgbClr val="E11D48"/>
+                </a:solidFill>
+                <a:latin typeface="Malgun Gothic"/>
+              </a:rPr>
+              <a:t>사용 방법</a:t>
+            </a:r>
+          </a:p>
+        </p:txBody>
+      </p:sp>
+      <p:sp>
+        <p:nvSpPr>
+          <p:cNvPr id="13" name="TextBox 12"/>
+          <p:cNvSpPr txBox="1"/>
+          <p:nvPr/>
+        </p:nvSpPr>
+        <p:spPr>
+          <a:xfrm>
+            <a:off x="457200" y="3108960"/>
+            <a:ext cx="5669280" cy="2377440"/>
+          </a:xfrm>
+          <a:prstGeom prst="rect">
+            <a:avLst/>
+          </a:prstGeom>
+          <a:noFill/>
+        </p:spPr>
+        <p:txBody>
+          <a:bodyPr wrap="square">
+            <a:spAutoFit/>
+          </a:bodyPr>
+          <a:lstStyle/>
+          <a:p>
+            <a:pPr>
+              <a:lnSpc>
+                <a:spcPct val="115000"/>
+              </a:lnSpc>
+              <a:spcAft>
+                <a:spcPts val="600"/>
+              </a:spcAft>
+            </a:pPr>
+            <a:r>
+              <a:rPr sz="1050" b="1">
+                <a:solidFill>
+                  <a:srgbClr val="E11D48"/>
+                </a:solidFill>
+                <a:latin typeface="Malgun Gothic"/>
+              </a:rPr>
+              <a:t>● </a:t>
+            </a:r>
+            <a:r>
+              <a:rPr sz="1250">
+                <a:solidFill>
+                  <a:srgbClr val="334155"/>
+                </a:solidFill>
+                <a:latin typeface="Malgun Gothic"/>
+              </a:rPr>
+              <a:t>관리자 메뉴 알림 센터 → 📢 공지 스튜디오로 들어가요.</a:t>
+            </a:r>
+          </a:p>
+          <a:p>
+            <a:pPr>
+              <a:lnSpc>
+                <a:spcPct val="115000"/>
+              </a:lnSpc>
+              <a:spcAft>
+                <a:spcPts val="600"/>
+              </a:spcAft>
+            </a:pPr>
+            <a:r>
+              <a:rPr sz="1050" b="1">
+                <a:solidFill>
+                  <a:srgbClr val="E11D48"/>
+                </a:solidFill>
+                <a:latin typeface="Malgun Gothic"/>
+              </a:rPr>
+              <a:t>● </a:t>
+            </a:r>
+            <a:r>
+              <a:rPr sz="1250">
+                <a:solidFill>
+                  <a:srgbClr val="334155"/>
+                </a:solidFill>
+                <a:latin typeface="Malgun Gothic"/>
+              </a:rPr>
+              <a:t>①만들기 탭에서 문구·이미지·동영상으로 포스터를 꾸며요. (크기 조절·서버 저장·재사용 가능)</a:t>
+            </a:r>
+          </a:p>
+          <a:p>
+            <a:pPr>
+              <a:lnSpc>
+                <a:spcPct val="115000"/>
+              </a:lnSpc>
+              <a:spcAft>
+                <a:spcPts val="600"/>
+              </a:spcAft>
+            </a:pPr>
+            <a:r>
+              <a:rPr sz="1050" b="1">
+                <a:solidFill>
+                  <a:srgbClr val="E11D48"/>
+                </a:solidFill>
+                <a:latin typeface="Malgun Gothic"/>
+              </a:rPr>
+              <a:t>● </a:t>
+            </a:r>
+            <a:r>
+              <a:rPr sz="1250">
+                <a:solidFill>
+                  <a:srgbClr val="334155"/>
+                </a:solidFill>
+                <a:latin typeface="Malgun Gothic"/>
+              </a:rPr>
+              <a:t>완성한 포스터의 ‘📢 팝업으로 게시’ 를 누르면 ②게시·팝업 탭으로 자동 전환돼요.</a:t>
+            </a:r>
+          </a:p>
+          <a:p>
+            <a:pPr>
+              <a:lnSpc>
+                <a:spcPct val="115000"/>
+              </a:lnSpc>
+              <a:spcAft>
+                <a:spcPts val="600"/>
+              </a:spcAft>
+            </a:pPr>
+            <a:r>
+              <a:rPr sz="1050" b="1">
+                <a:solidFill>
+                  <a:srgbClr val="E11D48"/>
+                </a:solidFill>
+                <a:latin typeface="Malgun Gothic"/>
+              </a:rPr>
+              <a:t>● </a:t>
+            </a:r>
+            <a:r>
+              <a:rPr sz="1250">
+                <a:solidFill>
+                  <a:srgbClr val="334155"/>
+                </a:solidFill>
+                <a:latin typeface="Malgun Gothic"/>
+              </a:rPr>
+              <a:t>게시 탭에서 노출 기간·중단을 설정해 학생 앱 팝업으로 발행해요.</a:t>
+            </a:r>
+          </a:p>
+        </p:txBody>
+      </p:sp>
+      <p:sp>
+        <p:nvSpPr>
+          <p:cNvPr id="14" name="Rounded Rectangle 13"/>
+          <p:cNvSpPr/>
+          <p:nvPr/>
+        </p:nvSpPr>
+        <p:spPr>
+          <a:xfrm>
+            <a:off x="457200" y="4782312"/>
+            <a:ext cx="5669280" cy="1316736"/>
+          </a:xfrm>
+          <a:prstGeom prst="roundRect">
+            <a:avLst/>
+          </a:prstGeom>
+          <a:solidFill>
+            <a:srgbClr val="F4F7FF"/>
+          </a:solidFill>
+          <a:ln w="12700">
+            <a:solidFill>
+              <a:srgbClr val="E11D48"/>
+            </a:solidFill>
+          </a:ln>
+          <a:effectLst/>
+        </p:spPr>
+        <p:style>
+          <a:lnRef idx="1">
+            <a:schemeClr val="accent1"/>
+          </a:lnRef>
+          <a:fillRef idx="3">
+            <a:schemeClr val="accent1"/>
+          </a:fillRef>
+          <a:effectRef idx="2">
+            <a:schemeClr val="accent1"/>
+          </a:effectRef>
+          <a:fontRef idx="minor">
+            <a:schemeClr val="lt1"/>
+          </a:fontRef>
+        </p:style>
+        <p:txBody>
+          <a:bodyPr rtlCol="0" anchor="ctr"/>
+          <a:lstStyle/>
+          <a:p>
+            <a:pPr algn="ctr"/>
+          </a:p>
+        </p:txBody>
+      </p:sp>
+      <p:sp>
+        <p:nvSpPr>
+          <p:cNvPr id="15" name="TextBox 14"/>
+          <p:cNvSpPr txBox="1"/>
+          <p:nvPr/>
+        </p:nvSpPr>
+        <p:spPr>
+          <a:xfrm>
+            <a:off x="594360" y="4837175"/>
+            <a:ext cx="5394960" cy="274320"/>
+          </a:xfrm>
+          <a:prstGeom prst="rect">
+            <a:avLst/>
+          </a:prstGeom>
+          <a:noFill/>
+        </p:spPr>
+        <p:txBody>
+          <a:bodyPr wrap="square" anchor="t">
+            <a:spAutoFit/>
+          </a:bodyPr>
+          <a:lstStyle/>
+          <a:p>
+            <a:pPr algn="l">
+              <a:lnSpc>
+                <a:spcPct val="100000"/>
+              </a:lnSpc>
+            </a:pPr>
+            <a:r>
+              <a:rPr sz="1150" b="1">
+                <a:solidFill>
+                  <a:srgbClr val="E11D48"/>
+                </a:solidFill>
+                <a:latin typeface="Malgun Gothic"/>
+              </a:rPr>
+              <a:t>✅ 핵심 포인트</a:t>
+            </a:r>
+          </a:p>
+        </p:txBody>
+      </p:sp>
+      <p:sp>
+        <p:nvSpPr>
+          <p:cNvPr id="16" name="TextBox 15"/>
+          <p:cNvSpPr txBox="1"/>
+          <p:nvPr/>
+        </p:nvSpPr>
+        <p:spPr>
+          <a:xfrm>
+            <a:off x="594360" y="5111496"/>
+            <a:ext cx="5394960" cy="950976"/>
+          </a:xfrm>
+          <a:prstGeom prst="rect">
+            <a:avLst/>
+          </a:prstGeom>
+          <a:noFill/>
+        </p:spPr>
+        <p:txBody>
+          <a:bodyPr wrap="square">
+            <a:spAutoFit/>
+          </a:bodyPr>
+          <a:lstStyle/>
+          <a:p>
+            <a:pPr>
+              <a:lnSpc>
+                <a:spcPct val="115000"/>
+              </a:lnSpc>
+              <a:spcAft>
+                <a:spcPts val="200"/>
+              </a:spcAft>
+            </a:pPr>
+            <a:r>
+              <a:rPr sz="900" b="1">
+                <a:solidFill>
+                  <a:srgbClr val="E11D48"/>
+                </a:solidFill>
+                <a:latin typeface="Malgun Gothic"/>
+              </a:rPr>
+              <a:t>● </a:t>
+            </a:r>
+            <a:r>
+              <a:rPr sz="1100">
+                <a:solidFill>
+                  <a:srgbClr val="334155"/>
+                </a:solidFill>
+                <a:latin typeface="Malgun Gothic"/>
+              </a:rPr>
+              <a:t>포스터 제작과 팝업 발행이 한 화면 2탭으로 이어져 헷갈리지 않아요.</a:t>
+            </a:r>
+          </a:p>
+          <a:p>
+            <a:pPr>
+              <a:lnSpc>
+                <a:spcPct val="115000"/>
+              </a:lnSpc>
+              <a:spcAft>
+                <a:spcPts val="200"/>
+              </a:spcAft>
+            </a:pPr>
+            <a:r>
+              <a:rPr sz="900" b="1">
+                <a:solidFill>
+                  <a:srgbClr val="E11D48"/>
+                </a:solidFill>
+                <a:latin typeface="Malgun Gothic"/>
+              </a:rPr>
+              <a:t>● </a:t>
+            </a:r>
+            <a:r>
+              <a:rPr sz="1100">
+                <a:solidFill>
+                  <a:srgbClr val="334155"/>
+                </a:solidFill>
+                <a:latin typeface="Malgun Gothic"/>
+              </a:rPr>
+              <a:t>만든 포스터는 저장해두고 재사용할 수 있어요.</a:t>
+            </a:r>
+          </a:p>
+          <a:p>
+            <a:pPr>
+              <a:lnSpc>
+                <a:spcPct val="115000"/>
+              </a:lnSpc>
+              <a:spcAft>
+                <a:spcPts val="200"/>
+              </a:spcAft>
+            </a:pPr>
+            <a:r>
+              <a:rPr sz="900" b="1">
+                <a:solidFill>
+                  <a:srgbClr val="E11D48"/>
+                </a:solidFill>
+                <a:latin typeface="Malgun Gothic"/>
+              </a:rPr>
+              <a:t>● </a:t>
+            </a:r>
+            <a:r>
+              <a:rPr sz="1100">
+                <a:solidFill>
+                  <a:srgbClr val="334155"/>
+                </a:solidFill>
+                <a:latin typeface="Malgun Gothic"/>
+              </a:rPr>
+              <a:t>AI 비서·사이드바 검색 어느 경로로 들어와도 올바른 탭이 열려요.</a:t>
+            </a:r>
+          </a:p>
+        </p:txBody>
+      </p:sp>
+      <p:sp>
+        <p:nvSpPr>
+          <p:cNvPr id="17" name="Rounded Rectangle 16"/>
+          <p:cNvSpPr/>
+          <p:nvPr/>
+        </p:nvSpPr>
+        <p:spPr>
+          <a:xfrm>
+            <a:off x="457200" y="6208775"/>
+            <a:ext cx="5669280" cy="640080"/>
+          </a:xfrm>
+          <a:prstGeom prst="roundRect">
+            <a:avLst/>
+          </a:prstGeom>
+          <a:solidFill>
+            <a:srgbClr val="FFFBEB"/>
+          </a:solidFill>
+          <a:ln w="12700">
+            <a:solidFill>
+              <a:srgbClr val="F59E0B"/>
+            </a:solidFill>
+          </a:ln>
+          <a:effectLst/>
+        </p:spPr>
+        <p:style>
+          <a:lnRef idx="1">
+            <a:schemeClr val="accent1"/>
+          </a:lnRef>
+          <a:fillRef idx="3">
+            <a:schemeClr val="accent1"/>
+          </a:fillRef>
+          <a:effectRef idx="2">
+            <a:schemeClr val="accent1"/>
+          </a:effectRef>
+          <a:fontRef idx="minor">
+            <a:schemeClr val="lt1"/>
+          </a:fontRef>
+        </p:style>
+        <p:txBody>
+          <a:bodyPr rtlCol="0" anchor="ctr"/>
+          <a:lstStyle/>
+          <a:p>
+            <a:pPr algn="ctr"/>
+          </a:p>
+        </p:txBody>
+      </p:sp>
+      <p:sp>
+        <p:nvSpPr>
+          <p:cNvPr id="18" name="TextBox 17"/>
+          <p:cNvSpPr txBox="1"/>
+          <p:nvPr/>
+        </p:nvSpPr>
+        <p:spPr>
+          <a:xfrm>
+            <a:off x="594360" y="6254495"/>
+            <a:ext cx="5394960" cy="548640"/>
+          </a:xfrm>
+          <a:prstGeom prst="rect">
+            <a:avLst/>
+          </a:prstGeom>
+          <a:noFill/>
+        </p:spPr>
+        <p:txBody>
+          <a:bodyPr wrap="square" anchor="t">
+            <a:spAutoFit/>
+          </a:bodyPr>
+          <a:lstStyle/>
+          <a:p>
+            <a:pPr algn="l">
+              <a:lnSpc>
+                <a:spcPct val="105000"/>
+              </a:lnSpc>
+            </a:pPr>
+            <a:r>
+              <a:rPr sz="1050" b="0">
+                <a:solidFill>
+                  <a:srgbClr val="92670A"/>
+                </a:solidFill>
+                <a:latin typeface="Malgun Gothic"/>
+              </a:rPr>
+              <a:t>⚠️ 알아두기 · 기존 포스터·팝업 데이터는 그대로 유지돼요(통합만 됐고 삭제되지 않았어요).</a:t>
+            </a:r>
+          </a:p>
+        </p:txBody>
+      </p:sp>
+      <p:sp>
+        <p:nvSpPr>
+          <p:cNvPr id="19" name="Rounded Rectangle 18"/>
+          <p:cNvSpPr/>
+          <p:nvPr/>
+        </p:nvSpPr>
+        <p:spPr>
+          <a:xfrm>
+            <a:off x="457200" y="6940295"/>
+            <a:ext cx="5669280" cy="658368"/>
+          </a:xfrm>
+          <a:prstGeom prst="roundRect">
+            <a:avLst/>
+          </a:prstGeom>
+          <a:solidFill>
+            <a:srgbClr val="FFF7E6"/>
+          </a:solidFill>
+          <a:ln w="12700">
+            <a:solidFill>
+              <a:srgbClr val="0EA5E9"/>
+            </a:solidFill>
+          </a:ln>
+          <a:effectLst/>
+        </p:spPr>
+        <p:style>
+          <a:lnRef idx="1">
+            <a:schemeClr val="accent1"/>
+          </a:lnRef>
+          <a:fillRef idx="3">
+            <a:schemeClr val="accent1"/>
+          </a:fillRef>
+          <a:effectRef idx="2">
+            <a:schemeClr val="accent1"/>
+          </a:effectRef>
+          <a:fontRef idx="minor">
+            <a:schemeClr val="lt1"/>
+          </a:fontRef>
+        </p:style>
+        <p:txBody>
+          <a:bodyPr rtlCol="0" anchor="ctr"/>
+          <a:lstStyle/>
+          <a:p>
+            <a:pPr algn="ctr"/>
+          </a:p>
+        </p:txBody>
+      </p:sp>
+      <p:sp>
+        <p:nvSpPr>
+          <p:cNvPr id="20" name="TextBox 19"/>
+          <p:cNvSpPr txBox="1"/>
+          <p:nvPr/>
+        </p:nvSpPr>
+        <p:spPr>
+          <a:xfrm>
+            <a:off x="594360" y="6986015"/>
+            <a:ext cx="5394960" cy="566928"/>
+          </a:xfrm>
+          <a:prstGeom prst="rect">
+            <a:avLst/>
+          </a:prstGeom>
+          <a:noFill/>
+        </p:spPr>
+        <p:txBody>
+          <a:bodyPr wrap="square" anchor="t">
+            <a:spAutoFit/>
+          </a:bodyPr>
+          <a:lstStyle/>
+          <a:p>
+            <a:pPr algn="l">
+              <a:lnSpc>
+                <a:spcPct val="105000"/>
+              </a:lnSpc>
+            </a:pPr>
+            <a:r>
+              <a:rPr sz="1050" b="0">
+                <a:solidFill>
+                  <a:srgbClr val="5B4A2A"/>
+                </a:solidFill>
+                <a:latin typeface="Malgun Gothic"/>
+              </a:rPr>
+              <a:t>💡 꿀팁 · 이벤트 홍보는 ‘만들기 → 바로 팝업 게시’ 흐름 한 번이면 끝나요.</a:t>
+            </a:r>
+          </a:p>
+        </p:txBody>
+      </p:sp>
+      <p:sp>
+        <p:nvSpPr>
+          <p:cNvPr id="21" name="Rectangle 20"/>
+          <p:cNvSpPr/>
+          <p:nvPr/>
+        </p:nvSpPr>
+        <p:spPr>
+          <a:xfrm>
+            <a:off x="6300216" y="2345436"/>
+            <a:ext cx="5596128" cy="3538728"/>
+          </a:xfrm>
+          <a:prstGeom prst="rect">
+            <a:avLst/>
+          </a:prstGeom>
+          <a:solidFill>
+            <a:srgbClr val="FFFFFF"/>
+          </a:solidFill>
+          <a:ln w="12700">
+            <a:solidFill>
+              <a:srgbClr val="E2E8F0"/>
+            </a:solidFill>
+          </a:ln>
+          <a:effectLst/>
+        </p:spPr>
+        <p:style>
+          <a:lnRef idx="1">
+            <a:schemeClr val="accent1"/>
+          </a:lnRef>
+          <a:fillRef idx="3">
+            <a:schemeClr val="accent1"/>
+          </a:fillRef>
+          <a:effectRef idx="2">
+            <a:schemeClr val="accent1"/>
+          </a:effectRef>
+          <a:fontRef idx="minor">
+            <a:schemeClr val="lt1"/>
+          </a:fontRef>
+        </p:style>
+        <p:txBody>
+          <a:bodyPr rtlCol="0" anchor="ctr"/>
+          <a:lstStyle/>
+          <a:p>
+            <a:pPr algn="ctr"/>
+          </a:p>
+        </p:txBody>
+      </p:sp>
+      <p:pic>
+        <p:nvPicPr>
+          <p:cNvPr id="22" name="Picture 21" descr="admin_noticestudio.jpg"/>
+          <p:cNvPicPr>
+            <a:picLocks noChangeAspect="1"/>
+          </p:cNvPicPr>
+          <p:nvPr/>
+        </p:nvPicPr>
+        <p:blipFill>
+          <a:blip r:embed="rId2"/>
+          <a:stretch>
+            <a:fillRect/>
+          </a:stretch>
+        </p:blipFill>
+        <p:spPr>
+          <a:xfrm>
+            <a:off x="6355080" y="2400300"/>
+            <a:ext cx="5486400" cy="3429000"/>
+          </a:xfrm>
+          <a:prstGeom prst="rect">
+            <a:avLst/>
+          </a:prstGeom>
+        </p:spPr>
+      </p:pic>
+    </p:spTree>
+  </p:cSld>
+  <p:clrMapOvr>
+    <a:masterClrMapping/>
+  </p:clrMapOvr>
+</p:sld>
+</file>
+
+<file path=ppt/slides/slide2.xml><?xml version="1.0" encoding="utf-8"?>
+<p:sld xmlns:a="http://schemas.openxmlformats.org/drawingml/2006/main" xmlns:p="http://schemas.openxmlformats.org/presentationml/2006/main" xmlns:r="http://schemas.openxmlformats.org/officeDocument/2006/relationships">
+  <p:cSld>
+    <p:bg>
+      <p:bgPr>
+        <a:solidFill>
+          <a:srgbClr val="FFFFFF"/>
+        </a:solidFill>
+        <a:effectLst/>
+      </p:bgPr>
+    </p:bg>
+    <p:spTree>
+      <p:nvGrpSpPr>
+        <p:cNvPr id="1" name=""/>
+        <p:cNvGrpSpPr/>
+        <p:nvPr/>
+      </p:nvGrpSpPr>
+      <p:grpSpPr/>
+      <p:sp>
+        <p:nvSpPr>
+          <p:cNvPr id="2" name="Rectangle 1"/>
+          <p:cNvSpPr/>
+          <p:nvPr/>
+        </p:nvSpPr>
+        <p:spPr>
+          <a:xfrm>
+            <a:off x="0" y="0"/>
+            <a:ext cx="12191695" cy="566928"/>
+          </a:xfrm>
+          <a:prstGeom prst="rect">
+            <a:avLst/>
+          </a:prstGeom>
+          <a:solidFill>
+            <a:srgbClr val="E11D48"/>
+          </a:solidFill>
+          <a:ln>
+            <a:noFill/>
+          </a:ln>
+          <a:effectLst/>
+        </p:spPr>
+        <p:style>
+          <a:lnRef idx="1">
+            <a:schemeClr val="accent1"/>
+          </a:lnRef>
+          <a:fillRef idx="3">
+            <a:schemeClr val="accent1"/>
+          </a:fillRef>
+          <a:effectRef idx="2">
+            <a:schemeClr val="accent1"/>
+          </a:effectRef>
+          <a:fontRef idx="minor">
+            <a:schemeClr val="lt1"/>
+          </a:fontRef>
+        </p:style>
+        <p:txBody>
+          <a:bodyPr rtlCol="0" anchor="ctr"/>
+          <a:lstStyle/>
+          <a:p>
+            <a:pPr algn="ctr"/>
+          </a:p>
+        </p:txBody>
+      </p:sp>
+      <p:sp>
+        <p:nvSpPr>
+          <p:cNvPr id="3" name="Rectangle 2"/>
+          <p:cNvSpPr/>
+          <p:nvPr/>
+        </p:nvSpPr>
+        <p:spPr>
+          <a:xfrm>
+            <a:off x="0" y="566928"/>
+            <a:ext cx="12191695" cy="54864"/>
+          </a:xfrm>
+          <a:prstGeom prst="rect">
+            <a:avLst/>
+          </a:prstGeom>
+          <a:solidFill>
+            <a:srgbClr val="0EA5E9"/>
+          </a:solidFill>
+          <a:ln>
+            <a:noFill/>
+          </a:ln>
+          <a:effectLst/>
+        </p:spPr>
+        <p:style>
+          <a:lnRef idx="1">
+            <a:schemeClr val="accent1"/>
+          </a:lnRef>
+          <a:fillRef idx="3">
+            <a:schemeClr val="accent1"/>
+          </a:fillRef>
+          <a:effectRef idx="2">
+            <a:schemeClr val="accent1"/>
+          </a:effectRef>
+          <a:fontRef idx="minor">
+            <a:schemeClr val="lt1"/>
+          </a:fontRef>
+        </p:style>
+        <p:txBody>
+          <a:bodyPr rtlCol="0" anchor="ctr"/>
+          <a:lstStyle/>
+          <a:p>
+            <a:pPr algn="ctr"/>
+          </a:p>
+        </p:txBody>
+      </p:sp>
+      <p:sp>
+        <p:nvSpPr>
+          <p:cNvPr id="4" name="TextBox 3"/>
+          <p:cNvSpPr txBox="1"/>
+          <p:nvPr/>
+        </p:nvSpPr>
+        <p:spPr>
+          <a:xfrm>
+            <a:off x="365760" y="27432"/>
+            <a:ext cx="7315200" cy="502920"/>
+          </a:xfrm>
+          <a:prstGeom prst="rect">
+            <a:avLst/>
+          </a:prstGeom>
+          <a:noFill/>
+        </p:spPr>
+        <p:txBody>
+          <a:bodyPr wrap="square" anchor="ctr">
+            <a:spAutoFit/>
+          </a:bodyPr>
+          <a:lstStyle/>
+          <a:p>
+            <a:pPr algn="l">
+              <a:lnSpc>
+                <a:spcPct val="100000"/>
+              </a:lnSpc>
+            </a:pPr>
+            <a:r>
+              <a:rPr sz="1500" b="1">
+                <a:solidFill>
+                  <a:srgbClr val="FFFFFF"/>
+                </a:solidFill>
+                <a:latin typeface="Malgun Gothic"/>
+              </a:rPr>
+              <a:t>🤝 망고아이 대리점용 사용설명서</a:t>
+            </a:r>
+          </a:p>
+        </p:txBody>
+      </p:sp>
+      <p:sp>
+        <p:nvSpPr>
+          <p:cNvPr id="5" name="TextBox 4"/>
+          <p:cNvSpPr txBox="1"/>
+          <p:nvPr/>
+        </p:nvSpPr>
+        <p:spPr>
+          <a:xfrm>
+            <a:off x="8168335" y="27432"/>
+            <a:ext cx="3657600" cy="502920"/>
+          </a:xfrm>
+          <a:prstGeom prst="rect">
+            <a:avLst/>
+          </a:prstGeom>
+          <a:noFill/>
+        </p:spPr>
+        <p:txBody>
+          <a:bodyPr wrap="square" anchor="ctr">
+            <a:spAutoFit/>
+          </a:bodyPr>
+          <a:lstStyle/>
+          <a:p>
+            <a:pPr algn="r">
+              <a:lnSpc>
+                <a:spcPct val="100000"/>
+              </a:lnSpc>
+            </a:pPr>
+            <a:r>
+              <a:rPr sz="1300" b="1">
+                <a:solidFill>
+                  <a:srgbClr val="F1F5F9"/>
+                </a:solidFill>
+                <a:latin typeface="Malgun Gothic"/>
+              </a:rPr>
+              <a:t>소개</a:t>
+            </a:r>
+          </a:p>
+        </p:txBody>
+      </p:sp>
+      <p:sp>
+        <p:nvSpPr>
+          <p:cNvPr id="6" name="Rounded Rectangle 5"/>
+          <p:cNvSpPr/>
+          <p:nvPr/>
+        </p:nvSpPr>
+        <p:spPr>
+          <a:xfrm>
+            <a:off x="365760" y="868680"/>
+            <a:ext cx="11460175" cy="1554480"/>
+          </a:xfrm>
+          <a:prstGeom prst="roundRect">
+            <a:avLst/>
+          </a:prstGeom>
+          <a:solidFill>
+            <a:srgbClr val="FFF1F2"/>
+          </a:solidFill>
+          <a:ln>
+            <a:noFill/>
+          </a:ln>
+          <a:effectLst/>
+        </p:spPr>
+        <p:style>
+          <a:lnRef idx="1">
+            <a:schemeClr val="accent1"/>
+          </a:lnRef>
+          <a:fillRef idx="3">
+            <a:schemeClr val="accent1"/>
+          </a:fillRef>
+          <a:effectRef idx="2">
+            <a:schemeClr val="accent1"/>
+          </a:effectRef>
+          <a:fontRef idx="minor">
+            <a:schemeClr val="lt1"/>
+          </a:fontRef>
+        </p:style>
+        <p:txBody>
+          <a:bodyPr rtlCol="0" anchor="ctr"/>
+          <a:lstStyle/>
+          <a:p>
+            <a:pPr algn="ctr"/>
+          </a:p>
+        </p:txBody>
+      </p:sp>
+      <p:sp>
+        <p:nvSpPr>
+          <p:cNvPr id="7" name="TextBox 6"/>
+          <p:cNvSpPr txBox="1"/>
+          <p:nvPr/>
+        </p:nvSpPr>
+        <p:spPr>
+          <a:xfrm>
+            <a:off x="640080" y="1005840"/>
+            <a:ext cx="10881360" cy="457200"/>
+          </a:xfrm>
+          <a:prstGeom prst="rect">
+            <a:avLst/>
+          </a:prstGeom>
+          <a:noFill/>
+        </p:spPr>
+        <p:txBody>
+          <a:bodyPr wrap="square" anchor="t">
+            <a:spAutoFit/>
+          </a:bodyPr>
+          <a:lstStyle/>
+          <a:p>
+            <a:pPr algn="l">
+              <a:lnSpc>
+                <a:spcPct val="100000"/>
+              </a:lnSpc>
+            </a:pPr>
+            <a:r>
+              <a:rPr sz="2400" b="1">
+                <a:solidFill>
+                  <a:srgbClr val="E11D48"/>
+                </a:solidFill>
+                <a:latin typeface="Malgun Gothic"/>
+              </a:rPr>
+              <a:t>대리점 관리 페이지란?</a:t>
+            </a:r>
+          </a:p>
+        </p:txBody>
+      </p:sp>
+      <p:sp>
+        <p:nvSpPr>
+          <p:cNvPr id="8" name="TextBox 7"/>
+          <p:cNvSpPr txBox="1"/>
+          <p:nvPr/>
+        </p:nvSpPr>
+        <p:spPr>
+          <a:xfrm>
+            <a:off x="640080" y="1481328"/>
+            <a:ext cx="10972800" cy="914400"/>
+          </a:xfrm>
+          <a:prstGeom prst="rect">
+            <a:avLst/>
+          </a:prstGeom>
+          <a:noFill/>
+        </p:spPr>
+        <p:txBody>
+          <a:bodyPr wrap="square" anchor="t">
+            <a:spAutoFit/>
+          </a:bodyPr>
+          <a:lstStyle/>
+          <a:p>
+            <a:pPr algn="l">
+              <a:lnSpc>
+                <a:spcPct val="125000"/>
+              </a:lnSpc>
+            </a:pPr>
+            <a:r>
+              <a:rPr sz="1300" b="0">
+                <a:solidFill>
+                  <a:srgbClr val="334155"/>
+                </a:solidFill>
+                <a:latin typeface="Malgun Gothic"/>
+              </a:rPr>
+              <a:t>대리점 페이지는 우리 대리점의 학생·수업·결제·정산을 직접 관리하는 곳이에요. 학생 모집·상담부터 등록, 수업 배정, 수납, 학부모 소통, 정산 수령까지 대리점 운영에 필요한 기능이 모여 있어요. 로그인하면 ‘우리 대리점’ 범위의 데이터만 자동으로 보여, 내 학생에게 집중할 수 있어요.</a:t>
+            </a:r>
+          </a:p>
+        </p:txBody>
+      </p:sp>
+      <p:sp>
+        <p:nvSpPr>
+          <p:cNvPr id="9" name="Rounded Rectangle 8"/>
+          <p:cNvSpPr/>
+          <p:nvPr/>
+        </p:nvSpPr>
+        <p:spPr>
+          <a:xfrm>
+            <a:off x="365760" y="2697480"/>
+            <a:ext cx="5524347" cy="822960"/>
+          </a:xfrm>
+          <a:prstGeom prst="roundRect">
+            <a:avLst/>
+          </a:prstGeom>
+          <a:solidFill>
+            <a:srgbClr val="FFFFFF"/>
+          </a:solidFill>
+          <a:ln w="12700">
+            <a:solidFill>
+              <a:srgbClr val="E2E8F0"/>
+            </a:solidFill>
+          </a:ln>
+          <a:effectLst/>
+        </p:spPr>
+        <p:style>
+          <a:lnRef idx="1">
+            <a:schemeClr val="accent1"/>
+          </a:lnRef>
+          <a:fillRef idx="3">
+            <a:schemeClr val="accent1"/>
+          </a:fillRef>
+          <a:effectRef idx="2">
+            <a:schemeClr val="accent1"/>
+          </a:effectRef>
+          <a:fontRef idx="minor">
+            <a:schemeClr val="lt1"/>
+          </a:fontRef>
+        </p:style>
+        <p:txBody>
+          <a:bodyPr rtlCol="0" anchor="ctr"/>
+          <a:lstStyle/>
+          <a:p>
+            <a:pPr algn="ctr"/>
+          </a:p>
+        </p:txBody>
+      </p:sp>
+      <p:sp>
+        <p:nvSpPr>
+          <p:cNvPr id="10" name="Rounded Rectangle 9"/>
+          <p:cNvSpPr/>
+          <p:nvPr/>
+        </p:nvSpPr>
+        <p:spPr>
+          <a:xfrm>
+            <a:off x="502920" y="2852928"/>
+            <a:ext cx="512064" cy="512064"/>
+          </a:xfrm>
+          <a:prstGeom prst="roundRect">
+            <a:avLst/>
+          </a:prstGeom>
+          <a:solidFill>
+            <a:srgbClr val="FFE4E6"/>
+          </a:solidFill>
+          <a:ln>
+            <a:noFill/>
+          </a:ln>
+          <a:effectLst/>
+        </p:spPr>
+        <p:style>
+          <a:lnRef idx="1">
+            <a:schemeClr val="accent1"/>
+          </a:lnRef>
+          <a:fillRef idx="3">
+            <a:schemeClr val="accent1"/>
+          </a:fillRef>
+          <a:effectRef idx="2">
+            <a:schemeClr val="accent1"/>
+          </a:effectRef>
+          <a:fontRef idx="minor">
+            <a:schemeClr val="lt1"/>
+          </a:fontRef>
+        </p:style>
+        <p:txBody>
+          <a:bodyPr rtlCol="0" anchor="ctr"/>
+          <a:lstStyle/>
+          <a:p>
+            <a:pPr algn="ctr"/>
+          </a:p>
+        </p:txBody>
+      </p:sp>
+      <p:sp>
+        <p:nvSpPr>
+          <p:cNvPr id="11" name="TextBox 10"/>
+          <p:cNvSpPr txBox="1"/>
+          <p:nvPr/>
+        </p:nvSpPr>
+        <p:spPr>
+          <a:xfrm>
+            <a:off x="502920" y="2852928"/>
+            <a:ext cx="512064" cy="512064"/>
+          </a:xfrm>
+          <a:prstGeom prst="rect">
+            <a:avLst/>
+          </a:prstGeom>
+          <a:noFill/>
+        </p:spPr>
+        <p:txBody>
+          <a:bodyPr wrap="square" anchor="ctr">
+            <a:spAutoFit/>
+          </a:bodyPr>
+          <a:lstStyle/>
+          <a:p>
+            <a:pPr algn="ctr">
+              <a:lnSpc>
+                <a:spcPct val="100000"/>
+              </a:lnSpc>
+            </a:pPr>
+            <a:r>
+              <a:rPr sz="2000" b="0">
+                <a:solidFill>
+                  <a:srgbClr val="E11D48"/>
+                </a:solidFill>
+                <a:latin typeface="Malgun Gothic"/>
+              </a:rPr>
+              <a:t>🤝</a:t>
+            </a:r>
+          </a:p>
+        </p:txBody>
+      </p:sp>
+      <p:sp>
+        <p:nvSpPr>
+          <p:cNvPr id="12" name="TextBox 11"/>
+          <p:cNvSpPr txBox="1"/>
+          <p:nvPr/>
+        </p:nvSpPr>
+        <p:spPr>
+          <a:xfrm>
+            <a:off x="1143000" y="2816352"/>
+            <a:ext cx="4609947" cy="365760"/>
+          </a:xfrm>
+          <a:prstGeom prst="rect">
+            <a:avLst/>
+          </a:prstGeom>
+          <a:noFill/>
+        </p:spPr>
+        <p:txBody>
+          <a:bodyPr wrap="square" anchor="t">
+            <a:spAutoFit/>
+          </a:bodyPr>
+          <a:lstStyle/>
+          <a:p>
+            <a:pPr algn="l">
+              <a:lnSpc>
+                <a:spcPct val="100000"/>
+              </a:lnSpc>
+            </a:pPr>
+            <a:r>
+              <a:rPr sz="1400" b="1">
+                <a:solidFill>
+                  <a:srgbClr val="1E2340"/>
+                </a:solidFill>
+                <a:latin typeface="Malgun Gothic"/>
+              </a:rPr>
+              <a:t>우리 대리점 범위 자동</a:t>
+            </a:r>
+          </a:p>
+        </p:txBody>
+      </p:sp>
+      <p:sp>
+        <p:nvSpPr>
+          <p:cNvPr id="13" name="TextBox 12"/>
+          <p:cNvSpPr txBox="1"/>
+          <p:nvPr/>
+        </p:nvSpPr>
+        <p:spPr>
+          <a:xfrm>
+            <a:off x="1143000" y="3127248"/>
+            <a:ext cx="4609947" cy="365760"/>
+          </a:xfrm>
+          <a:prstGeom prst="rect">
+            <a:avLst/>
+          </a:prstGeom>
+          <a:noFill/>
+        </p:spPr>
+        <p:txBody>
+          <a:bodyPr wrap="square" anchor="t">
+            <a:spAutoFit/>
+          </a:bodyPr>
+          <a:lstStyle/>
+          <a:p>
+            <a:pPr algn="l">
+              <a:lnSpc>
+                <a:spcPct val="100000"/>
+              </a:lnSpc>
+            </a:pPr>
+            <a:r>
+              <a:rPr sz="1050" b="0">
+                <a:solidFill>
+                  <a:srgbClr val="64748B"/>
+                </a:solidFill>
+                <a:latin typeface="Malgun Gothic"/>
+              </a:rPr>
+              <a:t>로그인만 하면 내 학생·매출만 보여요.</a:t>
+            </a:r>
+          </a:p>
+        </p:txBody>
+      </p:sp>
+      <p:sp>
+        <p:nvSpPr>
+          <p:cNvPr id="14" name="Rounded Rectangle 13"/>
+          <p:cNvSpPr/>
+          <p:nvPr/>
+        </p:nvSpPr>
+        <p:spPr>
+          <a:xfrm>
+            <a:off x="6301587" y="2697480"/>
+            <a:ext cx="5524347" cy="822960"/>
+          </a:xfrm>
+          <a:prstGeom prst="roundRect">
+            <a:avLst/>
+          </a:prstGeom>
+          <a:solidFill>
+            <a:srgbClr val="FFFFFF"/>
+          </a:solidFill>
+          <a:ln w="12700">
+            <a:solidFill>
+              <a:srgbClr val="E2E8F0"/>
+            </a:solidFill>
+          </a:ln>
+          <a:effectLst/>
+        </p:spPr>
+        <p:style>
+          <a:lnRef idx="1">
+            <a:schemeClr val="accent1"/>
+          </a:lnRef>
+          <a:fillRef idx="3">
+            <a:schemeClr val="accent1"/>
+          </a:fillRef>
+          <a:effectRef idx="2">
+            <a:schemeClr val="accent1"/>
+          </a:effectRef>
+          <a:fontRef idx="minor">
+            <a:schemeClr val="lt1"/>
+          </a:fontRef>
+        </p:style>
+        <p:txBody>
+          <a:bodyPr rtlCol="0" anchor="ctr"/>
+          <a:lstStyle/>
+          <a:p>
+            <a:pPr algn="ctr"/>
+          </a:p>
+        </p:txBody>
+      </p:sp>
+      <p:sp>
+        <p:nvSpPr>
+          <p:cNvPr id="15" name="Rounded Rectangle 14"/>
+          <p:cNvSpPr/>
+          <p:nvPr/>
+        </p:nvSpPr>
+        <p:spPr>
+          <a:xfrm>
+            <a:off x="6438747" y="2852928"/>
+            <a:ext cx="512064" cy="512064"/>
+          </a:xfrm>
+          <a:prstGeom prst="roundRect">
+            <a:avLst/>
+          </a:prstGeom>
+          <a:solidFill>
+            <a:srgbClr val="FFE4E6"/>
+          </a:solidFill>
+          <a:ln>
+            <a:noFill/>
+          </a:ln>
+          <a:effectLst/>
+        </p:spPr>
+        <p:style>
+          <a:lnRef idx="1">
+            <a:schemeClr val="accent1"/>
+          </a:lnRef>
+          <a:fillRef idx="3">
+            <a:schemeClr val="accent1"/>
+          </a:fillRef>
+          <a:effectRef idx="2">
+            <a:schemeClr val="accent1"/>
+          </a:effectRef>
+          <a:fontRef idx="minor">
+            <a:schemeClr val="lt1"/>
+          </a:fontRef>
+        </p:style>
+        <p:txBody>
+          <a:bodyPr rtlCol="0" anchor="ctr"/>
+          <a:lstStyle/>
+          <a:p>
+            <a:pPr algn="ctr"/>
+          </a:p>
+        </p:txBody>
+      </p:sp>
+      <p:sp>
+        <p:nvSpPr>
+          <p:cNvPr id="16" name="TextBox 15"/>
+          <p:cNvSpPr txBox="1"/>
+          <p:nvPr/>
+        </p:nvSpPr>
+        <p:spPr>
+          <a:xfrm>
+            <a:off x="6438747" y="2852928"/>
+            <a:ext cx="512064" cy="512064"/>
+          </a:xfrm>
+          <a:prstGeom prst="rect">
+            <a:avLst/>
+          </a:prstGeom>
+          <a:noFill/>
+        </p:spPr>
+        <p:txBody>
+          <a:bodyPr wrap="square" anchor="ctr">
+            <a:spAutoFit/>
+          </a:bodyPr>
+          <a:lstStyle/>
+          <a:p>
+            <a:pPr algn="ctr">
+              <a:lnSpc>
+                <a:spcPct val="100000"/>
+              </a:lnSpc>
+            </a:pPr>
+            <a:r>
+              <a:rPr sz="2000" b="0">
+                <a:solidFill>
+                  <a:srgbClr val="E11D48"/>
+                </a:solidFill>
+                <a:latin typeface="Malgun Gothic"/>
+              </a:rPr>
+              <a:t>🧑‍🎓</a:t>
+            </a:r>
+          </a:p>
+        </p:txBody>
+      </p:sp>
+      <p:sp>
+        <p:nvSpPr>
+          <p:cNvPr id="17" name="TextBox 16"/>
+          <p:cNvSpPr txBox="1"/>
+          <p:nvPr/>
+        </p:nvSpPr>
+        <p:spPr>
+          <a:xfrm>
+            <a:off x="7078827" y="2816352"/>
+            <a:ext cx="4609947" cy="365760"/>
+          </a:xfrm>
+          <a:prstGeom prst="rect">
+            <a:avLst/>
+          </a:prstGeom>
+          <a:noFill/>
+        </p:spPr>
+        <p:txBody>
+          <a:bodyPr wrap="square" anchor="t">
+            <a:spAutoFit/>
+          </a:bodyPr>
+          <a:lstStyle/>
+          <a:p>
+            <a:pPr algn="l">
+              <a:lnSpc>
+                <a:spcPct val="100000"/>
+              </a:lnSpc>
+            </a:pPr>
+            <a:r>
+              <a:rPr sz="1400" b="1">
+                <a:solidFill>
+                  <a:srgbClr val="1E2340"/>
+                </a:solidFill>
+                <a:latin typeface="Malgun Gothic"/>
+              </a:rPr>
+              <a:t>학생 모집·등록·관리</a:t>
+            </a:r>
+          </a:p>
+        </p:txBody>
+      </p:sp>
+      <p:sp>
+        <p:nvSpPr>
+          <p:cNvPr id="18" name="TextBox 17"/>
+          <p:cNvSpPr txBox="1"/>
+          <p:nvPr/>
+        </p:nvSpPr>
+        <p:spPr>
+          <a:xfrm>
+            <a:off x="7078827" y="3127248"/>
+            <a:ext cx="4609947" cy="365760"/>
+          </a:xfrm>
+          <a:prstGeom prst="rect">
+            <a:avLst/>
+          </a:prstGeom>
+          <a:noFill/>
+        </p:spPr>
+        <p:txBody>
+          <a:bodyPr wrap="square" anchor="t">
+            <a:spAutoFit/>
+          </a:bodyPr>
+          <a:lstStyle/>
+          <a:p>
+            <a:pPr algn="l">
+              <a:lnSpc>
+                <a:spcPct val="100000"/>
+              </a:lnSpc>
+            </a:pPr>
+            <a:r>
+              <a:rPr sz="1050" b="0">
+                <a:solidFill>
+                  <a:srgbClr val="64748B"/>
+                </a:solidFill>
+                <a:latin typeface="Malgun Gothic"/>
+              </a:rPr>
+              <a:t>상담부터 등록·수업 배정까지.</a:t>
+            </a:r>
+          </a:p>
+        </p:txBody>
+      </p:sp>
+      <p:sp>
+        <p:nvSpPr>
+          <p:cNvPr id="19" name="Rounded Rectangle 18"/>
+          <p:cNvSpPr/>
+          <p:nvPr/>
+        </p:nvSpPr>
+        <p:spPr>
+          <a:xfrm>
+            <a:off x="365760" y="3657600"/>
+            <a:ext cx="5524347" cy="822960"/>
+          </a:xfrm>
+          <a:prstGeom prst="roundRect">
+            <a:avLst/>
+          </a:prstGeom>
+          <a:solidFill>
+            <a:srgbClr val="FFFFFF"/>
+          </a:solidFill>
+          <a:ln w="12700">
+            <a:solidFill>
+              <a:srgbClr val="E2E8F0"/>
+            </a:solidFill>
+          </a:ln>
+          <a:effectLst/>
+        </p:spPr>
+        <p:style>
+          <a:lnRef idx="1">
+            <a:schemeClr val="accent1"/>
+          </a:lnRef>
+          <a:fillRef idx="3">
+            <a:schemeClr val="accent1"/>
+          </a:fillRef>
+          <a:effectRef idx="2">
+            <a:schemeClr val="accent1"/>
+          </a:effectRef>
+          <a:fontRef idx="minor">
+            <a:schemeClr val="lt1"/>
+          </a:fontRef>
+        </p:style>
+        <p:txBody>
+          <a:bodyPr rtlCol="0" anchor="ctr"/>
+          <a:lstStyle/>
+          <a:p>
+            <a:pPr algn="ctr"/>
+          </a:p>
+        </p:txBody>
+      </p:sp>
+      <p:sp>
+        <p:nvSpPr>
+          <p:cNvPr id="20" name="Rounded Rectangle 19"/>
+          <p:cNvSpPr/>
+          <p:nvPr/>
+        </p:nvSpPr>
+        <p:spPr>
+          <a:xfrm>
+            <a:off x="502920" y="3813048"/>
+            <a:ext cx="512064" cy="512064"/>
+          </a:xfrm>
+          <a:prstGeom prst="roundRect">
+            <a:avLst/>
+          </a:prstGeom>
+          <a:solidFill>
+            <a:srgbClr val="FFE4E6"/>
+          </a:solidFill>
+          <a:ln>
+            <a:noFill/>
+          </a:ln>
+          <a:effectLst/>
+        </p:spPr>
+        <p:style>
+          <a:lnRef idx="1">
+            <a:schemeClr val="accent1"/>
+          </a:lnRef>
+          <a:fillRef idx="3">
+            <a:schemeClr val="accent1"/>
+          </a:fillRef>
+          <a:effectRef idx="2">
+            <a:schemeClr val="accent1"/>
+          </a:effectRef>
+          <a:fontRef idx="minor">
+            <a:schemeClr val="lt1"/>
+          </a:fontRef>
+        </p:style>
+        <p:txBody>
+          <a:bodyPr rtlCol="0" anchor="ctr"/>
+          <a:lstStyle/>
+          <a:p>
+            <a:pPr algn="ctr"/>
+          </a:p>
+        </p:txBody>
+      </p:sp>
+      <p:sp>
+        <p:nvSpPr>
+          <p:cNvPr id="21" name="TextBox 20"/>
+          <p:cNvSpPr txBox="1"/>
+          <p:nvPr/>
+        </p:nvSpPr>
+        <p:spPr>
+          <a:xfrm>
+            <a:off x="502920" y="3813048"/>
+            <a:ext cx="512064" cy="512064"/>
+          </a:xfrm>
+          <a:prstGeom prst="rect">
+            <a:avLst/>
+          </a:prstGeom>
+          <a:noFill/>
+        </p:spPr>
+        <p:txBody>
+          <a:bodyPr wrap="square" anchor="ctr">
+            <a:spAutoFit/>
+          </a:bodyPr>
+          <a:lstStyle/>
+          <a:p>
+            <a:pPr algn="ctr">
+              <a:lnSpc>
+                <a:spcPct val="100000"/>
+              </a:lnSpc>
+            </a:pPr>
+            <a:r>
+              <a:rPr sz="2000" b="0">
+                <a:solidFill>
+                  <a:srgbClr val="E11D48"/>
+                </a:solidFill>
+                <a:latin typeface="Malgun Gothic"/>
+              </a:rPr>
+              <a:t>💳</a:t>
+            </a:r>
+          </a:p>
+        </p:txBody>
+      </p:sp>
+      <p:sp>
+        <p:nvSpPr>
+          <p:cNvPr id="22" name="TextBox 21"/>
+          <p:cNvSpPr txBox="1"/>
+          <p:nvPr/>
+        </p:nvSpPr>
+        <p:spPr>
+          <a:xfrm>
+            <a:off x="1143000" y="3776472"/>
+            <a:ext cx="4609947" cy="365760"/>
+          </a:xfrm>
+          <a:prstGeom prst="rect">
+            <a:avLst/>
+          </a:prstGeom>
+          <a:noFill/>
+        </p:spPr>
+        <p:txBody>
+          <a:bodyPr wrap="square" anchor="t">
+            <a:spAutoFit/>
+          </a:bodyPr>
+          <a:lstStyle/>
+          <a:p>
+            <a:pPr algn="l">
+              <a:lnSpc>
+                <a:spcPct val="100000"/>
+              </a:lnSpc>
+            </a:pPr>
+            <a:r>
+              <a:rPr sz="1400" b="1">
+                <a:solidFill>
+                  <a:srgbClr val="1E2340"/>
+                </a:solidFill>
+                <a:latin typeface="Malgun Gothic"/>
+              </a:rPr>
+              <a:t>수납·정산</a:t>
+            </a:r>
+          </a:p>
+        </p:txBody>
+      </p:sp>
+      <p:sp>
+        <p:nvSpPr>
+          <p:cNvPr id="23" name="TextBox 22"/>
+          <p:cNvSpPr txBox="1"/>
+          <p:nvPr/>
+        </p:nvSpPr>
+        <p:spPr>
+          <a:xfrm>
+            <a:off x="1143000" y="4087368"/>
+            <a:ext cx="4609947" cy="365760"/>
+          </a:xfrm>
+          <a:prstGeom prst="rect">
+            <a:avLst/>
+          </a:prstGeom>
+          <a:noFill/>
+        </p:spPr>
+        <p:txBody>
+          <a:bodyPr wrap="square" anchor="t">
+            <a:spAutoFit/>
+          </a:bodyPr>
+          <a:lstStyle/>
+          <a:p>
+            <a:pPr algn="l">
+              <a:lnSpc>
+                <a:spcPct val="100000"/>
+              </a:lnSpc>
+            </a:pPr>
+            <a:r>
+              <a:rPr sz="1050" b="0">
+                <a:solidFill>
+                  <a:srgbClr val="64748B"/>
+                </a:solidFill>
+                <a:latin typeface="Malgun Gothic"/>
+              </a:rPr>
+              <a:t>결제·미납 관리와 지사→대리점 정산 수령.</a:t>
+            </a:r>
+          </a:p>
+        </p:txBody>
+      </p:sp>
+      <p:sp>
+        <p:nvSpPr>
+          <p:cNvPr id="24" name="Rounded Rectangle 23"/>
+          <p:cNvSpPr/>
+          <p:nvPr/>
+        </p:nvSpPr>
+        <p:spPr>
+          <a:xfrm>
+            <a:off x="6301587" y="3657600"/>
+            <a:ext cx="5524347" cy="822960"/>
+          </a:xfrm>
+          <a:prstGeom prst="roundRect">
+            <a:avLst/>
+          </a:prstGeom>
+          <a:solidFill>
+            <a:srgbClr val="FFFFFF"/>
+          </a:solidFill>
+          <a:ln w="12700">
+            <a:solidFill>
+              <a:srgbClr val="E2E8F0"/>
+            </a:solidFill>
+          </a:ln>
+          <a:effectLst/>
+        </p:spPr>
+        <p:style>
+          <a:lnRef idx="1">
+            <a:schemeClr val="accent1"/>
+          </a:lnRef>
+          <a:fillRef idx="3">
+            <a:schemeClr val="accent1"/>
+          </a:fillRef>
+          <a:effectRef idx="2">
+            <a:schemeClr val="accent1"/>
+          </a:effectRef>
+          <a:fontRef idx="minor">
+            <a:schemeClr val="lt1"/>
+          </a:fontRef>
+        </p:style>
+        <p:txBody>
+          <a:bodyPr rtlCol="0" anchor="ctr"/>
+          <a:lstStyle/>
+          <a:p>
+            <a:pPr algn="ctr"/>
+          </a:p>
+        </p:txBody>
+      </p:sp>
+      <p:sp>
+        <p:nvSpPr>
+          <p:cNvPr id="25" name="Rounded Rectangle 24"/>
+          <p:cNvSpPr/>
+          <p:nvPr/>
+        </p:nvSpPr>
+        <p:spPr>
+          <a:xfrm>
+            <a:off x="6438747" y="3813048"/>
+            <a:ext cx="512064" cy="512064"/>
+          </a:xfrm>
+          <a:prstGeom prst="roundRect">
+            <a:avLst/>
+          </a:prstGeom>
+          <a:solidFill>
+            <a:srgbClr val="FFE4E6"/>
+          </a:solidFill>
+          <a:ln>
+            <a:noFill/>
+          </a:ln>
+          <a:effectLst/>
+        </p:spPr>
+        <p:style>
+          <a:lnRef idx="1">
+            <a:schemeClr val="accent1"/>
+          </a:lnRef>
+          <a:fillRef idx="3">
+            <a:schemeClr val="accent1"/>
+          </a:fillRef>
+          <a:effectRef idx="2">
+            <a:schemeClr val="accent1"/>
+          </a:effectRef>
+          <a:fontRef idx="minor">
+            <a:schemeClr val="lt1"/>
+          </a:fontRef>
+        </p:style>
+        <p:txBody>
+          <a:bodyPr rtlCol="0" anchor="ctr"/>
+          <a:lstStyle/>
+          <a:p>
+            <a:pPr algn="ctr"/>
+          </a:p>
+        </p:txBody>
+      </p:sp>
+      <p:sp>
+        <p:nvSpPr>
+          <p:cNvPr id="26" name="TextBox 25"/>
+          <p:cNvSpPr txBox="1"/>
+          <p:nvPr/>
+        </p:nvSpPr>
+        <p:spPr>
+          <a:xfrm>
+            <a:off x="6438747" y="3813048"/>
+            <a:ext cx="512064" cy="512064"/>
+          </a:xfrm>
+          <a:prstGeom prst="rect">
+            <a:avLst/>
+          </a:prstGeom>
+          <a:noFill/>
+        </p:spPr>
+        <p:txBody>
+          <a:bodyPr wrap="square" anchor="ctr">
+            <a:spAutoFit/>
+          </a:bodyPr>
+          <a:lstStyle/>
+          <a:p>
+            <a:pPr algn="ctr">
+              <a:lnSpc>
+                <a:spcPct val="100000"/>
+              </a:lnSpc>
+            </a:pPr>
+            <a:r>
+              <a:rPr sz="2000" b="0">
+                <a:solidFill>
+                  <a:srgbClr val="E11D48"/>
+                </a:solidFill>
+                <a:latin typeface="Malgun Gothic"/>
+              </a:rPr>
+              <a:t>📈</a:t>
+            </a:r>
+          </a:p>
+        </p:txBody>
+      </p:sp>
+      <p:sp>
+        <p:nvSpPr>
+          <p:cNvPr id="27" name="TextBox 26"/>
+          <p:cNvSpPr txBox="1"/>
+          <p:nvPr/>
+        </p:nvSpPr>
+        <p:spPr>
+          <a:xfrm>
+            <a:off x="7078827" y="3776472"/>
+            <a:ext cx="4609947" cy="365760"/>
+          </a:xfrm>
+          <a:prstGeom prst="rect">
+            <a:avLst/>
+          </a:prstGeom>
+          <a:noFill/>
+        </p:spPr>
+        <p:txBody>
+          <a:bodyPr wrap="square" anchor="t">
+            <a:spAutoFit/>
+          </a:bodyPr>
+          <a:lstStyle/>
+          <a:p>
+            <a:pPr algn="l">
+              <a:lnSpc>
+                <a:spcPct val="100000"/>
+              </a:lnSpc>
+            </a:pPr>
+            <a:r>
+              <a:rPr sz="1400" b="1">
+                <a:solidFill>
+                  <a:srgbClr val="1E2340"/>
+                </a:solidFill>
+                <a:latin typeface="Malgun Gothic"/>
+              </a:rPr>
+              <a:t>학습 현황·리포트</a:t>
+            </a:r>
+          </a:p>
+        </p:txBody>
+      </p:sp>
+      <p:sp>
+        <p:nvSpPr>
+          <p:cNvPr id="28" name="TextBox 27"/>
+          <p:cNvSpPr txBox="1"/>
+          <p:nvPr/>
+        </p:nvSpPr>
+        <p:spPr>
+          <a:xfrm>
+            <a:off x="7078827" y="4087368"/>
+            <a:ext cx="4609947" cy="365760"/>
+          </a:xfrm>
+          <a:prstGeom prst="rect">
+            <a:avLst/>
+          </a:prstGeom>
+          <a:noFill/>
+        </p:spPr>
+        <p:txBody>
+          <a:bodyPr wrap="square" anchor="t">
+            <a:spAutoFit/>
+          </a:bodyPr>
+          <a:lstStyle/>
+          <a:p>
+            <a:pPr algn="l">
+              <a:lnSpc>
+                <a:spcPct val="100000"/>
+              </a:lnSpc>
+            </a:pPr>
+            <a:r>
+              <a:rPr sz="1050" b="0">
+                <a:solidFill>
+                  <a:srgbClr val="64748B"/>
+                </a:solidFill>
+                <a:latin typeface="Malgun Gothic"/>
+              </a:rPr>
+              <a:t>우리 학생 학습을 한눈에.</a:t>
+            </a:r>
+          </a:p>
+        </p:txBody>
+      </p:sp>
+      <p:sp>
+        <p:nvSpPr>
+          <p:cNvPr id="29" name="TextBox 28"/>
+          <p:cNvSpPr txBox="1"/>
+          <p:nvPr/>
+        </p:nvSpPr>
+        <p:spPr>
+          <a:xfrm>
+            <a:off x="365760" y="4754880"/>
+            <a:ext cx="5486400" cy="365760"/>
+          </a:xfrm>
+          <a:prstGeom prst="rect">
+            <a:avLst/>
+          </a:prstGeom>
+          <a:noFill/>
+        </p:spPr>
+        <p:txBody>
+          <a:bodyPr wrap="square" anchor="t">
+            <a:spAutoFit/>
+          </a:bodyPr>
+          <a:lstStyle/>
+          <a:p>
+            <a:pPr algn="l">
+              <a:lnSpc>
+                <a:spcPct val="100000"/>
+              </a:lnSpc>
+            </a:pPr>
+            <a:r>
+              <a:rPr sz="1300" b="1">
+                <a:solidFill>
+                  <a:srgbClr val="E11D48"/>
+                </a:solidFill>
+                <a:latin typeface="Malgun Gothic"/>
+              </a:rPr>
+              <a:t>우리 대리점 지표(예시)</a:t>
+            </a:r>
+          </a:p>
+        </p:txBody>
+      </p:sp>
+      <p:graphicFrame>
+        <p:nvGraphicFramePr>
+          <p:cNvPr id="30" name="Chart 29"/>
+          <p:cNvGraphicFramePr>
+            <a:graphicFrameLocks noGrp="1"/>
+          </p:cNvGraphicFramePr>
+          <p:nvPr/>
+        </p:nvGraphicFramePr>
+        <p:xfrm>
+          <a:off x="365760" y="5074920"/>
+          <a:ext cx="5669280" cy="1554480"/>
+        </p:xfrm>
+        <a:graphic>
+          <a:graphicData uri="http://schemas.openxmlformats.org/drawingml/2006/chart">
+            <c:chart xmlns:c="http://schemas.openxmlformats.org/drawingml/2006/chart" r:id="rId2"/>
+          </a:graphicData>
+        </a:graphic>
+      </p:graphicFrame>
+      <p:sp>
+        <p:nvSpPr>
+          <p:cNvPr id="31" name="Rectangle 30"/>
+          <p:cNvSpPr/>
+          <p:nvPr/>
+        </p:nvSpPr>
+        <p:spPr>
+          <a:xfrm>
+            <a:off x="7470648" y="4654296"/>
+            <a:ext cx="3255264" cy="2075688"/>
+          </a:xfrm>
+          <a:prstGeom prst="rect">
+            <a:avLst/>
+          </a:prstGeom>
+          <a:solidFill>
+            <a:srgbClr val="FFFFFF"/>
+          </a:solidFill>
+          <a:ln w="12700">
+            <a:solidFill>
+              <a:srgbClr val="E2E8F0"/>
+            </a:solidFill>
+          </a:ln>
+          <a:effectLst/>
+        </p:spPr>
+        <p:style>
+          <a:lnRef idx="1">
+            <a:schemeClr val="accent1"/>
+          </a:lnRef>
+          <a:fillRef idx="3">
+            <a:schemeClr val="accent1"/>
+          </a:fillRef>
+          <a:effectRef idx="2">
+            <a:schemeClr val="accent1"/>
+          </a:effectRef>
+          <a:fontRef idx="minor">
+            <a:schemeClr val="lt1"/>
+          </a:fontRef>
+        </p:style>
+        <p:txBody>
+          <a:bodyPr rtlCol="0" anchor="ctr"/>
+          <a:lstStyle/>
+          <a:p>
+            <a:pPr algn="ctr"/>
+          </a:p>
+        </p:txBody>
+      </p:sp>
+      <p:pic>
+        <p:nvPicPr>
+          <p:cNvPr id="32" name="Picture 31" descr="admin_login.jpg"/>
+          <p:cNvPicPr>
+            <a:picLocks noChangeAspect="1"/>
+          </p:cNvPicPr>
+          <p:nvPr/>
+        </p:nvPicPr>
+        <p:blipFill>
+          <a:blip r:embed="rId3"/>
+          <a:stretch>
+            <a:fillRect/>
+          </a:stretch>
+        </p:blipFill>
+        <p:spPr>
+          <a:xfrm>
+            <a:off x="7525512" y="4709160"/>
+            <a:ext cx="3145536" cy="1965960"/>
+          </a:xfrm>
+          <a:prstGeom prst="rect">
+            <a:avLst/>
+          </a:prstGeom>
+        </p:spPr>
+      </p:pic>
+    </p:spTree>
+  </p:cSld>
+  <p:clrMapOvr>
+    <a:masterClrMapping/>
+  </p:clrMapOvr>
+</p:sld>
+</file>
+
+<file path=ppt/slides/slide20.xml><?xml version="1.0" encoding="utf-8"?>
+<p:sld xmlns:a="http://schemas.openxmlformats.org/drawingml/2006/main" xmlns:p="http://schemas.openxmlformats.org/presentationml/2006/main" xmlns:r="http://schemas.openxmlformats.org/officeDocument/2006/relationships">
+  <p:cSld>
+    <p:bg>
+      <p:bgPr>
+        <a:solidFill>
+          <a:srgbClr val="FFFFFF"/>
+        </a:solidFill>
+        <a:effectLst/>
+      </p:bgPr>
+    </p:bg>
+    <p:spTree>
+      <p:nvGrpSpPr>
+        <p:cNvPr id="1" name=""/>
+        <p:cNvGrpSpPr/>
+        <p:nvPr/>
+      </p:nvGrpSpPr>
+      <p:grpSpPr/>
+      <p:sp>
+        <p:nvSpPr>
+          <p:cNvPr id="2" name="Rectangle 1"/>
+          <p:cNvSpPr/>
+          <p:nvPr/>
+        </p:nvSpPr>
+        <p:spPr>
+          <a:xfrm>
+            <a:off x="0" y="0"/>
+            <a:ext cx="12191695" cy="566928"/>
+          </a:xfrm>
+          <a:prstGeom prst="rect">
+            <a:avLst/>
+          </a:prstGeom>
+          <a:solidFill>
+            <a:srgbClr val="E11D48"/>
+          </a:solidFill>
+          <a:ln>
+            <a:noFill/>
+          </a:ln>
+          <a:effectLst/>
+        </p:spPr>
+        <p:style>
+          <a:lnRef idx="1">
+            <a:schemeClr val="accent1"/>
+          </a:lnRef>
+          <a:fillRef idx="3">
+            <a:schemeClr val="accent1"/>
+          </a:fillRef>
+          <a:effectRef idx="2">
+            <a:schemeClr val="accent1"/>
+          </a:effectRef>
+          <a:fontRef idx="minor">
+            <a:schemeClr val="lt1"/>
+          </a:fontRef>
+        </p:style>
+        <p:txBody>
+          <a:bodyPr rtlCol="0" anchor="ctr"/>
+          <a:lstStyle/>
+          <a:p>
+            <a:pPr algn="ctr"/>
+          </a:p>
+        </p:txBody>
+      </p:sp>
+      <p:sp>
+        <p:nvSpPr>
+          <p:cNvPr id="3" name="Rectangle 2"/>
+          <p:cNvSpPr/>
+          <p:nvPr/>
+        </p:nvSpPr>
+        <p:spPr>
+          <a:xfrm>
+            <a:off x="0" y="566928"/>
+            <a:ext cx="12191695" cy="54864"/>
+          </a:xfrm>
+          <a:prstGeom prst="rect">
+            <a:avLst/>
+          </a:prstGeom>
+          <a:solidFill>
+            <a:srgbClr val="0EA5E9"/>
+          </a:solidFill>
+          <a:ln>
+            <a:noFill/>
+          </a:ln>
+          <a:effectLst/>
+        </p:spPr>
+        <p:style>
+          <a:lnRef idx="1">
+            <a:schemeClr val="accent1"/>
+          </a:lnRef>
+          <a:fillRef idx="3">
+            <a:schemeClr val="accent1"/>
+          </a:fillRef>
+          <a:effectRef idx="2">
+            <a:schemeClr val="accent1"/>
+          </a:effectRef>
+          <a:fontRef idx="minor">
+            <a:schemeClr val="lt1"/>
+          </a:fontRef>
+        </p:style>
+        <p:txBody>
+          <a:bodyPr rtlCol="0" anchor="ctr"/>
+          <a:lstStyle/>
+          <a:p>
+            <a:pPr algn="ctr"/>
+          </a:p>
+        </p:txBody>
+      </p:sp>
+      <p:sp>
+        <p:nvSpPr>
+          <p:cNvPr id="4" name="TextBox 3"/>
+          <p:cNvSpPr txBox="1"/>
+          <p:nvPr/>
+        </p:nvSpPr>
+        <p:spPr>
+          <a:xfrm>
+            <a:off x="365760" y="27432"/>
+            <a:ext cx="7315200" cy="502920"/>
+          </a:xfrm>
+          <a:prstGeom prst="rect">
+            <a:avLst/>
+          </a:prstGeom>
+          <a:noFill/>
+        </p:spPr>
+        <p:txBody>
+          <a:bodyPr wrap="square" anchor="ctr">
+            <a:spAutoFit/>
+          </a:bodyPr>
+          <a:lstStyle/>
+          <a:p>
+            <a:pPr algn="l">
+              <a:lnSpc>
+                <a:spcPct val="100000"/>
+              </a:lnSpc>
+            </a:pPr>
+            <a:r>
+              <a:rPr sz="1500" b="1">
+                <a:solidFill>
+                  <a:srgbClr val="FFFFFF"/>
+                </a:solidFill>
+                <a:latin typeface="Malgun Gothic"/>
+              </a:rPr>
+              <a:t>🤝 망고아이 대리점용 사용설명서</a:t>
+            </a:r>
+          </a:p>
+        </p:txBody>
+      </p:sp>
+      <p:sp>
+        <p:nvSpPr>
+          <p:cNvPr id="5" name="TextBox 4"/>
+          <p:cNvSpPr txBox="1"/>
+          <p:nvPr/>
+        </p:nvSpPr>
+        <p:spPr>
+          <a:xfrm>
+            <a:off x="8168335" y="27432"/>
+            <a:ext cx="3657600" cy="502920"/>
+          </a:xfrm>
+          <a:prstGeom prst="rect">
+            <a:avLst/>
+          </a:prstGeom>
+          <a:noFill/>
+        </p:spPr>
+        <p:txBody>
+          <a:bodyPr wrap="square" anchor="ctr">
+            <a:spAutoFit/>
+          </a:bodyPr>
+          <a:lstStyle/>
+          <a:p>
+            <a:pPr algn="r">
+              <a:lnSpc>
+                <a:spcPct val="100000"/>
+              </a:lnSpc>
+            </a:pPr>
+            <a:r>
+              <a:rPr sz="1300" b="1">
+                <a:solidFill>
+                  <a:srgbClr val="F1F5F9"/>
+                </a:solidFill>
+                <a:latin typeface="Malgun Gothic"/>
+              </a:rPr>
+              <a:t>주요 기능 사용법</a:t>
+            </a:r>
+          </a:p>
+        </p:txBody>
+      </p:sp>
+      <p:sp>
+        <p:nvSpPr>
+          <p:cNvPr id="6" name="Rounded Rectangle 5"/>
+          <p:cNvSpPr/>
+          <p:nvPr/>
+        </p:nvSpPr>
+        <p:spPr>
+          <a:xfrm>
+            <a:off x="365760" y="822960"/>
+            <a:ext cx="868680" cy="868680"/>
+          </a:xfrm>
+          <a:prstGeom prst="roundRect">
+            <a:avLst/>
+          </a:prstGeom>
+          <a:solidFill>
+            <a:srgbClr val="E11D48"/>
+          </a:solidFill>
+          <a:ln>
+            <a:noFill/>
+          </a:ln>
+          <a:effectLst/>
+        </p:spPr>
+        <p:style>
+          <a:lnRef idx="1">
+            <a:schemeClr val="accent1"/>
+          </a:lnRef>
+          <a:fillRef idx="3">
+            <a:schemeClr val="accent1"/>
+          </a:fillRef>
+          <a:effectRef idx="2">
+            <a:schemeClr val="accent1"/>
+          </a:effectRef>
+          <a:fontRef idx="minor">
+            <a:schemeClr val="lt1"/>
+          </a:fontRef>
+        </p:style>
+        <p:txBody>
+          <a:bodyPr rtlCol="0" anchor="ctr"/>
+          <a:lstStyle/>
+          <a:p>
+            <a:pPr algn="ctr"/>
+          </a:p>
+        </p:txBody>
+      </p:sp>
+      <p:sp>
+        <p:nvSpPr>
+          <p:cNvPr id="7" name="TextBox 6"/>
+          <p:cNvSpPr txBox="1"/>
+          <p:nvPr/>
+        </p:nvSpPr>
+        <p:spPr>
+          <a:xfrm>
+            <a:off x="365760" y="822960"/>
+            <a:ext cx="868680" cy="868680"/>
+          </a:xfrm>
+          <a:prstGeom prst="rect">
+            <a:avLst/>
+          </a:prstGeom>
+          <a:noFill/>
+        </p:spPr>
+        <p:txBody>
+          <a:bodyPr wrap="square" anchor="ctr">
+            <a:spAutoFit/>
+          </a:bodyPr>
+          <a:lstStyle/>
+          <a:p>
+            <a:pPr algn="ctr">
+              <a:lnSpc>
+                <a:spcPct val="100000"/>
+              </a:lnSpc>
+            </a:pPr>
+            <a:r>
+              <a:rPr sz="2600" b="1">
+                <a:solidFill>
+                  <a:srgbClr val="FFFFFF"/>
+                </a:solidFill>
+                <a:latin typeface="Malgun Gothic"/>
+              </a:rPr>
+              <a:t>18</a:t>
+            </a:r>
+          </a:p>
+        </p:txBody>
+      </p:sp>
+      <p:sp>
+        <p:nvSpPr>
+          <p:cNvPr id="8" name="TextBox 7"/>
+          <p:cNvSpPr txBox="1"/>
+          <p:nvPr/>
+        </p:nvSpPr>
+        <p:spPr>
+          <a:xfrm>
+            <a:off x="1371600" y="822960"/>
+            <a:ext cx="10424160" cy="502920"/>
+          </a:xfrm>
+          <a:prstGeom prst="rect">
+            <a:avLst/>
+          </a:prstGeom>
+          <a:noFill/>
+        </p:spPr>
+        <p:txBody>
+          <a:bodyPr wrap="square" anchor="t">
+            <a:spAutoFit/>
+          </a:bodyPr>
+          <a:lstStyle/>
+          <a:p>
+            <a:pPr algn="l">
+              <a:lnSpc>
+                <a:spcPct val="100000"/>
+              </a:lnSpc>
+            </a:pPr>
+            <a:r>
+              <a:rPr sz="2300" b="1">
+                <a:solidFill>
+                  <a:srgbClr val="1E2340"/>
+                </a:solidFill>
+                <a:latin typeface="Malgun Gothic"/>
+              </a:rPr>
+              <a:t>🤖 AI 운영비서에게 시키기</a:t>
+            </a:r>
+          </a:p>
+        </p:txBody>
+      </p:sp>
+      <p:sp>
+        <p:nvSpPr>
+          <p:cNvPr id="9" name="TextBox 8"/>
+          <p:cNvSpPr txBox="1"/>
+          <p:nvPr/>
+        </p:nvSpPr>
+        <p:spPr>
+          <a:xfrm>
+            <a:off x="1417320" y="1353312"/>
+            <a:ext cx="10424160" cy="320040"/>
+          </a:xfrm>
+          <a:prstGeom prst="rect">
+            <a:avLst/>
+          </a:prstGeom>
+          <a:noFill/>
+        </p:spPr>
+        <p:txBody>
+          <a:bodyPr wrap="square" anchor="t">
+            <a:spAutoFit/>
+          </a:bodyPr>
+          <a:lstStyle/>
+          <a:p>
+            <a:pPr algn="l">
+              <a:lnSpc>
+                <a:spcPct val="100000"/>
+              </a:lnSpc>
+            </a:pPr>
+            <a:r>
+              <a:rPr sz="1300" b="0">
+                <a:solidFill>
+                  <a:srgbClr val="64748B"/>
+                </a:solidFill>
+                <a:latin typeface="Malgun Gothic"/>
+              </a:rPr>
+              <a:t>“○○ 화면으로 가게 해줘” 한마디로 이동</a:t>
+            </a:r>
+          </a:p>
+        </p:txBody>
+      </p:sp>
+      <p:sp>
+        <p:nvSpPr>
+          <p:cNvPr id="10" name="Rounded Rectangle 9"/>
+          <p:cNvSpPr/>
+          <p:nvPr/>
+        </p:nvSpPr>
+        <p:spPr>
+          <a:xfrm>
+            <a:off x="365760" y="1828800"/>
+            <a:ext cx="11430000" cy="777240"/>
+          </a:xfrm>
+          <a:prstGeom prst="roundRect">
+            <a:avLst/>
+          </a:prstGeom>
+          <a:solidFill>
+            <a:srgbClr val="FFF1F2"/>
+          </a:solidFill>
+          <a:ln>
+            <a:noFill/>
+          </a:ln>
+          <a:effectLst/>
+        </p:spPr>
+        <p:style>
+          <a:lnRef idx="1">
+            <a:schemeClr val="accent1"/>
+          </a:lnRef>
+          <a:fillRef idx="3">
+            <a:schemeClr val="accent1"/>
+          </a:fillRef>
+          <a:effectRef idx="2">
+            <a:schemeClr val="accent1"/>
+          </a:effectRef>
+          <a:fontRef idx="minor">
+            <a:schemeClr val="lt1"/>
+          </a:fontRef>
+        </p:style>
+        <p:txBody>
+          <a:bodyPr rtlCol="0" anchor="ctr"/>
+          <a:lstStyle/>
+          <a:p>
+            <a:pPr algn="ctr"/>
+          </a:p>
+        </p:txBody>
+      </p:sp>
+      <p:sp>
+        <p:nvSpPr>
+          <p:cNvPr id="11" name="TextBox 10"/>
+          <p:cNvSpPr txBox="1"/>
+          <p:nvPr/>
+        </p:nvSpPr>
+        <p:spPr>
+          <a:xfrm>
+            <a:off x="548640" y="1901952"/>
+            <a:ext cx="11064240" cy="640080"/>
+          </a:xfrm>
+          <a:prstGeom prst="rect">
+            <a:avLst/>
+          </a:prstGeom>
+          <a:noFill/>
+        </p:spPr>
+        <p:txBody>
+          <a:bodyPr wrap="square" anchor="t">
+            <a:spAutoFit/>
+          </a:bodyPr>
+          <a:lstStyle/>
+          <a:p>
+            <a:pPr algn="l">
+              <a:lnSpc>
+                <a:spcPct val="115000"/>
+              </a:lnSpc>
+            </a:pPr>
+            <a:r>
+              <a:rPr sz="1200" b="0">
+                <a:solidFill>
+                  <a:srgbClr val="334155"/>
+                </a:solidFill>
+                <a:latin typeface="Malgun Gothic"/>
+              </a:rPr>
+              <a:t>상단 통합 검색창(또는 우하단 AI 운영비서) 에 하고 싶은 일을 자연스럽게 말하면, AI가 알아듣고 바로 그 화면으로 이동시켜줘요. 이제 ‘○○ 강사 스케줄로 가게 해줘’, ‘자동 스케줄링 열어줘’ 같은 이동 명령을 정확히 따라요.</a:t>
+            </a:r>
+          </a:p>
+        </p:txBody>
+      </p:sp>
+      <p:sp>
+        <p:nvSpPr>
+          <p:cNvPr id="12" name="TextBox 11"/>
+          <p:cNvSpPr txBox="1"/>
+          <p:nvPr/>
+        </p:nvSpPr>
+        <p:spPr>
+          <a:xfrm>
+            <a:off x="457200" y="2743200"/>
+            <a:ext cx="5669280" cy="320040"/>
+          </a:xfrm>
+          <a:prstGeom prst="rect">
+            <a:avLst/>
+          </a:prstGeom>
+          <a:noFill/>
+        </p:spPr>
+        <p:txBody>
+          <a:bodyPr wrap="square" anchor="t">
+            <a:spAutoFit/>
+          </a:bodyPr>
+          <a:lstStyle/>
+          <a:p>
+            <a:pPr algn="l">
+              <a:lnSpc>
+                <a:spcPct val="100000"/>
+              </a:lnSpc>
+            </a:pPr>
+            <a:r>
+              <a:rPr sz="1350" b="1">
+                <a:solidFill>
+                  <a:srgbClr val="E11D48"/>
+                </a:solidFill>
+                <a:latin typeface="Malgun Gothic"/>
+              </a:rPr>
+              <a:t>사용 방법</a:t>
+            </a:r>
+          </a:p>
+        </p:txBody>
+      </p:sp>
+      <p:sp>
+        <p:nvSpPr>
+          <p:cNvPr id="13" name="TextBox 12"/>
+          <p:cNvSpPr txBox="1"/>
+          <p:nvPr/>
+        </p:nvSpPr>
+        <p:spPr>
+          <a:xfrm>
+            <a:off x="457200" y="3108960"/>
+            <a:ext cx="5669280" cy="2377440"/>
+          </a:xfrm>
+          <a:prstGeom prst="rect">
+            <a:avLst/>
+          </a:prstGeom>
+          <a:noFill/>
+        </p:spPr>
+        <p:txBody>
+          <a:bodyPr wrap="square">
+            <a:spAutoFit/>
+          </a:bodyPr>
+          <a:lstStyle/>
+          <a:p>
+            <a:pPr>
+              <a:lnSpc>
+                <a:spcPct val="115000"/>
+              </a:lnSpc>
+              <a:spcAft>
+                <a:spcPts val="600"/>
+              </a:spcAft>
+            </a:pPr>
+            <a:r>
+              <a:rPr sz="1050" b="1">
+                <a:solidFill>
+                  <a:srgbClr val="E11D48"/>
+                </a:solidFill>
+                <a:latin typeface="Malgun Gothic"/>
+              </a:rPr>
+              <a:t>● </a:t>
+            </a:r>
+            <a:r>
+              <a:rPr sz="1250">
+                <a:solidFill>
+                  <a:srgbClr val="334155"/>
+                </a:solidFill>
+                <a:latin typeface="Malgun Gothic"/>
+              </a:rPr>
+              <a:t>상단 검색창에 명령을 입력하거나 🎤 마이크로 말해요.</a:t>
+            </a:r>
+          </a:p>
+          <a:p>
+            <a:pPr>
+              <a:lnSpc>
+                <a:spcPct val="115000"/>
+              </a:lnSpc>
+              <a:spcAft>
+                <a:spcPts val="600"/>
+              </a:spcAft>
+            </a:pPr>
+            <a:r>
+              <a:rPr sz="1050" b="1">
+                <a:solidFill>
+                  <a:srgbClr val="E11D48"/>
+                </a:solidFill>
+                <a:latin typeface="Malgun Gothic"/>
+              </a:rPr>
+              <a:t>● </a:t>
+            </a:r>
+            <a:r>
+              <a:rPr sz="1250">
+                <a:solidFill>
+                  <a:srgbClr val="334155"/>
+                </a:solidFill>
+                <a:latin typeface="Malgun Gothic"/>
+              </a:rPr>
+              <a:t>예: “김민지 강사 스케줄로 가게 해줘” → 주간 스케줄에서 해당 강사를 자동으로 찾아 열어줘요.</a:t>
+            </a:r>
+          </a:p>
+          <a:p>
+            <a:pPr>
+              <a:lnSpc>
+                <a:spcPct val="115000"/>
+              </a:lnSpc>
+              <a:spcAft>
+                <a:spcPts val="600"/>
+              </a:spcAft>
+            </a:pPr>
+            <a:r>
+              <a:rPr sz="1050" b="1">
+                <a:solidFill>
+                  <a:srgbClr val="E11D48"/>
+                </a:solidFill>
+                <a:latin typeface="Malgun Gothic"/>
+              </a:rPr>
+              <a:t>● </a:t>
+            </a:r>
+            <a:r>
+              <a:rPr sz="1250">
+                <a:solidFill>
+                  <a:srgbClr val="334155"/>
+                </a:solidFill>
+                <a:latin typeface="Malgun Gothic"/>
+              </a:rPr>
+              <a:t>예: “자동 스케줄링 열어줘”, “정산 화면으로” 처럼 메뉴 이동을 시켜요.</a:t>
+            </a:r>
+          </a:p>
+          <a:p>
+            <a:pPr>
+              <a:lnSpc>
+                <a:spcPct val="115000"/>
+              </a:lnSpc>
+              <a:spcAft>
+                <a:spcPts val="600"/>
+              </a:spcAft>
+            </a:pPr>
+            <a:r>
+              <a:rPr sz="1050" b="1">
+                <a:solidFill>
+                  <a:srgbClr val="E11D48"/>
+                </a:solidFill>
+                <a:latin typeface="Malgun Gothic"/>
+              </a:rPr>
+              <a:t>● </a:t>
+            </a:r>
+            <a:r>
+              <a:rPr sz="1250">
+                <a:solidFill>
+                  <a:srgbClr val="334155"/>
+                </a:solidFill>
+                <a:latin typeface="Malgun Gothic"/>
+              </a:rPr>
+              <a:t>AI 응답 카드의 ‘지금 이동 →’ 을 누르면 해당 화면으로 넘어가요.</a:t>
+            </a:r>
+          </a:p>
+        </p:txBody>
+      </p:sp>
+      <p:sp>
+        <p:nvSpPr>
+          <p:cNvPr id="14" name="Rounded Rectangle 13"/>
+          <p:cNvSpPr/>
+          <p:nvPr/>
+        </p:nvSpPr>
+        <p:spPr>
+          <a:xfrm>
+            <a:off x="457200" y="4782312"/>
+            <a:ext cx="5669280" cy="1316736"/>
+          </a:xfrm>
+          <a:prstGeom prst="roundRect">
+            <a:avLst/>
+          </a:prstGeom>
+          <a:solidFill>
+            <a:srgbClr val="F4F7FF"/>
+          </a:solidFill>
+          <a:ln w="12700">
+            <a:solidFill>
+              <a:srgbClr val="E11D48"/>
+            </a:solidFill>
+          </a:ln>
+          <a:effectLst/>
+        </p:spPr>
+        <p:style>
+          <a:lnRef idx="1">
+            <a:schemeClr val="accent1"/>
+          </a:lnRef>
+          <a:fillRef idx="3">
+            <a:schemeClr val="accent1"/>
+          </a:fillRef>
+          <a:effectRef idx="2">
+            <a:schemeClr val="accent1"/>
+          </a:effectRef>
+          <a:fontRef idx="minor">
+            <a:schemeClr val="lt1"/>
+          </a:fontRef>
+        </p:style>
+        <p:txBody>
+          <a:bodyPr rtlCol="0" anchor="ctr"/>
+          <a:lstStyle/>
+          <a:p>
+            <a:pPr algn="ctr"/>
+          </a:p>
+        </p:txBody>
+      </p:sp>
+      <p:sp>
+        <p:nvSpPr>
+          <p:cNvPr id="15" name="TextBox 14"/>
+          <p:cNvSpPr txBox="1"/>
+          <p:nvPr/>
+        </p:nvSpPr>
+        <p:spPr>
+          <a:xfrm>
+            <a:off x="594360" y="4837175"/>
+            <a:ext cx="5394960" cy="274320"/>
+          </a:xfrm>
+          <a:prstGeom prst="rect">
+            <a:avLst/>
+          </a:prstGeom>
+          <a:noFill/>
+        </p:spPr>
+        <p:txBody>
+          <a:bodyPr wrap="square" anchor="t">
+            <a:spAutoFit/>
+          </a:bodyPr>
+          <a:lstStyle/>
+          <a:p>
+            <a:pPr algn="l">
+              <a:lnSpc>
+                <a:spcPct val="100000"/>
+              </a:lnSpc>
+            </a:pPr>
+            <a:r>
+              <a:rPr sz="1150" b="1">
+                <a:solidFill>
+                  <a:srgbClr val="E11D48"/>
+                </a:solidFill>
+                <a:latin typeface="Malgun Gothic"/>
+              </a:rPr>
+              <a:t>✅ 핵심 포인트</a:t>
+            </a:r>
+          </a:p>
+        </p:txBody>
+      </p:sp>
+      <p:sp>
+        <p:nvSpPr>
+          <p:cNvPr id="16" name="TextBox 15"/>
+          <p:cNvSpPr txBox="1"/>
+          <p:nvPr/>
+        </p:nvSpPr>
+        <p:spPr>
+          <a:xfrm>
+            <a:off x="594360" y="5111496"/>
+            <a:ext cx="5394960" cy="950976"/>
+          </a:xfrm>
+          <a:prstGeom prst="rect">
+            <a:avLst/>
+          </a:prstGeom>
+          <a:noFill/>
+        </p:spPr>
+        <p:txBody>
+          <a:bodyPr wrap="square">
+            <a:spAutoFit/>
+          </a:bodyPr>
+          <a:lstStyle/>
+          <a:p>
+            <a:pPr>
+              <a:lnSpc>
+                <a:spcPct val="115000"/>
+              </a:lnSpc>
+              <a:spcAft>
+                <a:spcPts val="200"/>
+              </a:spcAft>
+            </a:pPr>
+            <a:r>
+              <a:rPr sz="900" b="1">
+                <a:solidFill>
+                  <a:srgbClr val="E11D48"/>
+                </a:solidFill>
+                <a:latin typeface="Malgun Gothic"/>
+              </a:rPr>
+              <a:t>● </a:t>
+            </a:r>
+            <a:r>
+              <a:rPr sz="1100">
+                <a:solidFill>
+                  <a:srgbClr val="334155"/>
+                </a:solidFill>
+                <a:latin typeface="Malgun Gothic"/>
+              </a:rPr>
+              <a:t>이동 명령은 확실히 이동하고, 설명만 하고 마는 일이 줄었어요.</a:t>
+            </a:r>
+          </a:p>
+          <a:p>
+            <a:pPr>
+              <a:lnSpc>
+                <a:spcPct val="115000"/>
+              </a:lnSpc>
+              <a:spcAft>
+                <a:spcPts val="200"/>
+              </a:spcAft>
+            </a:pPr>
+            <a:r>
+              <a:rPr sz="900" b="1">
+                <a:solidFill>
+                  <a:srgbClr val="E11D48"/>
+                </a:solidFill>
+                <a:latin typeface="Malgun Gothic"/>
+              </a:rPr>
+              <a:t>● </a:t>
+            </a:r>
+            <a:r>
+              <a:rPr sz="1100">
+                <a:solidFill>
+                  <a:srgbClr val="334155"/>
+                </a:solidFill>
+                <a:latin typeface="Malgun Gothic"/>
+              </a:rPr>
+              <a:t>강사 이름으로 스케줄을 검색하면 검색창 자동 채움 + 필터 + 스크롤까지 돼요.</a:t>
+            </a:r>
+          </a:p>
+          <a:p>
+            <a:pPr>
+              <a:lnSpc>
+                <a:spcPct val="115000"/>
+              </a:lnSpc>
+              <a:spcAft>
+                <a:spcPts val="200"/>
+              </a:spcAft>
+            </a:pPr>
+            <a:r>
+              <a:rPr sz="900" b="1">
+                <a:solidFill>
+                  <a:srgbClr val="E11D48"/>
+                </a:solidFill>
+                <a:latin typeface="Malgun Gothic"/>
+              </a:rPr>
+              <a:t>● </a:t>
+            </a:r>
+            <a:r>
+              <a:rPr sz="1100">
+                <a:solidFill>
+                  <a:srgbClr val="334155"/>
+                </a:solidFill>
+                <a:latin typeface="Malgun Gothic"/>
+              </a:rPr>
+              <a:t>데이터 조회·통계 질문에는 카드형 답변으로도 도와줘요.</a:t>
+            </a:r>
+          </a:p>
+        </p:txBody>
+      </p:sp>
+      <p:sp>
+        <p:nvSpPr>
+          <p:cNvPr id="17" name="Rounded Rectangle 16"/>
+          <p:cNvSpPr/>
+          <p:nvPr/>
+        </p:nvSpPr>
+        <p:spPr>
+          <a:xfrm>
+            <a:off x="457200" y="6208775"/>
+            <a:ext cx="5669280" cy="640080"/>
+          </a:xfrm>
+          <a:prstGeom prst="roundRect">
+            <a:avLst/>
+          </a:prstGeom>
+          <a:solidFill>
+            <a:srgbClr val="FFFBEB"/>
+          </a:solidFill>
+          <a:ln w="12700">
+            <a:solidFill>
+              <a:srgbClr val="F59E0B"/>
+            </a:solidFill>
+          </a:ln>
+          <a:effectLst/>
+        </p:spPr>
+        <p:style>
+          <a:lnRef idx="1">
+            <a:schemeClr val="accent1"/>
+          </a:lnRef>
+          <a:fillRef idx="3">
+            <a:schemeClr val="accent1"/>
+          </a:fillRef>
+          <a:effectRef idx="2">
+            <a:schemeClr val="accent1"/>
+          </a:effectRef>
+          <a:fontRef idx="minor">
+            <a:schemeClr val="lt1"/>
+          </a:fontRef>
+        </p:style>
+        <p:txBody>
+          <a:bodyPr rtlCol="0" anchor="ctr"/>
+          <a:lstStyle/>
+          <a:p>
+            <a:pPr algn="ctr"/>
+          </a:p>
+        </p:txBody>
+      </p:sp>
+      <p:sp>
+        <p:nvSpPr>
+          <p:cNvPr id="18" name="TextBox 17"/>
+          <p:cNvSpPr txBox="1"/>
+          <p:nvPr/>
+        </p:nvSpPr>
+        <p:spPr>
+          <a:xfrm>
+            <a:off x="594360" y="6254495"/>
+            <a:ext cx="5394960" cy="548640"/>
+          </a:xfrm>
+          <a:prstGeom prst="rect">
+            <a:avLst/>
+          </a:prstGeom>
+          <a:noFill/>
+        </p:spPr>
+        <p:txBody>
+          <a:bodyPr wrap="square" anchor="t">
+            <a:spAutoFit/>
+          </a:bodyPr>
+          <a:lstStyle/>
+          <a:p>
+            <a:pPr algn="l">
+              <a:lnSpc>
+                <a:spcPct val="105000"/>
+              </a:lnSpc>
+            </a:pPr>
+            <a:r>
+              <a:rPr sz="1050" b="0">
+                <a:solidFill>
+                  <a:srgbClr val="92670A"/>
+                </a:solidFill>
+                <a:latin typeface="Malgun Gothic"/>
+              </a:rPr>
+              <a:t>⚠️ 알아두기 · ‘등록·발송·변경’처럼 실제로 무언가를 바꾸는 명령은 한 번 더 확인해요(안전장치).</a:t>
+            </a:r>
+          </a:p>
+        </p:txBody>
+      </p:sp>
+      <p:sp>
+        <p:nvSpPr>
+          <p:cNvPr id="19" name="Rounded Rectangle 18"/>
+          <p:cNvSpPr/>
+          <p:nvPr/>
+        </p:nvSpPr>
+        <p:spPr>
+          <a:xfrm>
+            <a:off x="457200" y="6940295"/>
+            <a:ext cx="5669280" cy="658368"/>
+          </a:xfrm>
+          <a:prstGeom prst="roundRect">
+            <a:avLst/>
+          </a:prstGeom>
+          <a:solidFill>
+            <a:srgbClr val="FFF7E6"/>
+          </a:solidFill>
+          <a:ln w="12700">
+            <a:solidFill>
+              <a:srgbClr val="0EA5E9"/>
+            </a:solidFill>
+          </a:ln>
+          <a:effectLst/>
+        </p:spPr>
+        <p:style>
+          <a:lnRef idx="1">
+            <a:schemeClr val="accent1"/>
+          </a:lnRef>
+          <a:fillRef idx="3">
+            <a:schemeClr val="accent1"/>
+          </a:fillRef>
+          <a:effectRef idx="2">
+            <a:schemeClr val="accent1"/>
+          </a:effectRef>
+          <a:fontRef idx="minor">
+            <a:schemeClr val="lt1"/>
+          </a:fontRef>
+        </p:style>
+        <p:txBody>
+          <a:bodyPr rtlCol="0" anchor="ctr"/>
+          <a:lstStyle/>
+          <a:p>
+            <a:pPr algn="ctr"/>
+          </a:p>
+        </p:txBody>
+      </p:sp>
+      <p:sp>
+        <p:nvSpPr>
+          <p:cNvPr id="20" name="TextBox 19"/>
+          <p:cNvSpPr txBox="1"/>
+          <p:nvPr/>
+        </p:nvSpPr>
+        <p:spPr>
+          <a:xfrm>
+            <a:off x="594360" y="6986015"/>
+            <a:ext cx="5394960" cy="566928"/>
+          </a:xfrm>
+          <a:prstGeom prst="rect">
+            <a:avLst/>
+          </a:prstGeom>
+          <a:noFill/>
+        </p:spPr>
+        <p:txBody>
+          <a:bodyPr wrap="square" anchor="t">
+            <a:spAutoFit/>
+          </a:bodyPr>
+          <a:lstStyle/>
+          <a:p>
+            <a:pPr algn="l">
+              <a:lnSpc>
+                <a:spcPct val="105000"/>
+              </a:lnSpc>
+            </a:pPr>
+            <a:r>
+              <a:rPr sz="1050" b="0">
+                <a:solidFill>
+                  <a:srgbClr val="5B4A2A"/>
+                </a:solidFill>
+                <a:latin typeface="Malgun Gothic"/>
+              </a:rPr>
+              <a:t>💡 꿀팁 · 메뉴 이름이 기억나지 않을 땐 하고 싶은 일을 그대로 말해보세요 — 알아서 찾아가요.</a:t>
+            </a:r>
+          </a:p>
+        </p:txBody>
+      </p:sp>
+      <p:sp>
+        <p:nvSpPr>
+          <p:cNvPr id="21" name="Rectangle 20"/>
+          <p:cNvSpPr/>
+          <p:nvPr/>
+        </p:nvSpPr>
+        <p:spPr>
+          <a:xfrm>
+            <a:off x="6300216" y="2345436"/>
+            <a:ext cx="5596128" cy="3538728"/>
+          </a:xfrm>
+          <a:prstGeom prst="rect">
+            <a:avLst/>
+          </a:prstGeom>
+          <a:solidFill>
+            <a:srgbClr val="FFFFFF"/>
+          </a:solidFill>
+          <a:ln w="12700">
+            <a:solidFill>
+              <a:srgbClr val="E2E8F0"/>
+            </a:solidFill>
+          </a:ln>
+          <a:effectLst/>
+        </p:spPr>
+        <p:style>
+          <a:lnRef idx="1">
+            <a:schemeClr val="accent1"/>
+          </a:lnRef>
+          <a:fillRef idx="3">
+            <a:schemeClr val="accent1"/>
+          </a:fillRef>
+          <a:effectRef idx="2">
+            <a:schemeClr val="accent1"/>
+          </a:effectRef>
+          <a:fontRef idx="minor">
+            <a:schemeClr val="lt1"/>
+          </a:fontRef>
+        </p:style>
+        <p:txBody>
+          <a:bodyPr rtlCol="0" anchor="ctr"/>
+          <a:lstStyle/>
+          <a:p>
+            <a:pPr algn="ctr"/>
+          </a:p>
+        </p:txBody>
+      </p:sp>
+      <p:pic>
+        <p:nvPicPr>
+          <p:cNvPr id="22" name="Picture 21" descr="admin_aicommand.jpg"/>
+          <p:cNvPicPr>
+            <a:picLocks noChangeAspect="1"/>
+          </p:cNvPicPr>
+          <p:nvPr/>
+        </p:nvPicPr>
+        <p:blipFill>
+          <a:blip r:embed="rId2"/>
+          <a:stretch>
+            <a:fillRect/>
+          </a:stretch>
+        </p:blipFill>
+        <p:spPr>
+          <a:xfrm>
+            <a:off x="6355080" y="2400300"/>
+            <a:ext cx="5486400" cy="3429000"/>
+          </a:xfrm>
+          <a:prstGeom prst="rect">
+            <a:avLst/>
+          </a:prstGeom>
+        </p:spPr>
+      </p:pic>
+    </p:spTree>
+  </p:cSld>
+  <p:clrMapOvr>
+    <a:masterClrMapping/>
+  </p:clrMapOvr>
+</p:sld>
+</file>
+
+<file path=ppt/slides/slide21.xml><?xml version="1.0" encoding="utf-8"?>
 <p:sld xmlns:a="http://schemas.openxmlformats.org/drawingml/2006/main" xmlns:p="http://schemas.openxmlformats.org/presentationml/2006/main" xmlns:r="http://schemas.openxmlformats.org/officeDocument/2006/relationships">
   <p:cSld>
     <p:bg>
@@ -13444,7 +16799,7 @@
 </p:sld>
 </file>
 
-<file path=ppt/slides/slide2.xml><?xml version="1.0" encoding="utf-8"?>
+<file path=ppt/slides/slide22.xml><?xml version="1.0" encoding="utf-8"?>
 <p:sld xmlns:a="http://schemas.openxmlformats.org/drawingml/2006/main" xmlns:p="http://schemas.openxmlformats.org/presentationml/2006/main" xmlns:r="http://schemas.openxmlformats.org/officeDocument/2006/relationships">
   <p:cSld>
     <p:bg>
@@ -13623,1275 +16978,6 @@
                 </a:solidFill>
                 <a:latin typeface="Malgun Gothic"/>
               </a:rPr>
-              <a:t>소개</a:t>
-            </a:r>
-          </a:p>
-        </p:txBody>
-      </p:sp>
-      <p:sp>
-        <p:nvSpPr>
-          <p:cNvPr id="6" name="Rounded Rectangle 5"/>
-          <p:cNvSpPr/>
-          <p:nvPr/>
-        </p:nvSpPr>
-        <p:spPr>
-          <a:xfrm>
-            <a:off x="365760" y="868680"/>
-            <a:ext cx="11460175" cy="1554480"/>
-          </a:xfrm>
-          <a:prstGeom prst="roundRect">
-            <a:avLst/>
-          </a:prstGeom>
-          <a:solidFill>
-            <a:srgbClr val="FFF1F2"/>
-          </a:solidFill>
-          <a:ln>
-            <a:noFill/>
-          </a:ln>
-          <a:effectLst/>
-        </p:spPr>
-        <p:style>
-          <a:lnRef idx="1">
-            <a:schemeClr val="accent1"/>
-          </a:lnRef>
-          <a:fillRef idx="3">
-            <a:schemeClr val="accent1"/>
-          </a:fillRef>
-          <a:effectRef idx="2">
-            <a:schemeClr val="accent1"/>
-          </a:effectRef>
-          <a:fontRef idx="minor">
-            <a:schemeClr val="lt1"/>
-          </a:fontRef>
-        </p:style>
-        <p:txBody>
-          <a:bodyPr rtlCol="0" anchor="ctr"/>
-          <a:lstStyle/>
-          <a:p>
-            <a:pPr algn="ctr"/>
-          </a:p>
-        </p:txBody>
-      </p:sp>
-      <p:sp>
-        <p:nvSpPr>
-          <p:cNvPr id="7" name="TextBox 6"/>
-          <p:cNvSpPr txBox="1"/>
-          <p:nvPr/>
-        </p:nvSpPr>
-        <p:spPr>
-          <a:xfrm>
-            <a:off x="640080" y="1005840"/>
-            <a:ext cx="10881360" cy="457200"/>
-          </a:xfrm>
-          <a:prstGeom prst="rect">
-            <a:avLst/>
-          </a:prstGeom>
-          <a:noFill/>
-        </p:spPr>
-        <p:txBody>
-          <a:bodyPr wrap="square" anchor="t">
-            <a:spAutoFit/>
-          </a:bodyPr>
-          <a:lstStyle/>
-          <a:p>
-            <a:pPr algn="l">
-              <a:lnSpc>
-                <a:spcPct val="100000"/>
-              </a:lnSpc>
-            </a:pPr>
-            <a:r>
-              <a:rPr sz="2400" b="1">
-                <a:solidFill>
-                  <a:srgbClr val="E11D48"/>
-                </a:solidFill>
-                <a:latin typeface="Malgun Gothic"/>
-              </a:rPr>
-              <a:t>대리점 관리 페이지란?</a:t>
-            </a:r>
-          </a:p>
-        </p:txBody>
-      </p:sp>
-      <p:sp>
-        <p:nvSpPr>
-          <p:cNvPr id="8" name="TextBox 7"/>
-          <p:cNvSpPr txBox="1"/>
-          <p:nvPr/>
-        </p:nvSpPr>
-        <p:spPr>
-          <a:xfrm>
-            <a:off x="640080" y="1481328"/>
-            <a:ext cx="10972800" cy="914400"/>
-          </a:xfrm>
-          <a:prstGeom prst="rect">
-            <a:avLst/>
-          </a:prstGeom>
-          <a:noFill/>
-        </p:spPr>
-        <p:txBody>
-          <a:bodyPr wrap="square" anchor="t">
-            <a:spAutoFit/>
-          </a:bodyPr>
-          <a:lstStyle/>
-          <a:p>
-            <a:pPr algn="l">
-              <a:lnSpc>
-                <a:spcPct val="125000"/>
-              </a:lnSpc>
-            </a:pPr>
-            <a:r>
-              <a:rPr sz="1300" b="0">
-                <a:solidFill>
-                  <a:srgbClr val="334155"/>
-                </a:solidFill>
-                <a:latin typeface="Malgun Gothic"/>
-              </a:rPr>
-              <a:t>대리점 페이지는 우리 대리점의 학생·수업·결제·정산을 직접 관리하는 곳이에요. 학생 모집·상담부터 등록, 수업 배정, 수납, 학부모 소통, 정산 수령까지 대리점 운영에 필요한 기능이 모여 있어요. 로그인하면 ‘우리 대리점’ 범위의 데이터만 자동으로 보여, 내 학생에게 집중할 수 있어요.</a:t>
-            </a:r>
-          </a:p>
-        </p:txBody>
-      </p:sp>
-      <p:sp>
-        <p:nvSpPr>
-          <p:cNvPr id="9" name="Rounded Rectangle 8"/>
-          <p:cNvSpPr/>
-          <p:nvPr/>
-        </p:nvSpPr>
-        <p:spPr>
-          <a:xfrm>
-            <a:off x="365760" y="2697480"/>
-            <a:ext cx="5524347" cy="822960"/>
-          </a:xfrm>
-          <a:prstGeom prst="roundRect">
-            <a:avLst/>
-          </a:prstGeom>
-          <a:solidFill>
-            <a:srgbClr val="FFFFFF"/>
-          </a:solidFill>
-          <a:ln w="12700">
-            <a:solidFill>
-              <a:srgbClr val="E2E8F0"/>
-            </a:solidFill>
-          </a:ln>
-          <a:effectLst/>
-        </p:spPr>
-        <p:style>
-          <a:lnRef idx="1">
-            <a:schemeClr val="accent1"/>
-          </a:lnRef>
-          <a:fillRef idx="3">
-            <a:schemeClr val="accent1"/>
-          </a:fillRef>
-          <a:effectRef idx="2">
-            <a:schemeClr val="accent1"/>
-          </a:effectRef>
-          <a:fontRef idx="minor">
-            <a:schemeClr val="lt1"/>
-          </a:fontRef>
-        </p:style>
-        <p:txBody>
-          <a:bodyPr rtlCol="0" anchor="ctr"/>
-          <a:lstStyle/>
-          <a:p>
-            <a:pPr algn="ctr"/>
-          </a:p>
-        </p:txBody>
-      </p:sp>
-      <p:sp>
-        <p:nvSpPr>
-          <p:cNvPr id="10" name="Rounded Rectangle 9"/>
-          <p:cNvSpPr/>
-          <p:nvPr/>
-        </p:nvSpPr>
-        <p:spPr>
-          <a:xfrm>
-            <a:off x="502920" y="2852928"/>
-            <a:ext cx="512064" cy="512064"/>
-          </a:xfrm>
-          <a:prstGeom prst="roundRect">
-            <a:avLst/>
-          </a:prstGeom>
-          <a:solidFill>
-            <a:srgbClr val="FFE4E6"/>
-          </a:solidFill>
-          <a:ln>
-            <a:noFill/>
-          </a:ln>
-          <a:effectLst/>
-        </p:spPr>
-        <p:style>
-          <a:lnRef idx="1">
-            <a:schemeClr val="accent1"/>
-          </a:lnRef>
-          <a:fillRef idx="3">
-            <a:schemeClr val="accent1"/>
-          </a:fillRef>
-          <a:effectRef idx="2">
-            <a:schemeClr val="accent1"/>
-          </a:effectRef>
-          <a:fontRef idx="minor">
-            <a:schemeClr val="lt1"/>
-          </a:fontRef>
-        </p:style>
-        <p:txBody>
-          <a:bodyPr rtlCol="0" anchor="ctr"/>
-          <a:lstStyle/>
-          <a:p>
-            <a:pPr algn="ctr"/>
-          </a:p>
-        </p:txBody>
-      </p:sp>
-      <p:sp>
-        <p:nvSpPr>
-          <p:cNvPr id="11" name="TextBox 10"/>
-          <p:cNvSpPr txBox="1"/>
-          <p:nvPr/>
-        </p:nvSpPr>
-        <p:spPr>
-          <a:xfrm>
-            <a:off x="502920" y="2852928"/>
-            <a:ext cx="512064" cy="512064"/>
-          </a:xfrm>
-          <a:prstGeom prst="rect">
-            <a:avLst/>
-          </a:prstGeom>
-          <a:noFill/>
-        </p:spPr>
-        <p:txBody>
-          <a:bodyPr wrap="square" anchor="ctr">
-            <a:spAutoFit/>
-          </a:bodyPr>
-          <a:lstStyle/>
-          <a:p>
-            <a:pPr algn="ctr">
-              <a:lnSpc>
-                <a:spcPct val="100000"/>
-              </a:lnSpc>
-            </a:pPr>
-            <a:r>
-              <a:rPr sz="2000" b="0">
-                <a:solidFill>
-                  <a:srgbClr val="E11D48"/>
-                </a:solidFill>
-                <a:latin typeface="Malgun Gothic"/>
-              </a:rPr>
-              <a:t>🤝</a:t>
-            </a:r>
-          </a:p>
-        </p:txBody>
-      </p:sp>
-      <p:sp>
-        <p:nvSpPr>
-          <p:cNvPr id="12" name="TextBox 11"/>
-          <p:cNvSpPr txBox="1"/>
-          <p:nvPr/>
-        </p:nvSpPr>
-        <p:spPr>
-          <a:xfrm>
-            <a:off x="1143000" y="2816352"/>
-            <a:ext cx="4609947" cy="365760"/>
-          </a:xfrm>
-          <a:prstGeom prst="rect">
-            <a:avLst/>
-          </a:prstGeom>
-          <a:noFill/>
-        </p:spPr>
-        <p:txBody>
-          <a:bodyPr wrap="square" anchor="t">
-            <a:spAutoFit/>
-          </a:bodyPr>
-          <a:lstStyle/>
-          <a:p>
-            <a:pPr algn="l">
-              <a:lnSpc>
-                <a:spcPct val="100000"/>
-              </a:lnSpc>
-            </a:pPr>
-            <a:r>
-              <a:rPr sz="1400" b="1">
-                <a:solidFill>
-                  <a:srgbClr val="1E2340"/>
-                </a:solidFill>
-                <a:latin typeface="Malgun Gothic"/>
-              </a:rPr>
-              <a:t>우리 대리점 범위 자동</a:t>
-            </a:r>
-          </a:p>
-        </p:txBody>
-      </p:sp>
-      <p:sp>
-        <p:nvSpPr>
-          <p:cNvPr id="13" name="TextBox 12"/>
-          <p:cNvSpPr txBox="1"/>
-          <p:nvPr/>
-        </p:nvSpPr>
-        <p:spPr>
-          <a:xfrm>
-            <a:off x="1143000" y="3127248"/>
-            <a:ext cx="4609947" cy="365760"/>
-          </a:xfrm>
-          <a:prstGeom prst="rect">
-            <a:avLst/>
-          </a:prstGeom>
-          <a:noFill/>
-        </p:spPr>
-        <p:txBody>
-          <a:bodyPr wrap="square" anchor="t">
-            <a:spAutoFit/>
-          </a:bodyPr>
-          <a:lstStyle/>
-          <a:p>
-            <a:pPr algn="l">
-              <a:lnSpc>
-                <a:spcPct val="100000"/>
-              </a:lnSpc>
-            </a:pPr>
-            <a:r>
-              <a:rPr sz="1050" b="0">
-                <a:solidFill>
-                  <a:srgbClr val="64748B"/>
-                </a:solidFill>
-                <a:latin typeface="Malgun Gothic"/>
-              </a:rPr>
-              <a:t>로그인만 하면 내 학생·매출만 보여요.</a:t>
-            </a:r>
-          </a:p>
-        </p:txBody>
-      </p:sp>
-      <p:sp>
-        <p:nvSpPr>
-          <p:cNvPr id="14" name="Rounded Rectangle 13"/>
-          <p:cNvSpPr/>
-          <p:nvPr/>
-        </p:nvSpPr>
-        <p:spPr>
-          <a:xfrm>
-            <a:off x="6301587" y="2697480"/>
-            <a:ext cx="5524347" cy="822960"/>
-          </a:xfrm>
-          <a:prstGeom prst="roundRect">
-            <a:avLst/>
-          </a:prstGeom>
-          <a:solidFill>
-            <a:srgbClr val="FFFFFF"/>
-          </a:solidFill>
-          <a:ln w="12700">
-            <a:solidFill>
-              <a:srgbClr val="E2E8F0"/>
-            </a:solidFill>
-          </a:ln>
-          <a:effectLst/>
-        </p:spPr>
-        <p:style>
-          <a:lnRef idx="1">
-            <a:schemeClr val="accent1"/>
-          </a:lnRef>
-          <a:fillRef idx="3">
-            <a:schemeClr val="accent1"/>
-          </a:fillRef>
-          <a:effectRef idx="2">
-            <a:schemeClr val="accent1"/>
-          </a:effectRef>
-          <a:fontRef idx="minor">
-            <a:schemeClr val="lt1"/>
-          </a:fontRef>
-        </p:style>
-        <p:txBody>
-          <a:bodyPr rtlCol="0" anchor="ctr"/>
-          <a:lstStyle/>
-          <a:p>
-            <a:pPr algn="ctr"/>
-          </a:p>
-        </p:txBody>
-      </p:sp>
-      <p:sp>
-        <p:nvSpPr>
-          <p:cNvPr id="15" name="Rounded Rectangle 14"/>
-          <p:cNvSpPr/>
-          <p:nvPr/>
-        </p:nvSpPr>
-        <p:spPr>
-          <a:xfrm>
-            <a:off x="6438747" y="2852928"/>
-            <a:ext cx="512064" cy="512064"/>
-          </a:xfrm>
-          <a:prstGeom prst="roundRect">
-            <a:avLst/>
-          </a:prstGeom>
-          <a:solidFill>
-            <a:srgbClr val="FFE4E6"/>
-          </a:solidFill>
-          <a:ln>
-            <a:noFill/>
-          </a:ln>
-          <a:effectLst/>
-        </p:spPr>
-        <p:style>
-          <a:lnRef idx="1">
-            <a:schemeClr val="accent1"/>
-          </a:lnRef>
-          <a:fillRef idx="3">
-            <a:schemeClr val="accent1"/>
-          </a:fillRef>
-          <a:effectRef idx="2">
-            <a:schemeClr val="accent1"/>
-          </a:effectRef>
-          <a:fontRef idx="minor">
-            <a:schemeClr val="lt1"/>
-          </a:fontRef>
-        </p:style>
-        <p:txBody>
-          <a:bodyPr rtlCol="0" anchor="ctr"/>
-          <a:lstStyle/>
-          <a:p>
-            <a:pPr algn="ctr"/>
-          </a:p>
-        </p:txBody>
-      </p:sp>
-      <p:sp>
-        <p:nvSpPr>
-          <p:cNvPr id="16" name="TextBox 15"/>
-          <p:cNvSpPr txBox="1"/>
-          <p:nvPr/>
-        </p:nvSpPr>
-        <p:spPr>
-          <a:xfrm>
-            <a:off x="6438747" y="2852928"/>
-            <a:ext cx="512064" cy="512064"/>
-          </a:xfrm>
-          <a:prstGeom prst="rect">
-            <a:avLst/>
-          </a:prstGeom>
-          <a:noFill/>
-        </p:spPr>
-        <p:txBody>
-          <a:bodyPr wrap="square" anchor="ctr">
-            <a:spAutoFit/>
-          </a:bodyPr>
-          <a:lstStyle/>
-          <a:p>
-            <a:pPr algn="ctr">
-              <a:lnSpc>
-                <a:spcPct val="100000"/>
-              </a:lnSpc>
-            </a:pPr>
-            <a:r>
-              <a:rPr sz="2000" b="0">
-                <a:solidFill>
-                  <a:srgbClr val="E11D48"/>
-                </a:solidFill>
-                <a:latin typeface="Malgun Gothic"/>
-              </a:rPr>
-              <a:t>🧑‍🎓</a:t>
-            </a:r>
-          </a:p>
-        </p:txBody>
-      </p:sp>
-      <p:sp>
-        <p:nvSpPr>
-          <p:cNvPr id="17" name="TextBox 16"/>
-          <p:cNvSpPr txBox="1"/>
-          <p:nvPr/>
-        </p:nvSpPr>
-        <p:spPr>
-          <a:xfrm>
-            <a:off x="7078827" y="2816352"/>
-            <a:ext cx="4609947" cy="365760"/>
-          </a:xfrm>
-          <a:prstGeom prst="rect">
-            <a:avLst/>
-          </a:prstGeom>
-          <a:noFill/>
-        </p:spPr>
-        <p:txBody>
-          <a:bodyPr wrap="square" anchor="t">
-            <a:spAutoFit/>
-          </a:bodyPr>
-          <a:lstStyle/>
-          <a:p>
-            <a:pPr algn="l">
-              <a:lnSpc>
-                <a:spcPct val="100000"/>
-              </a:lnSpc>
-            </a:pPr>
-            <a:r>
-              <a:rPr sz="1400" b="1">
-                <a:solidFill>
-                  <a:srgbClr val="1E2340"/>
-                </a:solidFill>
-                <a:latin typeface="Malgun Gothic"/>
-              </a:rPr>
-              <a:t>학생 모집·등록·관리</a:t>
-            </a:r>
-          </a:p>
-        </p:txBody>
-      </p:sp>
-      <p:sp>
-        <p:nvSpPr>
-          <p:cNvPr id="18" name="TextBox 17"/>
-          <p:cNvSpPr txBox="1"/>
-          <p:nvPr/>
-        </p:nvSpPr>
-        <p:spPr>
-          <a:xfrm>
-            <a:off x="7078827" y="3127248"/>
-            <a:ext cx="4609947" cy="365760"/>
-          </a:xfrm>
-          <a:prstGeom prst="rect">
-            <a:avLst/>
-          </a:prstGeom>
-          <a:noFill/>
-        </p:spPr>
-        <p:txBody>
-          <a:bodyPr wrap="square" anchor="t">
-            <a:spAutoFit/>
-          </a:bodyPr>
-          <a:lstStyle/>
-          <a:p>
-            <a:pPr algn="l">
-              <a:lnSpc>
-                <a:spcPct val="100000"/>
-              </a:lnSpc>
-            </a:pPr>
-            <a:r>
-              <a:rPr sz="1050" b="0">
-                <a:solidFill>
-                  <a:srgbClr val="64748B"/>
-                </a:solidFill>
-                <a:latin typeface="Malgun Gothic"/>
-              </a:rPr>
-              <a:t>상담부터 등록·수업 배정까지.</a:t>
-            </a:r>
-          </a:p>
-        </p:txBody>
-      </p:sp>
-      <p:sp>
-        <p:nvSpPr>
-          <p:cNvPr id="19" name="Rounded Rectangle 18"/>
-          <p:cNvSpPr/>
-          <p:nvPr/>
-        </p:nvSpPr>
-        <p:spPr>
-          <a:xfrm>
-            <a:off x="365760" y="3657600"/>
-            <a:ext cx="5524347" cy="822960"/>
-          </a:xfrm>
-          <a:prstGeom prst="roundRect">
-            <a:avLst/>
-          </a:prstGeom>
-          <a:solidFill>
-            <a:srgbClr val="FFFFFF"/>
-          </a:solidFill>
-          <a:ln w="12700">
-            <a:solidFill>
-              <a:srgbClr val="E2E8F0"/>
-            </a:solidFill>
-          </a:ln>
-          <a:effectLst/>
-        </p:spPr>
-        <p:style>
-          <a:lnRef idx="1">
-            <a:schemeClr val="accent1"/>
-          </a:lnRef>
-          <a:fillRef idx="3">
-            <a:schemeClr val="accent1"/>
-          </a:fillRef>
-          <a:effectRef idx="2">
-            <a:schemeClr val="accent1"/>
-          </a:effectRef>
-          <a:fontRef idx="minor">
-            <a:schemeClr val="lt1"/>
-          </a:fontRef>
-        </p:style>
-        <p:txBody>
-          <a:bodyPr rtlCol="0" anchor="ctr"/>
-          <a:lstStyle/>
-          <a:p>
-            <a:pPr algn="ctr"/>
-          </a:p>
-        </p:txBody>
-      </p:sp>
-      <p:sp>
-        <p:nvSpPr>
-          <p:cNvPr id="20" name="Rounded Rectangle 19"/>
-          <p:cNvSpPr/>
-          <p:nvPr/>
-        </p:nvSpPr>
-        <p:spPr>
-          <a:xfrm>
-            <a:off x="502920" y="3813048"/>
-            <a:ext cx="512064" cy="512064"/>
-          </a:xfrm>
-          <a:prstGeom prst="roundRect">
-            <a:avLst/>
-          </a:prstGeom>
-          <a:solidFill>
-            <a:srgbClr val="FFE4E6"/>
-          </a:solidFill>
-          <a:ln>
-            <a:noFill/>
-          </a:ln>
-          <a:effectLst/>
-        </p:spPr>
-        <p:style>
-          <a:lnRef idx="1">
-            <a:schemeClr val="accent1"/>
-          </a:lnRef>
-          <a:fillRef idx="3">
-            <a:schemeClr val="accent1"/>
-          </a:fillRef>
-          <a:effectRef idx="2">
-            <a:schemeClr val="accent1"/>
-          </a:effectRef>
-          <a:fontRef idx="minor">
-            <a:schemeClr val="lt1"/>
-          </a:fontRef>
-        </p:style>
-        <p:txBody>
-          <a:bodyPr rtlCol="0" anchor="ctr"/>
-          <a:lstStyle/>
-          <a:p>
-            <a:pPr algn="ctr"/>
-          </a:p>
-        </p:txBody>
-      </p:sp>
-      <p:sp>
-        <p:nvSpPr>
-          <p:cNvPr id="21" name="TextBox 20"/>
-          <p:cNvSpPr txBox="1"/>
-          <p:nvPr/>
-        </p:nvSpPr>
-        <p:spPr>
-          <a:xfrm>
-            <a:off x="502920" y="3813048"/>
-            <a:ext cx="512064" cy="512064"/>
-          </a:xfrm>
-          <a:prstGeom prst="rect">
-            <a:avLst/>
-          </a:prstGeom>
-          <a:noFill/>
-        </p:spPr>
-        <p:txBody>
-          <a:bodyPr wrap="square" anchor="ctr">
-            <a:spAutoFit/>
-          </a:bodyPr>
-          <a:lstStyle/>
-          <a:p>
-            <a:pPr algn="ctr">
-              <a:lnSpc>
-                <a:spcPct val="100000"/>
-              </a:lnSpc>
-            </a:pPr>
-            <a:r>
-              <a:rPr sz="2000" b="0">
-                <a:solidFill>
-                  <a:srgbClr val="E11D48"/>
-                </a:solidFill>
-                <a:latin typeface="Malgun Gothic"/>
-              </a:rPr>
-              <a:t>💳</a:t>
-            </a:r>
-          </a:p>
-        </p:txBody>
-      </p:sp>
-      <p:sp>
-        <p:nvSpPr>
-          <p:cNvPr id="22" name="TextBox 21"/>
-          <p:cNvSpPr txBox="1"/>
-          <p:nvPr/>
-        </p:nvSpPr>
-        <p:spPr>
-          <a:xfrm>
-            <a:off x="1143000" y="3776472"/>
-            <a:ext cx="4609947" cy="365760"/>
-          </a:xfrm>
-          <a:prstGeom prst="rect">
-            <a:avLst/>
-          </a:prstGeom>
-          <a:noFill/>
-        </p:spPr>
-        <p:txBody>
-          <a:bodyPr wrap="square" anchor="t">
-            <a:spAutoFit/>
-          </a:bodyPr>
-          <a:lstStyle/>
-          <a:p>
-            <a:pPr algn="l">
-              <a:lnSpc>
-                <a:spcPct val="100000"/>
-              </a:lnSpc>
-            </a:pPr>
-            <a:r>
-              <a:rPr sz="1400" b="1">
-                <a:solidFill>
-                  <a:srgbClr val="1E2340"/>
-                </a:solidFill>
-                <a:latin typeface="Malgun Gothic"/>
-              </a:rPr>
-              <a:t>수납·정산</a:t>
-            </a:r>
-          </a:p>
-        </p:txBody>
-      </p:sp>
-      <p:sp>
-        <p:nvSpPr>
-          <p:cNvPr id="23" name="TextBox 22"/>
-          <p:cNvSpPr txBox="1"/>
-          <p:nvPr/>
-        </p:nvSpPr>
-        <p:spPr>
-          <a:xfrm>
-            <a:off x="1143000" y="4087368"/>
-            <a:ext cx="4609947" cy="365760"/>
-          </a:xfrm>
-          <a:prstGeom prst="rect">
-            <a:avLst/>
-          </a:prstGeom>
-          <a:noFill/>
-        </p:spPr>
-        <p:txBody>
-          <a:bodyPr wrap="square" anchor="t">
-            <a:spAutoFit/>
-          </a:bodyPr>
-          <a:lstStyle/>
-          <a:p>
-            <a:pPr algn="l">
-              <a:lnSpc>
-                <a:spcPct val="100000"/>
-              </a:lnSpc>
-            </a:pPr>
-            <a:r>
-              <a:rPr sz="1050" b="0">
-                <a:solidFill>
-                  <a:srgbClr val="64748B"/>
-                </a:solidFill>
-                <a:latin typeface="Malgun Gothic"/>
-              </a:rPr>
-              <a:t>결제·미납 관리와 지사→대리점 정산 수령.</a:t>
-            </a:r>
-          </a:p>
-        </p:txBody>
-      </p:sp>
-      <p:sp>
-        <p:nvSpPr>
-          <p:cNvPr id="24" name="Rounded Rectangle 23"/>
-          <p:cNvSpPr/>
-          <p:nvPr/>
-        </p:nvSpPr>
-        <p:spPr>
-          <a:xfrm>
-            <a:off x="6301587" y="3657600"/>
-            <a:ext cx="5524347" cy="822960"/>
-          </a:xfrm>
-          <a:prstGeom prst="roundRect">
-            <a:avLst/>
-          </a:prstGeom>
-          <a:solidFill>
-            <a:srgbClr val="FFFFFF"/>
-          </a:solidFill>
-          <a:ln w="12700">
-            <a:solidFill>
-              <a:srgbClr val="E2E8F0"/>
-            </a:solidFill>
-          </a:ln>
-          <a:effectLst/>
-        </p:spPr>
-        <p:style>
-          <a:lnRef idx="1">
-            <a:schemeClr val="accent1"/>
-          </a:lnRef>
-          <a:fillRef idx="3">
-            <a:schemeClr val="accent1"/>
-          </a:fillRef>
-          <a:effectRef idx="2">
-            <a:schemeClr val="accent1"/>
-          </a:effectRef>
-          <a:fontRef idx="minor">
-            <a:schemeClr val="lt1"/>
-          </a:fontRef>
-        </p:style>
-        <p:txBody>
-          <a:bodyPr rtlCol="0" anchor="ctr"/>
-          <a:lstStyle/>
-          <a:p>
-            <a:pPr algn="ctr"/>
-          </a:p>
-        </p:txBody>
-      </p:sp>
-      <p:sp>
-        <p:nvSpPr>
-          <p:cNvPr id="25" name="Rounded Rectangle 24"/>
-          <p:cNvSpPr/>
-          <p:nvPr/>
-        </p:nvSpPr>
-        <p:spPr>
-          <a:xfrm>
-            <a:off x="6438747" y="3813048"/>
-            <a:ext cx="512064" cy="512064"/>
-          </a:xfrm>
-          <a:prstGeom prst="roundRect">
-            <a:avLst/>
-          </a:prstGeom>
-          <a:solidFill>
-            <a:srgbClr val="FFE4E6"/>
-          </a:solidFill>
-          <a:ln>
-            <a:noFill/>
-          </a:ln>
-          <a:effectLst/>
-        </p:spPr>
-        <p:style>
-          <a:lnRef idx="1">
-            <a:schemeClr val="accent1"/>
-          </a:lnRef>
-          <a:fillRef idx="3">
-            <a:schemeClr val="accent1"/>
-          </a:fillRef>
-          <a:effectRef idx="2">
-            <a:schemeClr val="accent1"/>
-          </a:effectRef>
-          <a:fontRef idx="minor">
-            <a:schemeClr val="lt1"/>
-          </a:fontRef>
-        </p:style>
-        <p:txBody>
-          <a:bodyPr rtlCol="0" anchor="ctr"/>
-          <a:lstStyle/>
-          <a:p>
-            <a:pPr algn="ctr"/>
-          </a:p>
-        </p:txBody>
-      </p:sp>
-      <p:sp>
-        <p:nvSpPr>
-          <p:cNvPr id="26" name="TextBox 25"/>
-          <p:cNvSpPr txBox="1"/>
-          <p:nvPr/>
-        </p:nvSpPr>
-        <p:spPr>
-          <a:xfrm>
-            <a:off x="6438747" y="3813048"/>
-            <a:ext cx="512064" cy="512064"/>
-          </a:xfrm>
-          <a:prstGeom prst="rect">
-            <a:avLst/>
-          </a:prstGeom>
-          <a:noFill/>
-        </p:spPr>
-        <p:txBody>
-          <a:bodyPr wrap="square" anchor="ctr">
-            <a:spAutoFit/>
-          </a:bodyPr>
-          <a:lstStyle/>
-          <a:p>
-            <a:pPr algn="ctr">
-              <a:lnSpc>
-                <a:spcPct val="100000"/>
-              </a:lnSpc>
-            </a:pPr>
-            <a:r>
-              <a:rPr sz="2000" b="0">
-                <a:solidFill>
-                  <a:srgbClr val="E11D48"/>
-                </a:solidFill>
-                <a:latin typeface="Malgun Gothic"/>
-              </a:rPr>
-              <a:t>📈</a:t>
-            </a:r>
-          </a:p>
-        </p:txBody>
-      </p:sp>
-      <p:sp>
-        <p:nvSpPr>
-          <p:cNvPr id="27" name="TextBox 26"/>
-          <p:cNvSpPr txBox="1"/>
-          <p:nvPr/>
-        </p:nvSpPr>
-        <p:spPr>
-          <a:xfrm>
-            <a:off x="7078827" y="3776472"/>
-            <a:ext cx="4609947" cy="365760"/>
-          </a:xfrm>
-          <a:prstGeom prst="rect">
-            <a:avLst/>
-          </a:prstGeom>
-          <a:noFill/>
-        </p:spPr>
-        <p:txBody>
-          <a:bodyPr wrap="square" anchor="t">
-            <a:spAutoFit/>
-          </a:bodyPr>
-          <a:lstStyle/>
-          <a:p>
-            <a:pPr algn="l">
-              <a:lnSpc>
-                <a:spcPct val="100000"/>
-              </a:lnSpc>
-            </a:pPr>
-            <a:r>
-              <a:rPr sz="1400" b="1">
-                <a:solidFill>
-                  <a:srgbClr val="1E2340"/>
-                </a:solidFill>
-                <a:latin typeface="Malgun Gothic"/>
-              </a:rPr>
-              <a:t>학습 현황·리포트</a:t>
-            </a:r>
-          </a:p>
-        </p:txBody>
-      </p:sp>
-      <p:sp>
-        <p:nvSpPr>
-          <p:cNvPr id="28" name="TextBox 27"/>
-          <p:cNvSpPr txBox="1"/>
-          <p:nvPr/>
-        </p:nvSpPr>
-        <p:spPr>
-          <a:xfrm>
-            <a:off x="7078827" y="4087368"/>
-            <a:ext cx="4609947" cy="365760"/>
-          </a:xfrm>
-          <a:prstGeom prst="rect">
-            <a:avLst/>
-          </a:prstGeom>
-          <a:noFill/>
-        </p:spPr>
-        <p:txBody>
-          <a:bodyPr wrap="square" anchor="t">
-            <a:spAutoFit/>
-          </a:bodyPr>
-          <a:lstStyle/>
-          <a:p>
-            <a:pPr algn="l">
-              <a:lnSpc>
-                <a:spcPct val="100000"/>
-              </a:lnSpc>
-            </a:pPr>
-            <a:r>
-              <a:rPr sz="1050" b="0">
-                <a:solidFill>
-                  <a:srgbClr val="64748B"/>
-                </a:solidFill>
-                <a:latin typeface="Malgun Gothic"/>
-              </a:rPr>
-              <a:t>우리 학생 학습을 한눈에.</a:t>
-            </a:r>
-          </a:p>
-        </p:txBody>
-      </p:sp>
-      <p:sp>
-        <p:nvSpPr>
-          <p:cNvPr id="29" name="TextBox 28"/>
-          <p:cNvSpPr txBox="1"/>
-          <p:nvPr/>
-        </p:nvSpPr>
-        <p:spPr>
-          <a:xfrm>
-            <a:off x="365760" y="4754880"/>
-            <a:ext cx="5486400" cy="365760"/>
-          </a:xfrm>
-          <a:prstGeom prst="rect">
-            <a:avLst/>
-          </a:prstGeom>
-          <a:noFill/>
-        </p:spPr>
-        <p:txBody>
-          <a:bodyPr wrap="square" anchor="t">
-            <a:spAutoFit/>
-          </a:bodyPr>
-          <a:lstStyle/>
-          <a:p>
-            <a:pPr algn="l">
-              <a:lnSpc>
-                <a:spcPct val="100000"/>
-              </a:lnSpc>
-            </a:pPr>
-            <a:r>
-              <a:rPr sz="1300" b="1">
-                <a:solidFill>
-                  <a:srgbClr val="E11D48"/>
-                </a:solidFill>
-                <a:latin typeface="Malgun Gothic"/>
-              </a:rPr>
-              <a:t>우리 대리점 지표(예시)</a:t>
-            </a:r>
-          </a:p>
-        </p:txBody>
-      </p:sp>
-      <p:graphicFrame>
-        <p:nvGraphicFramePr>
-          <p:cNvPr id="30" name="Chart 29"/>
-          <p:cNvGraphicFramePr>
-            <a:graphicFrameLocks noGrp="1"/>
-          </p:cNvGraphicFramePr>
-          <p:nvPr/>
-        </p:nvGraphicFramePr>
-        <p:xfrm>
-          <a:off x="365760" y="5074920"/>
-          <a:ext cx="5669280" cy="1554480"/>
-        </p:xfrm>
-        <a:graphic>
-          <a:graphicData uri="http://schemas.openxmlformats.org/drawingml/2006/chart">
-            <c:chart xmlns:c="http://schemas.openxmlformats.org/drawingml/2006/chart" r:id="rId2"/>
-          </a:graphicData>
-        </a:graphic>
-      </p:graphicFrame>
-      <p:sp>
-        <p:nvSpPr>
-          <p:cNvPr id="31" name="Rectangle 30"/>
-          <p:cNvSpPr/>
-          <p:nvPr/>
-        </p:nvSpPr>
-        <p:spPr>
-          <a:xfrm>
-            <a:off x="7470648" y="4654296"/>
-            <a:ext cx="3255264" cy="2075688"/>
-          </a:xfrm>
-          <a:prstGeom prst="rect">
-            <a:avLst/>
-          </a:prstGeom>
-          <a:solidFill>
-            <a:srgbClr val="FFFFFF"/>
-          </a:solidFill>
-          <a:ln w="12700">
-            <a:solidFill>
-              <a:srgbClr val="E2E8F0"/>
-            </a:solidFill>
-          </a:ln>
-          <a:effectLst/>
-        </p:spPr>
-        <p:style>
-          <a:lnRef idx="1">
-            <a:schemeClr val="accent1"/>
-          </a:lnRef>
-          <a:fillRef idx="3">
-            <a:schemeClr val="accent1"/>
-          </a:fillRef>
-          <a:effectRef idx="2">
-            <a:schemeClr val="accent1"/>
-          </a:effectRef>
-          <a:fontRef idx="minor">
-            <a:schemeClr val="lt1"/>
-          </a:fontRef>
-        </p:style>
-        <p:txBody>
-          <a:bodyPr rtlCol="0" anchor="ctr"/>
-          <a:lstStyle/>
-          <a:p>
-            <a:pPr algn="ctr"/>
-          </a:p>
-        </p:txBody>
-      </p:sp>
-      <p:pic>
-        <p:nvPicPr>
-          <p:cNvPr id="32" name="Picture 31" descr="admin_login.jpg"/>
-          <p:cNvPicPr>
-            <a:picLocks noChangeAspect="1"/>
-          </p:cNvPicPr>
-          <p:nvPr/>
-        </p:nvPicPr>
-        <p:blipFill>
-          <a:blip r:embed="rId3"/>
-          <a:stretch>
-            <a:fillRect/>
-          </a:stretch>
-        </p:blipFill>
-        <p:spPr>
-          <a:xfrm>
-            <a:off x="7525512" y="4709160"/>
-            <a:ext cx="3145536" cy="1965960"/>
-          </a:xfrm>
-          <a:prstGeom prst="rect">
-            <a:avLst/>
-          </a:prstGeom>
-        </p:spPr>
-      </p:pic>
-    </p:spTree>
-  </p:cSld>
-  <p:clrMapOvr>
-    <a:masterClrMapping/>
-  </p:clrMapOvr>
-</p:sld>
-</file>
-
-<file path=ppt/slides/slide20.xml><?xml version="1.0" encoding="utf-8"?>
-<p:sld xmlns:a="http://schemas.openxmlformats.org/drawingml/2006/main" xmlns:p="http://schemas.openxmlformats.org/presentationml/2006/main" xmlns:r="http://schemas.openxmlformats.org/officeDocument/2006/relationships">
-  <p:cSld>
-    <p:bg>
-      <p:bgPr>
-        <a:solidFill>
-          <a:srgbClr val="FFFFFF"/>
-        </a:solidFill>
-        <a:effectLst/>
-      </p:bgPr>
-    </p:bg>
-    <p:spTree>
-      <p:nvGrpSpPr>
-        <p:cNvPr id="1" name=""/>
-        <p:cNvGrpSpPr/>
-        <p:nvPr/>
-      </p:nvGrpSpPr>
-      <p:grpSpPr/>
-      <p:sp>
-        <p:nvSpPr>
-          <p:cNvPr id="2" name="Rectangle 1"/>
-          <p:cNvSpPr/>
-          <p:nvPr/>
-        </p:nvSpPr>
-        <p:spPr>
-          <a:xfrm>
-            <a:off x="0" y="0"/>
-            <a:ext cx="12191695" cy="566928"/>
-          </a:xfrm>
-          <a:prstGeom prst="rect">
-            <a:avLst/>
-          </a:prstGeom>
-          <a:solidFill>
-            <a:srgbClr val="E11D48"/>
-          </a:solidFill>
-          <a:ln>
-            <a:noFill/>
-          </a:ln>
-          <a:effectLst/>
-        </p:spPr>
-        <p:style>
-          <a:lnRef idx="1">
-            <a:schemeClr val="accent1"/>
-          </a:lnRef>
-          <a:fillRef idx="3">
-            <a:schemeClr val="accent1"/>
-          </a:fillRef>
-          <a:effectRef idx="2">
-            <a:schemeClr val="accent1"/>
-          </a:effectRef>
-          <a:fontRef idx="minor">
-            <a:schemeClr val="lt1"/>
-          </a:fontRef>
-        </p:style>
-        <p:txBody>
-          <a:bodyPr rtlCol="0" anchor="ctr"/>
-          <a:lstStyle/>
-          <a:p>
-            <a:pPr algn="ctr"/>
-          </a:p>
-        </p:txBody>
-      </p:sp>
-      <p:sp>
-        <p:nvSpPr>
-          <p:cNvPr id="3" name="Rectangle 2"/>
-          <p:cNvSpPr/>
-          <p:nvPr/>
-        </p:nvSpPr>
-        <p:spPr>
-          <a:xfrm>
-            <a:off x="0" y="566928"/>
-            <a:ext cx="12191695" cy="54864"/>
-          </a:xfrm>
-          <a:prstGeom prst="rect">
-            <a:avLst/>
-          </a:prstGeom>
-          <a:solidFill>
-            <a:srgbClr val="0EA5E9"/>
-          </a:solidFill>
-          <a:ln>
-            <a:noFill/>
-          </a:ln>
-          <a:effectLst/>
-        </p:spPr>
-        <p:style>
-          <a:lnRef idx="1">
-            <a:schemeClr val="accent1"/>
-          </a:lnRef>
-          <a:fillRef idx="3">
-            <a:schemeClr val="accent1"/>
-          </a:fillRef>
-          <a:effectRef idx="2">
-            <a:schemeClr val="accent1"/>
-          </a:effectRef>
-          <a:fontRef idx="minor">
-            <a:schemeClr val="lt1"/>
-          </a:fontRef>
-        </p:style>
-        <p:txBody>
-          <a:bodyPr rtlCol="0" anchor="ctr"/>
-          <a:lstStyle/>
-          <a:p>
-            <a:pPr algn="ctr"/>
-          </a:p>
-        </p:txBody>
-      </p:sp>
-      <p:sp>
-        <p:nvSpPr>
-          <p:cNvPr id="4" name="TextBox 3"/>
-          <p:cNvSpPr txBox="1"/>
-          <p:nvPr/>
-        </p:nvSpPr>
-        <p:spPr>
-          <a:xfrm>
-            <a:off x="365760" y="27432"/>
-            <a:ext cx="7315200" cy="502920"/>
-          </a:xfrm>
-          <a:prstGeom prst="rect">
-            <a:avLst/>
-          </a:prstGeom>
-          <a:noFill/>
-        </p:spPr>
-        <p:txBody>
-          <a:bodyPr wrap="square" anchor="ctr">
-            <a:spAutoFit/>
-          </a:bodyPr>
-          <a:lstStyle/>
-          <a:p>
-            <a:pPr algn="l">
-              <a:lnSpc>
-                <a:spcPct val="100000"/>
-              </a:lnSpc>
-            </a:pPr>
-            <a:r>
-              <a:rPr sz="1500" b="1">
-                <a:solidFill>
-                  <a:srgbClr val="FFFFFF"/>
-                </a:solidFill>
-                <a:latin typeface="Malgun Gothic"/>
-              </a:rPr>
-              <a:t>🤝 망고아이 대리점용 사용설명서</a:t>
-            </a:r>
-          </a:p>
-        </p:txBody>
-      </p:sp>
-      <p:sp>
-        <p:nvSpPr>
-          <p:cNvPr id="5" name="TextBox 4"/>
-          <p:cNvSpPr txBox="1"/>
-          <p:nvPr/>
-        </p:nvSpPr>
-        <p:spPr>
-          <a:xfrm>
-            <a:off x="8168335" y="27432"/>
-            <a:ext cx="3657600" cy="502920"/>
-          </a:xfrm>
-          <a:prstGeom prst="rect">
-            <a:avLst/>
-          </a:prstGeom>
-          <a:noFill/>
-        </p:spPr>
-        <p:txBody>
-          <a:bodyPr wrap="square" anchor="ctr">
-            <a:spAutoFit/>
-          </a:bodyPr>
-          <a:lstStyle/>
-          <a:p>
-            <a:pPr algn="r">
-              <a:lnSpc>
-                <a:spcPct val="100000"/>
-              </a:lnSpc>
-            </a:pPr>
-            <a:r>
-              <a:rPr sz="1300" b="1">
-                <a:solidFill>
-                  <a:srgbClr val="F1F5F9"/>
-                </a:solidFill>
-                <a:latin typeface="Malgun Gothic"/>
-              </a:rPr>
               <a:t>한눈에 보는 데이터</a:t>
             </a:r>
           </a:p>
@@ -15050,1707 +17136,6 @@
           </a:graphicData>
         </a:graphic>
       </p:graphicFrame>
-    </p:spTree>
-  </p:cSld>
-  <p:clrMapOvr>
-    <a:masterClrMapping/>
-  </p:clrMapOvr>
-</p:sld>
-</file>
-
-<file path=ppt/slides/slide21.xml><?xml version="1.0" encoding="utf-8"?>
-<p:sld xmlns:a="http://schemas.openxmlformats.org/drawingml/2006/main" xmlns:p="http://schemas.openxmlformats.org/presentationml/2006/main" xmlns:r="http://schemas.openxmlformats.org/officeDocument/2006/relationships">
-  <p:cSld>
-    <p:bg>
-      <p:bgPr>
-        <a:solidFill>
-          <a:srgbClr val="FFFFFF"/>
-        </a:solidFill>
-        <a:effectLst/>
-      </p:bgPr>
-    </p:bg>
-    <p:spTree>
-      <p:nvGrpSpPr>
-        <p:cNvPr id="1" name=""/>
-        <p:cNvGrpSpPr/>
-        <p:nvPr/>
-      </p:nvGrpSpPr>
-      <p:grpSpPr/>
-      <p:sp>
-        <p:nvSpPr>
-          <p:cNvPr id="2" name="Rectangle 1"/>
-          <p:cNvSpPr/>
-          <p:nvPr/>
-        </p:nvSpPr>
-        <p:spPr>
-          <a:xfrm>
-            <a:off x="0" y="0"/>
-            <a:ext cx="12191695" cy="566928"/>
-          </a:xfrm>
-          <a:prstGeom prst="rect">
-            <a:avLst/>
-          </a:prstGeom>
-          <a:solidFill>
-            <a:srgbClr val="E11D48"/>
-          </a:solidFill>
-          <a:ln>
-            <a:noFill/>
-          </a:ln>
-          <a:effectLst/>
-        </p:spPr>
-        <p:style>
-          <a:lnRef idx="1">
-            <a:schemeClr val="accent1"/>
-          </a:lnRef>
-          <a:fillRef idx="3">
-            <a:schemeClr val="accent1"/>
-          </a:fillRef>
-          <a:effectRef idx="2">
-            <a:schemeClr val="accent1"/>
-          </a:effectRef>
-          <a:fontRef idx="minor">
-            <a:schemeClr val="lt1"/>
-          </a:fontRef>
-        </p:style>
-        <p:txBody>
-          <a:bodyPr rtlCol="0" anchor="ctr"/>
-          <a:lstStyle/>
-          <a:p>
-            <a:pPr algn="ctr"/>
-          </a:p>
-        </p:txBody>
-      </p:sp>
-      <p:sp>
-        <p:nvSpPr>
-          <p:cNvPr id="3" name="Rectangle 2"/>
-          <p:cNvSpPr/>
-          <p:nvPr/>
-        </p:nvSpPr>
-        <p:spPr>
-          <a:xfrm>
-            <a:off x="0" y="566928"/>
-            <a:ext cx="12191695" cy="54864"/>
-          </a:xfrm>
-          <a:prstGeom prst="rect">
-            <a:avLst/>
-          </a:prstGeom>
-          <a:solidFill>
-            <a:srgbClr val="0EA5E9"/>
-          </a:solidFill>
-          <a:ln>
-            <a:noFill/>
-          </a:ln>
-          <a:effectLst/>
-        </p:spPr>
-        <p:style>
-          <a:lnRef idx="1">
-            <a:schemeClr val="accent1"/>
-          </a:lnRef>
-          <a:fillRef idx="3">
-            <a:schemeClr val="accent1"/>
-          </a:fillRef>
-          <a:effectRef idx="2">
-            <a:schemeClr val="accent1"/>
-          </a:effectRef>
-          <a:fontRef idx="minor">
-            <a:schemeClr val="lt1"/>
-          </a:fontRef>
-        </p:style>
-        <p:txBody>
-          <a:bodyPr rtlCol="0" anchor="ctr"/>
-          <a:lstStyle/>
-          <a:p>
-            <a:pPr algn="ctr"/>
-          </a:p>
-        </p:txBody>
-      </p:sp>
-      <p:sp>
-        <p:nvSpPr>
-          <p:cNvPr id="4" name="TextBox 3"/>
-          <p:cNvSpPr txBox="1"/>
-          <p:nvPr/>
-        </p:nvSpPr>
-        <p:spPr>
-          <a:xfrm>
-            <a:off x="365760" y="27432"/>
-            <a:ext cx="7315200" cy="502920"/>
-          </a:xfrm>
-          <a:prstGeom prst="rect">
-            <a:avLst/>
-          </a:prstGeom>
-          <a:noFill/>
-        </p:spPr>
-        <p:txBody>
-          <a:bodyPr wrap="square" anchor="ctr">
-            <a:spAutoFit/>
-          </a:bodyPr>
-          <a:lstStyle/>
-          <a:p>
-            <a:pPr algn="l">
-              <a:lnSpc>
-                <a:spcPct val="100000"/>
-              </a:lnSpc>
-            </a:pPr>
-            <a:r>
-              <a:rPr sz="1500" b="1">
-                <a:solidFill>
-                  <a:srgbClr val="FFFFFF"/>
-                </a:solidFill>
-                <a:latin typeface="Malgun Gothic"/>
-              </a:rPr>
-              <a:t>🤝 망고아이 대리점용 사용설명서</a:t>
-            </a:r>
-          </a:p>
-        </p:txBody>
-      </p:sp>
-      <p:sp>
-        <p:nvSpPr>
-          <p:cNvPr id="5" name="TextBox 4"/>
-          <p:cNvSpPr txBox="1"/>
-          <p:nvPr/>
-        </p:nvSpPr>
-        <p:spPr>
-          <a:xfrm>
-            <a:off x="8168335" y="27432"/>
-            <a:ext cx="3657600" cy="502920"/>
-          </a:xfrm>
-          <a:prstGeom prst="rect">
-            <a:avLst/>
-          </a:prstGeom>
-          <a:noFill/>
-        </p:spPr>
-        <p:txBody>
-          <a:bodyPr wrap="square" anchor="ctr">
-            <a:spAutoFit/>
-          </a:bodyPr>
-          <a:lstStyle/>
-          <a:p>
-            <a:pPr algn="r">
-              <a:lnSpc>
-                <a:spcPct val="100000"/>
-              </a:lnSpc>
-            </a:pPr>
-            <a:r>
-              <a:rPr sz="1300" b="1">
-                <a:solidFill>
-                  <a:srgbClr val="F1F5F9"/>
-                </a:solidFill>
-                <a:latin typeface="Malgun Gothic"/>
-              </a:rPr>
-              <a:t>자주 묻는 질문 (FAQ)</a:t>
-            </a:r>
-          </a:p>
-        </p:txBody>
-      </p:sp>
-      <p:sp>
-        <p:nvSpPr>
-          <p:cNvPr id="6" name="TextBox 5"/>
-          <p:cNvSpPr txBox="1"/>
-          <p:nvPr/>
-        </p:nvSpPr>
-        <p:spPr>
-          <a:xfrm>
-            <a:off x="365760" y="868680"/>
-            <a:ext cx="9144000" cy="457200"/>
-          </a:xfrm>
-          <a:prstGeom prst="rect">
-            <a:avLst/>
-          </a:prstGeom>
-          <a:noFill/>
-        </p:spPr>
-        <p:txBody>
-          <a:bodyPr wrap="square" anchor="t">
-            <a:spAutoFit/>
-          </a:bodyPr>
-          <a:lstStyle/>
-          <a:p>
-            <a:pPr algn="l">
-              <a:lnSpc>
-                <a:spcPct val="100000"/>
-              </a:lnSpc>
-            </a:pPr>
-            <a:r>
-              <a:rPr sz="2200" b="1">
-                <a:solidFill>
-                  <a:srgbClr val="E11D48"/>
-                </a:solidFill>
-                <a:latin typeface="Malgun Gothic"/>
-              </a:rPr>
-              <a:t>❓ 자주 묻는 질문 (FAQ)</a:t>
-            </a:r>
-          </a:p>
-        </p:txBody>
-      </p:sp>
-      <p:sp>
-        <p:nvSpPr>
-          <p:cNvPr id="7" name="Rounded Rectangle 6"/>
-          <p:cNvSpPr/>
-          <p:nvPr/>
-        </p:nvSpPr>
-        <p:spPr>
-          <a:xfrm>
-            <a:off x="365760" y="1554480"/>
-            <a:ext cx="11460175" cy="868680"/>
-          </a:xfrm>
-          <a:prstGeom prst="roundRect">
-            <a:avLst/>
-          </a:prstGeom>
-          <a:solidFill>
-            <a:srgbClr val="F8FAFC"/>
-          </a:solidFill>
-          <a:ln w="12700">
-            <a:solidFill>
-              <a:srgbClr val="E2E8F0"/>
-            </a:solidFill>
-          </a:ln>
-          <a:effectLst/>
-        </p:spPr>
-        <p:style>
-          <a:lnRef idx="1">
-            <a:schemeClr val="accent1"/>
-          </a:lnRef>
-          <a:fillRef idx="3">
-            <a:schemeClr val="accent1"/>
-          </a:fillRef>
-          <a:effectRef idx="2">
-            <a:schemeClr val="accent1"/>
-          </a:effectRef>
-          <a:fontRef idx="minor">
-            <a:schemeClr val="lt1"/>
-          </a:fontRef>
-        </p:style>
-        <p:txBody>
-          <a:bodyPr rtlCol="0" anchor="ctr"/>
-          <a:lstStyle/>
-          <a:p>
-            <a:pPr algn="ctr"/>
-          </a:p>
-        </p:txBody>
-      </p:sp>
-      <p:sp>
-        <p:nvSpPr>
-          <p:cNvPr id="8" name="TextBox 7"/>
-          <p:cNvSpPr txBox="1"/>
-          <p:nvPr/>
-        </p:nvSpPr>
-        <p:spPr>
-          <a:xfrm>
-            <a:off x="548640" y="1627632"/>
-            <a:ext cx="11094415" cy="365760"/>
-          </a:xfrm>
-          <a:prstGeom prst="rect">
-            <a:avLst/>
-          </a:prstGeom>
-          <a:noFill/>
-        </p:spPr>
-        <p:txBody>
-          <a:bodyPr wrap="square" anchor="t">
-            <a:spAutoFit/>
-          </a:bodyPr>
-          <a:lstStyle/>
-          <a:p>
-            <a:pPr algn="l">
-              <a:lnSpc>
-                <a:spcPct val="100000"/>
-              </a:lnSpc>
-            </a:pPr>
-            <a:r>
-              <a:rPr sz="1350" b="1">
-                <a:solidFill>
-                  <a:srgbClr val="E11D48"/>
-                </a:solidFill>
-                <a:latin typeface="Malgun Gothic"/>
-              </a:rPr>
-              <a:t>Q. 어디서 접속하나요?</a:t>
-            </a:r>
-          </a:p>
-        </p:txBody>
-      </p:sp>
-      <p:sp>
-        <p:nvSpPr>
-          <p:cNvPr id="9" name="TextBox 8"/>
-          <p:cNvSpPr txBox="1"/>
-          <p:nvPr/>
-        </p:nvSpPr>
-        <p:spPr>
-          <a:xfrm>
-            <a:off x="548640" y="1965960"/>
-            <a:ext cx="11094415" cy="411480"/>
-          </a:xfrm>
-          <a:prstGeom prst="rect">
-            <a:avLst/>
-          </a:prstGeom>
-          <a:noFill/>
-        </p:spPr>
-        <p:txBody>
-          <a:bodyPr wrap="square" anchor="t">
-            <a:spAutoFit/>
-          </a:bodyPr>
-          <a:lstStyle/>
-          <a:p>
-            <a:pPr algn="l">
-              <a:lnSpc>
-                <a:spcPct val="105000"/>
-              </a:lnSpc>
-            </a:pPr>
-            <a:r>
-              <a:rPr sz="1150" b="0">
-                <a:solidFill>
-                  <a:srgbClr val="475569"/>
-                </a:solidFill>
-                <a:latin typeface="Malgun Gothic"/>
-              </a:rPr>
-              <a:t>A. admin.mangoi.co.kr 에서 로그인해요. 권한(대리점)에 따라 우리 대리점 데이터만 자동으로 보여요.</a:t>
-            </a:r>
-          </a:p>
-        </p:txBody>
-      </p:sp>
-      <p:sp>
-        <p:nvSpPr>
-          <p:cNvPr id="10" name="Rounded Rectangle 9"/>
-          <p:cNvSpPr/>
-          <p:nvPr/>
-        </p:nvSpPr>
-        <p:spPr>
-          <a:xfrm>
-            <a:off x="365760" y="2542032"/>
-            <a:ext cx="11460175" cy="868680"/>
-          </a:xfrm>
-          <a:prstGeom prst="roundRect">
-            <a:avLst/>
-          </a:prstGeom>
-          <a:solidFill>
-            <a:srgbClr val="F8FAFC"/>
-          </a:solidFill>
-          <a:ln w="12700">
-            <a:solidFill>
-              <a:srgbClr val="E2E8F0"/>
-            </a:solidFill>
-          </a:ln>
-          <a:effectLst/>
-        </p:spPr>
-        <p:style>
-          <a:lnRef idx="1">
-            <a:schemeClr val="accent1"/>
-          </a:lnRef>
-          <a:fillRef idx="3">
-            <a:schemeClr val="accent1"/>
-          </a:fillRef>
-          <a:effectRef idx="2">
-            <a:schemeClr val="accent1"/>
-          </a:effectRef>
-          <a:fontRef idx="minor">
-            <a:schemeClr val="lt1"/>
-          </a:fontRef>
-        </p:style>
-        <p:txBody>
-          <a:bodyPr rtlCol="0" anchor="ctr"/>
-          <a:lstStyle/>
-          <a:p>
-            <a:pPr algn="ctr"/>
-          </a:p>
-        </p:txBody>
-      </p:sp>
-      <p:sp>
-        <p:nvSpPr>
-          <p:cNvPr id="11" name="TextBox 10"/>
-          <p:cNvSpPr txBox="1"/>
-          <p:nvPr/>
-        </p:nvSpPr>
-        <p:spPr>
-          <a:xfrm>
-            <a:off x="548640" y="2615184"/>
-            <a:ext cx="11094415" cy="365760"/>
-          </a:xfrm>
-          <a:prstGeom prst="rect">
-            <a:avLst/>
-          </a:prstGeom>
-          <a:noFill/>
-        </p:spPr>
-        <p:txBody>
-          <a:bodyPr wrap="square" anchor="t">
-            <a:spAutoFit/>
-          </a:bodyPr>
-          <a:lstStyle/>
-          <a:p>
-            <a:pPr algn="l">
-              <a:lnSpc>
-                <a:spcPct val="100000"/>
-              </a:lnSpc>
-            </a:pPr>
-            <a:r>
-              <a:rPr sz="1350" b="1">
-                <a:solidFill>
-                  <a:srgbClr val="E11D48"/>
-                </a:solidFill>
-                <a:latin typeface="Malgun Gothic"/>
-              </a:rPr>
-              <a:t>Q. 다른 대리점 데이터도 보이나요?</a:t>
-            </a:r>
-          </a:p>
-        </p:txBody>
-      </p:sp>
-      <p:sp>
-        <p:nvSpPr>
-          <p:cNvPr id="12" name="TextBox 11"/>
-          <p:cNvSpPr txBox="1"/>
-          <p:nvPr/>
-        </p:nvSpPr>
-        <p:spPr>
-          <a:xfrm>
-            <a:off x="548640" y="2953512"/>
-            <a:ext cx="11094415" cy="411480"/>
-          </a:xfrm>
-          <a:prstGeom prst="rect">
-            <a:avLst/>
-          </a:prstGeom>
-          <a:noFill/>
-        </p:spPr>
-        <p:txBody>
-          <a:bodyPr wrap="square" anchor="t">
-            <a:spAutoFit/>
-          </a:bodyPr>
-          <a:lstStyle/>
-          <a:p>
-            <a:pPr algn="l">
-              <a:lnSpc>
-                <a:spcPct val="105000"/>
-              </a:lnSpc>
-            </a:pPr>
-            <a:r>
-              <a:rPr sz="1150" b="0">
-                <a:solidFill>
-                  <a:srgbClr val="475569"/>
-                </a:solidFill>
-                <a:latin typeface="Malgun Gothic"/>
-              </a:rPr>
-              <a:t>A. 아니요. 권한 범위상 우리 대리점 데이터만 보입니다.</a:t>
-            </a:r>
-          </a:p>
-        </p:txBody>
-      </p:sp>
-      <p:sp>
-        <p:nvSpPr>
-          <p:cNvPr id="13" name="Rounded Rectangle 12"/>
-          <p:cNvSpPr/>
-          <p:nvPr/>
-        </p:nvSpPr>
-        <p:spPr>
-          <a:xfrm>
-            <a:off x="365760" y="3529584"/>
-            <a:ext cx="11460175" cy="868680"/>
-          </a:xfrm>
-          <a:prstGeom prst="roundRect">
-            <a:avLst/>
-          </a:prstGeom>
-          <a:solidFill>
-            <a:srgbClr val="F8FAFC"/>
-          </a:solidFill>
-          <a:ln w="12700">
-            <a:solidFill>
-              <a:srgbClr val="E2E8F0"/>
-            </a:solidFill>
-          </a:ln>
-          <a:effectLst/>
-        </p:spPr>
-        <p:style>
-          <a:lnRef idx="1">
-            <a:schemeClr val="accent1"/>
-          </a:lnRef>
-          <a:fillRef idx="3">
-            <a:schemeClr val="accent1"/>
-          </a:fillRef>
-          <a:effectRef idx="2">
-            <a:schemeClr val="accent1"/>
-          </a:effectRef>
-          <a:fontRef idx="minor">
-            <a:schemeClr val="lt1"/>
-          </a:fontRef>
-        </p:style>
-        <p:txBody>
-          <a:bodyPr rtlCol="0" anchor="ctr"/>
-          <a:lstStyle/>
-          <a:p>
-            <a:pPr algn="ctr"/>
-          </a:p>
-        </p:txBody>
-      </p:sp>
-      <p:sp>
-        <p:nvSpPr>
-          <p:cNvPr id="14" name="TextBox 13"/>
-          <p:cNvSpPr txBox="1"/>
-          <p:nvPr/>
-        </p:nvSpPr>
-        <p:spPr>
-          <a:xfrm>
-            <a:off x="548640" y="3602736"/>
-            <a:ext cx="11094415" cy="365760"/>
-          </a:xfrm>
-          <a:prstGeom prst="rect">
-            <a:avLst/>
-          </a:prstGeom>
-          <a:noFill/>
-        </p:spPr>
-        <p:txBody>
-          <a:bodyPr wrap="square" anchor="t">
-            <a:spAutoFit/>
-          </a:bodyPr>
-          <a:lstStyle/>
-          <a:p>
-            <a:pPr algn="l">
-              <a:lnSpc>
-                <a:spcPct val="100000"/>
-              </a:lnSpc>
-            </a:pPr>
-            <a:r>
-              <a:rPr sz="1350" b="1">
-                <a:solidFill>
-                  <a:srgbClr val="E11D48"/>
-                </a:solidFill>
-                <a:latin typeface="Malgun Gothic"/>
-              </a:rPr>
-              <a:t>Q. 등록을 늘리려면?</a:t>
-            </a:r>
-          </a:p>
-        </p:txBody>
-      </p:sp>
-      <p:sp>
-        <p:nvSpPr>
-          <p:cNvPr id="15" name="TextBox 14"/>
-          <p:cNvSpPr txBox="1"/>
-          <p:nvPr/>
-        </p:nvSpPr>
-        <p:spPr>
-          <a:xfrm>
-            <a:off x="548640" y="3941064"/>
-            <a:ext cx="11094415" cy="411480"/>
-          </a:xfrm>
-          <a:prstGeom prst="rect">
-            <a:avLst/>
-          </a:prstGeom>
-          <a:noFill/>
-        </p:spPr>
-        <p:txBody>
-          <a:bodyPr wrap="square" anchor="t">
-            <a:spAutoFit/>
-          </a:bodyPr>
-          <a:lstStyle/>
-          <a:p>
-            <a:pPr algn="l">
-              <a:lnSpc>
-                <a:spcPct val="105000"/>
-              </a:lnSpc>
-            </a:pPr>
-            <a:r>
-              <a:rPr sz="1150" b="0">
-                <a:solidFill>
-                  <a:srgbClr val="475569"/>
-                </a:solidFill>
-                <a:latin typeface="Malgun Gothic"/>
-              </a:rPr>
-              <a:t>A. 빠른 상담 응대와 체험→등록 흐름, 학습 리포트를 활용한 학부모 설득이 핵심입니다.</a:t>
-            </a:r>
-          </a:p>
-        </p:txBody>
-      </p:sp>
-      <p:sp>
-        <p:nvSpPr>
-          <p:cNvPr id="16" name="Rounded Rectangle 15"/>
-          <p:cNvSpPr/>
-          <p:nvPr/>
-        </p:nvSpPr>
-        <p:spPr>
-          <a:xfrm>
-            <a:off x="365760" y="4517136"/>
-            <a:ext cx="11460175" cy="868680"/>
-          </a:xfrm>
-          <a:prstGeom prst="roundRect">
-            <a:avLst/>
-          </a:prstGeom>
-          <a:solidFill>
-            <a:srgbClr val="F8FAFC"/>
-          </a:solidFill>
-          <a:ln w="12700">
-            <a:solidFill>
-              <a:srgbClr val="E2E8F0"/>
-            </a:solidFill>
-          </a:ln>
-          <a:effectLst/>
-        </p:spPr>
-        <p:style>
-          <a:lnRef idx="1">
-            <a:schemeClr val="accent1"/>
-          </a:lnRef>
-          <a:fillRef idx="3">
-            <a:schemeClr val="accent1"/>
-          </a:fillRef>
-          <a:effectRef idx="2">
-            <a:schemeClr val="accent1"/>
-          </a:effectRef>
-          <a:fontRef idx="minor">
-            <a:schemeClr val="lt1"/>
-          </a:fontRef>
-        </p:style>
-        <p:txBody>
-          <a:bodyPr rtlCol="0" anchor="ctr"/>
-          <a:lstStyle/>
-          <a:p>
-            <a:pPr algn="ctr"/>
-          </a:p>
-        </p:txBody>
-      </p:sp>
-      <p:sp>
-        <p:nvSpPr>
-          <p:cNvPr id="17" name="TextBox 16"/>
-          <p:cNvSpPr txBox="1"/>
-          <p:nvPr/>
-        </p:nvSpPr>
-        <p:spPr>
-          <a:xfrm>
-            <a:off x="548640" y="4590288"/>
-            <a:ext cx="11094415" cy="365760"/>
-          </a:xfrm>
-          <a:prstGeom prst="rect">
-            <a:avLst/>
-          </a:prstGeom>
-          <a:noFill/>
-        </p:spPr>
-        <p:txBody>
-          <a:bodyPr wrap="square" anchor="t">
-            <a:spAutoFit/>
-          </a:bodyPr>
-          <a:lstStyle/>
-          <a:p>
-            <a:pPr algn="l">
-              <a:lnSpc>
-                <a:spcPct val="100000"/>
-              </a:lnSpc>
-            </a:pPr>
-            <a:r>
-              <a:rPr sz="1350" b="1">
-                <a:solidFill>
-                  <a:srgbClr val="E11D48"/>
-                </a:solidFill>
-                <a:latin typeface="Malgun Gothic"/>
-              </a:rPr>
-              <a:t>Q. 정산은 어떻게 확인하나요?</a:t>
-            </a:r>
-          </a:p>
-        </p:txBody>
-      </p:sp>
-      <p:sp>
-        <p:nvSpPr>
-          <p:cNvPr id="18" name="TextBox 17"/>
-          <p:cNvSpPr txBox="1"/>
-          <p:nvPr/>
-        </p:nvSpPr>
-        <p:spPr>
-          <a:xfrm>
-            <a:off x="548640" y="4928616"/>
-            <a:ext cx="11094415" cy="411480"/>
-          </a:xfrm>
-          <a:prstGeom prst="rect">
-            <a:avLst/>
-          </a:prstGeom>
-          <a:noFill/>
-        </p:spPr>
-        <p:txBody>
-          <a:bodyPr wrap="square" anchor="t">
-            <a:spAutoFit/>
-          </a:bodyPr>
-          <a:lstStyle/>
-          <a:p>
-            <a:pPr algn="l">
-              <a:lnSpc>
-                <a:spcPct val="105000"/>
-              </a:lnSpc>
-            </a:pPr>
-            <a:r>
-              <a:rPr sz="1150" b="0">
-                <a:solidFill>
-                  <a:srgbClr val="475569"/>
-                </a:solidFill>
-                <a:latin typeface="Malgun Gothic"/>
-              </a:rPr>
-              <a:t>A. 지사→대리점 정산(수령액)이 조직 트리 구조로 자동 계산되며, 월간 리포트에서 확인합니다.</a:t>
-            </a:r>
-          </a:p>
-        </p:txBody>
-      </p:sp>
-      <p:sp>
-        <p:nvSpPr>
-          <p:cNvPr id="19" name="Rounded Rectangle 18"/>
-          <p:cNvSpPr/>
-          <p:nvPr/>
-        </p:nvSpPr>
-        <p:spPr>
-          <a:xfrm>
-            <a:off x="365760" y="5504688"/>
-            <a:ext cx="11460175" cy="868680"/>
-          </a:xfrm>
-          <a:prstGeom prst="roundRect">
-            <a:avLst/>
-          </a:prstGeom>
-          <a:solidFill>
-            <a:srgbClr val="F8FAFC"/>
-          </a:solidFill>
-          <a:ln w="12700">
-            <a:solidFill>
-              <a:srgbClr val="E2E8F0"/>
-            </a:solidFill>
-          </a:ln>
-          <a:effectLst/>
-        </p:spPr>
-        <p:style>
-          <a:lnRef idx="1">
-            <a:schemeClr val="accent1"/>
-          </a:lnRef>
-          <a:fillRef idx="3">
-            <a:schemeClr val="accent1"/>
-          </a:fillRef>
-          <a:effectRef idx="2">
-            <a:schemeClr val="accent1"/>
-          </a:effectRef>
-          <a:fontRef idx="minor">
-            <a:schemeClr val="lt1"/>
-          </a:fontRef>
-        </p:style>
-        <p:txBody>
-          <a:bodyPr rtlCol="0" anchor="ctr"/>
-          <a:lstStyle/>
-          <a:p>
-            <a:pPr algn="ctr"/>
-          </a:p>
-        </p:txBody>
-      </p:sp>
-      <p:sp>
-        <p:nvSpPr>
-          <p:cNvPr id="20" name="TextBox 19"/>
-          <p:cNvSpPr txBox="1"/>
-          <p:nvPr/>
-        </p:nvSpPr>
-        <p:spPr>
-          <a:xfrm>
-            <a:off x="548640" y="5577840"/>
-            <a:ext cx="11094415" cy="365760"/>
-          </a:xfrm>
-          <a:prstGeom prst="rect">
-            <a:avLst/>
-          </a:prstGeom>
-          <a:noFill/>
-        </p:spPr>
-        <p:txBody>
-          <a:bodyPr wrap="square" anchor="t">
-            <a:spAutoFit/>
-          </a:bodyPr>
-          <a:lstStyle/>
-          <a:p>
-            <a:pPr algn="l">
-              <a:lnSpc>
-                <a:spcPct val="100000"/>
-              </a:lnSpc>
-            </a:pPr>
-            <a:r>
-              <a:rPr sz="1350" b="1">
-                <a:solidFill>
-                  <a:srgbClr val="E11D48"/>
-                </a:solidFill>
-                <a:latin typeface="Malgun Gothic"/>
-              </a:rPr>
-              <a:t>Q. 학생이 그만둘 것 같아요.</a:t>
-            </a:r>
-          </a:p>
-        </p:txBody>
-      </p:sp>
-      <p:sp>
-        <p:nvSpPr>
-          <p:cNvPr id="21" name="TextBox 20"/>
-          <p:cNvSpPr txBox="1"/>
-          <p:nvPr/>
-        </p:nvSpPr>
-        <p:spPr>
-          <a:xfrm>
-            <a:off x="548640" y="5916168"/>
-            <a:ext cx="11094415" cy="411480"/>
-          </a:xfrm>
-          <a:prstGeom prst="rect">
-            <a:avLst/>
-          </a:prstGeom>
-          <a:noFill/>
-        </p:spPr>
-        <p:txBody>
-          <a:bodyPr wrap="square" anchor="t">
-            <a:spAutoFit/>
-          </a:bodyPr>
-          <a:lstStyle/>
-          <a:p>
-            <a:pPr algn="l">
-              <a:lnSpc>
-                <a:spcPct val="105000"/>
-              </a:lnSpc>
-            </a:pPr>
-            <a:r>
-              <a:rPr sz="1150" b="0">
-                <a:solidFill>
-                  <a:srgbClr val="475569"/>
-                </a:solidFill>
-                <a:latin typeface="Malgun Gothic"/>
-              </a:rPr>
-              <a:t>A. 이탈위험 신호(결석·성과 하락)를 보고 상담·알림톡으로 빠르게 개입하세요.</a:t>
-            </a:r>
-          </a:p>
-        </p:txBody>
-      </p:sp>
-    </p:spTree>
-  </p:cSld>
-  <p:clrMapOvr>
-    <a:masterClrMapping/>
-  </p:clrMapOvr>
-</p:sld>
-</file>
-
-<file path=ppt/slides/slide22.xml><?xml version="1.0" encoding="utf-8"?>
-<p:sld xmlns:a="http://schemas.openxmlformats.org/drawingml/2006/main" xmlns:p="http://schemas.openxmlformats.org/presentationml/2006/main" xmlns:r="http://schemas.openxmlformats.org/officeDocument/2006/relationships">
-  <p:cSld>
-    <p:bg>
-      <p:bgPr>
-        <a:solidFill>
-          <a:srgbClr val="FFF1F2"/>
-        </a:solidFill>
-        <a:effectLst/>
-      </p:bgPr>
-    </p:bg>
-    <p:spTree>
-      <p:nvGrpSpPr>
-        <p:cNvPr id="1" name=""/>
-        <p:cNvGrpSpPr/>
-        <p:nvPr/>
-      </p:nvGrpSpPr>
-      <p:grpSpPr/>
-      <p:sp>
-        <p:nvSpPr>
-          <p:cNvPr id="2" name="Rectangle 1"/>
-          <p:cNvSpPr/>
-          <p:nvPr/>
-        </p:nvSpPr>
-        <p:spPr>
-          <a:xfrm>
-            <a:off x="0" y="0"/>
-            <a:ext cx="12191695" cy="566928"/>
-          </a:xfrm>
-          <a:prstGeom prst="rect">
-            <a:avLst/>
-          </a:prstGeom>
-          <a:solidFill>
-            <a:srgbClr val="E11D48"/>
-          </a:solidFill>
-          <a:ln>
-            <a:noFill/>
-          </a:ln>
-          <a:effectLst/>
-        </p:spPr>
-        <p:style>
-          <a:lnRef idx="1">
-            <a:schemeClr val="accent1"/>
-          </a:lnRef>
-          <a:fillRef idx="3">
-            <a:schemeClr val="accent1"/>
-          </a:fillRef>
-          <a:effectRef idx="2">
-            <a:schemeClr val="accent1"/>
-          </a:effectRef>
-          <a:fontRef idx="minor">
-            <a:schemeClr val="lt1"/>
-          </a:fontRef>
-        </p:style>
-        <p:txBody>
-          <a:bodyPr rtlCol="0" anchor="ctr"/>
-          <a:lstStyle/>
-          <a:p>
-            <a:pPr algn="ctr"/>
-          </a:p>
-        </p:txBody>
-      </p:sp>
-      <p:sp>
-        <p:nvSpPr>
-          <p:cNvPr id="3" name="Rectangle 2"/>
-          <p:cNvSpPr/>
-          <p:nvPr/>
-        </p:nvSpPr>
-        <p:spPr>
-          <a:xfrm>
-            <a:off x="0" y="566928"/>
-            <a:ext cx="12191695" cy="54864"/>
-          </a:xfrm>
-          <a:prstGeom prst="rect">
-            <a:avLst/>
-          </a:prstGeom>
-          <a:solidFill>
-            <a:srgbClr val="0EA5E9"/>
-          </a:solidFill>
-          <a:ln>
-            <a:noFill/>
-          </a:ln>
-          <a:effectLst/>
-        </p:spPr>
-        <p:style>
-          <a:lnRef idx="1">
-            <a:schemeClr val="accent1"/>
-          </a:lnRef>
-          <a:fillRef idx="3">
-            <a:schemeClr val="accent1"/>
-          </a:fillRef>
-          <a:effectRef idx="2">
-            <a:schemeClr val="accent1"/>
-          </a:effectRef>
-          <a:fontRef idx="minor">
-            <a:schemeClr val="lt1"/>
-          </a:fontRef>
-        </p:style>
-        <p:txBody>
-          <a:bodyPr rtlCol="0" anchor="ctr"/>
-          <a:lstStyle/>
-          <a:p>
-            <a:pPr algn="ctr"/>
-          </a:p>
-        </p:txBody>
-      </p:sp>
-      <p:sp>
-        <p:nvSpPr>
-          <p:cNvPr id="4" name="TextBox 3"/>
-          <p:cNvSpPr txBox="1"/>
-          <p:nvPr/>
-        </p:nvSpPr>
-        <p:spPr>
-          <a:xfrm>
-            <a:off x="365760" y="27432"/>
-            <a:ext cx="7315200" cy="502920"/>
-          </a:xfrm>
-          <a:prstGeom prst="rect">
-            <a:avLst/>
-          </a:prstGeom>
-          <a:noFill/>
-        </p:spPr>
-        <p:txBody>
-          <a:bodyPr wrap="square" anchor="ctr">
-            <a:spAutoFit/>
-          </a:bodyPr>
-          <a:lstStyle/>
-          <a:p>
-            <a:pPr algn="l">
-              <a:lnSpc>
-                <a:spcPct val="100000"/>
-              </a:lnSpc>
-            </a:pPr>
-            <a:r>
-              <a:rPr sz="1500" b="1">
-                <a:solidFill>
-                  <a:srgbClr val="FFFFFF"/>
-                </a:solidFill>
-                <a:latin typeface="Malgun Gothic"/>
-              </a:rPr>
-              <a:t>🤝 망고아이 대리점용 사용설명서</a:t>
-            </a:r>
-          </a:p>
-        </p:txBody>
-      </p:sp>
-      <p:sp>
-        <p:nvSpPr>
-          <p:cNvPr id="5" name="TextBox 4"/>
-          <p:cNvSpPr txBox="1"/>
-          <p:nvPr/>
-        </p:nvSpPr>
-        <p:spPr>
-          <a:xfrm>
-            <a:off x="8168335" y="27432"/>
-            <a:ext cx="3657600" cy="502920"/>
-          </a:xfrm>
-          <a:prstGeom prst="rect">
-            <a:avLst/>
-          </a:prstGeom>
-          <a:noFill/>
-        </p:spPr>
-        <p:txBody>
-          <a:bodyPr wrap="square" anchor="ctr">
-            <a:spAutoFit/>
-          </a:bodyPr>
-          <a:lstStyle/>
-          <a:p>
-            <a:pPr algn="r">
-              <a:lnSpc>
-                <a:spcPct val="100000"/>
-              </a:lnSpc>
-            </a:pPr>
-            <a:r>
-              <a:rPr sz="1300" b="1">
-                <a:solidFill>
-                  <a:srgbClr val="F1F5F9"/>
-                </a:solidFill>
-                <a:latin typeface="Malgun Gothic"/>
-              </a:rPr>
-              <a:t>체크리스트</a:t>
-            </a:r>
-          </a:p>
-        </p:txBody>
-      </p:sp>
-      <p:sp>
-        <p:nvSpPr>
-          <p:cNvPr id="6" name="TextBox 5"/>
-          <p:cNvSpPr txBox="1"/>
-          <p:nvPr/>
-        </p:nvSpPr>
-        <p:spPr>
-          <a:xfrm>
-            <a:off x="365760" y="868680"/>
-            <a:ext cx="9144000" cy="457200"/>
-          </a:xfrm>
-          <a:prstGeom prst="rect">
-            <a:avLst/>
-          </a:prstGeom>
-          <a:noFill/>
-        </p:spPr>
-        <p:txBody>
-          <a:bodyPr wrap="square" anchor="t">
-            <a:spAutoFit/>
-          </a:bodyPr>
-          <a:lstStyle/>
-          <a:p>
-            <a:pPr algn="l">
-              <a:lnSpc>
-                <a:spcPct val="100000"/>
-              </a:lnSpc>
-            </a:pPr>
-            <a:r>
-              <a:rPr sz="2200" b="1">
-                <a:solidFill>
-                  <a:srgbClr val="E11D48"/>
-                </a:solidFill>
-                <a:latin typeface="Malgun Gothic"/>
-              </a:rPr>
-              <a:t>✅ 대리점 운영 체크리스트</a:t>
-            </a:r>
-          </a:p>
-        </p:txBody>
-      </p:sp>
-      <p:sp>
-        <p:nvSpPr>
-          <p:cNvPr id="7" name="Rounded Rectangle 6"/>
-          <p:cNvSpPr/>
-          <p:nvPr/>
-        </p:nvSpPr>
-        <p:spPr>
-          <a:xfrm>
-            <a:off x="457200" y="1645920"/>
-            <a:ext cx="292608" cy="292608"/>
-          </a:xfrm>
-          <a:prstGeom prst="roundRect">
-            <a:avLst/>
-          </a:prstGeom>
-          <a:solidFill>
-            <a:srgbClr val="FFFFFF"/>
-          </a:solidFill>
-          <a:ln w="12700">
-            <a:solidFill>
-              <a:srgbClr val="E11D48"/>
-            </a:solidFill>
-          </a:ln>
-          <a:effectLst/>
-        </p:spPr>
-        <p:style>
-          <a:lnRef idx="1">
-            <a:schemeClr val="accent1"/>
-          </a:lnRef>
-          <a:fillRef idx="3">
-            <a:schemeClr val="accent1"/>
-          </a:fillRef>
-          <a:effectRef idx="2">
-            <a:schemeClr val="accent1"/>
-          </a:effectRef>
-          <a:fontRef idx="minor">
-            <a:schemeClr val="lt1"/>
-          </a:fontRef>
-        </p:style>
-        <p:txBody>
-          <a:bodyPr rtlCol="0" anchor="ctr"/>
-          <a:lstStyle/>
-          <a:p>
-            <a:pPr algn="ctr"/>
-          </a:p>
-        </p:txBody>
-      </p:sp>
-      <p:sp>
-        <p:nvSpPr>
-          <p:cNvPr id="8" name="TextBox 7"/>
-          <p:cNvSpPr txBox="1"/>
-          <p:nvPr/>
-        </p:nvSpPr>
-        <p:spPr>
-          <a:xfrm>
-            <a:off x="914400" y="1581912"/>
-            <a:ext cx="10058400" cy="411480"/>
-          </a:xfrm>
-          <a:prstGeom prst="rect">
-            <a:avLst/>
-          </a:prstGeom>
-          <a:noFill/>
-        </p:spPr>
-        <p:txBody>
-          <a:bodyPr wrap="square" anchor="t">
-            <a:spAutoFit/>
-          </a:bodyPr>
-          <a:lstStyle/>
-          <a:p>
-            <a:pPr algn="l">
-              <a:lnSpc>
-                <a:spcPct val="100000"/>
-              </a:lnSpc>
-            </a:pPr>
-            <a:r>
-              <a:rPr sz="1500" b="1">
-                <a:solidFill>
-                  <a:srgbClr val="334155"/>
-                </a:solidFill>
-                <a:latin typeface="Malgun Gothic"/>
-              </a:rPr>
-              <a:t>오늘 매출·재원·출석 지표를 확인했나요?</a:t>
-            </a:r>
-          </a:p>
-        </p:txBody>
-      </p:sp>
-      <p:sp>
-        <p:nvSpPr>
-          <p:cNvPr id="9" name="Rounded Rectangle 8"/>
-          <p:cNvSpPr/>
-          <p:nvPr/>
-        </p:nvSpPr>
-        <p:spPr>
-          <a:xfrm>
-            <a:off x="457200" y="2212848"/>
-            <a:ext cx="292608" cy="292608"/>
-          </a:xfrm>
-          <a:prstGeom prst="roundRect">
-            <a:avLst/>
-          </a:prstGeom>
-          <a:solidFill>
-            <a:srgbClr val="FFFFFF"/>
-          </a:solidFill>
-          <a:ln w="12700">
-            <a:solidFill>
-              <a:srgbClr val="E11D48"/>
-            </a:solidFill>
-          </a:ln>
-          <a:effectLst/>
-        </p:spPr>
-        <p:style>
-          <a:lnRef idx="1">
-            <a:schemeClr val="accent1"/>
-          </a:lnRef>
-          <a:fillRef idx="3">
-            <a:schemeClr val="accent1"/>
-          </a:fillRef>
-          <a:effectRef idx="2">
-            <a:schemeClr val="accent1"/>
-          </a:effectRef>
-          <a:fontRef idx="minor">
-            <a:schemeClr val="lt1"/>
-          </a:fontRef>
-        </p:style>
-        <p:txBody>
-          <a:bodyPr rtlCol="0" anchor="ctr"/>
-          <a:lstStyle/>
-          <a:p>
-            <a:pPr algn="ctr"/>
-          </a:p>
-        </p:txBody>
-      </p:sp>
-      <p:sp>
-        <p:nvSpPr>
-          <p:cNvPr id="10" name="TextBox 9"/>
-          <p:cNvSpPr txBox="1"/>
-          <p:nvPr/>
-        </p:nvSpPr>
-        <p:spPr>
-          <a:xfrm>
-            <a:off x="914400" y="2148840"/>
-            <a:ext cx="10058400" cy="411480"/>
-          </a:xfrm>
-          <a:prstGeom prst="rect">
-            <a:avLst/>
-          </a:prstGeom>
-          <a:noFill/>
-        </p:spPr>
-        <p:txBody>
-          <a:bodyPr wrap="square" anchor="t">
-            <a:spAutoFit/>
-          </a:bodyPr>
-          <a:lstStyle/>
-          <a:p>
-            <a:pPr algn="l">
-              <a:lnSpc>
-                <a:spcPct val="100000"/>
-              </a:lnSpc>
-            </a:pPr>
-            <a:r>
-              <a:rPr sz="1500" b="1">
-                <a:solidFill>
-                  <a:srgbClr val="334155"/>
-                </a:solidFill>
-                <a:latin typeface="Malgun Gothic"/>
-              </a:rPr>
-              <a:t>신규 상담/문의를 접수·응대했나요?</a:t>
-            </a:r>
-          </a:p>
-        </p:txBody>
-      </p:sp>
-      <p:sp>
-        <p:nvSpPr>
-          <p:cNvPr id="11" name="Rounded Rectangle 10"/>
-          <p:cNvSpPr/>
-          <p:nvPr/>
-        </p:nvSpPr>
-        <p:spPr>
-          <a:xfrm>
-            <a:off x="457200" y="2779776"/>
-            <a:ext cx="292608" cy="292608"/>
-          </a:xfrm>
-          <a:prstGeom prst="roundRect">
-            <a:avLst/>
-          </a:prstGeom>
-          <a:solidFill>
-            <a:srgbClr val="FFFFFF"/>
-          </a:solidFill>
-          <a:ln w="12700">
-            <a:solidFill>
-              <a:srgbClr val="E11D48"/>
-            </a:solidFill>
-          </a:ln>
-          <a:effectLst/>
-        </p:spPr>
-        <p:style>
-          <a:lnRef idx="1">
-            <a:schemeClr val="accent1"/>
-          </a:lnRef>
-          <a:fillRef idx="3">
-            <a:schemeClr val="accent1"/>
-          </a:fillRef>
-          <a:effectRef idx="2">
-            <a:schemeClr val="accent1"/>
-          </a:effectRef>
-          <a:fontRef idx="minor">
-            <a:schemeClr val="lt1"/>
-          </a:fontRef>
-        </p:style>
-        <p:txBody>
-          <a:bodyPr rtlCol="0" anchor="ctr"/>
-          <a:lstStyle/>
-          <a:p>
-            <a:pPr algn="ctr"/>
-          </a:p>
-        </p:txBody>
-      </p:sp>
-      <p:sp>
-        <p:nvSpPr>
-          <p:cNvPr id="12" name="TextBox 11"/>
-          <p:cNvSpPr txBox="1"/>
-          <p:nvPr/>
-        </p:nvSpPr>
-        <p:spPr>
-          <a:xfrm>
-            <a:off x="914400" y="2715768"/>
-            <a:ext cx="10058400" cy="411480"/>
-          </a:xfrm>
-          <a:prstGeom prst="rect">
-            <a:avLst/>
-          </a:prstGeom>
-          <a:noFill/>
-        </p:spPr>
-        <p:txBody>
-          <a:bodyPr wrap="square" anchor="t">
-            <a:spAutoFit/>
-          </a:bodyPr>
-          <a:lstStyle/>
-          <a:p>
-            <a:pPr algn="l">
-              <a:lnSpc>
-                <a:spcPct val="100000"/>
-              </a:lnSpc>
-            </a:pPr>
-            <a:r>
-              <a:rPr sz="1500" b="1">
-                <a:solidFill>
-                  <a:srgbClr val="334155"/>
-                </a:solidFill>
-                <a:latin typeface="Malgun Gothic"/>
-              </a:rPr>
-              <a:t>미납 건을 확인하고 안내했나요?</a:t>
-            </a:r>
-          </a:p>
-        </p:txBody>
-      </p:sp>
-      <p:sp>
-        <p:nvSpPr>
-          <p:cNvPr id="13" name="Rounded Rectangle 12"/>
-          <p:cNvSpPr/>
-          <p:nvPr/>
-        </p:nvSpPr>
-        <p:spPr>
-          <a:xfrm>
-            <a:off x="457200" y="3346704"/>
-            <a:ext cx="292608" cy="292608"/>
-          </a:xfrm>
-          <a:prstGeom prst="roundRect">
-            <a:avLst/>
-          </a:prstGeom>
-          <a:solidFill>
-            <a:srgbClr val="FFFFFF"/>
-          </a:solidFill>
-          <a:ln w="12700">
-            <a:solidFill>
-              <a:srgbClr val="E11D48"/>
-            </a:solidFill>
-          </a:ln>
-          <a:effectLst/>
-        </p:spPr>
-        <p:style>
-          <a:lnRef idx="1">
-            <a:schemeClr val="accent1"/>
-          </a:lnRef>
-          <a:fillRef idx="3">
-            <a:schemeClr val="accent1"/>
-          </a:fillRef>
-          <a:effectRef idx="2">
-            <a:schemeClr val="accent1"/>
-          </a:effectRef>
-          <a:fontRef idx="minor">
-            <a:schemeClr val="lt1"/>
-          </a:fontRef>
-        </p:style>
-        <p:txBody>
-          <a:bodyPr rtlCol="0" anchor="ctr"/>
-          <a:lstStyle/>
-          <a:p>
-            <a:pPr algn="ctr"/>
-          </a:p>
-        </p:txBody>
-      </p:sp>
-      <p:sp>
-        <p:nvSpPr>
-          <p:cNvPr id="14" name="TextBox 13"/>
-          <p:cNvSpPr txBox="1"/>
-          <p:nvPr/>
-        </p:nvSpPr>
-        <p:spPr>
-          <a:xfrm>
-            <a:off x="914400" y="3282696"/>
-            <a:ext cx="10058400" cy="411480"/>
-          </a:xfrm>
-          <a:prstGeom prst="rect">
-            <a:avLst/>
-          </a:prstGeom>
-          <a:noFill/>
-        </p:spPr>
-        <p:txBody>
-          <a:bodyPr wrap="square" anchor="t">
-            <a:spAutoFit/>
-          </a:bodyPr>
-          <a:lstStyle/>
-          <a:p>
-            <a:pPr algn="l">
-              <a:lnSpc>
-                <a:spcPct val="100000"/>
-              </a:lnSpc>
-            </a:pPr>
-            <a:r>
-              <a:rPr sz="1500" b="1">
-                <a:solidFill>
-                  <a:srgbClr val="334155"/>
-                </a:solidFill>
-                <a:latin typeface="Malgun Gothic"/>
-              </a:rPr>
-              <a:t>이탈위험 학생을 챙겼나요?</a:t>
-            </a:r>
-          </a:p>
-        </p:txBody>
-      </p:sp>
-      <p:sp>
-        <p:nvSpPr>
-          <p:cNvPr id="15" name="Rounded Rectangle 14"/>
-          <p:cNvSpPr/>
-          <p:nvPr/>
-        </p:nvSpPr>
-        <p:spPr>
-          <a:xfrm>
-            <a:off x="457200" y="3913632"/>
-            <a:ext cx="292608" cy="292608"/>
-          </a:xfrm>
-          <a:prstGeom prst="roundRect">
-            <a:avLst/>
-          </a:prstGeom>
-          <a:solidFill>
-            <a:srgbClr val="FFFFFF"/>
-          </a:solidFill>
-          <a:ln w="12700">
-            <a:solidFill>
-              <a:srgbClr val="E11D48"/>
-            </a:solidFill>
-          </a:ln>
-          <a:effectLst/>
-        </p:spPr>
-        <p:style>
-          <a:lnRef idx="1">
-            <a:schemeClr val="accent1"/>
-          </a:lnRef>
-          <a:fillRef idx="3">
-            <a:schemeClr val="accent1"/>
-          </a:fillRef>
-          <a:effectRef idx="2">
-            <a:schemeClr val="accent1"/>
-          </a:effectRef>
-          <a:fontRef idx="minor">
-            <a:schemeClr val="lt1"/>
-          </a:fontRef>
-        </p:style>
-        <p:txBody>
-          <a:bodyPr rtlCol="0" anchor="ctr"/>
-          <a:lstStyle/>
-          <a:p>
-            <a:pPr algn="ctr"/>
-          </a:p>
-        </p:txBody>
-      </p:sp>
-      <p:sp>
-        <p:nvSpPr>
-          <p:cNvPr id="16" name="TextBox 15"/>
-          <p:cNvSpPr txBox="1"/>
-          <p:nvPr/>
-        </p:nvSpPr>
-        <p:spPr>
-          <a:xfrm>
-            <a:off x="914400" y="3849624"/>
-            <a:ext cx="10058400" cy="411480"/>
-          </a:xfrm>
-          <a:prstGeom prst="rect">
-            <a:avLst/>
-          </a:prstGeom>
-          <a:noFill/>
-        </p:spPr>
-        <p:txBody>
-          <a:bodyPr wrap="square" anchor="t">
-            <a:spAutoFit/>
-          </a:bodyPr>
-          <a:lstStyle/>
-          <a:p>
-            <a:pPr algn="l">
-              <a:lnSpc>
-                <a:spcPct val="100000"/>
-              </a:lnSpc>
-            </a:pPr>
-            <a:r>
-              <a:rPr sz="1500" b="1">
-                <a:solidFill>
-                  <a:srgbClr val="334155"/>
-                </a:solidFill>
-                <a:latin typeface="Malgun Gothic"/>
-              </a:rPr>
-              <a:t>학부모에게 리포트·마이페이지를 안내했나요?</a:t>
-            </a:r>
-          </a:p>
-        </p:txBody>
-      </p:sp>
-      <p:sp>
-        <p:nvSpPr>
-          <p:cNvPr id="17" name="Rounded Rectangle 16"/>
-          <p:cNvSpPr/>
-          <p:nvPr/>
-        </p:nvSpPr>
-        <p:spPr>
-          <a:xfrm>
-            <a:off x="457200" y="4480560"/>
-            <a:ext cx="292608" cy="292608"/>
-          </a:xfrm>
-          <a:prstGeom prst="roundRect">
-            <a:avLst/>
-          </a:prstGeom>
-          <a:solidFill>
-            <a:srgbClr val="FFFFFF"/>
-          </a:solidFill>
-          <a:ln w="12700">
-            <a:solidFill>
-              <a:srgbClr val="E11D48"/>
-            </a:solidFill>
-          </a:ln>
-          <a:effectLst/>
-        </p:spPr>
-        <p:style>
-          <a:lnRef idx="1">
-            <a:schemeClr val="accent1"/>
-          </a:lnRef>
-          <a:fillRef idx="3">
-            <a:schemeClr val="accent1"/>
-          </a:fillRef>
-          <a:effectRef idx="2">
-            <a:schemeClr val="accent1"/>
-          </a:effectRef>
-          <a:fontRef idx="minor">
-            <a:schemeClr val="lt1"/>
-          </a:fontRef>
-        </p:style>
-        <p:txBody>
-          <a:bodyPr rtlCol="0" anchor="ctr"/>
-          <a:lstStyle/>
-          <a:p>
-            <a:pPr algn="ctr"/>
-          </a:p>
-        </p:txBody>
-      </p:sp>
-      <p:sp>
-        <p:nvSpPr>
-          <p:cNvPr id="18" name="TextBox 17"/>
-          <p:cNvSpPr txBox="1"/>
-          <p:nvPr/>
-        </p:nvSpPr>
-        <p:spPr>
-          <a:xfrm>
-            <a:off x="914400" y="4416552"/>
-            <a:ext cx="10058400" cy="411480"/>
-          </a:xfrm>
-          <a:prstGeom prst="rect">
-            <a:avLst/>
-          </a:prstGeom>
-          <a:noFill/>
-        </p:spPr>
-        <p:txBody>
-          <a:bodyPr wrap="square" anchor="t">
-            <a:spAutoFit/>
-          </a:bodyPr>
-          <a:lstStyle/>
-          <a:p>
-            <a:pPr algn="l">
-              <a:lnSpc>
-                <a:spcPct val="100000"/>
-              </a:lnSpc>
-            </a:pPr>
-            <a:r>
-              <a:rPr sz="1500" b="1">
-                <a:solidFill>
-                  <a:srgbClr val="334155"/>
-                </a:solidFill>
-                <a:latin typeface="Malgun Gothic"/>
-              </a:rPr>
-              <a:t>이번 달 정산(수령)을 확인했나요?</a:t>
-            </a:r>
-          </a:p>
-        </p:txBody>
-      </p:sp>
-      <p:sp>
-        <p:nvSpPr>
-          <p:cNvPr id="19" name="Rounded Rectangle 18"/>
-          <p:cNvSpPr/>
-          <p:nvPr/>
-        </p:nvSpPr>
-        <p:spPr>
-          <a:xfrm>
-            <a:off x="457200" y="5047488"/>
-            <a:ext cx="292608" cy="292608"/>
-          </a:xfrm>
-          <a:prstGeom prst="roundRect">
-            <a:avLst/>
-          </a:prstGeom>
-          <a:solidFill>
-            <a:srgbClr val="FFFFFF"/>
-          </a:solidFill>
-          <a:ln w="12700">
-            <a:solidFill>
-              <a:srgbClr val="E11D48"/>
-            </a:solidFill>
-          </a:ln>
-          <a:effectLst/>
-        </p:spPr>
-        <p:style>
-          <a:lnRef idx="1">
-            <a:schemeClr val="accent1"/>
-          </a:lnRef>
-          <a:fillRef idx="3">
-            <a:schemeClr val="accent1"/>
-          </a:fillRef>
-          <a:effectRef idx="2">
-            <a:schemeClr val="accent1"/>
-          </a:effectRef>
-          <a:fontRef idx="minor">
-            <a:schemeClr val="lt1"/>
-          </a:fontRef>
-        </p:style>
-        <p:txBody>
-          <a:bodyPr rtlCol="0" anchor="ctr"/>
-          <a:lstStyle/>
-          <a:p>
-            <a:pPr algn="ctr"/>
-          </a:p>
-        </p:txBody>
-      </p:sp>
-      <p:sp>
-        <p:nvSpPr>
-          <p:cNvPr id="20" name="TextBox 19"/>
-          <p:cNvSpPr txBox="1"/>
-          <p:nvPr/>
-        </p:nvSpPr>
-        <p:spPr>
-          <a:xfrm>
-            <a:off x="914400" y="4983480"/>
-            <a:ext cx="10058400" cy="411480"/>
-          </a:xfrm>
-          <a:prstGeom prst="rect">
-            <a:avLst/>
-          </a:prstGeom>
-          <a:noFill/>
-        </p:spPr>
-        <p:txBody>
-          <a:bodyPr wrap="square" anchor="t">
-            <a:spAutoFit/>
-          </a:bodyPr>
-          <a:lstStyle/>
-          <a:p>
-            <a:pPr algn="l">
-              <a:lnSpc>
-                <a:spcPct val="100000"/>
-              </a:lnSpc>
-            </a:pPr>
-            <a:r>
-              <a:rPr sz="1500" b="1">
-                <a:solidFill>
-                  <a:srgbClr val="334155"/>
-                </a:solidFill>
-                <a:latin typeface="Malgun Gothic"/>
-              </a:rPr>
-              <a:t>체험→등록 후속 연락을 했나요?</a:t>
-            </a:r>
-          </a:p>
-        </p:txBody>
-      </p:sp>
-      <p:pic>
-        <p:nvPicPr>
-          <p:cNvPr id="21" name="Picture 20" descr="mango_char.png"/>
-          <p:cNvPicPr>
-            <a:picLocks noChangeAspect="1"/>
-          </p:cNvPicPr>
-          <p:nvPr/>
-        </p:nvPicPr>
-        <p:blipFill>
-          <a:blip r:embed="rId2"/>
-          <a:stretch>
-            <a:fillRect/>
-          </a:stretch>
-        </p:blipFill>
-        <p:spPr>
-          <a:xfrm>
-            <a:off x="9153162" y="4480559"/>
-            <a:ext cx="2489892" cy="2011680"/>
-          </a:xfrm>
-          <a:prstGeom prst="rect">
-            <a:avLst/>
-          </a:prstGeom>
-        </p:spPr>
-      </p:pic>
     </p:spTree>
   </p:cSld>
   <p:clrMapOvr>
@@ -16938,6 +17323,1707 @@
                 </a:solidFill>
                 <a:latin typeface="Malgun Gothic"/>
               </a:rPr>
+              <a:t>자주 묻는 질문 (FAQ)</a:t>
+            </a:r>
+          </a:p>
+        </p:txBody>
+      </p:sp>
+      <p:sp>
+        <p:nvSpPr>
+          <p:cNvPr id="6" name="TextBox 5"/>
+          <p:cNvSpPr txBox="1"/>
+          <p:nvPr/>
+        </p:nvSpPr>
+        <p:spPr>
+          <a:xfrm>
+            <a:off x="365760" y="868680"/>
+            <a:ext cx="9144000" cy="457200"/>
+          </a:xfrm>
+          <a:prstGeom prst="rect">
+            <a:avLst/>
+          </a:prstGeom>
+          <a:noFill/>
+        </p:spPr>
+        <p:txBody>
+          <a:bodyPr wrap="square" anchor="t">
+            <a:spAutoFit/>
+          </a:bodyPr>
+          <a:lstStyle/>
+          <a:p>
+            <a:pPr algn="l">
+              <a:lnSpc>
+                <a:spcPct val="100000"/>
+              </a:lnSpc>
+            </a:pPr>
+            <a:r>
+              <a:rPr sz="2200" b="1">
+                <a:solidFill>
+                  <a:srgbClr val="E11D48"/>
+                </a:solidFill>
+                <a:latin typeface="Malgun Gothic"/>
+              </a:rPr>
+              <a:t>❓ 자주 묻는 질문 (FAQ)</a:t>
+            </a:r>
+          </a:p>
+        </p:txBody>
+      </p:sp>
+      <p:sp>
+        <p:nvSpPr>
+          <p:cNvPr id="7" name="Rounded Rectangle 6"/>
+          <p:cNvSpPr/>
+          <p:nvPr/>
+        </p:nvSpPr>
+        <p:spPr>
+          <a:xfrm>
+            <a:off x="365760" y="1554480"/>
+            <a:ext cx="11460175" cy="868680"/>
+          </a:xfrm>
+          <a:prstGeom prst="roundRect">
+            <a:avLst/>
+          </a:prstGeom>
+          <a:solidFill>
+            <a:srgbClr val="F8FAFC"/>
+          </a:solidFill>
+          <a:ln w="12700">
+            <a:solidFill>
+              <a:srgbClr val="E2E8F0"/>
+            </a:solidFill>
+          </a:ln>
+          <a:effectLst/>
+        </p:spPr>
+        <p:style>
+          <a:lnRef idx="1">
+            <a:schemeClr val="accent1"/>
+          </a:lnRef>
+          <a:fillRef idx="3">
+            <a:schemeClr val="accent1"/>
+          </a:fillRef>
+          <a:effectRef idx="2">
+            <a:schemeClr val="accent1"/>
+          </a:effectRef>
+          <a:fontRef idx="minor">
+            <a:schemeClr val="lt1"/>
+          </a:fontRef>
+        </p:style>
+        <p:txBody>
+          <a:bodyPr rtlCol="0" anchor="ctr"/>
+          <a:lstStyle/>
+          <a:p>
+            <a:pPr algn="ctr"/>
+          </a:p>
+        </p:txBody>
+      </p:sp>
+      <p:sp>
+        <p:nvSpPr>
+          <p:cNvPr id="8" name="TextBox 7"/>
+          <p:cNvSpPr txBox="1"/>
+          <p:nvPr/>
+        </p:nvSpPr>
+        <p:spPr>
+          <a:xfrm>
+            <a:off x="548640" y="1627632"/>
+            <a:ext cx="11094415" cy="365760"/>
+          </a:xfrm>
+          <a:prstGeom prst="rect">
+            <a:avLst/>
+          </a:prstGeom>
+          <a:noFill/>
+        </p:spPr>
+        <p:txBody>
+          <a:bodyPr wrap="square" anchor="t">
+            <a:spAutoFit/>
+          </a:bodyPr>
+          <a:lstStyle/>
+          <a:p>
+            <a:pPr algn="l">
+              <a:lnSpc>
+                <a:spcPct val="100000"/>
+              </a:lnSpc>
+            </a:pPr>
+            <a:r>
+              <a:rPr sz="1350" b="1">
+                <a:solidFill>
+                  <a:srgbClr val="E11D48"/>
+                </a:solidFill>
+                <a:latin typeface="Malgun Gothic"/>
+              </a:rPr>
+              <a:t>Q. 어디서 접속하나요?</a:t>
+            </a:r>
+          </a:p>
+        </p:txBody>
+      </p:sp>
+      <p:sp>
+        <p:nvSpPr>
+          <p:cNvPr id="9" name="TextBox 8"/>
+          <p:cNvSpPr txBox="1"/>
+          <p:nvPr/>
+        </p:nvSpPr>
+        <p:spPr>
+          <a:xfrm>
+            <a:off x="548640" y="1965960"/>
+            <a:ext cx="11094415" cy="411480"/>
+          </a:xfrm>
+          <a:prstGeom prst="rect">
+            <a:avLst/>
+          </a:prstGeom>
+          <a:noFill/>
+        </p:spPr>
+        <p:txBody>
+          <a:bodyPr wrap="square" anchor="t">
+            <a:spAutoFit/>
+          </a:bodyPr>
+          <a:lstStyle/>
+          <a:p>
+            <a:pPr algn="l">
+              <a:lnSpc>
+                <a:spcPct val="105000"/>
+              </a:lnSpc>
+            </a:pPr>
+            <a:r>
+              <a:rPr sz="1150" b="0">
+                <a:solidFill>
+                  <a:srgbClr val="475569"/>
+                </a:solidFill>
+                <a:latin typeface="Malgun Gothic"/>
+              </a:rPr>
+              <a:t>A. admin.mangoi.co.kr 에서 로그인해요. 권한(대리점)에 따라 우리 대리점 데이터만 자동으로 보여요.</a:t>
+            </a:r>
+          </a:p>
+        </p:txBody>
+      </p:sp>
+      <p:sp>
+        <p:nvSpPr>
+          <p:cNvPr id="10" name="Rounded Rectangle 9"/>
+          <p:cNvSpPr/>
+          <p:nvPr/>
+        </p:nvSpPr>
+        <p:spPr>
+          <a:xfrm>
+            <a:off x="365760" y="2542032"/>
+            <a:ext cx="11460175" cy="868680"/>
+          </a:xfrm>
+          <a:prstGeom prst="roundRect">
+            <a:avLst/>
+          </a:prstGeom>
+          <a:solidFill>
+            <a:srgbClr val="F8FAFC"/>
+          </a:solidFill>
+          <a:ln w="12700">
+            <a:solidFill>
+              <a:srgbClr val="E2E8F0"/>
+            </a:solidFill>
+          </a:ln>
+          <a:effectLst/>
+        </p:spPr>
+        <p:style>
+          <a:lnRef idx="1">
+            <a:schemeClr val="accent1"/>
+          </a:lnRef>
+          <a:fillRef idx="3">
+            <a:schemeClr val="accent1"/>
+          </a:fillRef>
+          <a:effectRef idx="2">
+            <a:schemeClr val="accent1"/>
+          </a:effectRef>
+          <a:fontRef idx="minor">
+            <a:schemeClr val="lt1"/>
+          </a:fontRef>
+        </p:style>
+        <p:txBody>
+          <a:bodyPr rtlCol="0" anchor="ctr"/>
+          <a:lstStyle/>
+          <a:p>
+            <a:pPr algn="ctr"/>
+          </a:p>
+        </p:txBody>
+      </p:sp>
+      <p:sp>
+        <p:nvSpPr>
+          <p:cNvPr id="11" name="TextBox 10"/>
+          <p:cNvSpPr txBox="1"/>
+          <p:nvPr/>
+        </p:nvSpPr>
+        <p:spPr>
+          <a:xfrm>
+            <a:off x="548640" y="2615184"/>
+            <a:ext cx="11094415" cy="365760"/>
+          </a:xfrm>
+          <a:prstGeom prst="rect">
+            <a:avLst/>
+          </a:prstGeom>
+          <a:noFill/>
+        </p:spPr>
+        <p:txBody>
+          <a:bodyPr wrap="square" anchor="t">
+            <a:spAutoFit/>
+          </a:bodyPr>
+          <a:lstStyle/>
+          <a:p>
+            <a:pPr algn="l">
+              <a:lnSpc>
+                <a:spcPct val="100000"/>
+              </a:lnSpc>
+            </a:pPr>
+            <a:r>
+              <a:rPr sz="1350" b="1">
+                <a:solidFill>
+                  <a:srgbClr val="E11D48"/>
+                </a:solidFill>
+                <a:latin typeface="Malgun Gothic"/>
+              </a:rPr>
+              <a:t>Q. 다른 대리점 데이터도 보이나요?</a:t>
+            </a:r>
+          </a:p>
+        </p:txBody>
+      </p:sp>
+      <p:sp>
+        <p:nvSpPr>
+          <p:cNvPr id="12" name="TextBox 11"/>
+          <p:cNvSpPr txBox="1"/>
+          <p:nvPr/>
+        </p:nvSpPr>
+        <p:spPr>
+          <a:xfrm>
+            <a:off x="548640" y="2953512"/>
+            <a:ext cx="11094415" cy="411480"/>
+          </a:xfrm>
+          <a:prstGeom prst="rect">
+            <a:avLst/>
+          </a:prstGeom>
+          <a:noFill/>
+        </p:spPr>
+        <p:txBody>
+          <a:bodyPr wrap="square" anchor="t">
+            <a:spAutoFit/>
+          </a:bodyPr>
+          <a:lstStyle/>
+          <a:p>
+            <a:pPr algn="l">
+              <a:lnSpc>
+                <a:spcPct val="105000"/>
+              </a:lnSpc>
+            </a:pPr>
+            <a:r>
+              <a:rPr sz="1150" b="0">
+                <a:solidFill>
+                  <a:srgbClr val="475569"/>
+                </a:solidFill>
+                <a:latin typeface="Malgun Gothic"/>
+              </a:rPr>
+              <a:t>A. 아니요. 권한 범위상 우리 대리점 데이터만 보입니다.</a:t>
+            </a:r>
+          </a:p>
+        </p:txBody>
+      </p:sp>
+      <p:sp>
+        <p:nvSpPr>
+          <p:cNvPr id="13" name="Rounded Rectangle 12"/>
+          <p:cNvSpPr/>
+          <p:nvPr/>
+        </p:nvSpPr>
+        <p:spPr>
+          <a:xfrm>
+            <a:off x="365760" y="3529584"/>
+            <a:ext cx="11460175" cy="868680"/>
+          </a:xfrm>
+          <a:prstGeom prst="roundRect">
+            <a:avLst/>
+          </a:prstGeom>
+          <a:solidFill>
+            <a:srgbClr val="F8FAFC"/>
+          </a:solidFill>
+          <a:ln w="12700">
+            <a:solidFill>
+              <a:srgbClr val="E2E8F0"/>
+            </a:solidFill>
+          </a:ln>
+          <a:effectLst/>
+        </p:spPr>
+        <p:style>
+          <a:lnRef idx="1">
+            <a:schemeClr val="accent1"/>
+          </a:lnRef>
+          <a:fillRef idx="3">
+            <a:schemeClr val="accent1"/>
+          </a:fillRef>
+          <a:effectRef idx="2">
+            <a:schemeClr val="accent1"/>
+          </a:effectRef>
+          <a:fontRef idx="minor">
+            <a:schemeClr val="lt1"/>
+          </a:fontRef>
+        </p:style>
+        <p:txBody>
+          <a:bodyPr rtlCol="0" anchor="ctr"/>
+          <a:lstStyle/>
+          <a:p>
+            <a:pPr algn="ctr"/>
+          </a:p>
+        </p:txBody>
+      </p:sp>
+      <p:sp>
+        <p:nvSpPr>
+          <p:cNvPr id="14" name="TextBox 13"/>
+          <p:cNvSpPr txBox="1"/>
+          <p:nvPr/>
+        </p:nvSpPr>
+        <p:spPr>
+          <a:xfrm>
+            <a:off x="548640" y="3602736"/>
+            <a:ext cx="11094415" cy="365760"/>
+          </a:xfrm>
+          <a:prstGeom prst="rect">
+            <a:avLst/>
+          </a:prstGeom>
+          <a:noFill/>
+        </p:spPr>
+        <p:txBody>
+          <a:bodyPr wrap="square" anchor="t">
+            <a:spAutoFit/>
+          </a:bodyPr>
+          <a:lstStyle/>
+          <a:p>
+            <a:pPr algn="l">
+              <a:lnSpc>
+                <a:spcPct val="100000"/>
+              </a:lnSpc>
+            </a:pPr>
+            <a:r>
+              <a:rPr sz="1350" b="1">
+                <a:solidFill>
+                  <a:srgbClr val="E11D48"/>
+                </a:solidFill>
+                <a:latin typeface="Malgun Gothic"/>
+              </a:rPr>
+              <a:t>Q. 등록을 늘리려면?</a:t>
+            </a:r>
+          </a:p>
+        </p:txBody>
+      </p:sp>
+      <p:sp>
+        <p:nvSpPr>
+          <p:cNvPr id="15" name="TextBox 14"/>
+          <p:cNvSpPr txBox="1"/>
+          <p:nvPr/>
+        </p:nvSpPr>
+        <p:spPr>
+          <a:xfrm>
+            <a:off x="548640" y="3941064"/>
+            <a:ext cx="11094415" cy="411480"/>
+          </a:xfrm>
+          <a:prstGeom prst="rect">
+            <a:avLst/>
+          </a:prstGeom>
+          <a:noFill/>
+        </p:spPr>
+        <p:txBody>
+          <a:bodyPr wrap="square" anchor="t">
+            <a:spAutoFit/>
+          </a:bodyPr>
+          <a:lstStyle/>
+          <a:p>
+            <a:pPr algn="l">
+              <a:lnSpc>
+                <a:spcPct val="105000"/>
+              </a:lnSpc>
+            </a:pPr>
+            <a:r>
+              <a:rPr sz="1150" b="0">
+                <a:solidFill>
+                  <a:srgbClr val="475569"/>
+                </a:solidFill>
+                <a:latin typeface="Malgun Gothic"/>
+              </a:rPr>
+              <a:t>A. 빠른 상담 응대와 체험→등록 흐름, 학습 리포트를 활용한 학부모 설득이 핵심입니다.</a:t>
+            </a:r>
+          </a:p>
+        </p:txBody>
+      </p:sp>
+      <p:sp>
+        <p:nvSpPr>
+          <p:cNvPr id="16" name="Rounded Rectangle 15"/>
+          <p:cNvSpPr/>
+          <p:nvPr/>
+        </p:nvSpPr>
+        <p:spPr>
+          <a:xfrm>
+            <a:off x="365760" y="4517136"/>
+            <a:ext cx="11460175" cy="868680"/>
+          </a:xfrm>
+          <a:prstGeom prst="roundRect">
+            <a:avLst/>
+          </a:prstGeom>
+          <a:solidFill>
+            <a:srgbClr val="F8FAFC"/>
+          </a:solidFill>
+          <a:ln w="12700">
+            <a:solidFill>
+              <a:srgbClr val="E2E8F0"/>
+            </a:solidFill>
+          </a:ln>
+          <a:effectLst/>
+        </p:spPr>
+        <p:style>
+          <a:lnRef idx="1">
+            <a:schemeClr val="accent1"/>
+          </a:lnRef>
+          <a:fillRef idx="3">
+            <a:schemeClr val="accent1"/>
+          </a:fillRef>
+          <a:effectRef idx="2">
+            <a:schemeClr val="accent1"/>
+          </a:effectRef>
+          <a:fontRef idx="minor">
+            <a:schemeClr val="lt1"/>
+          </a:fontRef>
+        </p:style>
+        <p:txBody>
+          <a:bodyPr rtlCol="0" anchor="ctr"/>
+          <a:lstStyle/>
+          <a:p>
+            <a:pPr algn="ctr"/>
+          </a:p>
+        </p:txBody>
+      </p:sp>
+      <p:sp>
+        <p:nvSpPr>
+          <p:cNvPr id="17" name="TextBox 16"/>
+          <p:cNvSpPr txBox="1"/>
+          <p:nvPr/>
+        </p:nvSpPr>
+        <p:spPr>
+          <a:xfrm>
+            <a:off x="548640" y="4590288"/>
+            <a:ext cx="11094415" cy="365760"/>
+          </a:xfrm>
+          <a:prstGeom prst="rect">
+            <a:avLst/>
+          </a:prstGeom>
+          <a:noFill/>
+        </p:spPr>
+        <p:txBody>
+          <a:bodyPr wrap="square" anchor="t">
+            <a:spAutoFit/>
+          </a:bodyPr>
+          <a:lstStyle/>
+          <a:p>
+            <a:pPr algn="l">
+              <a:lnSpc>
+                <a:spcPct val="100000"/>
+              </a:lnSpc>
+            </a:pPr>
+            <a:r>
+              <a:rPr sz="1350" b="1">
+                <a:solidFill>
+                  <a:srgbClr val="E11D48"/>
+                </a:solidFill>
+                <a:latin typeface="Malgun Gothic"/>
+              </a:rPr>
+              <a:t>Q. 정산은 어떻게 확인하나요?</a:t>
+            </a:r>
+          </a:p>
+        </p:txBody>
+      </p:sp>
+      <p:sp>
+        <p:nvSpPr>
+          <p:cNvPr id="18" name="TextBox 17"/>
+          <p:cNvSpPr txBox="1"/>
+          <p:nvPr/>
+        </p:nvSpPr>
+        <p:spPr>
+          <a:xfrm>
+            <a:off x="548640" y="4928616"/>
+            <a:ext cx="11094415" cy="411480"/>
+          </a:xfrm>
+          <a:prstGeom prst="rect">
+            <a:avLst/>
+          </a:prstGeom>
+          <a:noFill/>
+        </p:spPr>
+        <p:txBody>
+          <a:bodyPr wrap="square" anchor="t">
+            <a:spAutoFit/>
+          </a:bodyPr>
+          <a:lstStyle/>
+          <a:p>
+            <a:pPr algn="l">
+              <a:lnSpc>
+                <a:spcPct val="105000"/>
+              </a:lnSpc>
+            </a:pPr>
+            <a:r>
+              <a:rPr sz="1150" b="0">
+                <a:solidFill>
+                  <a:srgbClr val="475569"/>
+                </a:solidFill>
+                <a:latin typeface="Malgun Gothic"/>
+              </a:rPr>
+              <a:t>A. 지사→대리점 정산(수령액)이 조직 트리 구조로 자동 계산되며, 월간 리포트에서 확인합니다.</a:t>
+            </a:r>
+          </a:p>
+        </p:txBody>
+      </p:sp>
+      <p:sp>
+        <p:nvSpPr>
+          <p:cNvPr id="19" name="Rounded Rectangle 18"/>
+          <p:cNvSpPr/>
+          <p:nvPr/>
+        </p:nvSpPr>
+        <p:spPr>
+          <a:xfrm>
+            <a:off x="365760" y="5504688"/>
+            <a:ext cx="11460175" cy="868680"/>
+          </a:xfrm>
+          <a:prstGeom prst="roundRect">
+            <a:avLst/>
+          </a:prstGeom>
+          <a:solidFill>
+            <a:srgbClr val="F8FAFC"/>
+          </a:solidFill>
+          <a:ln w="12700">
+            <a:solidFill>
+              <a:srgbClr val="E2E8F0"/>
+            </a:solidFill>
+          </a:ln>
+          <a:effectLst/>
+        </p:spPr>
+        <p:style>
+          <a:lnRef idx="1">
+            <a:schemeClr val="accent1"/>
+          </a:lnRef>
+          <a:fillRef idx="3">
+            <a:schemeClr val="accent1"/>
+          </a:fillRef>
+          <a:effectRef idx="2">
+            <a:schemeClr val="accent1"/>
+          </a:effectRef>
+          <a:fontRef idx="minor">
+            <a:schemeClr val="lt1"/>
+          </a:fontRef>
+        </p:style>
+        <p:txBody>
+          <a:bodyPr rtlCol="0" anchor="ctr"/>
+          <a:lstStyle/>
+          <a:p>
+            <a:pPr algn="ctr"/>
+          </a:p>
+        </p:txBody>
+      </p:sp>
+      <p:sp>
+        <p:nvSpPr>
+          <p:cNvPr id="20" name="TextBox 19"/>
+          <p:cNvSpPr txBox="1"/>
+          <p:nvPr/>
+        </p:nvSpPr>
+        <p:spPr>
+          <a:xfrm>
+            <a:off x="548640" y="5577840"/>
+            <a:ext cx="11094415" cy="365760"/>
+          </a:xfrm>
+          <a:prstGeom prst="rect">
+            <a:avLst/>
+          </a:prstGeom>
+          <a:noFill/>
+        </p:spPr>
+        <p:txBody>
+          <a:bodyPr wrap="square" anchor="t">
+            <a:spAutoFit/>
+          </a:bodyPr>
+          <a:lstStyle/>
+          <a:p>
+            <a:pPr algn="l">
+              <a:lnSpc>
+                <a:spcPct val="100000"/>
+              </a:lnSpc>
+            </a:pPr>
+            <a:r>
+              <a:rPr sz="1350" b="1">
+                <a:solidFill>
+                  <a:srgbClr val="E11D48"/>
+                </a:solidFill>
+                <a:latin typeface="Malgun Gothic"/>
+              </a:rPr>
+              <a:t>Q. 학생이 그만둘 것 같아요.</a:t>
+            </a:r>
+          </a:p>
+        </p:txBody>
+      </p:sp>
+      <p:sp>
+        <p:nvSpPr>
+          <p:cNvPr id="21" name="TextBox 20"/>
+          <p:cNvSpPr txBox="1"/>
+          <p:nvPr/>
+        </p:nvSpPr>
+        <p:spPr>
+          <a:xfrm>
+            <a:off x="548640" y="5916168"/>
+            <a:ext cx="11094415" cy="411480"/>
+          </a:xfrm>
+          <a:prstGeom prst="rect">
+            <a:avLst/>
+          </a:prstGeom>
+          <a:noFill/>
+        </p:spPr>
+        <p:txBody>
+          <a:bodyPr wrap="square" anchor="t">
+            <a:spAutoFit/>
+          </a:bodyPr>
+          <a:lstStyle/>
+          <a:p>
+            <a:pPr algn="l">
+              <a:lnSpc>
+                <a:spcPct val="105000"/>
+              </a:lnSpc>
+            </a:pPr>
+            <a:r>
+              <a:rPr sz="1150" b="0">
+                <a:solidFill>
+                  <a:srgbClr val="475569"/>
+                </a:solidFill>
+                <a:latin typeface="Malgun Gothic"/>
+              </a:rPr>
+              <a:t>A. 이탈위험 신호(결석·성과 하락)를 보고 상담·알림톡으로 빠르게 개입하세요.</a:t>
+            </a:r>
+          </a:p>
+        </p:txBody>
+      </p:sp>
+    </p:spTree>
+  </p:cSld>
+  <p:clrMapOvr>
+    <a:masterClrMapping/>
+  </p:clrMapOvr>
+</p:sld>
+</file>
+
+<file path=ppt/slides/slide24.xml><?xml version="1.0" encoding="utf-8"?>
+<p:sld xmlns:a="http://schemas.openxmlformats.org/drawingml/2006/main" xmlns:p="http://schemas.openxmlformats.org/presentationml/2006/main" xmlns:r="http://schemas.openxmlformats.org/officeDocument/2006/relationships">
+  <p:cSld>
+    <p:bg>
+      <p:bgPr>
+        <a:solidFill>
+          <a:srgbClr val="FFF1F2"/>
+        </a:solidFill>
+        <a:effectLst/>
+      </p:bgPr>
+    </p:bg>
+    <p:spTree>
+      <p:nvGrpSpPr>
+        <p:cNvPr id="1" name=""/>
+        <p:cNvGrpSpPr/>
+        <p:nvPr/>
+      </p:nvGrpSpPr>
+      <p:grpSpPr/>
+      <p:sp>
+        <p:nvSpPr>
+          <p:cNvPr id="2" name="Rectangle 1"/>
+          <p:cNvSpPr/>
+          <p:nvPr/>
+        </p:nvSpPr>
+        <p:spPr>
+          <a:xfrm>
+            <a:off x="0" y="0"/>
+            <a:ext cx="12191695" cy="566928"/>
+          </a:xfrm>
+          <a:prstGeom prst="rect">
+            <a:avLst/>
+          </a:prstGeom>
+          <a:solidFill>
+            <a:srgbClr val="E11D48"/>
+          </a:solidFill>
+          <a:ln>
+            <a:noFill/>
+          </a:ln>
+          <a:effectLst/>
+        </p:spPr>
+        <p:style>
+          <a:lnRef idx="1">
+            <a:schemeClr val="accent1"/>
+          </a:lnRef>
+          <a:fillRef idx="3">
+            <a:schemeClr val="accent1"/>
+          </a:fillRef>
+          <a:effectRef idx="2">
+            <a:schemeClr val="accent1"/>
+          </a:effectRef>
+          <a:fontRef idx="minor">
+            <a:schemeClr val="lt1"/>
+          </a:fontRef>
+        </p:style>
+        <p:txBody>
+          <a:bodyPr rtlCol="0" anchor="ctr"/>
+          <a:lstStyle/>
+          <a:p>
+            <a:pPr algn="ctr"/>
+          </a:p>
+        </p:txBody>
+      </p:sp>
+      <p:sp>
+        <p:nvSpPr>
+          <p:cNvPr id="3" name="Rectangle 2"/>
+          <p:cNvSpPr/>
+          <p:nvPr/>
+        </p:nvSpPr>
+        <p:spPr>
+          <a:xfrm>
+            <a:off x="0" y="566928"/>
+            <a:ext cx="12191695" cy="54864"/>
+          </a:xfrm>
+          <a:prstGeom prst="rect">
+            <a:avLst/>
+          </a:prstGeom>
+          <a:solidFill>
+            <a:srgbClr val="0EA5E9"/>
+          </a:solidFill>
+          <a:ln>
+            <a:noFill/>
+          </a:ln>
+          <a:effectLst/>
+        </p:spPr>
+        <p:style>
+          <a:lnRef idx="1">
+            <a:schemeClr val="accent1"/>
+          </a:lnRef>
+          <a:fillRef idx="3">
+            <a:schemeClr val="accent1"/>
+          </a:fillRef>
+          <a:effectRef idx="2">
+            <a:schemeClr val="accent1"/>
+          </a:effectRef>
+          <a:fontRef idx="minor">
+            <a:schemeClr val="lt1"/>
+          </a:fontRef>
+        </p:style>
+        <p:txBody>
+          <a:bodyPr rtlCol="0" anchor="ctr"/>
+          <a:lstStyle/>
+          <a:p>
+            <a:pPr algn="ctr"/>
+          </a:p>
+        </p:txBody>
+      </p:sp>
+      <p:sp>
+        <p:nvSpPr>
+          <p:cNvPr id="4" name="TextBox 3"/>
+          <p:cNvSpPr txBox="1"/>
+          <p:nvPr/>
+        </p:nvSpPr>
+        <p:spPr>
+          <a:xfrm>
+            <a:off x="365760" y="27432"/>
+            <a:ext cx="7315200" cy="502920"/>
+          </a:xfrm>
+          <a:prstGeom prst="rect">
+            <a:avLst/>
+          </a:prstGeom>
+          <a:noFill/>
+        </p:spPr>
+        <p:txBody>
+          <a:bodyPr wrap="square" anchor="ctr">
+            <a:spAutoFit/>
+          </a:bodyPr>
+          <a:lstStyle/>
+          <a:p>
+            <a:pPr algn="l">
+              <a:lnSpc>
+                <a:spcPct val="100000"/>
+              </a:lnSpc>
+            </a:pPr>
+            <a:r>
+              <a:rPr sz="1500" b="1">
+                <a:solidFill>
+                  <a:srgbClr val="FFFFFF"/>
+                </a:solidFill>
+                <a:latin typeface="Malgun Gothic"/>
+              </a:rPr>
+              <a:t>🤝 망고아이 대리점용 사용설명서</a:t>
+            </a:r>
+          </a:p>
+        </p:txBody>
+      </p:sp>
+      <p:sp>
+        <p:nvSpPr>
+          <p:cNvPr id="5" name="TextBox 4"/>
+          <p:cNvSpPr txBox="1"/>
+          <p:nvPr/>
+        </p:nvSpPr>
+        <p:spPr>
+          <a:xfrm>
+            <a:off x="8168335" y="27432"/>
+            <a:ext cx="3657600" cy="502920"/>
+          </a:xfrm>
+          <a:prstGeom prst="rect">
+            <a:avLst/>
+          </a:prstGeom>
+          <a:noFill/>
+        </p:spPr>
+        <p:txBody>
+          <a:bodyPr wrap="square" anchor="ctr">
+            <a:spAutoFit/>
+          </a:bodyPr>
+          <a:lstStyle/>
+          <a:p>
+            <a:pPr algn="r">
+              <a:lnSpc>
+                <a:spcPct val="100000"/>
+              </a:lnSpc>
+            </a:pPr>
+            <a:r>
+              <a:rPr sz="1300" b="1">
+                <a:solidFill>
+                  <a:srgbClr val="F1F5F9"/>
+                </a:solidFill>
+                <a:latin typeface="Malgun Gothic"/>
+              </a:rPr>
+              <a:t>체크리스트</a:t>
+            </a:r>
+          </a:p>
+        </p:txBody>
+      </p:sp>
+      <p:sp>
+        <p:nvSpPr>
+          <p:cNvPr id="6" name="TextBox 5"/>
+          <p:cNvSpPr txBox="1"/>
+          <p:nvPr/>
+        </p:nvSpPr>
+        <p:spPr>
+          <a:xfrm>
+            <a:off x="365760" y="868680"/>
+            <a:ext cx="9144000" cy="457200"/>
+          </a:xfrm>
+          <a:prstGeom prst="rect">
+            <a:avLst/>
+          </a:prstGeom>
+          <a:noFill/>
+        </p:spPr>
+        <p:txBody>
+          <a:bodyPr wrap="square" anchor="t">
+            <a:spAutoFit/>
+          </a:bodyPr>
+          <a:lstStyle/>
+          <a:p>
+            <a:pPr algn="l">
+              <a:lnSpc>
+                <a:spcPct val="100000"/>
+              </a:lnSpc>
+            </a:pPr>
+            <a:r>
+              <a:rPr sz="2200" b="1">
+                <a:solidFill>
+                  <a:srgbClr val="E11D48"/>
+                </a:solidFill>
+                <a:latin typeface="Malgun Gothic"/>
+              </a:rPr>
+              <a:t>✅ 대리점 운영 체크리스트</a:t>
+            </a:r>
+          </a:p>
+        </p:txBody>
+      </p:sp>
+      <p:sp>
+        <p:nvSpPr>
+          <p:cNvPr id="7" name="Rounded Rectangle 6"/>
+          <p:cNvSpPr/>
+          <p:nvPr/>
+        </p:nvSpPr>
+        <p:spPr>
+          <a:xfrm>
+            <a:off x="457200" y="1645920"/>
+            <a:ext cx="292608" cy="292608"/>
+          </a:xfrm>
+          <a:prstGeom prst="roundRect">
+            <a:avLst/>
+          </a:prstGeom>
+          <a:solidFill>
+            <a:srgbClr val="FFFFFF"/>
+          </a:solidFill>
+          <a:ln w="12700">
+            <a:solidFill>
+              <a:srgbClr val="E11D48"/>
+            </a:solidFill>
+          </a:ln>
+          <a:effectLst/>
+        </p:spPr>
+        <p:style>
+          <a:lnRef idx="1">
+            <a:schemeClr val="accent1"/>
+          </a:lnRef>
+          <a:fillRef idx="3">
+            <a:schemeClr val="accent1"/>
+          </a:fillRef>
+          <a:effectRef idx="2">
+            <a:schemeClr val="accent1"/>
+          </a:effectRef>
+          <a:fontRef idx="minor">
+            <a:schemeClr val="lt1"/>
+          </a:fontRef>
+        </p:style>
+        <p:txBody>
+          <a:bodyPr rtlCol="0" anchor="ctr"/>
+          <a:lstStyle/>
+          <a:p>
+            <a:pPr algn="ctr"/>
+          </a:p>
+        </p:txBody>
+      </p:sp>
+      <p:sp>
+        <p:nvSpPr>
+          <p:cNvPr id="8" name="TextBox 7"/>
+          <p:cNvSpPr txBox="1"/>
+          <p:nvPr/>
+        </p:nvSpPr>
+        <p:spPr>
+          <a:xfrm>
+            <a:off x="914400" y="1581912"/>
+            <a:ext cx="10058400" cy="411480"/>
+          </a:xfrm>
+          <a:prstGeom prst="rect">
+            <a:avLst/>
+          </a:prstGeom>
+          <a:noFill/>
+        </p:spPr>
+        <p:txBody>
+          <a:bodyPr wrap="square" anchor="t">
+            <a:spAutoFit/>
+          </a:bodyPr>
+          <a:lstStyle/>
+          <a:p>
+            <a:pPr algn="l">
+              <a:lnSpc>
+                <a:spcPct val="100000"/>
+              </a:lnSpc>
+            </a:pPr>
+            <a:r>
+              <a:rPr sz="1500" b="1">
+                <a:solidFill>
+                  <a:srgbClr val="334155"/>
+                </a:solidFill>
+                <a:latin typeface="Malgun Gothic"/>
+              </a:rPr>
+              <a:t>오늘 매출·재원·출석 지표를 확인했나요?</a:t>
+            </a:r>
+          </a:p>
+        </p:txBody>
+      </p:sp>
+      <p:sp>
+        <p:nvSpPr>
+          <p:cNvPr id="9" name="Rounded Rectangle 8"/>
+          <p:cNvSpPr/>
+          <p:nvPr/>
+        </p:nvSpPr>
+        <p:spPr>
+          <a:xfrm>
+            <a:off x="457200" y="2212848"/>
+            <a:ext cx="292608" cy="292608"/>
+          </a:xfrm>
+          <a:prstGeom prst="roundRect">
+            <a:avLst/>
+          </a:prstGeom>
+          <a:solidFill>
+            <a:srgbClr val="FFFFFF"/>
+          </a:solidFill>
+          <a:ln w="12700">
+            <a:solidFill>
+              <a:srgbClr val="E11D48"/>
+            </a:solidFill>
+          </a:ln>
+          <a:effectLst/>
+        </p:spPr>
+        <p:style>
+          <a:lnRef idx="1">
+            <a:schemeClr val="accent1"/>
+          </a:lnRef>
+          <a:fillRef idx="3">
+            <a:schemeClr val="accent1"/>
+          </a:fillRef>
+          <a:effectRef idx="2">
+            <a:schemeClr val="accent1"/>
+          </a:effectRef>
+          <a:fontRef idx="minor">
+            <a:schemeClr val="lt1"/>
+          </a:fontRef>
+        </p:style>
+        <p:txBody>
+          <a:bodyPr rtlCol="0" anchor="ctr"/>
+          <a:lstStyle/>
+          <a:p>
+            <a:pPr algn="ctr"/>
+          </a:p>
+        </p:txBody>
+      </p:sp>
+      <p:sp>
+        <p:nvSpPr>
+          <p:cNvPr id="10" name="TextBox 9"/>
+          <p:cNvSpPr txBox="1"/>
+          <p:nvPr/>
+        </p:nvSpPr>
+        <p:spPr>
+          <a:xfrm>
+            <a:off x="914400" y="2148840"/>
+            <a:ext cx="10058400" cy="411480"/>
+          </a:xfrm>
+          <a:prstGeom prst="rect">
+            <a:avLst/>
+          </a:prstGeom>
+          <a:noFill/>
+        </p:spPr>
+        <p:txBody>
+          <a:bodyPr wrap="square" anchor="t">
+            <a:spAutoFit/>
+          </a:bodyPr>
+          <a:lstStyle/>
+          <a:p>
+            <a:pPr algn="l">
+              <a:lnSpc>
+                <a:spcPct val="100000"/>
+              </a:lnSpc>
+            </a:pPr>
+            <a:r>
+              <a:rPr sz="1500" b="1">
+                <a:solidFill>
+                  <a:srgbClr val="334155"/>
+                </a:solidFill>
+                <a:latin typeface="Malgun Gothic"/>
+              </a:rPr>
+              <a:t>신규 상담/문의를 접수·응대했나요?</a:t>
+            </a:r>
+          </a:p>
+        </p:txBody>
+      </p:sp>
+      <p:sp>
+        <p:nvSpPr>
+          <p:cNvPr id="11" name="Rounded Rectangle 10"/>
+          <p:cNvSpPr/>
+          <p:nvPr/>
+        </p:nvSpPr>
+        <p:spPr>
+          <a:xfrm>
+            <a:off x="457200" y="2779776"/>
+            <a:ext cx="292608" cy="292608"/>
+          </a:xfrm>
+          <a:prstGeom prst="roundRect">
+            <a:avLst/>
+          </a:prstGeom>
+          <a:solidFill>
+            <a:srgbClr val="FFFFFF"/>
+          </a:solidFill>
+          <a:ln w="12700">
+            <a:solidFill>
+              <a:srgbClr val="E11D48"/>
+            </a:solidFill>
+          </a:ln>
+          <a:effectLst/>
+        </p:spPr>
+        <p:style>
+          <a:lnRef idx="1">
+            <a:schemeClr val="accent1"/>
+          </a:lnRef>
+          <a:fillRef idx="3">
+            <a:schemeClr val="accent1"/>
+          </a:fillRef>
+          <a:effectRef idx="2">
+            <a:schemeClr val="accent1"/>
+          </a:effectRef>
+          <a:fontRef idx="minor">
+            <a:schemeClr val="lt1"/>
+          </a:fontRef>
+        </p:style>
+        <p:txBody>
+          <a:bodyPr rtlCol="0" anchor="ctr"/>
+          <a:lstStyle/>
+          <a:p>
+            <a:pPr algn="ctr"/>
+          </a:p>
+        </p:txBody>
+      </p:sp>
+      <p:sp>
+        <p:nvSpPr>
+          <p:cNvPr id="12" name="TextBox 11"/>
+          <p:cNvSpPr txBox="1"/>
+          <p:nvPr/>
+        </p:nvSpPr>
+        <p:spPr>
+          <a:xfrm>
+            <a:off x="914400" y="2715768"/>
+            <a:ext cx="10058400" cy="411480"/>
+          </a:xfrm>
+          <a:prstGeom prst="rect">
+            <a:avLst/>
+          </a:prstGeom>
+          <a:noFill/>
+        </p:spPr>
+        <p:txBody>
+          <a:bodyPr wrap="square" anchor="t">
+            <a:spAutoFit/>
+          </a:bodyPr>
+          <a:lstStyle/>
+          <a:p>
+            <a:pPr algn="l">
+              <a:lnSpc>
+                <a:spcPct val="100000"/>
+              </a:lnSpc>
+            </a:pPr>
+            <a:r>
+              <a:rPr sz="1500" b="1">
+                <a:solidFill>
+                  <a:srgbClr val="334155"/>
+                </a:solidFill>
+                <a:latin typeface="Malgun Gothic"/>
+              </a:rPr>
+              <a:t>미납 건을 확인하고 안내했나요?</a:t>
+            </a:r>
+          </a:p>
+        </p:txBody>
+      </p:sp>
+      <p:sp>
+        <p:nvSpPr>
+          <p:cNvPr id="13" name="Rounded Rectangle 12"/>
+          <p:cNvSpPr/>
+          <p:nvPr/>
+        </p:nvSpPr>
+        <p:spPr>
+          <a:xfrm>
+            <a:off x="457200" y="3346704"/>
+            <a:ext cx="292608" cy="292608"/>
+          </a:xfrm>
+          <a:prstGeom prst="roundRect">
+            <a:avLst/>
+          </a:prstGeom>
+          <a:solidFill>
+            <a:srgbClr val="FFFFFF"/>
+          </a:solidFill>
+          <a:ln w="12700">
+            <a:solidFill>
+              <a:srgbClr val="E11D48"/>
+            </a:solidFill>
+          </a:ln>
+          <a:effectLst/>
+        </p:spPr>
+        <p:style>
+          <a:lnRef idx="1">
+            <a:schemeClr val="accent1"/>
+          </a:lnRef>
+          <a:fillRef idx="3">
+            <a:schemeClr val="accent1"/>
+          </a:fillRef>
+          <a:effectRef idx="2">
+            <a:schemeClr val="accent1"/>
+          </a:effectRef>
+          <a:fontRef idx="minor">
+            <a:schemeClr val="lt1"/>
+          </a:fontRef>
+        </p:style>
+        <p:txBody>
+          <a:bodyPr rtlCol="0" anchor="ctr"/>
+          <a:lstStyle/>
+          <a:p>
+            <a:pPr algn="ctr"/>
+          </a:p>
+        </p:txBody>
+      </p:sp>
+      <p:sp>
+        <p:nvSpPr>
+          <p:cNvPr id="14" name="TextBox 13"/>
+          <p:cNvSpPr txBox="1"/>
+          <p:nvPr/>
+        </p:nvSpPr>
+        <p:spPr>
+          <a:xfrm>
+            <a:off x="914400" y="3282696"/>
+            <a:ext cx="10058400" cy="411480"/>
+          </a:xfrm>
+          <a:prstGeom prst="rect">
+            <a:avLst/>
+          </a:prstGeom>
+          <a:noFill/>
+        </p:spPr>
+        <p:txBody>
+          <a:bodyPr wrap="square" anchor="t">
+            <a:spAutoFit/>
+          </a:bodyPr>
+          <a:lstStyle/>
+          <a:p>
+            <a:pPr algn="l">
+              <a:lnSpc>
+                <a:spcPct val="100000"/>
+              </a:lnSpc>
+            </a:pPr>
+            <a:r>
+              <a:rPr sz="1500" b="1">
+                <a:solidFill>
+                  <a:srgbClr val="334155"/>
+                </a:solidFill>
+                <a:latin typeface="Malgun Gothic"/>
+              </a:rPr>
+              <a:t>이탈위험 학생을 챙겼나요?</a:t>
+            </a:r>
+          </a:p>
+        </p:txBody>
+      </p:sp>
+      <p:sp>
+        <p:nvSpPr>
+          <p:cNvPr id="15" name="Rounded Rectangle 14"/>
+          <p:cNvSpPr/>
+          <p:nvPr/>
+        </p:nvSpPr>
+        <p:spPr>
+          <a:xfrm>
+            <a:off x="457200" y="3913632"/>
+            <a:ext cx="292608" cy="292608"/>
+          </a:xfrm>
+          <a:prstGeom prst="roundRect">
+            <a:avLst/>
+          </a:prstGeom>
+          <a:solidFill>
+            <a:srgbClr val="FFFFFF"/>
+          </a:solidFill>
+          <a:ln w="12700">
+            <a:solidFill>
+              <a:srgbClr val="E11D48"/>
+            </a:solidFill>
+          </a:ln>
+          <a:effectLst/>
+        </p:spPr>
+        <p:style>
+          <a:lnRef idx="1">
+            <a:schemeClr val="accent1"/>
+          </a:lnRef>
+          <a:fillRef idx="3">
+            <a:schemeClr val="accent1"/>
+          </a:fillRef>
+          <a:effectRef idx="2">
+            <a:schemeClr val="accent1"/>
+          </a:effectRef>
+          <a:fontRef idx="minor">
+            <a:schemeClr val="lt1"/>
+          </a:fontRef>
+        </p:style>
+        <p:txBody>
+          <a:bodyPr rtlCol="0" anchor="ctr"/>
+          <a:lstStyle/>
+          <a:p>
+            <a:pPr algn="ctr"/>
+          </a:p>
+        </p:txBody>
+      </p:sp>
+      <p:sp>
+        <p:nvSpPr>
+          <p:cNvPr id="16" name="TextBox 15"/>
+          <p:cNvSpPr txBox="1"/>
+          <p:nvPr/>
+        </p:nvSpPr>
+        <p:spPr>
+          <a:xfrm>
+            <a:off x="914400" y="3849624"/>
+            <a:ext cx="10058400" cy="411480"/>
+          </a:xfrm>
+          <a:prstGeom prst="rect">
+            <a:avLst/>
+          </a:prstGeom>
+          <a:noFill/>
+        </p:spPr>
+        <p:txBody>
+          <a:bodyPr wrap="square" anchor="t">
+            <a:spAutoFit/>
+          </a:bodyPr>
+          <a:lstStyle/>
+          <a:p>
+            <a:pPr algn="l">
+              <a:lnSpc>
+                <a:spcPct val="100000"/>
+              </a:lnSpc>
+            </a:pPr>
+            <a:r>
+              <a:rPr sz="1500" b="1">
+                <a:solidFill>
+                  <a:srgbClr val="334155"/>
+                </a:solidFill>
+                <a:latin typeface="Malgun Gothic"/>
+              </a:rPr>
+              <a:t>학부모에게 리포트·마이페이지를 안내했나요?</a:t>
+            </a:r>
+          </a:p>
+        </p:txBody>
+      </p:sp>
+      <p:sp>
+        <p:nvSpPr>
+          <p:cNvPr id="17" name="Rounded Rectangle 16"/>
+          <p:cNvSpPr/>
+          <p:nvPr/>
+        </p:nvSpPr>
+        <p:spPr>
+          <a:xfrm>
+            <a:off x="457200" y="4480560"/>
+            <a:ext cx="292608" cy="292608"/>
+          </a:xfrm>
+          <a:prstGeom prst="roundRect">
+            <a:avLst/>
+          </a:prstGeom>
+          <a:solidFill>
+            <a:srgbClr val="FFFFFF"/>
+          </a:solidFill>
+          <a:ln w="12700">
+            <a:solidFill>
+              <a:srgbClr val="E11D48"/>
+            </a:solidFill>
+          </a:ln>
+          <a:effectLst/>
+        </p:spPr>
+        <p:style>
+          <a:lnRef idx="1">
+            <a:schemeClr val="accent1"/>
+          </a:lnRef>
+          <a:fillRef idx="3">
+            <a:schemeClr val="accent1"/>
+          </a:fillRef>
+          <a:effectRef idx="2">
+            <a:schemeClr val="accent1"/>
+          </a:effectRef>
+          <a:fontRef idx="minor">
+            <a:schemeClr val="lt1"/>
+          </a:fontRef>
+        </p:style>
+        <p:txBody>
+          <a:bodyPr rtlCol="0" anchor="ctr"/>
+          <a:lstStyle/>
+          <a:p>
+            <a:pPr algn="ctr"/>
+          </a:p>
+        </p:txBody>
+      </p:sp>
+      <p:sp>
+        <p:nvSpPr>
+          <p:cNvPr id="18" name="TextBox 17"/>
+          <p:cNvSpPr txBox="1"/>
+          <p:nvPr/>
+        </p:nvSpPr>
+        <p:spPr>
+          <a:xfrm>
+            <a:off x="914400" y="4416552"/>
+            <a:ext cx="10058400" cy="411480"/>
+          </a:xfrm>
+          <a:prstGeom prst="rect">
+            <a:avLst/>
+          </a:prstGeom>
+          <a:noFill/>
+        </p:spPr>
+        <p:txBody>
+          <a:bodyPr wrap="square" anchor="t">
+            <a:spAutoFit/>
+          </a:bodyPr>
+          <a:lstStyle/>
+          <a:p>
+            <a:pPr algn="l">
+              <a:lnSpc>
+                <a:spcPct val="100000"/>
+              </a:lnSpc>
+            </a:pPr>
+            <a:r>
+              <a:rPr sz="1500" b="1">
+                <a:solidFill>
+                  <a:srgbClr val="334155"/>
+                </a:solidFill>
+                <a:latin typeface="Malgun Gothic"/>
+              </a:rPr>
+              <a:t>이번 달 정산(수령)을 확인했나요?</a:t>
+            </a:r>
+          </a:p>
+        </p:txBody>
+      </p:sp>
+      <p:sp>
+        <p:nvSpPr>
+          <p:cNvPr id="19" name="Rounded Rectangle 18"/>
+          <p:cNvSpPr/>
+          <p:nvPr/>
+        </p:nvSpPr>
+        <p:spPr>
+          <a:xfrm>
+            <a:off x="457200" y="5047488"/>
+            <a:ext cx="292608" cy="292608"/>
+          </a:xfrm>
+          <a:prstGeom prst="roundRect">
+            <a:avLst/>
+          </a:prstGeom>
+          <a:solidFill>
+            <a:srgbClr val="FFFFFF"/>
+          </a:solidFill>
+          <a:ln w="12700">
+            <a:solidFill>
+              <a:srgbClr val="E11D48"/>
+            </a:solidFill>
+          </a:ln>
+          <a:effectLst/>
+        </p:spPr>
+        <p:style>
+          <a:lnRef idx="1">
+            <a:schemeClr val="accent1"/>
+          </a:lnRef>
+          <a:fillRef idx="3">
+            <a:schemeClr val="accent1"/>
+          </a:fillRef>
+          <a:effectRef idx="2">
+            <a:schemeClr val="accent1"/>
+          </a:effectRef>
+          <a:fontRef idx="minor">
+            <a:schemeClr val="lt1"/>
+          </a:fontRef>
+        </p:style>
+        <p:txBody>
+          <a:bodyPr rtlCol="0" anchor="ctr"/>
+          <a:lstStyle/>
+          <a:p>
+            <a:pPr algn="ctr"/>
+          </a:p>
+        </p:txBody>
+      </p:sp>
+      <p:sp>
+        <p:nvSpPr>
+          <p:cNvPr id="20" name="TextBox 19"/>
+          <p:cNvSpPr txBox="1"/>
+          <p:nvPr/>
+        </p:nvSpPr>
+        <p:spPr>
+          <a:xfrm>
+            <a:off x="914400" y="4983480"/>
+            <a:ext cx="10058400" cy="411480"/>
+          </a:xfrm>
+          <a:prstGeom prst="rect">
+            <a:avLst/>
+          </a:prstGeom>
+          <a:noFill/>
+        </p:spPr>
+        <p:txBody>
+          <a:bodyPr wrap="square" anchor="t">
+            <a:spAutoFit/>
+          </a:bodyPr>
+          <a:lstStyle/>
+          <a:p>
+            <a:pPr algn="l">
+              <a:lnSpc>
+                <a:spcPct val="100000"/>
+              </a:lnSpc>
+            </a:pPr>
+            <a:r>
+              <a:rPr sz="1500" b="1">
+                <a:solidFill>
+                  <a:srgbClr val="334155"/>
+                </a:solidFill>
+                <a:latin typeface="Malgun Gothic"/>
+              </a:rPr>
+              <a:t>체험→등록 후속 연락을 했나요?</a:t>
+            </a:r>
+          </a:p>
+        </p:txBody>
+      </p:sp>
+      <p:pic>
+        <p:nvPicPr>
+          <p:cNvPr id="21" name="Picture 20" descr="mango_char.png"/>
+          <p:cNvPicPr>
+            <a:picLocks noChangeAspect="1"/>
+          </p:cNvPicPr>
+          <p:nvPr/>
+        </p:nvPicPr>
+        <p:blipFill>
+          <a:blip r:embed="rId2"/>
+          <a:stretch>
+            <a:fillRect/>
+          </a:stretch>
+        </p:blipFill>
+        <p:spPr>
+          <a:xfrm>
+            <a:off x="9153162" y="4480559"/>
+            <a:ext cx="2489892" cy="2011680"/>
+          </a:xfrm>
+          <a:prstGeom prst="rect">
+            <a:avLst/>
+          </a:prstGeom>
+        </p:spPr>
+      </p:pic>
+    </p:spTree>
+  </p:cSld>
+  <p:clrMapOvr>
+    <a:masterClrMapping/>
+  </p:clrMapOvr>
+</p:sld>
+</file>
+
+<file path=ppt/slides/slide25.xml><?xml version="1.0" encoding="utf-8"?>
+<p:sld xmlns:a="http://schemas.openxmlformats.org/drawingml/2006/main" xmlns:p="http://schemas.openxmlformats.org/presentationml/2006/main" xmlns:r="http://schemas.openxmlformats.org/officeDocument/2006/relationships">
+  <p:cSld>
+    <p:bg>
+      <p:bgPr>
+        <a:solidFill>
+          <a:srgbClr val="FFFFFF"/>
+        </a:solidFill>
+        <a:effectLst/>
+      </p:bgPr>
+    </p:bg>
+    <p:spTree>
+      <p:nvGrpSpPr>
+        <p:cNvPr id="1" name=""/>
+        <p:cNvGrpSpPr/>
+        <p:nvPr/>
+      </p:nvGrpSpPr>
+      <p:grpSpPr/>
+      <p:sp>
+        <p:nvSpPr>
+          <p:cNvPr id="2" name="Rectangle 1"/>
+          <p:cNvSpPr/>
+          <p:nvPr/>
+        </p:nvSpPr>
+        <p:spPr>
+          <a:xfrm>
+            <a:off x="0" y="0"/>
+            <a:ext cx="12191695" cy="566928"/>
+          </a:xfrm>
+          <a:prstGeom prst="rect">
+            <a:avLst/>
+          </a:prstGeom>
+          <a:solidFill>
+            <a:srgbClr val="E11D48"/>
+          </a:solidFill>
+          <a:ln>
+            <a:noFill/>
+          </a:ln>
+          <a:effectLst/>
+        </p:spPr>
+        <p:style>
+          <a:lnRef idx="1">
+            <a:schemeClr val="accent1"/>
+          </a:lnRef>
+          <a:fillRef idx="3">
+            <a:schemeClr val="accent1"/>
+          </a:fillRef>
+          <a:effectRef idx="2">
+            <a:schemeClr val="accent1"/>
+          </a:effectRef>
+          <a:fontRef idx="minor">
+            <a:schemeClr val="lt1"/>
+          </a:fontRef>
+        </p:style>
+        <p:txBody>
+          <a:bodyPr rtlCol="0" anchor="ctr"/>
+          <a:lstStyle/>
+          <a:p>
+            <a:pPr algn="ctr"/>
+          </a:p>
+        </p:txBody>
+      </p:sp>
+      <p:sp>
+        <p:nvSpPr>
+          <p:cNvPr id="3" name="Rectangle 2"/>
+          <p:cNvSpPr/>
+          <p:nvPr/>
+        </p:nvSpPr>
+        <p:spPr>
+          <a:xfrm>
+            <a:off x="0" y="566928"/>
+            <a:ext cx="12191695" cy="54864"/>
+          </a:xfrm>
+          <a:prstGeom prst="rect">
+            <a:avLst/>
+          </a:prstGeom>
+          <a:solidFill>
+            <a:srgbClr val="0EA5E9"/>
+          </a:solidFill>
+          <a:ln>
+            <a:noFill/>
+          </a:ln>
+          <a:effectLst/>
+        </p:spPr>
+        <p:style>
+          <a:lnRef idx="1">
+            <a:schemeClr val="accent1"/>
+          </a:lnRef>
+          <a:fillRef idx="3">
+            <a:schemeClr val="accent1"/>
+          </a:fillRef>
+          <a:effectRef idx="2">
+            <a:schemeClr val="accent1"/>
+          </a:effectRef>
+          <a:fontRef idx="minor">
+            <a:schemeClr val="lt1"/>
+          </a:fontRef>
+        </p:style>
+        <p:txBody>
+          <a:bodyPr rtlCol="0" anchor="ctr"/>
+          <a:lstStyle/>
+          <a:p>
+            <a:pPr algn="ctr"/>
+          </a:p>
+        </p:txBody>
+      </p:sp>
+      <p:sp>
+        <p:nvSpPr>
+          <p:cNvPr id="4" name="TextBox 3"/>
+          <p:cNvSpPr txBox="1"/>
+          <p:nvPr/>
+        </p:nvSpPr>
+        <p:spPr>
+          <a:xfrm>
+            <a:off x="365760" y="27432"/>
+            <a:ext cx="7315200" cy="502920"/>
+          </a:xfrm>
+          <a:prstGeom prst="rect">
+            <a:avLst/>
+          </a:prstGeom>
+          <a:noFill/>
+        </p:spPr>
+        <p:txBody>
+          <a:bodyPr wrap="square" anchor="ctr">
+            <a:spAutoFit/>
+          </a:bodyPr>
+          <a:lstStyle/>
+          <a:p>
+            <a:pPr algn="l">
+              <a:lnSpc>
+                <a:spcPct val="100000"/>
+              </a:lnSpc>
+            </a:pPr>
+            <a:r>
+              <a:rPr sz="1500" b="1">
+                <a:solidFill>
+                  <a:srgbClr val="FFFFFF"/>
+                </a:solidFill>
+                <a:latin typeface="Malgun Gothic"/>
+              </a:rPr>
+              <a:t>🤝 망고아이 대리점용 사용설명서</a:t>
+            </a:r>
+          </a:p>
+        </p:txBody>
+      </p:sp>
+      <p:sp>
+        <p:nvSpPr>
+          <p:cNvPr id="5" name="TextBox 4"/>
+          <p:cNvSpPr txBox="1"/>
+          <p:nvPr/>
+        </p:nvSpPr>
+        <p:spPr>
+          <a:xfrm>
+            <a:off x="8168335" y="27432"/>
+            <a:ext cx="3657600" cy="502920"/>
+          </a:xfrm>
+          <a:prstGeom prst="rect">
+            <a:avLst/>
+          </a:prstGeom>
+          <a:noFill/>
+        </p:spPr>
+        <p:txBody>
+          <a:bodyPr wrap="square" anchor="ctr">
+            <a:spAutoFit/>
+          </a:bodyPr>
+          <a:lstStyle/>
+          <a:p>
+            <a:pPr algn="r">
+              <a:lnSpc>
+                <a:spcPct val="100000"/>
+              </a:lnSpc>
+            </a:pPr>
+            <a:r>
+              <a:rPr sz="1300" b="1">
+                <a:solidFill>
+                  <a:srgbClr val="F1F5F9"/>
+                </a:solidFill>
+                <a:latin typeface="Malgun Gothic"/>
+              </a:rPr>
               <a:t>마무리</a:t>
             </a:r>
           </a:p>
@@ -18183,7 +20269,7 @@
 </p:sld>
 </file>
 
-<file path=ppt/slides/slide24.xml><?xml version="1.0" encoding="utf-8"?>
+<file path=ppt/slides/slide26.xml><?xml version="1.0" encoding="utf-8"?>
 <p:sld xmlns:a="http://schemas.openxmlformats.org/drawingml/2006/main" xmlns:p="http://schemas.openxmlformats.org/presentationml/2006/main" xmlns:r="http://schemas.openxmlformats.org/officeDocument/2006/relationships">
   <p:cSld>
     <p:bg>

--- a/cloudflare-deploy/public/library/agency/agency-kr.pptx
+++ b/cloudflare-deploy/public/library/agency/agency-kr.pptx
@@ -4026,7 +4026,7 @@
                 </a:solidFill>
                 <a:latin typeface="Malgun Gothic"/>
               </a:rPr>
-              <a:t>대상 · 대리점(가맹) 운영자   |   test.mangoi.co.kr</a:t>
+              <a:t>대상 · 대리점(가맹) 운영자   |   www.mangoi.co.kr</a:t>
             </a:r>
           </a:p>
         </p:txBody>
@@ -20531,7 +20531,7 @@
                 </a:solidFill>
                 <a:latin typeface="Malgun Gothic"/>
               </a:rPr>
-              <a:t>🌐 test.mangoi.co.kr    📞 1588-0000    ✉ support@mangoi.co.kr</a:t>
+              <a:t>🌐 www.mangoi.co.kr    📞 1644-0561    ✉ support@mangoi.co.kr</a:t>
             </a:r>
           </a:p>
         </p:txBody>

--- a/cloudflare-deploy/public/library/agency/agency-kr.pptx
+++ b/cloudflare-deploy/public/library/agency/agency-kr.pptx
@@ -6,6 +6,7 @@
   </p:sldMasterIdLst>
   <p:sldIdLst>
     <p:sldId id="256" r:id="rId7"/>
+    <p:sldId id="282" r:id="rId33"/>
     <p:sldId id="257" r:id="rId8"/>
     <p:sldId id="258" r:id="rId9"/>
     <p:sldId id="259" r:id="rId10"/>
@@ -15886,7 +15887,7 @@
         </p:nvSpPr>
         <p:spPr>
           <a:xfrm>
-            <a:off x="365760" y="868680"/>
+            <a:off x="987552" y="868680"/>
             <a:ext cx="9144000" cy="457200"/>
           </a:xfrm>
           <a:prstGeom prst="rect">
@@ -16791,6 +16792,89 @@
           </a:graphicData>
         </a:graphic>
       </p:graphicFrame>
+      <p:sp>
+        <p:nvSpPr>
+          <p:cNvPr id="6" name="Rounded Rectangle 5"/>
+          <p:cNvSpPr/>
+          <p:nvPr/>
+        </p:nvSpPr>
+        <p:spPr>
+          <a:xfrm>
+            <a:off x="365760" y="841247"/>
+            <a:ext cx="475488" cy="475488"/>
+          </a:xfrm>
+          <a:prstGeom prst="roundRect">
+            <a:avLst/>
+          </a:prstGeom>
+          <a:solidFill>
+            <a:srgbClr val="E11D48"/>
+          </a:solidFill>
+          <a:ln>
+            <a:noFill/>
+          </a:ln>
+          <a:effectLst/>
+        </p:spPr>
+        <p:style>
+          <a:lnRef idx="1">
+            <a:schemeClr val="accent1"/>
+          </a:lnRef>
+          <a:fillRef idx="3">
+            <a:schemeClr val="accent1"/>
+          </a:fillRef>
+          <a:effectRef idx="2">
+            <a:schemeClr val="accent1"/>
+          </a:effectRef>
+          <a:fontRef idx="minor">
+            <a:schemeClr val="lt1"/>
+          </a:fontRef>
+        </p:style>
+        <p:txBody>
+          <a:bodyPr rtlCol="0" anchor="ctr"/>
+          <a:lstStyle/>
+          <a:p>
+            <a:pPr algn="ctr"/>
+          </a:p>
+        </p:txBody>
+      </p:sp>
+      <p:sp>
+        <p:nvSpPr>
+          <p:cNvPr id="7" name="TextBox 6"/>
+          <p:cNvSpPr txBox="1"/>
+          <p:nvPr/>
+        </p:nvSpPr>
+        <p:spPr>
+          <a:xfrm>
+            <a:off x="365760" y="841247"/>
+            <a:ext cx="475488" cy="475488"/>
+          </a:xfrm>
+          <a:prstGeom prst="rect">
+            <a:avLst/>
+          </a:prstGeom>
+          <a:noFill/>
+        </p:spPr>
+        <p:txBody>
+          <a:bodyPr wrap="square" anchor="ctr">
+            <a:spAutoFit/>
+          </a:bodyPr>
+          <a:lstStyle/>
+          <a:p>
+            <a:pPr algn="ctr">
+              <a:lnSpc>
+                <a:spcPct val="100000"/>
+              </a:lnSpc>
+            </a:pPr>
+            <a:r>
+              <a:rPr sz="1500" b="1">
+                <a:solidFill>
+                  <a:srgbClr val="FFFFFF"/>
+                </a:solidFill>
+                <a:latin typeface="Malgun Gothic"/>
+              </a:rPr>
+              <a:t>19</a:t>
+            </a:r>
+          </a:p>
+        </p:txBody>
+      </p:sp>
     </p:spTree>
   </p:cSld>
   <p:clrMapOvr>
@@ -16991,7 +17075,7 @@
         </p:nvSpPr>
         <p:spPr>
           <a:xfrm>
-            <a:off x="365760" y="868680"/>
+            <a:off x="987552" y="868680"/>
             <a:ext cx="9144000" cy="457200"/>
           </a:xfrm>
           <a:prstGeom prst="rect">
@@ -17136,6 +17220,89 @@
           </a:graphicData>
         </a:graphic>
       </p:graphicFrame>
+      <p:sp>
+        <p:nvSpPr>
+          <p:cNvPr id="6" name="Rounded Rectangle 5"/>
+          <p:cNvSpPr/>
+          <p:nvPr/>
+        </p:nvSpPr>
+        <p:spPr>
+          <a:xfrm>
+            <a:off x="365760" y="841247"/>
+            <a:ext cx="475488" cy="475488"/>
+          </a:xfrm>
+          <a:prstGeom prst="roundRect">
+            <a:avLst/>
+          </a:prstGeom>
+          <a:solidFill>
+            <a:srgbClr val="E11D48"/>
+          </a:solidFill>
+          <a:ln>
+            <a:noFill/>
+          </a:ln>
+          <a:effectLst/>
+        </p:spPr>
+        <p:style>
+          <a:lnRef idx="1">
+            <a:schemeClr val="accent1"/>
+          </a:lnRef>
+          <a:fillRef idx="3">
+            <a:schemeClr val="accent1"/>
+          </a:fillRef>
+          <a:effectRef idx="2">
+            <a:schemeClr val="accent1"/>
+          </a:effectRef>
+          <a:fontRef idx="minor">
+            <a:schemeClr val="lt1"/>
+          </a:fontRef>
+        </p:style>
+        <p:txBody>
+          <a:bodyPr rtlCol="0" anchor="ctr"/>
+          <a:lstStyle/>
+          <a:p>
+            <a:pPr algn="ctr"/>
+          </a:p>
+        </p:txBody>
+      </p:sp>
+      <p:sp>
+        <p:nvSpPr>
+          <p:cNvPr id="7" name="TextBox 6"/>
+          <p:cNvSpPr txBox="1"/>
+          <p:nvPr/>
+        </p:nvSpPr>
+        <p:spPr>
+          <a:xfrm>
+            <a:off x="365760" y="841247"/>
+            <a:ext cx="475488" cy="475488"/>
+          </a:xfrm>
+          <a:prstGeom prst="rect">
+            <a:avLst/>
+          </a:prstGeom>
+          <a:noFill/>
+        </p:spPr>
+        <p:txBody>
+          <a:bodyPr wrap="square" anchor="ctr">
+            <a:spAutoFit/>
+          </a:bodyPr>
+          <a:lstStyle/>
+          <a:p>
+            <a:pPr algn="ctr">
+              <a:lnSpc>
+                <a:spcPct val="100000"/>
+              </a:lnSpc>
+            </a:pPr>
+            <a:r>
+              <a:rPr sz="1500" b="1">
+                <a:solidFill>
+                  <a:srgbClr val="FFFFFF"/>
+                </a:solidFill>
+                <a:latin typeface="Malgun Gothic"/>
+              </a:rPr>
+              <a:t>20</a:t>
+            </a:r>
+          </a:p>
+        </p:txBody>
+      </p:sp>
     </p:spTree>
   </p:cSld>
   <p:clrMapOvr>
@@ -17336,7 +17503,7 @@
         </p:nvSpPr>
         <p:spPr>
           <a:xfrm>
-            <a:off x="365760" y="868680"/>
+            <a:off x="987552" y="868680"/>
             <a:ext cx="9144000" cy="457200"/>
           </a:xfrm>
           <a:prstGeom prst="rect">
@@ -17983,6 +18150,89 @@
                 <a:latin typeface="Malgun Gothic"/>
               </a:rPr>
               <a:t>A. 이탈위험 신호(결석·성과 하락)를 보고 상담·알림톡으로 빠르게 개입하세요.</a:t>
+            </a:r>
+          </a:p>
+        </p:txBody>
+      </p:sp>
+      <p:sp>
+        <p:nvSpPr>
+          <p:cNvPr id="6" name="Rounded Rectangle 5"/>
+          <p:cNvSpPr/>
+          <p:nvPr/>
+        </p:nvSpPr>
+        <p:spPr>
+          <a:xfrm>
+            <a:off x="365760" y="841247"/>
+            <a:ext cx="475488" cy="475488"/>
+          </a:xfrm>
+          <a:prstGeom prst="roundRect">
+            <a:avLst/>
+          </a:prstGeom>
+          <a:solidFill>
+            <a:srgbClr val="E11D48"/>
+          </a:solidFill>
+          <a:ln>
+            <a:noFill/>
+          </a:ln>
+          <a:effectLst/>
+        </p:spPr>
+        <p:style>
+          <a:lnRef idx="1">
+            <a:schemeClr val="accent1"/>
+          </a:lnRef>
+          <a:fillRef idx="3">
+            <a:schemeClr val="accent1"/>
+          </a:fillRef>
+          <a:effectRef idx="2">
+            <a:schemeClr val="accent1"/>
+          </a:effectRef>
+          <a:fontRef idx="minor">
+            <a:schemeClr val="lt1"/>
+          </a:fontRef>
+        </p:style>
+        <p:txBody>
+          <a:bodyPr rtlCol="0" anchor="ctr"/>
+          <a:lstStyle/>
+          <a:p>
+            <a:pPr algn="ctr"/>
+          </a:p>
+        </p:txBody>
+      </p:sp>
+      <p:sp>
+        <p:nvSpPr>
+          <p:cNvPr id="7" name="TextBox 6"/>
+          <p:cNvSpPr txBox="1"/>
+          <p:nvPr/>
+        </p:nvSpPr>
+        <p:spPr>
+          <a:xfrm>
+            <a:off x="365760" y="841247"/>
+            <a:ext cx="475488" cy="475488"/>
+          </a:xfrm>
+          <a:prstGeom prst="rect">
+            <a:avLst/>
+          </a:prstGeom>
+          <a:noFill/>
+        </p:spPr>
+        <p:txBody>
+          <a:bodyPr wrap="square" anchor="ctr">
+            <a:spAutoFit/>
+          </a:bodyPr>
+          <a:lstStyle/>
+          <a:p>
+            <a:pPr algn="ctr">
+              <a:lnSpc>
+                <a:spcPct val="100000"/>
+              </a:lnSpc>
+            </a:pPr>
+            <a:r>
+              <a:rPr sz="1500" b="1">
+                <a:solidFill>
+                  <a:srgbClr val="FFFFFF"/>
+                </a:solidFill>
+                <a:latin typeface="Malgun Gothic"/>
+              </a:rPr>
+              <a:t>21</a:t>
             </a:r>
           </a:p>
         </p:txBody>
@@ -18187,7 +18437,7 @@
         </p:nvSpPr>
         <p:spPr>
           <a:xfrm>
-            <a:off x="365760" y="868680"/>
+            <a:off x="987552" y="868680"/>
             <a:ext cx="9144000" cy="457200"/>
           </a:xfrm>
           <a:prstGeom prst="rect">
@@ -18837,6 +19087,89 @@
           </a:prstGeom>
         </p:spPr>
       </p:pic>
+      <p:sp>
+        <p:nvSpPr>
+          <p:cNvPr id="6" name="Rounded Rectangle 5"/>
+          <p:cNvSpPr/>
+          <p:nvPr/>
+        </p:nvSpPr>
+        <p:spPr>
+          <a:xfrm>
+            <a:off x="365760" y="841247"/>
+            <a:ext cx="475488" cy="475488"/>
+          </a:xfrm>
+          <a:prstGeom prst="roundRect">
+            <a:avLst/>
+          </a:prstGeom>
+          <a:solidFill>
+            <a:srgbClr val="E11D48"/>
+          </a:solidFill>
+          <a:ln>
+            <a:noFill/>
+          </a:ln>
+          <a:effectLst/>
+        </p:spPr>
+        <p:style>
+          <a:lnRef idx="1">
+            <a:schemeClr val="accent1"/>
+          </a:lnRef>
+          <a:fillRef idx="3">
+            <a:schemeClr val="accent1"/>
+          </a:fillRef>
+          <a:effectRef idx="2">
+            <a:schemeClr val="accent1"/>
+          </a:effectRef>
+          <a:fontRef idx="minor">
+            <a:schemeClr val="lt1"/>
+          </a:fontRef>
+        </p:style>
+        <p:txBody>
+          <a:bodyPr rtlCol="0" anchor="ctr"/>
+          <a:lstStyle/>
+          <a:p>
+            <a:pPr algn="ctr"/>
+          </a:p>
+        </p:txBody>
+      </p:sp>
+      <p:sp>
+        <p:nvSpPr>
+          <p:cNvPr id="7" name="TextBox 6"/>
+          <p:cNvSpPr txBox="1"/>
+          <p:nvPr/>
+        </p:nvSpPr>
+        <p:spPr>
+          <a:xfrm>
+            <a:off x="365760" y="841247"/>
+            <a:ext cx="475488" cy="475488"/>
+          </a:xfrm>
+          <a:prstGeom prst="rect">
+            <a:avLst/>
+          </a:prstGeom>
+          <a:noFill/>
+        </p:spPr>
+        <p:txBody>
+          <a:bodyPr wrap="square" anchor="ctr">
+            <a:spAutoFit/>
+          </a:bodyPr>
+          <a:lstStyle/>
+          <a:p>
+            <a:pPr algn="ctr">
+              <a:lnSpc>
+                <a:spcPct val="100000"/>
+              </a:lnSpc>
+            </a:pPr>
+            <a:r>
+              <a:rPr sz="1500" b="1">
+                <a:solidFill>
+                  <a:srgbClr val="FFFFFF"/>
+                </a:solidFill>
+                <a:latin typeface="Malgun Gothic"/>
+              </a:rPr>
+              <a:t>22</a:t>
+            </a:r>
+          </a:p>
+        </p:txBody>
+      </p:sp>
     </p:spTree>
   </p:cSld>
   <p:clrMapOvr>
@@ -19037,7 +19370,7 @@
         </p:nvSpPr>
         <p:spPr>
           <a:xfrm>
-            <a:off x="365760" y="822960"/>
+            <a:off x="987552" y="822960"/>
             <a:ext cx="11430000" cy="457200"/>
           </a:xfrm>
           <a:prstGeom prst="rect">
@@ -20257,6 +20590,89 @@
                 <a:latin typeface="Malgun Gothic"/>
               </a:rPr>
               <a:t>🍊 대리점의 힘은 ‘내 학생 한 명 한 명을 챙기는 정성’에서 나와요. 빠르게 응대하고, 성과를 보여주고, 이탈을 미리 막으세요. 지사와 본사가 든든하게 지원합니다. 궁금한 점은 언제든 고객센터로 — 무럭무럭 성장하는 대리점을 응원합니다! 🍊</a:t>
+            </a:r>
+          </a:p>
+        </p:txBody>
+      </p:sp>
+      <p:sp>
+        <p:nvSpPr>
+          <p:cNvPr id="6" name="Rounded Rectangle 5"/>
+          <p:cNvSpPr/>
+          <p:nvPr/>
+        </p:nvSpPr>
+        <p:spPr>
+          <a:xfrm>
+            <a:off x="365760" y="795528"/>
+            <a:ext cx="475488" cy="475488"/>
+          </a:xfrm>
+          <a:prstGeom prst="roundRect">
+            <a:avLst/>
+          </a:prstGeom>
+          <a:solidFill>
+            <a:srgbClr val="E11D48"/>
+          </a:solidFill>
+          <a:ln>
+            <a:noFill/>
+          </a:ln>
+          <a:effectLst/>
+        </p:spPr>
+        <p:style>
+          <a:lnRef idx="1">
+            <a:schemeClr val="accent1"/>
+          </a:lnRef>
+          <a:fillRef idx="3">
+            <a:schemeClr val="accent1"/>
+          </a:fillRef>
+          <a:effectRef idx="2">
+            <a:schemeClr val="accent1"/>
+          </a:effectRef>
+          <a:fontRef idx="minor">
+            <a:schemeClr val="lt1"/>
+          </a:fontRef>
+        </p:style>
+        <p:txBody>
+          <a:bodyPr rtlCol="0" anchor="ctr"/>
+          <a:lstStyle/>
+          <a:p>
+            <a:pPr algn="ctr"/>
+          </a:p>
+        </p:txBody>
+      </p:sp>
+      <p:sp>
+        <p:nvSpPr>
+          <p:cNvPr id="7" name="TextBox 6"/>
+          <p:cNvSpPr txBox="1"/>
+          <p:nvPr/>
+        </p:nvSpPr>
+        <p:spPr>
+          <a:xfrm>
+            <a:off x="365760" y="795528"/>
+            <a:ext cx="475488" cy="475488"/>
+          </a:xfrm>
+          <a:prstGeom prst="rect">
+            <a:avLst/>
+          </a:prstGeom>
+          <a:noFill/>
+        </p:spPr>
+        <p:txBody>
+          <a:bodyPr wrap="square" anchor="ctr">
+            <a:spAutoFit/>
+          </a:bodyPr>
+          <a:lstStyle/>
+          <a:p>
+            <a:pPr algn="ctr">
+              <a:lnSpc>
+                <a:spcPct val="100000"/>
+              </a:lnSpc>
+            </a:pPr>
+            <a:r>
+              <a:rPr sz="1500" b="1">
+                <a:solidFill>
+                  <a:srgbClr val="FFFFFF"/>
+                </a:solidFill>
+                <a:latin typeface="Malgun Gothic"/>
+              </a:rPr>
+              <a:t>23</a:t>
             </a:r>
           </a:p>
         </p:txBody>
@@ -20532,6 +20948,1086 @@
                 <a:latin typeface="Malgun Gothic"/>
               </a:rPr>
               <a:t>🌐 www.mangoi.co.kr    📞 1644-0561    ✉ support@mangoi.co.kr</a:t>
+            </a:r>
+          </a:p>
+        </p:txBody>
+      </p:sp>
+    </p:spTree>
+  </p:cSld>
+  <p:clrMapOvr>
+    <a:masterClrMapping/>
+  </p:clrMapOvr>
+</p:sld>
+</file>
+
+<file path=ppt/slides/slide27.xml><?xml version="1.0" encoding="utf-8"?>
+<p:sld xmlns:a="http://schemas.openxmlformats.org/drawingml/2006/main" xmlns:p="http://schemas.openxmlformats.org/presentationml/2006/main" xmlns:r="http://schemas.openxmlformats.org/officeDocument/2006/relationships">
+  <p:cSld>
+    <p:spTree>
+      <p:nvGrpSpPr>
+        <p:cNvPr id="1" name=""/>
+        <p:cNvGrpSpPr/>
+        <p:nvPr/>
+      </p:nvGrpSpPr>
+      <p:grpSpPr/>
+      <p:sp>
+        <p:nvSpPr>
+          <p:cNvPr id="2" name="Rectangle 1"/>
+          <p:cNvSpPr/>
+          <p:nvPr/>
+        </p:nvSpPr>
+        <p:spPr>
+          <a:xfrm>
+            <a:off x="0" y="0"/>
+            <a:ext cx="12191695" cy="566928"/>
+          </a:xfrm>
+          <a:prstGeom prst="rect">
+            <a:avLst/>
+          </a:prstGeom>
+          <a:solidFill>
+            <a:srgbClr val="E11D48"/>
+          </a:solidFill>
+          <a:ln>
+            <a:noFill/>
+          </a:ln>
+          <a:effectLst/>
+        </p:spPr>
+        <p:style>
+          <a:lnRef idx="1">
+            <a:schemeClr val="accent1"/>
+          </a:lnRef>
+          <a:fillRef idx="3">
+            <a:schemeClr val="accent1"/>
+          </a:fillRef>
+          <a:effectRef idx="2">
+            <a:schemeClr val="accent1"/>
+          </a:effectRef>
+          <a:fontRef idx="minor">
+            <a:schemeClr val="lt1"/>
+          </a:fontRef>
+        </p:style>
+        <p:txBody>
+          <a:bodyPr rtlCol="0" anchor="ctr"/>
+          <a:lstStyle/>
+          <a:p>
+            <a:pPr algn="ctr"/>
+          </a:p>
+        </p:txBody>
+      </p:sp>
+      <p:sp>
+        <p:nvSpPr>
+          <p:cNvPr id="3" name="Rectangle 2"/>
+          <p:cNvSpPr/>
+          <p:nvPr/>
+        </p:nvSpPr>
+        <p:spPr>
+          <a:xfrm>
+            <a:off x="0" y="566928"/>
+            <a:ext cx="12191695" cy="54864"/>
+          </a:xfrm>
+          <a:prstGeom prst="rect">
+            <a:avLst/>
+          </a:prstGeom>
+          <a:solidFill>
+            <a:srgbClr val="0EA5E9"/>
+          </a:solidFill>
+          <a:ln>
+            <a:noFill/>
+          </a:ln>
+          <a:effectLst/>
+        </p:spPr>
+        <p:style>
+          <a:lnRef idx="1">
+            <a:schemeClr val="accent1"/>
+          </a:lnRef>
+          <a:fillRef idx="3">
+            <a:schemeClr val="accent1"/>
+          </a:fillRef>
+          <a:effectRef idx="2">
+            <a:schemeClr val="accent1"/>
+          </a:effectRef>
+          <a:fontRef idx="minor">
+            <a:schemeClr val="lt1"/>
+          </a:fontRef>
+        </p:style>
+        <p:txBody>
+          <a:bodyPr rtlCol="0" anchor="ctr"/>
+          <a:lstStyle/>
+          <a:p>
+            <a:pPr algn="ctr"/>
+          </a:p>
+        </p:txBody>
+      </p:sp>
+      <p:sp>
+        <p:nvSpPr>
+          <p:cNvPr id="4" name="TextBox 3"/>
+          <p:cNvSpPr txBox="1"/>
+          <p:nvPr/>
+        </p:nvSpPr>
+        <p:spPr>
+          <a:xfrm>
+            <a:off x="365760" y="27432"/>
+            <a:ext cx="7315200" cy="502920"/>
+          </a:xfrm>
+          <a:prstGeom prst="rect">
+            <a:avLst/>
+          </a:prstGeom>
+          <a:noFill/>
+        </p:spPr>
+        <p:txBody>
+          <a:bodyPr wrap="square" anchor="ctr">
+            <a:spAutoFit/>
+          </a:bodyPr>
+          <a:lstStyle/>
+          <a:p>
+            <a:pPr algn="l">
+              <a:lnSpc>
+                <a:spcPct val="100000"/>
+              </a:lnSpc>
+            </a:pPr>
+            <a:r>
+              <a:rPr sz="1500" b="1">
+                <a:solidFill>
+                  <a:srgbClr val="FFFFFF"/>
+                </a:solidFill>
+                <a:latin typeface="Malgun Gothic"/>
+              </a:rPr>
+              <a:t>🤝 망고아이 대리점용 사용설명서</a:t>
+            </a:r>
+          </a:p>
+        </p:txBody>
+      </p:sp>
+      <p:sp>
+        <p:nvSpPr>
+          <p:cNvPr id="5" name="TextBox 4"/>
+          <p:cNvSpPr txBox="1"/>
+          <p:nvPr/>
+        </p:nvSpPr>
+        <p:spPr>
+          <a:xfrm>
+            <a:off x="8168335" y="27432"/>
+            <a:ext cx="3657600" cy="502920"/>
+          </a:xfrm>
+          <a:prstGeom prst="rect">
+            <a:avLst/>
+          </a:prstGeom>
+          <a:noFill/>
+        </p:spPr>
+        <p:txBody>
+          <a:bodyPr wrap="square" anchor="ctr">
+            <a:spAutoFit/>
+          </a:bodyPr>
+          <a:lstStyle/>
+          <a:p>
+            <a:pPr algn="r">
+              <a:lnSpc>
+                <a:spcPct val="100000"/>
+              </a:lnSpc>
+            </a:pPr>
+            <a:r>
+              <a:rPr sz="1300" b="1">
+                <a:solidFill>
+                  <a:srgbClr val="F1F5F9"/>
+                </a:solidFill>
+                <a:latin typeface="Malgun Gothic"/>
+              </a:rPr>
+              <a:t>차례</a:t>
+            </a:r>
+          </a:p>
+        </p:txBody>
+      </p:sp>
+      <p:sp>
+        <p:nvSpPr>
+          <p:cNvPr id="6" name="TextBox 5"/>
+          <p:cNvSpPr txBox="1"/>
+          <p:nvPr/>
+        </p:nvSpPr>
+        <p:spPr>
+          <a:xfrm>
+            <a:off x="365760" y="749808"/>
+            <a:ext cx="7315200" cy="502920"/>
+          </a:xfrm>
+          <a:prstGeom prst="rect">
+            <a:avLst/>
+          </a:prstGeom>
+          <a:noFill/>
+        </p:spPr>
+        <p:txBody>
+          <a:bodyPr wrap="none">
+            <a:spAutoFit/>
+          </a:bodyPr>
+          <a:lstStyle/>
+          <a:p>
+            <a:r>
+              <a:rPr sz="2200" b="1">
+                <a:solidFill>
+                  <a:srgbClr val="1E2340"/>
+                </a:solidFill>
+                <a:latin typeface="Malgun Gothic"/>
+              </a:rPr>
+              <a:t>📑 차례</a:t>
+            </a:r>
+          </a:p>
+        </p:txBody>
+      </p:sp>
+      <p:sp>
+        <p:nvSpPr>
+          <p:cNvPr id="7" name="TextBox 6"/>
+          <p:cNvSpPr txBox="1"/>
+          <p:nvPr/>
+        </p:nvSpPr>
+        <p:spPr>
+          <a:xfrm>
+            <a:off x="365760" y="1417320"/>
+            <a:ext cx="5500116" cy="5212080"/>
+          </a:xfrm>
+          <a:prstGeom prst="rect">
+            <a:avLst/>
+          </a:prstGeom>
+          <a:noFill/>
+        </p:spPr>
+        <p:txBody>
+          <a:bodyPr wrap="none">
+            <a:spAutoFit/>
+          </a:bodyPr>
+          <a:lstStyle/>
+          <a:p>
+            <a:pPr>
+              <a:spcAft>
+                <a:spcPts val="1935"/>
+              </a:spcAft>
+            </a:pPr>
+            <a:r>
+              <a:rPr sz="1100" b="1">
+                <a:solidFill>
+                  <a:srgbClr val="4F46E5"/>
+                </a:solidFill>
+                <a:latin typeface="Malgun Gothic"/>
+              </a:rPr>
+              <a:t>·   </a:t>
+            </a:r>
+            <a:r>
+              <a:rPr sz="1100">
+                <a:solidFill>
+                  <a:srgbClr val="334155"/>
+                </a:solidFill>
+                <a:latin typeface="Malgun Gothic"/>
+              </a:rPr>
+              <a:t>소개</a:t>
+            </a:r>
+            <a:r>
+              <a:rPr sz="950">
+                <a:solidFill>
+                  <a:srgbClr val="94A3B8"/>
+                </a:solidFill>
+                <a:latin typeface="Malgun Gothic"/>
+              </a:rPr>
+              <a:t>   ·  p.3</a:t>
+            </a:r>
+          </a:p>
+          <a:p>
+            <a:pPr>
+              <a:spcAft>
+                <a:spcPts val="1935"/>
+              </a:spcAft>
+            </a:pPr>
+            <a:r>
+              <a:rPr sz="1100" b="1">
+                <a:solidFill>
+                  <a:srgbClr val="4F46E5"/>
+                </a:solidFill>
+                <a:latin typeface="Malgun Gothic"/>
+              </a:rPr>
+              <a:t>01  </a:t>
+            </a:r>
+            <a:r>
+              <a:rPr sz="1100">
+                <a:solidFill>
+                  <a:srgbClr val="334155"/>
+                </a:solidFill>
+                <a:latin typeface="Malgun Gothic"/>
+              </a:rPr>
+              <a:t>🔐 대리점 로그인 &amp; 권한</a:t>
+            </a:r>
+            <a:r>
+              <a:rPr sz="950">
+                <a:solidFill>
+                  <a:srgbClr val="94A3B8"/>
+                </a:solidFill>
+                <a:latin typeface="Malgun Gothic"/>
+              </a:rPr>
+              <a:t>   ·  p.4</a:t>
+            </a:r>
+          </a:p>
+          <a:p>
+            <a:pPr>
+              <a:spcAft>
+                <a:spcPts val="1935"/>
+              </a:spcAft>
+            </a:pPr>
+            <a:r>
+              <a:rPr sz="1100" b="1">
+                <a:solidFill>
+                  <a:srgbClr val="4F46E5"/>
+                </a:solidFill>
+                <a:latin typeface="Malgun Gothic"/>
+              </a:rPr>
+              <a:t>02  </a:t>
+            </a:r>
+            <a:r>
+              <a:rPr sz="1100">
+                <a:solidFill>
+                  <a:srgbClr val="334155"/>
+                </a:solidFill>
+                <a:latin typeface="Malgun Gothic"/>
+              </a:rPr>
+              <a:t>👤 마이페이지 &amp; 관리자 대시보드</a:t>
+            </a:r>
+            <a:r>
+              <a:rPr sz="950">
+                <a:solidFill>
+                  <a:srgbClr val="94A3B8"/>
+                </a:solidFill>
+                <a:latin typeface="Malgun Gothic"/>
+              </a:rPr>
+              <a:t>   ·  p.5</a:t>
+            </a:r>
+          </a:p>
+          <a:p>
+            <a:pPr>
+              <a:spcAft>
+                <a:spcPts val="1935"/>
+              </a:spcAft>
+            </a:pPr>
+            <a:r>
+              <a:rPr sz="1100" b="1">
+                <a:solidFill>
+                  <a:srgbClr val="4F46E5"/>
+                </a:solidFill>
+                <a:latin typeface="Malgun Gothic"/>
+              </a:rPr>
+              <a:t>03  </a:t>
+            </a:r>
+            <a:r>
+              <a:rPr sz="1100">
+                <a:solidFill>
+                  <a:srgbClr val="334155"/>
+                </a:solidFill>
+                <a:latin typeface="Malgun Gothic"/>
+              </a:rPr>
+              <a:t>🏠 대리점 대시보드</a:t>
+            </a:r>
+            <a:r>
+              <a:rPr sz="950">
+                <a:solidFill>
+                  <a:srgbClr val="94A3B8"/>
+                </a:solidFill>
+                <a:latin typeface="Malgun Gothic"/>
+              </a:rPr>
+              <a:t>   ·  p.6</a:t>
+            </a:r>
+          </a:p>
+          <a:p>
+            <a:pPr>
+              <a:spcAft>
+                <a:spcPts val="1935"/>
+              </a:spcAft>
+            </a:pPr>
+            <a:r>
+              <a:rPr sz="1100" b="1">
+                <a:solidFill>
+                  <a:srgbClr val="4F46E5"/>
+                </a:solidFill>
+                <a:latin typeface="Malgun Gothic"/>
+              </a:rPr>
+              <a:t>04  </a:t>
+            </a:r>
+            <a:r>
+              <a:rPr sz="1100">
+                <a:solidFill>
+                  <a:srgbClr val="334155"/>
+                </a:solidFill>
+                <a:latin typeface="Malgun Gothic"/>
+              </a:rPr>
+              <a:t>🤖 AI 운영비서 활용</a:t>
+            </a:r>
+            <a:r>
+              <a:rPr sz="950">
+                <a:solidFill>
+                  <a:srgbClr val="94A3B8"/>
+                </a:solidFill>
+                <a:latin typeface="Malgun Gothic"/>
+              </a:rPr>
+              <a:t>   ·  p.7</a:t>
+            </a:r>
+          </a:p>
+          <a:p>
+            <a:pPr>
+              <a:spcAft>
+                <a:spcPts val="1935"/>
+              </a:spcAft>
+            </a:pPr>
+            <a:r>
+              <a:rPr sz="1100" b="1">
+                <a:solidFill>
+                  <a:srgbClr val="4F46E5"/>
+                </a:solidFill>
+                <a:latin typeface="Malgun Gothic"/>
+              </a:rPr>
+              <a:t>05  </a:t>
+            </a:r>
+            <a:r>
+              <a:rPr sz="1100">
+                <a:solidFill>
+                  <a:srgbClr val="334155"/>
+                </a:solidFill>
+                <a:latin typeface="Malgun Gothic"/>
+              </a:rPr>
+              <a:t>🧑‍🎓 학생 모집·등록·관리</a:t>
+            </a:r>
+            <a:r>
+              <a:rPr sz="950">
+                <a:solidFill>
+                  <a:srgbClr val="94A3B8"/>
+                </a:solidFill>
+                <a:latin typeface="Malgun Gothic"/>
+              </a:rPr>
+              <a:t>   ·  p.8</a:t>
+            </a:r>
+          </a:p>
+          <a:p>
+            <a:pPr>
+              <a:spcAft>
+                <a:spcPts val="1935"/>
+              </a:spcAft>
+            </a:pPr>
+            <a:r>
+              <a:rPr sz="1100" b="1">
+                <a:solidFill>
+                  <a:srgbClr val="4F46E5"/>
+                </a:solidFill>
+                <a:latin typeface="Malgun Gothic"/>
+              </a:rPr>
+              <a:t>06  </a:t>
+            </a:r>
+            <a:r>
+              <a:rPr sz="1100">
+                <a:solidFill>
+                  <a:srgbClr val="334155"/>
+                </a:solidFill>
+                <a:latin typeface="Malgun Gothic"/>
+              </a:rPr>
+              <a:t>👨‍👩‍👧 학부모 소통</a:t>
+            </a:r>
+            <a:r>
+              <a:rPr sz="950">
+                <a:solidFill>
+                  <a:srgbClr val="94A3B8"/>
+                </a:solidFill>
+                <a:latin typeface="Malgun Gothic"/>
+              </a:rPr>
+              <a:t>   ·  p.9</a:t>
+            </a:r>
+          </a:p>
+          <a:p>
+            <a:pPr>
+              <a:spcAft>
+                <a:spcPts val="1935"/>
+              </a:spcAft>
+            </a:pPr>
+            <a:r>
+              <a:rPr sz="1100" b="1">
+                <a:solidFill>
+                  <a:srgbClr val="4F46E5"/>
+                </a:solidFill>
+                <a:latin typeface="Malgun Gothic"/>
+              </a:rPr>
+              <a:t>07  </a:t>
+            </a:r>
+            <a:r>
+              <a:rPr sz="1100">
+                <a:solidFill>
+                  <a:srgbClr val="334155"/>
+                </a:solidFill>
+                <a:latin typeface="Malgun Gothic"/>
+              </a:rPr>
+              <a:t>📅 수업 예약·배정</a:t>
+            </a:r>
+            <a:r>
+              <a:rPr sz="950">
+                <a:solidFill>
+                  <a:srgbClr val="94A3B8"/>
+                </a:solidFill>
+                <a:latin typeface="Malgun Gothic"/>
+              </a:rPr>
+              <a:t>   ·  p.10</a:t>
+            </a:r>
+          </a:p>
+          <a:p>
+            <a:pPr>
+              <a:spcAft>
+                <a:spcPts val="1935"/>
+              </a:spcAft>
+            </a:pPr>
+            <a:r>
+              <a:rPr sz="1100" b="1">
+                <a:solidFill>
+                  <a:srgbClr val="4F46E5"/>
+                </a:solidFill>
+                <a:latin typeface="Malgun Gothic"/>
+              </a:rPr>
+              <a:t>08  </a:t>
+            </a:r>
+            <a:r>
+              <a:rPr sz="1100">
+                <a:solidFill>
+                  <a:srgbClr val="334155"/>
+                </a:solidFill>
+                <a:latin typeface="Malgun Gothic"/>
+              </a:rPr>
+              <a:t>💳 결제·수납 관리</a:t>
+            </a:r>
+            <a:r>
+              <a:rPr sz="950">
+                <a:solidFill>
+                  <a:srgbClr val="94A3B8"/>
+                </a:solidFill>
+                <a:latin typeface="Malgun Gothic"/>
+              </a:rPr>
+              <a:t>   ·  p.11</a:t>
+            </a:r>
+          </a:p>
+          <a:p>
+            <a:pPr>
+              <a:spcAft>
+                <a:spcPts val="1935"/>
+              </a:spcAft>
+            </a:pPr>
+            <a:r>
+              <a:rPr sz="1100" b="1">
+                <a:solidFill>
+                  <a:srgbClr val="4F46E5"/>
+                </a:solidFill>
+                <a:latin typeface="Malgun Gothic"/>
+              </a:rPr>
+              <a:t>09  </a:t>
+            </a:r>
+            <a:r>
+              <a:rPr sz="1100">
+                <a:solidFill>
+                  <a:srgbClr val="334155"/>
+                </a:solidFill>
+                <a:latin typeface="Malgun Gothic"/>
+              </a:rPr>
+              <a:t>📈 학생 학습 현황·리포트</a:t>
+            </a:r>
+            <a:r>
+              <a:rPr sz="950">
+                <a:solidFill>
+                  <a:srgbClr val="94A3B8"/>
+                </a:solidFill>
+                <a:latin typeface="Malgun Gothic"/>
+              </a:rPr>
+              <a:t>   ·  p.12</a:t>
+            </a:r>
+          </a:p>
+          <a:p>
+            <a:pPr>
+              <a:spcAft>
+                <a:spcPts val="1935"/>
+              </a:spcAft>
+            </a:pPr>
+            <a:r>
+              <a:rPr sz="1100" b="1">
+                <a:solidFill>
+                  <a:srgbClr val="4F46E5"/>
+                </a:solidFill>
+                <a:latin typeface="Malgun Gothic"/>
+              </a:rPr>
+              <a:t>10  </a:t>
+            </a:r>
+            <a:r>
+              <a:rPr sz="1100">
+                <a:solidFill>
+                  <a:srgbClr val="334155"/>
+                </a:solidFill>
+                <a:latin typeface="Malgun Gothic"/>
+              </a:rPr>
+              <a:t>🌳 대리점 정산</a:t>
+            </a:r>
+            <a:r>
+              <a:rPr sz="950">
+                <a:solidFill>
+                  <a:srgbClr val="94A3B8"/>
+                </a:solidFill>
+                <a:latin typeface="Malgun Gothic"/>
+              </a:rPr>
+              <a:t>   ·  p.13</a:t>
+            </a:r>
+          </a:p>
+          <a:p>
+            <a:pPr>
+              <a:spcAft>
+                <a:spcPts val="1935"/>
+              </a:spcAft>
+            </a:pPr>
+            <a:r>
+              <a:rPr sz="1100" b="1">
+                <a:solidFill>
+                  <a:srgbClr val="4F46E5"/>
+                </a:solidFill>
+                <a:latin typeface="Malgun Gothic"/>
+              </a:rPr>
+              <a:t>11  </a:t>
+            </a:r>
+            <a:r>
+              <a:rPr sz="1100">
+                <a:solidFill>
+                  <a:srgbClr val="334155"/>
+                </a:solidFill>
+                <a:latin typeface="Malgun Gothic"/>
+              </a:rPr>
+              <a:t>🧲 이탈 방지 (내 학생 케어)</a:t>
+            </a:r>
+            <a:r>
+              <a:rPr sz="950">
+                <a:solidFill>
+                  <a:srgbClr val="94A3B8"/>
+                </a:solidFill>
+                <a:latin typeface="Malgun Gothic"/>
+              </a:rPr>
+              <a:t>   ·  p.14</a:t>
+            </a:r>
+          </a:p>
+        </p:txBody>
+      </p:sp>
+      <p:sp>
+        <p:nvSpPr>
+          <p:cNvPr id="8" name="TextBox 7"/>
+          <p:cNvSpPr txBox="1"/>
+          <p:nvPr/>
+        </p:nvSpPr>
+        <p:spPr>
+          <a:xfrm>
+            <a:off x="6094476" y="1417320"/>
+            <a:ext cx="5500116" cy="5212080"/>
+          </a:xfrm>
+          <a:prstGeom prst="rect">
+            <a:avLst/>
+          </a:prstGeom>
+          <a:noFill/>
+        </p:spPr>
+        <p:txBody>
+          <a:bodyPr wrap="none">
+            <a:spAutoFit/>
+          </a:bodyPr>
+          <a:lstStyle/>
+          <a:p>
+            <a:pPr>
+              <a:spcAft>
+                <a:spcPts val="1935"/>
+              </a:spcAft>
+            </a:pPr>
+            <a:r>
+              <a:rPr sz="1100" b="1">
+                <a:solidFill>
+                  <a:srgbClr val="4F46E5"/>
+                </a:solidFill>
+                <a:latin typeface="Malgun Gothic"/>
+              </a:rPr>
+              <a:t>12  </a:t>
+            </a:r>
+            <a:r>
+              <a:rPr sz="1100">
+                <a:solidFill>
+                  <a:srgbClr val="334155"/>
+                </a:solidFill>
+                <a:latin typeface="Malgun Gothic"/>
+              </a:rPr>
+              <a:t>💬 신규 상담·모객</a:t>
+            </a:r>
+            <a:r>
+              <a:rPr sz="950">
+                <a:solidFill>
+                  <a:srgbClr val="94A3B8"/>
+                </a:solidFill>
+                <a:latin typeface="Malgun Gothic"/>
+              </a:rPr>
+              <a:t>   ·  p.15</a:t>
+            </a:r>
+          </a:p>
+          <a:p>
+            <a:pPr>
+              <a:spcAft>
+                <a:spcPts val="1935"/>
+              </a:spcAft>
+            </a:pPr>
+            <a:r>
+              <a:rPr sz="1100" b="1">
+                <a:solidFill>
+                  <a:srgbClr val="4F46E5"/>
+                </a:solidFill>
+                <a:latin typeface="Malgun Gothic"/>
+              </a:rPr>
+              <a:t>13  </a:t>
+            </a:r>
+            <a:r>
+              <a:rPr sz="1100">
+                <a:solidFill>
+                  <a:srgbClr val="334155"/>
+                </a:solidFill>
+                <a:latin typeface="Malgun Gothic"/>
+              </a:rPr>
+              <a:t>🎧 고객센터·지원</a:t>
+            </a:r>
+            <a:r>
+              <a:rPr sz="950">
+                <a:solidFill>
+                  <a:srgbClr val="94A3B8"/>
+                </a:solidFill>
+                <a:latin typeface="Malgun Gothic"/>
+              </a:rPr>
+              <a:t>   ·  p.16</a:t>
+            </a:r>
+          </a:p>
+          <a:p>
+            <a:pPr>
+              <a:spcAft>
+                <a:spcPts val="1935"/>
+              </a:spcAft>
+            </a:pPr>
+            <a:r>
+              <a:rPr sz="1100" b="1">
+                <a:solidFill>
+                  <a:srgbClr val="4F46E5"/>
+                </a:solidFill>
+                <a:latin typeface="Malgun Gothic"/>
+              </a:rPr>
+              <a:t>14  </a:t>
+            </a:r>
+            <a:r>
+              <a:rPr sz="1100">
+                <a:solidFill>
+                  <a:srgbClr val="334155"/>
+                </a:solidFill>
+                <a:latin typeface="Malgun Gothic"/>
+              </a:rPr>
+              <a:t>🕐 한국·필리핀 듀얼 시계</a:t>
+            </a:r>
+            <a:r>
+              <a:rPr sz="950">
+                <a:solidFill>
+                  <a:srgbClr val="94A3B8"/>
+                </a:solidFill>
+                <a:latin typeface="Malgun Gothic"/>
+              </a:rPr>
+              <a:t>   ·  p.17</a:t>
+            </a:r>
+          </a:p>
+          <a:p>
+            <a:pPr>
+              <a:spcAft>
+                <a:spcPts val="1935"/>
+              </a:spcAft>
+            </a:pPr>
+            <a:r>
+              <a:rPr sz="1100" b="1">
+                <a:solidFill>
+                  <a:srgbClr val="4F46E5"/>
+                </a:solidFill>
+                <a:latin typeface="Malgun Gothic"/>
+              </a:rPr>
+              <a:t>15  </a:t>
+            </a:r>
+            <a:r>
+              <a:rPr sz="1100">
+                <a:solidFill>
+                  <a:srgbClr val="334155"/>
+                </a:solidFill>
+                <a:latin typeface="Malgun Gothic"/>
+              </a:rPr>
+              <a:t>🇨🇳 중국어 발음 코치</a:t>
+            </a:r>
+            <a:r>
+              <a:rPr sz="950">
+                <a:solidFill>
+                  <a:srgbClr val="94A3B8"/>
+                </a:solidFill>
+                <a:latin typeface="Malgun Gothic"/>
+              </a:rPr>
+              <a:t>   ·  p.18</a:t>
+            </a:r>
+          </a:p>
+          <a:p>
+            <a:pPr>
+              <a:spcAft>
+                <a:spcPts val="1935"/>
+              </a:spcAft>
+            </a:pPr>
+            <a:r>
+              <a:rPr sz="1100" b="1">
+                <a:solidFill>
+                  <a:srgbClr val="4F46E5"/>
+                </a:solidFill>
+                <a:latin typeface="Malgun Gothic"/>
+              </a:rPr>
+              <a:t>16  </a:t>
+            </a:r>
+            <a:r>
+              <a:rPr sz="1100">
+                <a:solidFill>
+                  <a:srgbClr val="334155"/>
+                </a:solidFill>
+                <a:latin typeface="Malgun Gothic"/>
+              </a:rPr>
+              <a:t>🌟 수업 중 칭찬 포인트 (이해·활용)</a:t>
+            </a:r>
+            <a:r>
+              <a:rPr sz="950">
+                <a:solidFill>
+                  <a:srgbClr val="94A3B8"/>
+                </a:solidFill>
+                <a:latin typeface="Malgun Gothic"/>
+              </a:rPr>
+              <a:t>   ·  p.19</a:t>
+            </a:r>
+          </a:p>
+          <a:p>
+            <a:pPr>
+              <a:spcAft>
+                <a:spcPts val="1935"/>
+              </a:spcAft>
+            </a:pPr>
+            <a:r>
+              <a:rPr sz="1100" b="1">
+                <a:solidFill>
+                  <a:srgbClr val="4F46E5"/>
+                </a:solidFill>
+                <a:latin typeface="Malgun Gothic"/>
+              </a:rPr>
+              <a:t>17  </a:t>
+            </a:r>
+            <a:r>
+              <a:rPr sz="1100">
+                <a:solidFill>
+                  <a:srgbClr val="334155"/>
+                </a:solidFill>
+                <a:latin typeface="Malgun Gothic"/>
+              </a:rPr>
+              <a:t>📢 공지 스튜디오 (포스터 + 팝업)</a:t>
+            </a:r>
+            <a:r>
+              <a:rPr sz="950">
+                <a:solidFill>
+                  <a:srgbClr val="94A3B8"/>
+                </a:solidFill>
+                <a:latin typeface="Malgun Gothic"/>
+              </a:rPr>
+              <a:t>   ·  p.20</a:t>
+            </a:r>
+          </a:p>
+          <a:p>
+            <a:pPr>
+              <a:spcAft>
+                <a:spcPts val="1935"/>
+              </a:spcAft>
+            </a:pPr>
+            <a:r>
+              <a:rPr sz="1100" b="1">
+                <a:solidFill>
+                  <a:srgbClr val="4F46E5"/>
+                </a:solidFill>
+                <a:latin typeface="Malgun Gothic"/>
+              </a:rPr>
+              <a:t>18  </a:t>
+            </a:r>
+            <a:r>
+              <a:rPr sz="1100">
+                <a:solidFill>
+                  <a:srgbClr val="334155"/>
+                </a:solidFill>
+                <a:latin typeface="Malgun Gothic"/>
+              </a:rPr>
+              <a:t>🤖 AI 운영비서에게 시키기</a:t>
+            </a:r>
+            <a:r>
+              <a:rPr sz="950">
+                <a:solidFill>
+                  <a:srgbClr val="94A3B8"/>
+                </a:solidFill>
+                <a:latin typeface="Malgun Gothic"/>
+              </a:rPr>
+              <a:t>   ·  p.21</a:t>
+            </a:r>
+          </a:p>
+          <a:p>
+            <a:pPr>
+              <a:spcAft>
+                <a:spcPts val="1935"/>
+              </a:spcAft>
+            </a:pPr>
+            <a:r>
+              <a:rPr sz="1100" b="1">
+                <a:solidFill>
+                  <a:srgbClr val="4F46E5"/>
+                </a:solidFill>
+                <a:latin typeface="Malgun Gothic"/>
+              </a:rPr>
+              <a:t>19  </a:t>
+            </a:r>
+            <a:r>
+              <a:rPr sz="1100">
+                <a:solidFill>
+                  <a:srgbClr val="334155"/>
+                </a:solidFill>
+                <a:latin typeface="Malgun Gothic"/>
+              </a:rPr>
+              <a:t>대리점 기능 한눈에</a:t>
+            </a:r>
+            <a:r>
+              <a:rPr sz="950">
+                <a:solidFill>
+                  <a:srgbClr val="94A3B8"/>
+                </a:solidFill>
+                <a:latin typeface="Malgun Gothic"/>
+              </a:rPr>
+              <a:t>   ·  p.22</a:t>
+            </a:r>
+          </a:p>
+          <a:p>
+            <a:pPr>
+              <a:spcAft>
+                <a:spcPts val="1935"/>
+              </a:spcAft>
+            </a:pPr>
+            <a:r>
+              <a:rPr sz="1100" b="1">
+                <a:solidFill>
+                  <a:srgbClr val="4F46E5"/>
+                </a:solidFill>
+                <a:latin typeface="Malgun Gothic"/>
+              </a:rPr>
+              <a:t>20  </a:t>
+            </a:r>
+            <a:r>
+              <a:rPr sz="1100">
+                <a:solidFill>
+                  <a:srgbClr val="334155"/>
+                </a:solidFill>
+                <a:latin typeface="Malgun Gothic"/>
+              </a:rPr>
+              <a:t>한눈에 보는 데이터</a:t>
+            </a:r>
+            <a:r>
+              <a:rPr sz="950">
+                <a:solidFill>
+                  <a:srgbClr val="94A3B8"/>
+                </a:solidFill>
+                <a:latin typeface="Malgun Gothic"/>
+              </a:rPr>
+              <a:t>   ·  p.23</a:t>
+            </a:r>
+          </a:p>
+          <a:p>
+            <a:pPr>
+              <a:spcAft>
+                <a:spcPts val="1935"/>
+              </a:spcAft>
+            </a:pPr>
+            <a:r>
+              <a:rPr sz="1100" b="1">
+                <a:solidFill>
+                  <a:srgbClr val="4F46E5"/>
+                </a:solidFill>
+                <a:latin typeface="Malgun Gothic"/>
+              </a:rPr>
+              <a:t>21  </a:t>
+            </a:r>
+            <a:r>
+              <a:rPr sz="1100">
+                <a:solidFill>
+                  <a:srgbClr val="334155"/>
+                </a:solidFill>
+                <a:latin typeface="Malgun Gothic"/>
+              </a:rPr>
+              <a:t>자주 묻는 질문 (FAQ)</a:t>
+            </a:r>
+            <a:r>
+              <a:rPr sz="950">
+                <a:solidFill>
+                  <a:srgbClr val="94A3B8"/>
+                </a:solidFill>
+                <a:latin typeface="Malgun Gothic"/>
+              </a:rPr>
+              <a:t>   ·  p.24</a:t>
+            </a:r>
+          </a:p>
+          <a:p>
+            <a:pPr>
+              <a:spcAft>
+                <a:spcPts val="1935"/>
+              </a:spcAft>
+            </a:pPr>
+            <a:r>
+              <a:rPr sz="1100" b="1">
+                <a:solidFill>
+                  <a:srgbClr val="4F46E5"/>
+                </a:solidFill>
+                <a:latin typeface="Malgun Gothic"/>
+              </a:rPr>
+              <a:t>22  </a:t>
+            </a:r>
+            <a:r>
+              <a:rPr sz="1100">
+                <a:solidFill>
+                  <a:srgbClr val="334155"/>
+                </a:solidFill>
+                <a:latin typeface="Malgun Gothic"/>
+              </a:rPr>
+              <a:t>대리점 운영 체크리스트</a:t>
+            </a:r>
+            <a:r>
+              <a:rPr sz="950">
+                <a:solidFill>
+                  <a:srgbClr val="94A3B8"/>
+                </a:solidFill>
+                <a:latin typeface="Malgun Gothic"/>
+              </a:rPr>
+              <a:t>   ·  p.25</a:t>
+            </a:r>
+          </a:p>
+          <a:p>
+            <a:pPr>
+              <a:spcAft>
+                <a:spcPts val="1935"/>
+              </a:spcAft>
+            </a:pPr>
+            <a:r>
+              <a:rPr sz="1100" b="1">
+                <a:solidFill>
+                  <a:srgbClr val="4F46E5"/>
+                </a:solidFill>
+                <a:latin typeface="Malgun Gothic"/>
+              </a:rPr>
+              <a:t>23  </a:t>
+            </a:r>
+            <a:r>
+              <a:rPr sz="1100">
+                <a:solidFill>
+                  <a:srgbClr val="334155"/>
+                </a:solidFill>
+                <a:latin typeface="Malgun Gothic"/>
+              </a:rPr>
+              <a:t>마무리 · 대리점 성장을 위한 실천 가이드</a:t>
+            </a:r>
+            <a:r>
+              <a:rPr sz="950">
+                <a:solidFill>
+                  <a:srgbClr val="94A3B8"/>
+                </a:solidFill>
+                <a:latin typeface="Malgun Gothic"/>
+              </a:rPr>
+              <a:t>   ·  p.26</a:t>
             </a:r>
           </a:p>
         </p:txBody>

--- a/cloudflare-deploy/public/library/agency/agency-kr.pptx
+++ b/cloudflare-deploy/public/library/agency/agency-kr.pptx
@@ -6,7 +6,7 @@
   </p:sldMasterIdLst>
   <p:sldIdLst>
     <p:sldId id="256" r:id="rId7"/>
-    <p:sldId id="282" r:id="rId33"/>
+    <p:sldId id="283" r:id="rId34"/>
     <p:sldId id="257" r:id="rId8"/>
     <p:sldId id="258" r:id="rId9"/>
     <p:sldId id="259" r:id="rId10"/>
@@ -32,6 +32,7 @@
     <p:sldId id="279" r:id="rId30"/>
     <p:sldId id="280" r:id="rId31"/>
     <p:sldId id="281" r:id="rId32"/>
+    <p:sldId id="282" r:id="rId33"/>
   </p:sldIdLst>
   <p:sldSz cx="12191695" cy="6858000" type="screen4x3"/>
   <p:notesSz cx="6858000" cy="9144000"/>
@@ -15696,6 +15697,992 @@
 </file>
 
 <file path=ppt/slides/slide21.xml><?xml version="1.0" encoding="utf-8"?>
+<p:sld xmlns:a="http://schemas.openxmlformats.org/drawingml/2006/main" xmlns:p="http://schemas.openxmlformats.org/presentationml/2006/main" xmlns:r="http://schemas.openxmlformats.org/officeDocument/2006/relationships">
+  <p:cSld>
+    <p:bg>
+      <p:bgPr>
+        <a:solidFill>
+          <a:srgbClr val="FFFFFF"/>
+        </a:solidFill>
+        <a:effectLst/>
+      </p:bgPr>
+    </p:bg>
+    <p:spTree>
+      <p:nvGrpSpPr>
+        <p:cNvPr id="1" name=""/>
+        <p:cNvGrpSpPr/>
+        <p:nvPr/>
+      </p:nvGrpSpPr>
+      <p:grpSpPr/>
+      <p:sp>
+        <p:nvSpPr>
+          <p:cNvPr id="2" name="Rectangle 1"/>
+          <p:cNvSpPr/>
+          <p:nvPr/>
+        </p:nvSpPr>
+        <p:spPr>
+          <a:xfrm>
+            <a:off x="0" y="0"/>
+            <a:ext cx="12191695" cy="566928"/>
+          </a:xfrm>
+          <a:prstGeom prst="rect">
+            <a:avLst/>
+          </a:prstGeom>
+          <a:solidFill>
+            <a:srgbClr val="E11D48"/>
+          </a:solidFill>
+          <a:ln>
+            <a:noFill/>
+          </a:ln>
+          <a:effectLst/>
+        </p:spPr>
+        <p:style>
+          <a:lnRef idx="1">
+            <a:schemeClr val="accent1"/>
+          </a:lnRef>
+          <a:fillRef idx="3">
+            <a:schemeClr val="accent1"/>
+          </a:fillRef>
+          <a:effectRef idx="2">
+            <a:schemeClr val="accent1"/>
+          </a:effectRef>
+          <a:fontRef idx="minor">
+            <a:schemeClr val="lt1"/>
+          </a:fontRef>
+        </p:style>
+        <p:txBody>
+          <a:bodyPr rtlCol="0" anchor="ctr"/>
+          <a:lstStyle/>
+          <a:p>
+            <a:pPr algn="ctr"/>
+          </a:p>
+        </p:txBody>
+      </p:sp>
+      <p:sp>
+        <p:nvSpPr>
+          <p:cNvPr id="3" name="Rectangle 2"/>
+          <p:cNvSpPr/>
+          <p:nvPr/>
+        </p:nvSpPr>
+        <p:spPr>
+          <a:xfrm>
+            <a:off x="0" y="566928"/>
+            <a:ext cx="12191695" cy="54864"/>
+          </a:xfrm>
+          <a:prstGeom prst="rect">
+            <a:avLst/>
+          </a:prstGeom>
+          <a:solidFill>
+            <a:srgbClr val="0EA5E9"/>
+          </a:solidFill>
+          <a:ln>
+            <a:noFill/>
+          </a:ln>
+          <a:effectLst/>
+        </p:spPr>
+        <p:style>
+          <a:lnRef idx="1">
+            <a:schemeClr val="accent1"/>
+          </a:lnRef>
+          <a:fillRef idx="3">
+            <a:schemeClr val="accent1"/>
+          </a:fillRef>
+          <a:effectRef idx="2">
+            <a:schemeClr val="accent1"/>
+          </a:effectRef>
+          <a:fontRef idx="minor">
+            <a:schemeClr val="lt1"/>
+          </a:fontRef>
+        </p:style>
+        <p:txBody>
+          <a:bodyPr rtlCol="0" anchor="ctr"/>
+          <a:lstStyle/>
+          <a:p>
+            <a:pPr algn="ctr"/>
+          </a:p>
+        </p:txBody>
+      </p:sp>
+      <p:sp>
+        <p:nvSpPr>
+          <p:cNvPr id="4" name="TextBox 3"/>
+          <p:cNvSpPr txBox="1"/>
+          <p:nvPr/>
+        </p:nvSpPr>
+        <p:spPr>
+          <a:xfrm>
+            <a:off x="365760" y="27432"/>
+            <a:ext cx="7315200" cy="502920"/>
+          </a:xfrm>
+          <a:prstGeom prst="rect">
+            <a:avLst/>
+          </a:prstGeom>
+          <a:noFill/>
+        </p:spPr>
+        <p:txBody>
+          <a:bodyPr wrap="square" anchor="ctr">
+            <a:spAutoFit/>
+          </a:bodyPr>
+          <a:lstStyle/>
+          <a:p>
+            <a:pPr algn="l">
+              <a:lnSpc>
+                <a:spcPct val="100000"/>
+              </a:lnSpc>
+            </a:pPr>
+            <a:r>
+              <a:rPr sz="1500" b="1">
+                <a:solidFill>
+                  <a:srgbClr val="FFFFFF"/>
+                </a:solidFill>
+                <a:latin typeface="Malgun Gothic"/>
+              </a:rPr>
+              <a:t>🤝 망고아이 대리점용 사용설명서</a:t>
+            </a:r>
+          </a:p>
+        </p:txBody>
+      </p:sp>
+      <p:sp>
+        <p:nvSpPr>
+          <p:cNvPr id="5" name="TextBox 4"/>
+          <p:cNvSpPr txBox="1"/>
+          <p:nvPr/>
+        </p:nvSpPr>
+        <p:spPr>
+          <a:xfrm>
+            <a:off x="8168335" y="27432"/>
+            <a:ext cx="3657600" cy="502920"/>
+          </a:xfrm>
+          <a:prstGeom prst="rect">
+            <a:avLst/>
+          </a:prstGeom>
+          <a:noFill/>
+        </p:spPr>
+        <p:txBody>
+          <a:bodyPr wrap="square" anchor="ctr">
+            <a:spAutoFit/>
+          </a:bodyPr>
+          <a:lstStyle/>
+          <a:p>
+            <a:pPr algn="r">
+              <a:lnSpc>
+                <a:spcPct val="100000"/>
+              </a:lnSpc>
+            </a:pPr>
+            <a:r>
+              <a:rPr sz="1300" b="1">
+                <a:solidFill>
+                  <a:srgbClr val="F1F5F9"/>
+                </a:solidFill>
+                <a:latin typeface="Malgun Gothic"/>
+              </a:rPr>
+              <a:t>주요 기능 사용법</a:t>
+            </a:r>
+          </a:p>
+        </p:txBody>
+      </p:sp>
+      <p:sp>
+        <p:nvSpPr>
+          <p:cNvPr id="6" name="Rounded Rectangle 5"/>
+          <p:cNvSpPr/>
+          <p:nvPr/>
+        </p:nvSpPr>
+        <p:spPr>
+          <a:xfrm>
+            <a:off x="365760" y="822960"/>
+            <a:ext cx="868680" cy="868680"/>
+          </a:xfrm>
+          <a:prstGeom prst="roundRect">
+            <a:avLst/>
+          </a:prstGeom>
+          <a:solidFill>
+            <a:srgbClr val="E11D48"/>
+          </a:solidFill>
+          <a:ln>
+            <a:noFill/>
+          </a:ln>
+          <a:effectLst/>
+        </p:spPr>
+        <p:style>
+          <a:lnRef idx="1">
+            <a:schemeClr val="accent1"/>
+          </a:lnRef>
+          <a:fillRef idx="3">
+            <a:schemeClr val="accent1"/>
+          </a:fillRef>
+          <a:effectRef idx="2">
+            <a:schemeClr val="accent1"/>
+          </a:effectRef>
+          <a:fontRef idx="minor">
+            <a:schemeClr val="lt1"/>
+          </a:fontRef>
+        </p:style>
+        <p:txBody>
+          <a:bodyPr rtlCol="0" anchor="ctr"/>
+          <a:lstStyle/>
+          <a:p>
+            <a:pPr algn="ctr"/>
+          </a:p>
+        </p:txBody>
+      </p:sp>
+      <p:sp>
+        <p:nvSpPr>
+          <p:cNvPr id="7" name="TextBox 6"/>
+          <p:cNvSpPr txBox="1"/>
+          <p:nvPr/>
+        </p:nvSpPr>
+        <p:spPr>
+          <a:xfrm>
+            <a:off x="365760" y="822960"/>
+            <a:ext cx="868680" cy="868680"/>
+          </a:xfrm>
+          <a:prstGeom prst="rect">
+            <a:avLst/>
+          </a:prstGeom>
+          <a:noFill/>
+        </p:spPr>
+        <p:txBody>
+          <a:bodyPr wrap="square" anchor="ctr">
+            <a:spAutoFit/>
+          </a:bodyPr>
+          <a:lstStyle/>
+          <a:p>
+            <a:pPr algn="ctr">
+              <a:lnSpc>
+                <a:spcPct val="100000"/>
+              </a:lnSpc>
+            </a:pPr>
+            <a:r>
+              <a:rPr sz="2600" b="1">
+                <a:solidFill>
+                  <a:srgbClr val="FFFFFF"/>
+                </a:solidFill>
+                <a:latin typeface="Malgun Gothic"/>
+              </a:rPr>
+              <a:t>19</a:t>
+            </a:r>
+          </a:p>
+        </p:txBody>
+      </p:sp>
+      <p:sp>
+        <p:nvSpPr>
+          <p:cNvPr id="8" name="TextBox 7"/>
+          <p:cNvSpPr txBox="1"/>
+          <p:nvPr/>
+        </p:nvSpPr>
+        <p:spPr>
+          <a:xfrm>
+            <a:off x="1371600" y="822960"/>
+            <a:ext cx="10424160" cy="502920"/>
+          </a:xfrm>
+          <a:prstGeom prst="rect">
+            <a:avLst/>
+          </a:prstGeom>
+          <a:noFill/>
+        </p:spPr>
+        <p:txBody>
+          <a:bodyPr wrap="square" anchor="t">
+            <a:spAutoFit/>
+          </a:bodyPr>
+          <a:lstStyle/>
+          <a:p>
+            <a:pPr algn="l">
+              <a:lnSpc>
+                <a:spcPct val="100000"/>
+              </a:lnSpc>
+            </a:pPr>
+            <a:r>
+              <a:rPr sz="2300" b="1">
+                <a:solidFill>
+                  <a:srgbClr val="1E2340"/>
+                </a:solidFill>
+                <a:latin typeface="Malgun Gothic"/>
+              </a:rPr>
+              <a:t>💬 자료실 카카오톡 링크 공유</a:t>
+            </a:r>
+          </a:p>
+        </p:txBody>
+      </p:sp>
+      <p:sp>
+        <p:nvSpPr>
+          <p:cNvPr id="9" name="TextBox 8"/>
+          <p:cNvSpPr txBox="1"/>
+          <p:nvPr/>
+        </p:nvSpPr>
+        <p:spPr>
+          <a:xfrm>
+            <a:off x="1417320" y="1353312"/>
+            <a:ext cx="10424160" cy="320040"/>
+          </a:xfrm>
+          <a:prstGeom prst="rect">
+            <a:avLst/>
+          </a:prstGeom>
+          <a:noFill/>
+        </p:spPr>
+        <p:txBody>
+          <a:bodyPr wrap="square" anchor="t">
+            <a:spAutoFit/>
+          </a:bodyPr>
+          <a:lstStyle/>
+          <a:p>
+            <a:pPr algn="l">
+              <a:lnSpc>
+                <a:spcPct val="100000"/>
+              </a:lnSpc>
+            </a:pPr>
+            <a:r>
+              <a:rPr sz="1300" b="0">
+                <a:solidFill>
+                  <a:srgbClr val="64748B"/>
+                </a:solidFill>
+                <a:latin typeface="Malgun Gothic"/>
+              </a:rPr>
+              <a:t>영상·문서를 원본 화질 그대로 카톡으로</a:t>
+            </a:r>
+          </a:p>
+        </p:txBody>
+      </p:sp>
+      <p:sp>
+        <p:nvSpPr>
+          <p:cNvPr id="10" name="Rounded Rectangle 9"/>
+          <p:cNvSpPr/>
+          <p:nvPr/>
+        </p:nvSpPr>
+        <p:spPr>
+          <a:xfrm>
+            <a:off x="365760" y="1828800"/>
+            <a:ext cx="11430000" cy="777240"/>
+          </a:xfrm>
+          <a:prstGeom prst="roundRect">
+            <a:avLst/>
+          </a:prstGeom>
+          <a:solidFill>
+            <a:srgbClr val="FFF1F2"/>
+          </a:solidFill>
+          <a:ln>
+            <a:noFill/>
+          </a:ln>
+          <a:effectLst/>
+        </p:spPr>
+        <p:style>
+          <a:lnRef idx="1">
+            <a:schemeClr val="accent1"/>
+          </a:lnRef>
+          <a:fillRef idx="3">
+            <a:schemeClr val="accent1"/>
+          </a:fillRef>
+          <a:effectRef idx="2">
+            <a:schemeClr val="accent1"/>
+          </a:effectRef>
+          <a:fontRef idx="minor">
+            <a:schemeClr val="lt1"/>
+          </a:fontRef>
+        </p:style>
+        <p:txBody>
+          <a:bodyPr rtlCol="0" anchor="ctr"/>
+          <a:lstStyle/>
+          <a:p>
+            <a:pPr algn="ctr"/>
+          </a:p>
+        </p:txBody>
+      </p:sp>
+      <p:sp>
+        <p:nvSpPr>
+          <p:cNvPr id="11" name="TextBox 10"/>
+          <p:cNvSpPr txBox="1"/>
+          <p:nvPr/>
+        </p:nvSpPr>
+        <p:spPr>
+          <a:xfrm>
+            <a:off x="548640" y="1901952"/>
+            <a:ext cx="11064240" cy="640080"/>
+          </a:xfrm>
+          <a:prstGeom prst="rect">
+            <a:avLst/>
+          </a:prstGeom>
+          <a:noFill/>
+        </p:spPr>
+        <p:txBody>
+          <a:bodyPr wrap="square" anchor="t">
+            <a:spAutoFit/>
+          </a:bodyPr>
+          <a:lstStyle/>
+          <a:p>
+            <a:pPr algn="l">
+              <a:lnSpc>
+                <a:spcPct val="115000"/>
+              </a:lnSpc>
+            </a:pPr>
+            <a:r>
+              <a:rPr sz="1200" b="0">
+                <a:solidFill>
+                  <a:srgbClr val="334155"/>
+                </a:solidFill>
+                <a:latin typeface="Malgun Gothic"/>
+              </a:rPr>
+              <a:t>자료실의 설명서·영상마다 ‘💬 카톡 링크복사’ 버튼이 생겼어요. 카카오톡에 파일을 첨부하면 화질이 눌리지만, 링크로 보내면 원본 화질 그대로 재생돼요. 버튼 한 번으로 링크가 복사되니 학부모·강사 안내가 훨씬 쉬워요.</a:t>
+            </a:r>
+          </a:p>
+        </p:txBody>
+      </p:sp>
+      <p:sp>
+        <p:nvSpPr>
+          <p:cNvPr id="12" name="TextBox 11"/>
+          <p:cNvSpPr txBox="1"/>
+          <p:nvPr/>
+        </p:nvSpPr>
+        <p:spPr>
+          <a:xfrm>
+            <a:off x="457200" y="2743200"/>
+            <a:ext cx="5669280" cy="320040"/>
+          </a:xfrm>
+          <a:prstGeom prst="rect">
+            <a:avLst/>
+          </a:prstGeom>
+          <a:noFill/>
+        </p:spPr>
+        <p:txBody>
+          <a:bodyPr wrap="square" anchor="t">
+            <a:spAutoFit/>
+          </a:bodyPr>
+          <a:lstStyle/>
+          <a:p>
+            <a:pPr algn="l">
+              <a:lnSpc>
+                <a:spcPct val="100000"/>
+              </a:lnSpc>
+            </a:pPr>
+            <a:r>
+              <a:rPr sz="1350" b="1">
+                <a:solidFill>
+                  <a:srgbClr val="E11D48"/>
+                </a:solidFill>
+                <a:latin typeface="Malgun Gothic"/>
+              </a:rPr>
+              <a:t>사용 방법</a:t>
+            </a:r>
+          </a:p>
+        </p:txBody>
+      </p:sp>
+      <p:sp>
+        <p:nvSpPr>
+          <p:cNvPr id="13" name="TextBox 12"/>
+          <p:cNvSpPr txBox="1"/>
+          <p:nvPr/>
+        </p:nvSpPr>
+        <p:spPr>
+          <a:xfrm>
+            <a:off x="457200" y="3108960"/>
+            <a:ext cx="5669280" cy="2377440"/>
+          </a:xfrm>
+          <a:prstGeom prst="rect">
+            <a:avLst/>
+          </a:prstGeom>
+          <a:noFill/>
+        </p:spPr>
+        <p:txBody>
+          <a:bodyPr wrap="square">
+            <a:spAutoFit/>
+          </a:bodyPr>
+          <a:lstStyle/>
+          <a:p>
+            <a:pPr>
+              <a:lnSpc>
+                <a:spcPct val="115000"/>
+              </a:lnSpc>
+              <a:spcAft>
+                <a:spcPts val="600"/>
+              </a:spcAft>
+            </a:pPr>
+            <a:r>
+              <a:rPr sz="1050" b="1">
+                <a:solidFill>
+                  <a:srgbClr val="E11D48"/>
+                </a:solidFill>
+                <a:latin typeface="Malgun Gothic"/>
+              </a:rPr>
+              <a:t>● </a:t>
+            </a:r>
+            <a:r>
+              <a:rPr sz="1250">
+                <a:solidFill>
+                  <a:srgbClr val="334155"/>
+                </a:solidFill>
+                <a:latin typeface="Malgun Gothic"/>
+              </a:rPr>
+              <a:t>관리자 자료실에서 공유할 파일 옆 💬 카톡 링크복사를 눌러요.</a:t>
+            </a:r>
+          </a:p>
+          <a:p>
+            <a:pPr>
+              <a:lnSpc>
+                <a:spcPct val="115000"/>
+              </a:lnSpc>
+              <a:spcAft>
+                <a:spcPts val="600"/>
+              </a:spcAft>
+            </a:pPr>
+            <a:r>
+              <a:rPr sz="1050" b="1">
+                <a:solidFill>
+                  <a:srgbClr val="E11D48"/>
+                </a:solidFill>
+                <a:latin typeface="Malgun Gothic"/>
+              </a:rPr>
+              <a:t>● </a:t>
+            </a:r>
+            <a:r>
+              <a:rPr sz="1250">
+                <a:solidFill>
+                  <a:srgbClr val="334155"/>
+                </a:solidFill>
+                <a:latin typeface="Malgun Gothic"/>
+              </a:rPr>
+              <a:t>카카오톡 대화방에 붙여넣기로 보내요.</a:t>
+            </a:r>
+          </a:p>
+          <a:p>
+            <a:pPr>
+              <a:lnSpc>
+                <a:spcPct val="115000"/>
+              </a:lnSpc>
+              <a:spcAft>
+                <a:spcPts val="600"/>
+              </a:spcAft>
+            </a:pPr>
+            <a:r>
+              <a:rPr sz="1050" b="1">
+                <a:solidFill>
+                  <a:srgbClr val="E11D48"/>
+                </a:solidFill>
+                <a:latin typeface="Malgun Gothic"/>
+              </a:rPr>
+              <a:t>● </a:t>
+            </a:r>
+            <a:r>
+              <a:rPr sz="1250">
+                <a:solidFill>
+                  <a:srgbClr val="334155"/>
+                </a:solidFill>
+                <a:latin typeface="Malgun Gothic"/>
+              </a:rPr>
+              <a:t>받는 사람은 링크를 눌러 원본 화질로 바로 보거나 내려받아요.</a:t>
+            </a:r>
+          </a:p>
+        </p:txBody>
+      </p:sp>
+      <p:sp>
+        <p:nvSpPr>
+          <p:cNvPr id="14" name="Rounded Rectangle 13"/>
+          <p:cNvSpPr/>
+          <p:nvPr/>
+        </p:nvSpPr>
+        <p:spPr>
+          <a:xfrm>
+            <a:off x="457200" y="4398264"/>
+            <a:ext cx="5669280" cy="1005840"/>
+          </a:xfrm>
+          <a:prstGeom prst="roundRect">
+            <a:avLst/>
+          </a:prstGeom>
+          <a:solidFill>
+            <a:srgbClr val="F4F7FF"/>
+          </a:solidFill>
+          <a:ln w="12700">
+            <a:solidFill>
+              <a:srgbClr val="E11D48"/>
+            </a:solidFill>
+          </a:ln>
+          <a:effectLst/>
+        </p:spPr>
+        <p:style>
+          <a:lnRef idx="1">
+            <a:schemeClr val="accent1"/>
+          </a:lnRef>
+          <a:fillRef idx="3">
+            <a:schemeClr val="accent1"/>
+          </a:fillRef>
+          <a:effectRef idx="2">
+            <a:schemeClr val="accent1"/>
+          </a:effectRef>
+          <a:fontRef idx="minor">
+            <a:schemeClr val="lt1"/>
+          </a:fontRef>
+        </p:style>
+        <p:txBody>
+          <a:bodyPr rtlCol="0" anchor="ctr"/>
+          <a:lstStyle/>
+          <a:p>
+            <a:pPr algn="ctr"/>
+          </a:p>
+        </p:txBody>
+      </p:sp>
+      <p:sp>
+        <p:nvSpPr>
+          <p:cNvPr id="15" name="TextBox 14"/>
+          <p:cNvSpPr txBox="1"/>
+          <p:nvPr/>
+        </p:nvSpPr>
+        <p:spPr>
+          <a:xfrm>
+            <a:off x="594360" y="4453127"/>
+            <a:ext cx="5394960" cy="274320"/>
+          </a:xfrm>
+          <a:prstGeom prst="rect">
+            <a:avLst/>
+          </a:prstGeom>
+          <a:noFill/>
+        </p:spPr>
+        <p:txBody>
+          <a:bodyPr wrap="square" anchor="t">
+            <a:spAutoFit/>
+          </a:bodyPr>
+          <a:lstStyle/>
+          <a:p>
+            <a:pPr algn="l">
+              <a:lnSpc>
+                <a:spcPct val="100000"/>
+              </a:lnSpc>
+            </a:pPr>
+            <a:r>
+              <a:rPr sz="1150" b="1">
+                <a:solidFill>
+                  <a:srgbClr val="E11D48"/>
+                </a:solidFill>
+                <a:latin typeface="Malgun Gothic"/>
+              </a:rPr>
+              <a:t>✅ 핵심 포인트</a:t>
+            </a:r>
+          </a:p>
+        </p:txBody>
+      </p:sp>
+      <p:sp>
+        <p:nvSpPr>
+          <p:cNvPr id="16" name="TextBox 15"/>
+          <p:cNvSpPr txBox="1"/>
+          <p:nvPr/>
+        </p:nvSpPr>
+        <p:spPr>
+          <a:xfrm>
+            <a:off x="594360" y="4727448"/>
+            <a:ext cx="5394960" cy="640080"/>
+          </a:xfrm>
+          <a:prstGeom prst="rect">
+            <a:avLst/>
+          </a:prstGeom>
+          <a:noFill/>
+        </p:spPr>
+        <p:txBody>
+          <a:bodyPr wrap="square">
+            <a:spAutoFit/>
+          </a:bodyPr>
+          <a:lstStyle/>
+          <a:p>
+            <a:pPr>
+              <a:lnSpc>
+                <a:spcPct val="115000"/>
+              </a:lnSpc>
+              <a:spcAft>
+                <a:spcPts val="200"/>
+              </a:spcAft>
+            </a:pPr>
+            <a:r>
+              <a:rPr sz="900" b="1">
+                <a:solidFill>
+                  <a:srgbClr val="E11D48"/>
+                </a:solidFill>
+                <a:latin typeface="Malgun Gothic"/>
+              </a:rPr>
+              <a:t>● </a:t>
+            </a:r>
+            <a:r>
+              <a:rPr sz="1100">
+                <a:solidFill>
+                  <a:srgbClr val="334155"/>
+                </a:solidFill>
+                <a:latin typeface="Malgun Gothic"/>
+              </a:rPr>
+              <a:t>동영상은 링크 공유 = 원본 화질, 파일 첨부는 화질이 떨어져요.</a:t>
+            </a:r>
+          </a:p>
+          <a:p>
+            <a:pPr>
+              <a:lnSpc>
+                <a:spcPct val="115000"/>
+              </a:lnSpc>
+              <a:spcAft>
+                <a:spcPts val="200"/>
+              </a:spcAft>
+            </a:pPr>
+            <a:r>
+              <a:rPr sz="900" b="1">
+                <a:solidFill>
+                  <a:srgbClr val="E11D48"/>
+                </a:solidFill>
+                <a:latin typeface="Malgun Gothic"/>
+              </a:rPr>
+              <a:t>● </a:t>
+            </a:r>
+            <a:r>
+              <a:rPr sz="1100">
+                <a:solidFill>
+                  <a:srgbClr val="334155"/>
+                </a:solidFill>
+                <a:latin typeface="Malgun Gothic"/>
+              </a:rPr>
+              <a:t>설명서 PDF·PPT·영상 등 자료실 어디서나 같은 방식으로 공유돼요.</a:t>
+            </a:r>
+          </a:p>
+        </p:txBody>
+      </p:sp>
+      <p:sp>
+        <p:nvSpPr>
+          <p:cNvPr id="17" name="Rounded Rectangle 16"/>
+          <p:cNvSpPr/>
+          <p:nvPr/>
+        </p:nvSpPr>
+        <p:spPr>
+          <a:xfrm>
+            <a:off x="457200" y="5513831"/>
+            <a:ext cx="5669280" cy="640080"/>
+          </a:xfrm>
+          <a:prstGeom prst="roundRect">
+            <a:avLst/>
+          </a:prstGeom>
+          <a:solidFill>
+            <a:srgbClr val="FFFBEB"/>
+          </a:solidFill>
+          <a:ln w="12700">
+            <a:solidFill>
+              <a:srgbClr val="F59E0B"/>
+            </a:solidFill>
+          </a:ln>
+          <a:effectLst/>
+        </p:spPr>
+        <p:style>
+          <a:lnRef idx="1">
+            <a:schemeClr val="accent1"/>
+          </a:lnRef>
+          <a:fillRef idx="3">
+            <a:schemeClr val="accent1"/>
+          </a:fillRef>
+          <a:effectRef idx="2">
+            <a:schemeClr val="accent1"/>
+          </a:effectRef>
+          <a:fontRef idx="minor">
+            <a:schemeClr val="lt1"/>
+          </a:fontRef>
+        </p:style>
+        <p:txBody>
+          <a:bodyPr rtlCol="0" anchor="ctr"/>
+          <a:lstStyle/>
+          <a:p>
+            <a:pPr algn="ctr"/>
+          </a:p>
+        </p:txBody>
+      </p:sp>
+      <p:sp>
+        <p:nvSpPr>
+          <p:cNvPr id="18" name="TextBox 17"/>
+          <p:cNvSpPr txBox="1"/>
+          <p:nvPr/>
+        </p:nvSpPr>
+        <p:spPr>
+          <a:xfrm>
+            <a:off x="594360" y="5559551"/>
+            <a:ext cx="5394960" cy="548640"/>
+          </a:xfrm>
+          <a:prstGeom prst="rect">
+            <a:avLst/>
+          </a:prstGeom>
+          <a:noFill/>
+        </p:spPr>
+        <p:txBody>
+          <a:bodyPr wrap="square" anchor="t">
+            <a:spAutoFit/>
+          </a:bodyPr>
+          <a:lstStyle/>
+          <a:p>
+            <a:pPr algn="l">
+              <a:lnSpc>
+                <a:spcPct val="105000"/>
+              </a:lnSpc>
+            </a:pPr>
+            <a:r>
+              <a:rPr sz="1050" b="0">
+                <a:solidFill>
+                  <a:srgbClr val="92670A"/>
+                </a:solidFill>
+                <a:latin typeface="Malgun Gothic"/>
+              </a:rPr>
+              <a:t>⚠️ 알아두기 · 링크를 받은 사람은 누구나 열 수 있어요. 내부용 자료는 공유 대상을 확인하세요.</a:t>
+            </a:r>
+          </a:p>
+        </p:txBody>
+      </p:sp>
+      <p:sp>
+        <p:nvSpPr>
+          <p:cNvPr id="19" name="Rounded Rectangle 18"/>
+          <p:cNvSpPr/>
+          <p:nvPr/>
+        </p:nvSpPr>
+        <p:spPr>
+          <a:xfrm>
+            <a:off x="457200" y="6245351"/>
+            <a:ext cx="5669280" cy="658368"/>
+          </a:xfrm>
+          <a:prstGeom prst="roundRect">
+            <a:avLst/>
+          </a:prstGeom>
+          <a:solidFill>
+            <a:srgbClr val="FFF7E6"/>
+          </a:solidFill>
+          <a:ln w="12700">
+            <a:solidFill>
+              <a:srgbClr val="0EA5E9"/>
+            </a:solidFill>
+          </a:ln>
+          <a:effectLst/>
+        </p:spPr>
+        <p:style>
+          <a:lnRef idx="1">
+            <a:schemeClr val="accent1"/>
+          </a:lnRef>
+          <a:fillRef idx="3">
+            <a:schemeClr val="accent1"/>
+          </a:fillRef>
+          <a:effectRef idx="2">
+            <a:schemeClr val="accent1"/>
+          </a:effectRef>
+          <a:fontRef idx="minor">
+            <a:schemeClr val="lt1"/>
+          </a:fontRef>
+        </p:style>
+        <p:txBody>
+          <a:bodyPr rtlCol="0" anchor="ctr"/>
+          <a:lstStyle/>
+          <a:p>
+            <a:pPr algn="ctr"/>
+          </a:p>
+        </p:txBody>
+      </p:sp>
+      <p:sp>
+        <p:nvSpPr>
+          <p:cNvPr id="20" name="TextBox 19"/>
+          <p:cNvSpPr txBox="1"/>
+          <p:nvPr/>
+        </p:nvSpPr>
+        <p:spPr>
+          <a:xfrm>
+            <a:off x="594360" y="6291071"/>
+            <a:ext cx="5394960" cy="566928"/>
+          </a:xfrm>
+          <a:prstGeom prst="rect">
+            <a:avLst/>
+          </a:prstGeom>
+          <a:noFill/>
+        </p:spPr>
+        <p:txBody>
+          <a:bodyPr wrap="square" anchor="t">
+            <a:spAutoFit/>
+          </a:bodyPr>
+          <a:lstStyle/>
+          <a:p>
+            <a:pPr algn="l">
+              <a:lnSpc>
+                <a:spcPct val="105000"/>
+              </a:lnSpc>
+            </a:pPr>
+            <a:r>
+              <a:rPr sz="1050" b="0">
+                <a:solidFill>
+                  <a:srgbClr val="5B4A2A"/>
+                </a:solidFill>
+                <a:latin typeface="Malgun Gothic"/>
+              </a:rPr>
+              <a:t>💡 꿀팁 · 학부모 단체방에는 영상 설명서 링크 하나면 안내가 끝나요.</a:t>
+            </a:r>
+          </a:p>
+        </p:txBody>
+      </p:sp>
+      <p:sp>
+        <p:nvSpPr>
+          <p:cNvPr id="21" name="Rectangle 20"/>
+          <p:cNvSpPr/>
+          <p:nvPr/>
+        </p:nvSpPr>
+        <p:spPr>
+          <a:xfrm>
+            <a:off x="6300216" y="2345436"/>
+            <a:ext cx="5596128" cy="3538728"/>
+          </a:xfrm>
+          <a:prstGeom prst="rect">
+            <a:avLst/>
+          </a:prstGeom>
+          <a:solidFill>
+            <a:srgbClr val="FFFFFF"/>
+          </a:solidFill>
+          <a:ln w="12700">
+            <a:solidFill>
+              <a:srgbClr val="E2E8F0"/>
+            </a:solidFill>
+          </a:ln>
+          <a:effectLst/>
+        </p:spPr>
+        <p:style>
+          <a:lnRef idx="1">
+            <a:schemeClr val="accent1"/>
+          </a:lnRef>
+          <a:fillRef idx="3">
+            <a:schemeClr val="accent1"/>
+          </a:fillRef>
+          <a:effectRef idx="2">
+            <a:schemeClr val="accent1"/>
+          </a:effectRef>
+          <a:fontRef idx="minor">
+            <a:schemeClr val="lt1"/>
+          </a:fontRef>
+        </p:style>
+        <p:txBody>
+          <a:bodyPr rtlCol="0" anchor="ctr"/>
+          <a:lstStyle/>
+          <a:p>
+            <a:pPr algn="ctr"/>
+          </a:p>
+        </p:txBody>
+      </p:sp>
+      <p:pic>
+        <p:nvPicPr>
+          <p:cNvPr id="22" name="Picture 21" descr="admin_noticestudio.jpg"/>
+          <p:cNvPicPr>
+            <a:picLocks noChangeAspect="1"/>
+          </p:cNvPicPr>
+          <p:nvPr/>
+        </p:nvPicPr>
+        <p:blipFill>
+          <a:blip r:embed="rId2"/>
+          <a:stretch>
+            <a:fillRect/>
+          </a:stretch>
+        </p:blipFill>
+        <p:spPr>
+          <a:xfrm>
+            <a:off x="6355080" y="2400300"/>
+            <a:ext cx="5486400" cy="3429000"/>
+          </a:xfrm>
+          <a:prstGeom prst="rect">
+            <a:avLst/>
+          </a:prstGeom>
+        </p:spPr>
+      </p:pic>
+    </p:spTree>
+  </p:cSld>
+  <p:clrMapOvr>
+    <a:masterClrMapping/>
+  </p:clrMapOvr>
+</p:sld>
+</file>
+
+<file path=ppt/slides/slide22.xml><?xml version="1.0" encoding="utf-8"?>
 <p:sld xmlns:a="http://schemas.openxmlformats.org/drawingml/2006/main" xmlns:p="http://schemas.openxmlformats.org/presentationml/2006/main" xmlns:r="http://schemas.openxmlformats.org/officeDocument/2006/relationships">
   <p:cSld>
     <p:bg>
@@ -16870,434 +17857,6 @@
                 </a:solidFill>
                 <a:latin typeface="Malgun Gothic"/>
               </a:rPr>
-              <a:t>19</a:t>
-            </a:r>
-          </a:p>
-        </p:txBody>
-      </p:sp>
-    </p:spTree>
-  </p:cSld>
-  <p:clrMapOvr>
-    <a:masterClrMapping/>
-  </p:clrMapOvr>
-</p:sld>
-</file>
-
-<file path=ppt/slides/slide22.xml><?xml version="1.0" encoding="utf-8"?>
-<p:sld xmlns:a="http://schemas.openxmlformats.org/drawingml/2006/main" xmlns:p="http://schemas.openxmlformats.org/presentationml/2006/main" xmlns:r="http://schemas.openxmlformats.org/officeDocument/2006/relationships">
-  <p:cSld>
-    <p:bg>
-      <p:bgPr>
-        <a:solidFill>
-          <a:srgbClr val="FFFFFF"/>
-        </a:solidFill>
-        <a:effectLst/>
-      </p:bgPr>
-    </p:bg>
-    <p:spTree>
-      <p:nvGrpSpPr>
-        <p:cNvPr id="1" name=""/>
-        <p:cNvGrpSpPr/>
-        <p:nvPr/>
-      </p:nvGrpSpPr>
-      <p:grpSpPr/>
-      <p:sp>
-        <p:nvSpPr>
-          <p:cNvPr id="2" name="Rectangle 1"/>
-          <p:cNvSpPr/>
-          <p:nvPr/>
-        </p:nvSpPr>
-        <p:spPr>
-          <a:xfrm>
-            <a:off x="0" y="0"/>
-            <a:ext cx="12191695" cy="566928"/>
-          </a:xfrm>
-          <a:prstGeom prst="rect">
-            <a:avLst/>
-          </a:prstGeom>
-          <a:solidFill>
-            <a:srgbClr val="E11D48"/>
-          </a:solidFill>
-          <a:ln>
-            <a:noFill/>
-          </a:ln>
-          <a:effectLst/>
-        </p:spPr>
-        <p:style>
-          <a:lnRef idx="1">
-            <a:schemeClr val="accent1"/>
-          </a:lnRef>
-          <a:fillRef idx="3">
-            <a:schemeClr val="accent1"/>
-          </a:fillRef>
-          <a:effectRef idx="2">
-            <a:schemeClr val="accent1"/>
-          </a:effectRef>
-          <a:fontRef idx="minor">
-            <a:schemeClr val="lt1"/>
-          </a:fontRef>
-        </p:style>
-        <p:txBody>
-          <a:bodyPr rtlCol="0" anchor="ctr"/>
-          <a:lstStyle/>
-          <a:p>
-            <a:pPr algn="ctr"/>
-          </a:p>
-        </p:txBody>
-      </p:sp>
-      <p:sp>
-        <p:nvSpPr>
-          <p:cNvPr id="3" name="Rectangle 2"/>
-          <p:cNvSpPr/>
-          <p:nvPr/>
-        </p:nvSpPr>
-        <p:spPr>
-          <a:xfrm>
-            <a:off x="0" y="566928"/>
-            <a:ext cx="12191695" cy="54864"/>
-          </a:xfrm>
-          <a:prstGeom prst="rect">
-            <a:avLst/>
-          </a:prstGeom>
-          <a:solidFill>
-            <a:srgbClr val="0EA5E9"/>
-          </a:solidFill>
-          <a:ln>
-            <a:noFill/>
-          </a:ln>
-          <a:effectLst/>
-        </p:spPr>
-        <p:style>
-          <a:lnRef idx="1">
-            <a:schemeClr val="accent1"/>
-          </a:lnRef>
-          <a:fillRef idx="3">
-            <a:schemeClr val="accent1"/>
-          </a:fillRef>
-          <a:effectRef idx="2">
-            <a:schemeClr val="accent1"/>
-          </a:effectRef>
-          <a:fontRef idx="minor">
-            <a:schemeClr val="lt1"/>
-          </a:fontRef>
-        </p:style>
-        <p:txBody>
-          <a:bodyPr rtlCol="0" anchor="ctr"/>
-          <a:lstStyle/>
-          <a:p>
-            <a:pPr algn="ctr"/>
-          </a:p>
-        </p:txBody>
-      </p:sp>
-      <p:sp>
-        <p:nvSpPr>
-          <p:cNvPr id="4" name="TextBox 3"/>
-          <p:cNvSpPr txBox="1"/>
-          <p:nvPr/>
-        </p:nvSpPr>
-        <p:spPr>
-          <a:xfrm>
-            <a:off x="365760" y="27432"/>
-            <a:ext cx="7315200" cy="502920"/>
-          </a:xfrm>
-          <a:prstGeom prst="rect">
-            <a:avLst/>
-          </a:prstGeom>
-          <a:noFill/>
-        </p:spPr>
-        <p:txBody>
-          <a:bodyPr wrap="square" anchor="ctr">
-            <a:spAutoFit/>
-          </a:bodyPr>
-          <a:lstStyle/>
-          <a:p>
-            <a:pPr algn="l">
-              <a:lnSpc>
-                <a:spcPct val="100000"/>
-              </a:lnSpc>
-            </a:pPr>
-            <a:r>
-              <a:rPr sz="1500" b="1">
-                <a:solidFill>
-                  <a:srgbClr val="FFFFFF"/>
-                </a:solidFill>
-                <a:latin typeface="Malgun Gothic"/>
-              </a:rPr>
-              <a:t>🤝 망고아이 대리점용 사용설명서</a:t>
-            </a:r>
-          </a:p>
-        </p:txBody>
-      </p:sp>
-      <p:sp>
-        <p:nvSpPr>
-          <p:cNvPr id="5" name="TextBox 4"/>
-          <p:cNvSpPr txBox="1"/>
-          <p:nvPr/>
-        </p:nvSpPr>
-        <p:spPr>
-          <a:xfrm>
-            <a:off x="8168335" y="27432"/>
-            <a:ext cx="3657600" cy="502920"/>
-          </a:xfrm>
-          <a:prstGeom prst="rect">
-            <a:avLst/>
-          </a:prstGeom>
-          <a:noFill/>
-        </p:spPr>
-        <p:txBody>
-          <a:bodyPr wrap="square" anchor="ctr">
-            <a:spAutoFit/>
-          </a:bodyPr>
-          <a:lstStyle/>
-          <a:p>
-            <a:pPr algn="r">
-              <a:lnSpc>
-                <a:spcPct val="100000"/>
-              </a:lnSpc>
-            </a:pPr>
-            <a:r>
-              <a:rPr sz="1300" b="1">
-                <a:solidFill>
-                  <a:srgbClr val="F1F5F9"/>
-                </a:solidFill>
-                <a:latin typeface="Malgun Gothic"/>
-              </a:rPr>
-              <a:t>한눈에 보는 데이터</a:t>
-            </a:r>
-          </a:p>
-        </p:txBody>
-      </p:sp>
-      <p:sp>
-        <p:nvSpPr>
-          <p:cNvPr id="6" name="TextBox 5"/>
-          <p:cNvSpPr txBox="1"/>
-          <p:nvPr/>
-        </p:nvSpPr>
-        <p:spPr>
-          <a:xfrm>
-            <a:off x="987552" y="868680"/>
-            <a:ext cx="9144000" cy="457200"/>
-          </a:xfrm>
-          <a:prstGeom prst="rect">
-            <a:avLst/>
-          </a:prstGeom>
-          <a:noFill/>
-        </p:spPr>
-        <p:txBody>
-          <a:bodyPr wrap="square" anchor="t">
-            <a:spAutoFit/>
-          </a:bodyPr>
-          <a:lstStyle/>
-          <a:p>
-            <a:pPr algn="l">
-              <a:lnSpc>
-                <a:spcPct val="100000"/>
-              </a:lnSpc>
-            </a:pPr>
-            <a:r>
-              <a:rPr sz="2200" b="1">
-                <a:solidFill>
-                  <a:srgbClr val="E11D48"/>
-                </a:solidFill>
-                <a:latin typeface="Malgun Gothic"/>
-              </a:rPr>
-              <a:t>📊 한눈에 보는 데이터</a:t>
-            </a:r>
-          </a:p>
-        </p:txBody>
-      </p:sp>
-      <p:sp>
-        <p:nvSpPr>
-          <p:cNvPr id="7" name="TextBox 6"/>
-          <p:cNvSpPr txBox="1"/>
-          <p:nvPr/>
-        </p:nvSpPr>
-        <p:spPr>
-          <a:xfrm>
-            <a:off x="457200" y="1554480"/>
-            <a:ext cx="5486400" cy="365760"/>
-          </a:xfrm>
-          <a:prstGeom prst="rect">
-            <a:avLst/>
-          </a:prstGeom>
-          <a:noFill/>
-        </p:spPr>
-        <p:txBody>
-          <a:bodyPr wrap="square" anchor="t">
-            <a:spAutoFit/>
-          </a:bodyPr>
-          <a:lstStyle/>
-          <a:p>
-            <a:pPr algn="l">
-              <a:lnSpc>
-                <a:spcPct val="100000"/>
-              </a:lnSpc>
-            </a:pPr>
-            <a:r>
-              <a:rPr sz="1400" b="1">
-                <a:solidFill>
-                  <a:srgbClr val="1E2340"/>
-                </a:solidFill>
-                <a:latin typeface="Malgun Gothic"/>
-              </a:rPr>
-              <a:t>재원생 추이(예시)</a:t>
-            </a:r>
-          </a:p>
-        </p:txBody>
-      </p:sp>
-      <p:graphicFrame>
-        <p:nvGraphicFramePr>
-          <p:cNvPr id="8" name="Chart 7"/>
-          <p:cNvGraphicFramePr>
-            <a:graphicFrameLocks noGrp="1"/>
-          </p:cNvGraphicFramePr>
-          <p:nvPr/>
-        </p:nvGraphicFramePr>
-        <p:xfrm>
-          <a:off x="457200" y="1920240"/>
-          <a:ext cx="5486400" cy="4206240"/>
-        </p:xfrm>
-        <a:graphic>
-          <a:graphicData uri="http://schemas.openxmlformats.org/drawingml/2006/chart">
-            <c:chart xmlns:c="http://schemas.openxmlformats.org/drawingml/2006/chart" r:id="rId2"/>
-          </a:graphicData>
-        </a:graphic>
-      </p:graphicFrame>
-      <p:sp>
-        <p:nvSpPr>
-          <p:cNvPr id="9" name="TextBox 8"/>
-          <p:cNvSpPr txBox="1"/>
-          <p:nvPr/>
-        </p:nvSpPr>
-        <p:spPr>
-          <a:xfrm>
-            <a:off x="6309360" y="1554480"/>
-            <a:ext cx="5486400" cy="365760"/>
-          </a:xfrm>
-          <a:prstGeom prst="rect">
-            <a:avLst/>
-          </a:prstGeom>
-          <a:noFill/>
-        </p:spPr>
-        <p:txBody>
-          <a:bodyPr wrap="square" anchor="t">
-            <a:spAutoFit/>
-          </a:bodyPr>
-          <a:lstStyle/>
-          <a:p>
-            <a:pPr algn="l">
-              <a:lnSpc>
-                <a:spcPct val="100000"/>
-              </a:lnSpc>
-            </a:pPr>
-            <a:r>
-              <a:rPr sz="1400" b="1">
-                <a:solidFill>
-                  <a:srgbClr val="1E2340"/>
-                </a:solidFill>
-                <a:latin typeface="Malgun Gothic"/>
-              </a:rPr>
-              <a:t>이탈위험 분포(예시)</a:t>
-            </a:r>
-          </a:p>
-        </p:txBody>
-      </p:sp>
-      <p:graphicFrame>
-        <p:nvGraphicFramePr>
-          <p:cNvPr id="10" name="Chart 9"/>
-          <p:cNvGraphicFramePr>
-            <a:graphicFrameLocks noGrp="1"/>
-          </p:cNvGraphicFramePr>
-          <p:nvPr/>
-        </p:nvGraphicFramePr>
-        <p:xfrm>
-          <a:off x="6309360" y="1920240"/>
-          <a:ext cx="5486400" cy="4206240"/>
-        </p:xfrm>
-        <a:graphic>
-          <a:graphicData uri="http://schemas.openxmlformats.org/drawingml/2006/chart">
-            <c:chart xmlns:c="http://schemas.openxmlformats.org/drawingml/2006/chart" r:id="rId3"/>
-          </a:graphicData>
-        </a:graphic>
-      </p:graphicFrame>
-      <p:sp>
-        <p:nvSpPr>
-          <p:cNvPr id="6" name="Rounded Rectangle 5"/>
-          <p:cNvSpPr/>
-          <p:nvPr/>
-        </p:nvSpPr>
-        <p:spPr>
-          <a:xfrm>
-            <a:off x="365760" y="841247"/>
-            <a:ext cx="475488" cy="475488"/>
-          </a:xfrm>
-          <a:prstGeom prst="roundRect">
-            <a:avLst/>
-          </a:prstGeom>
-          <a:solidFill>
-            <a:srgbClr val="E11D48"/>
-          </a:solidFill>
-          <a:ln>
-            <a:noFill/>
-          </a:ln>
-          <a:effectLst/>
-        </p:spPr>
-        <p:style>
-          <a:lnRef idx="1">
-            <a:schemeClr val="accent1"/>
-          </a:lnRef>
-          <a:fillRef idx="3">
-            <a:schemeClr val="accent1"/>
-          </a:fillRef>
-          <a:effectRef idx="2">
-            <a:schemeClr val="accent1"/>
-          </a:effectRef>
-          <a:fontRef idx="minor">
-            <a:schemeClr val="lt1"/>
-          </a:fontRef>
-        </p:style>
-        <p:txBody>
-          <a:bodyPr rtlCol="0" anchor="ctr"/>
-          <a:lstStyle/>
-          <a:p>
-            <a:pPr algn="ctr"/>
-          </a:p>
-        </p:txBody>
-      </p:sp>
-      <p:sp>
-        <p:nvSpPr>
-          <p:cNvPr id="7" name="TextBox 6"/>
-          <p:cNvSpPr txBox="1"/>
-          <p:nvPr/>
-        </p:nvSpPr>
-        <p:spPr>
-          <a:xfrm>
-            <a:off x="365760" y="841247"/>
-            <a:ext cx="475488" cy="475488"/>
-          </a:xfrm>
-          <a:prstGeom prst="rect">
-            <a:avLst/>
-          </a:prstGeom>
-          <a:noFill/>
-        </p:spPr>
-        <p:txBody>
-          <a:bodyPr wrap="square" anchor="ctr">
-            <a:spAutoFit/>
-          </a:bodyPr>
-          <a:lstStyle/>
-          <a:p>
-            <a:pPr algn="ctr">
-              <a:lnSpc>
-                <a:spcPct val="100000"/>
-              </a:lnSpc>
-            </a:pPr>
-            <a:r>
-              <a:rPr sz="1500" b="1">
-                <a:solidFill>
-                  <a:srgbClr val="FFFFFF"/>
-                </a:solidFill>
-                <a:latin typeface="Malgun Gothic"/>
-              </a:rPr>
               <a:t>20</a:t>
             </a:r>
           </a:p>
@@ -17490,6 +18049,434 @@
                 </a:solidFill>
                 <a:latin typeface="Malgun Gothic"/>
               </a:rPr>
+              <a:t>한눈에 보는 데이터</a:t>
+            </a:r>
+          </a:p>
+        </p:txBody>
+      </p:sp>
+      <p:sp>
+        <p:nvSpPr>
+          <p:cNvPr id="6" name="TextBox 5"/>
+          <p:cNvSpPr txBox="1"/>
+          <p:nvPr/>
+        </p:nvSpPr>
+        <p:spPr>
+          <a:xfrm>
+            <a:off x="987552" y="868680"/>
+            <a:ext cx="9144000" cy="457200"/>
+          </a:xfrm>
+          <a:prstGeom prst="rect">
+            <a:avLst/>
+          </a:prstGeom>
+          <a:noFill/>
+        </p:spPr>
+        <p:txBody>
+          <a:bodyPr wrap="square" anchor="t">
+            <a:spAutoFit/>
+          </a:bodyPr>
+          <a:lstStyle/>
+          <a:p>
+            <a:pPr algn="l">
+              <a:lnSpc>
+                <a:spcPct val="100000"/>
+              </a:lnSpc>
+            </a:pPr>
+            <a:r>
+              <a:rPr sz="2200" b="1">
+                <a:solidFill>
+                  <a:srgbClr val="E11D48"/>
+                </a:solidFill>
+                <a:latin typeface="Malgun Gothic"/>
+              </a:rPr>
+              <a:t>📊 한눈에 보는 데이터</a:t>
+            </a:r>
+          </a:p>
+        </p:txBody>
+      </p:sp>
+      <p:sp>
+        <p:nvSpPr>
+          <p:cNvPr id="7" name="TextBox 6"/>
+          <p:cNvSpPr txBox="1"/>
+          <p:nvPr/>
+        </p:nvSpPr>
+        <p:spPr>
+          <a:xfrm>
+            <a:off x="457200" y="1554480"/>
+            <a:ext cx="5486400" cy="365760"/>
+          </a:xfrm>
+          <a:prstGeom prst="rect">
+            <a:avLst/>
+          </a:prstGeom>
+          <a:noFill/>
+        </p:spPr>
+        <p:txBody>
+          <a:bodyPr wrap="square" anchor="t">
+            <a:spAutoFit/>
+          </a:bodyPr>
+          <a:lstStyle/>
+          <a:p>
+            <a:pPr algn="l">
+              <a:lnSpc>
+                <a:spcPct val="100000"/>
+              </a:lnSpc>
+            </a:pPr>
+            <a:r>
+              <a:rPr sz="1400" b="1">
+                <a:solidFill>
+                  <a:srgbClr val="1E2340"/>
+                </a:solidFill>
+                <a:latin typeface="Malgun Gothic"/>
+              </a:rPr>
+              <a:t>재원생 추이(예시)</a:t>
+            </a:r>
+          </a:p>
+        </p:txBody>
+      </p:sp>
+      <p:graphicFrame>
+        <p:nvGraphicFramePr>
+          <p:cNvPr id="8" name="Chart 7"/>
+          <p:cNvGraphicFramePr>
+            <a:graphicFrameLocks noGrp="1"/>
+          </p:cNvGraphicFramePr>
+          <p:nvPr/>
+        </p:nvGraphicFramePr>
+        <p:xfrm>
+          <a:off x="457200" y="1920240"/>
+          <a:ext cx="5486400" cy="4206240"/>
+        </p:xfrm>
+        <a:graphic>
+          <a:graphicData uri="http://schemas.openxmlformats.org/drawingml/2006/chart">
+            <c:chart xmlns:c="http://schemas.openxmlformats.org/drawingml/2006/chart" r:id="rId2"/>
+          </a:graphicData>
+        </a:graphic>
+      </p:graphicFrame>
+      <p:sp>
+        <p:nvSpPr>
+          <p:cNvPr id="9" name="TextBox 8"/>
+          <p:cNvSpPr txBox="1"/>
+          <p:nvPr/>
+        </p:nvSpPr>
+        <p:spPr>
+          <a:xfrm>
+            <a:off x="6309360" y="1554480"/>
+            <a:ext cx="5486400" cy="365760"/>
+          </a:xfrm>
+          <a:prstGeom prst="rect">
+            <a:avLst/>
+          </a:prstGeom>
+          <a:noFill/>
+        </p:spPr>
+        <p:txBody>
+          <a:bodyPr wrap="square" anchor="t">
+            <a:spAutoFit/>
+          </a:bodyPr>
+          <a:lstStyle/>
+          <a:p>
+            <a:pPr algn="l">
+              <a:lnSpc>
+                <a:spcPct val="100000"/>
+              </a:lnSpc>
+            </a:pPr>
+            <a:r>
+              <a:rPr sz="1400" b="1">
+                <a:solidFill>
+                  <a:srgbClr val="1E2340"/>
+                </a:solidFill>
+                <a:latin typeface="Malgun Gothic"/>
+              </a:rPr>
+              <a:t>이탈위험 분포(예시)</a:t>
+            </a:r>
+          </a:p>
+        </p:txBody>
+      </p:sp>
+      <p:graphicFrame>
+        <p:nvGraphicFramePr>
+          <p:cNvPr id="10" name="Chart 9"/>
+          <p:cNvGraphicFramePr>
+            <a:graphicFrameLocks noGrp="1"/>
+          </p:cNvGraphicFramePr>
+          <p:nvPr/>
+        </p:nvGraphicFramePr>
+        <p:xfrm>
+          <a:off x="6309360" y="1920240"/>
+          <a:ext cx="5486400" cy="4206240"/>
+        </p:xfrm>
+        <a:graphic>
+          <a:graphicData uri="http://schemas.openxmlformats.org/drawingml/2006/chart">
+            <c:chart xmlns:c="http://schemas.openxmlformats.org/drawingml/2006/chart" r:id="rId3"/>
+          </a:graphicData>
+        </a:graphic>
+      </p:graphicFrame>
+      <p:sp>
+        <p:nvSpPr>
+          <p:cNvPr id="6" name="Rounded Rectangle 5"/>
+          <p:cNvSpPr/>
+          <p:nvPr/>
+        </p:nvSpPr>
+        <p:spPr>
+          <a:xfrm>
+            <a:off x="365760" y="841247"/>
+            <a:ext cx="475488" cy="475488"/>
+          </a:xfrm>
+          <a:prstGeom prst="roundRect">
+            <a:avLst/>
+          </a:prstGeom>
+          <a:solidFill>
+            <a:srgbClr val="E11D48"/>
+          </a:solidFill>
+          <a:ln>
+            <a:noFill/>
+          </a:ln>
+          <a:effectLst/>
+        </p:spPr>
+        <p:style>
+          <a:lnRef idx="1">
+            <a:schemeClr val="accent1"/>
+          </a:lnRef>
+          <a:fillRef idx="3">
+            <a:schemeClr val="accent1"/>
+          </a:fillRef>
+          <a:effectRef idx="2">
+            <a:schemeClr val="accent1"/>
+          </a:effectRef>
+          <a:fontRef idx="minor">
+            <a:schemeClr val="lt1"/>
+          </a:fontRef>
+        </p:style>
+        <p:txBody>
+          <a:bodyPr rtlCol="0" anchor="ctr"/>
+          <a:lstStyle/>
+          <a:p>
+            <a:pPr algn="ctr"/>
+          </a:p>
+        </p:txBody>
+      </p:sp>
+      <p:sp>
+        <p:nvSpPr>
+          <p:cNvPr id="7" name="TextBox 6"/>
+          <p:cNvSpPr txBox="1"/>
+          <p:nvPr/>
+        </p:nvSpPr>
+        <p:spPr>
+          <a:xfrm>
+            <a:off x="365760" y="841247"/>
+            <a:ext cx="475488" cy="475488"/>
+          </a:xfrm>
+          <a:prstGeom prst="rect">
+            <a:avLst/>
+          </a:prstGeom>
+          <a:noFill/>
+        </p:spPr>
+        <p:txBody>
+          <a:bodyPr wrap="square" anchor="ctr">
+            <a:spAutoFit/>
+          </a:bodyPr>
+          <a:lstStyle/>
+          <a:p>
+            <a:pPr algn="ctr">
+              <a:lnSpc>
+                <a:spcPct val="100000"/>
+              </a:lnSpc>
+            </a:pPr>
+            <a:r>
+              <a:rPr sz="1500" b="1">
+                <a:solidFill>
+                  <a:srgbClr val="FFFFFF"/>
+                </a:solidFill>
+                <a:latin typeface="Malgun Gothic"/>
+              </a:rPr>
+              <a:t>21</a:t>
+            </a:r>
+          </a:p>
+        </p:txBody>
+      </p:sp>
+    </p:spTree>
+  </p:cSld>
+  <p:clrMapOvr>
+    <a:masterClrMapping/>
+  </p:clrMapOvr>
+</p:sld>
+</file>
+
+<file path=ppt/slides/slide24.xml><?xml version="1.0" encoding="utf-8"?>
+<p:sld xmlns:a="http://schemas.openxmlformats.org/drawingml/2006/main" xmlns:p="http://schemas.openxmlformats.org/presentationml/2006/main" xmlns:r="http://schemas.openxmlformats.org/officeDocument/2006/relationships">
+  <p:cSld>
+    <p:bg>
+      <p:bgPr>
+        <a:solidFill>
+          <a:srgbClr val="FFFFFF"/>
+        </a:solidFill>
+        <a:effectLst/>
+      </p:bgPr>
+    </p:bg>
+    <p:spTree>
+      <p:nvGrpSpPr>
+        <p:cNvPr id="1" name=""/>
+        <p:cNvGrpSpPr/>
+        <p:nvPr/>
+      </p:nvGrpSpPr>
+      <p:grpSpPr/>
+      <p:sp>
+        <p:nvSpPr>
+          <p:cNvPr id="2" name="Rectangle 1"/>
+          <p:cNvSpPr/>
+          <p:nvPr/>
+        </p:nvSpPr>
+        <p:spPr>
+          <a:xfrm>
+            <a:off x="0" y="0"/>
+            <a:ext cx="12191695" cy="566928"/>
+          </a:xfrm>
+          <a:prstGeom prst="rect">
+            <a:avLst/>
+          </a:prstGeom>
+          <a:solidFill>
+            <a:srgbClr val="E11D48"/>
+          </a:solidFill>
+          <a:ln>
+            <a:noFill/>
+          </a:ln>
+          <a:effectLst/>
+        </p:spPr>
+        <p:style>
+          <a:lnRef idx="1">
+            <a:schemeClr val="accent1"/>
+          </a:lnRef>
+          <a:fillRef idx="3">
+            <a:schemeClr val="accent1"/>
+          </a:fillRef>
+          <a:effectRef idx="2">
+            <a:schemeClr val="accent1"/>
+          </a:effectRef>
+          <a:fontRef idx="minor">
+            <a:schemeClr val="lt1"/>
+          </a:fontRef>
+        </p:style>
+        <p:txBody>
+          <a:bodyPr rtlCol="0" anchor="ctr"/>
+          <a:lstStyle/>
+          <a:p>
+            <a:pPr algn="ctr"/>
+          </a:p>
+        </p:txBody>
+      </p:sp>
+      <p:sp>
+        <p:nvSpPr>
+          <p:cNvPr id="3" name="Rectangle 2"/>
+          <p:cNvSpPr/>
+          <p:nvPr/>
+        </p:nvSpPr>
+        <p:spPr>
+          <a:xfrm>
+            <a:off x="0" y="566928"/>
+            <a:ext cx="12191695" cy="54864"/>
+          </a:xfrm>
+          <a:prstGeom prst="rect">
+            <a:avLst/>
+          </a:prstGeom>
+          <a:solidFill>
+            <a:srgbClr val="0EA5E9"/>
+          </a:solidFill>
+          <a:ln>
+            <a:noFill/>
+          </a:ln>
+          <a:effectLst/>
+        </p:spPr>
+        <p:style>
+          <a:lnRef idx="1">
+            <a:schemeClr val="accent1"/>
+          </a:lnRef>
+          <a:fillRef idx="3">
+            <a:schemeClr val="accent1"/>
+          </a:fillRef>
+          <a:effectRef idx="2">
+            <a:schemeClr val="accent1"/>
+          </a:effectRef>
+          <a:fontRef idx="minor">
+            <a:schemeClr val="lt1"/>
+          </a:fontRef>
+        </p:style>
+        <p:txBody>
+          <a:bodyPr rtlCol="0" anchor="ctr"/>
+          <a:lstStyle/>
+          <a:p>
+            <a:pPr algn="ctr"/>
+          </a:p>
+        </p:txBody>
+      </p:sp>
+      <p:sp>
+        <p:nvSpPr>
+          <p:cNvPr id="4" name="TextBox 3"/>
+          <p:cNvSpPr txBox="1"/>
+          <p:nvPr/>
+        </p:nvSpPr>
+        <p:spPr>
+          <a:xfrm>
+            <a:off x="365760" y="27432"/>
+            <a:ext cx="7315200" cy="502920"/>
+          </a:xfrm>
+          <a:prstGeom prst="rect">
+            <a:avLst/>
+          </a:prstGeom>
+          <a:noFill/>
+        </p:spPr>
+        <p:txBody>
+          <a:bodyPr wrap="square" anchor="ctr">
+            <a:spAutoFit/>
+          </a:bodyPr>
+          <a:lstStyle/>
+          <a:p>
+            <a:pPr algn="l">
+              <a:lnSpc>
+                <a:spcPct val="100000"/>
+              </a:lnSpc>
+            </a:pPr>
+            <a:r>
+              <a:rPr sz="1500" b="1">
+                <a:solidFill>
+                  <a:srgbClr val="FFFFFF"/>
+                </a:solidFill>
+                <a:latin typeface="Malgun Gothic"/>
+              </a:rPr>
+              <a:t>🤝 망고아이 대리점용 사용설명서</a:t>
+            </a:r>
+          </a:p>
+        </p:txBody>
+      </p:sp>
+      <p:sp>
+        <p:nvSpPr>
+          <p:cNvPr id="5" name="TextBox 4"/>
+          <p:cNvSpPr txBox="1"/>
+          <p:nvPr/>
+        </p:nvSpPr>
+        <p:spPr>
+          <a:xfrm>
+            <a:off x="8168335" y="27432"/>
+            <a:ext cx="3657600" cy="502920"/>
+          </a:xfrm>
+          <a:prstGeom prst="rect">
+            <a:avLst/>
+          </a:prstGeom>
+          <a:noFill/>
+        </p:spPr>
+        <p:txBody>
+          <a:bodyPr wrap="square" anchor="ctr">
+            <a:spAutoFit/>
+          </a:bodyPr>
+          <a:lstStyle/>
+          <a:p>
+            <a:pPr algn="r">
+              <a:lnSpc>
+                <a:spcPct val="100000"/>
+              </a:lnSpc>
+            </a:pPr>
+            <a:r>
+              <a:rPr sz="1300" b="1">
+                <a:solidFill>
+                  <a:srgbClr val="F1F5F9"/>
+                </a:solidFill>
+                <a:latin typeface="Malgun Gothic"/>
+              </a:rPr>
               <a:t>자주 묻는 질문 (FAQ)</a:t>
             </a:r>
           </a:p>
@@ -18232,7 +19219,7 @@
                 </a:solidFill>
                 <a:latin typeface="Malgun Gothic"/>
               </a:rPr>
-              <a:t>21</a:t>
+              <a:t>22</a:t>
             </a:r>
           </a:p>
         </p:txBody>
@@ -18245,7 +19232,7 @@
 </p:sld>
 </file>
 
-<file path=ppt/slides/slide24.xml><?xml version="1.0" encoding="utf-8"?>
+<file path=ppt/slides/slide25.xml><?xml version="1.0" encoding="utf-8"?>
 <p:sld xmlns:a="http://schemas.openxmlformats.org/drawingml/2006/main" xmlns:p="http://schemas.openxmlformats.org/presentationml/2006/main" xmlns:r="http://schemas.openxmlformats.org/officeDocument/2006/relationships">
   <p:cSld>
     <p:bg>
@@ -19165,7 +20152,7 @@
                 </a:solidFill>
                 <a:latin typeface="Malgun Gothic"/>
               </a:rPr>
-              <a:t>22</a:t>
+              <a:t>23</a:t>
             </a:r>
           </a:p>
         </p:txBody>
@@ -19178,7 +20165,7 @@
 </p:sld>
 </file>
 
-<file path=ppt/slides/slide25.xml><?xml version="1.0" encoding="utf-8"?>
+<file path=ppt/slides/slide26.xml><?xml version="1.0" encoding="utf-8"?>
 <p:sld xmlns:a="http://schemas.openxmlformats.org/drawingml/2006/main" xmlns:p="http://schemas.openxmlformats.org/presentationml/2006/main" xmlns:r="http://schemas.openxmlformats.org/officeDocument/2006/relationships">
   <p:cSld>
     <p:bg>
@@ -20672,7 +21659,7 @@
                 </a:solidFill>
                 <a:latin typeface="Malgun Gothic"/>
               </a:rPr>
-              <a:t>23</a:t>
+              <a:t>24</a:t>
             </a:r>
           </a:p>
         </p:txBody>
@@ -20685,7 +21672,7 @@
 </p:sld>
 </file>
 
-<file path=ppt/slides/slide26.xml><?xml version="1.0" encoding="utf-8"?>
+<file path=ppt/slides/slide27.xml><?xml version="1.0" encoding="utf-8"?>
 <p:sld xmlns:a="http://schemas.openxmlformats.org/drawingml/2006/main" xmlns:p="http://schemas.openxmlformats.org/presentationml/2006/main" xmlns:r="http://schemas.openxmlformats.org/officeDocument/2006/relationships">
   <p:cSld>
     <p:bg>
@@ -20960,7 +21947,7 @@
 </p:sld>
 </file>
 
-<file path=ppt/slides/slide27.xml><?xml version="1.0" encoding="utf-8"?>
+<file path=ppt/slides/slide28.xml><?xml version="1.0" encoding="utf-8"?>
 <p:sld xmlns:a="http://schemas.openxmlformats.org/drawingml/2006/main" xmlns:p="http://schemas.openxmlformats.org/presentationml/2006/main" xmlns:r="http://schemas.openxmlformats.org/officeDocument/2006/relationships">
   <p:cSld>
     <p:spTree>
@@ -21194,7 +22181,7 @@
           <a:p>
             <a:pPr>
               <a:spcAft>
-                <a:spcPts val="1935"/>
+                <a:spcPts val="1671"/>
               </a:spcAft>
             </a:pPr>
             <a:r>
@@ -21228,7 +22215,7 @@
           <a:p>
             <a:pPr>
               <a:spcAft>
-                <a:spcPts val="1935"/>
+                <a:spcPts val="1671"/>
               </a:spcAft>
             </a:pPr>
             <a:r>
@@ -21262,7 +22249,7 @@
           <a:p>
             <a:pPr>
               <a:spcAft>
-                <a:spcPts val="1935"/>
+                <a:spcPts val="1671"/>
               </a:spcAft>
             </a:pPr>
             <a:r>
@@ -21296,7 +22283,7 @@
           <a:p>
             <a:pPr>
               <a:spcAft>
-                <a:spcPts val="1935"/>
+                <a:spcPts val="1671"/>
               </a:spcAft>
             </a:pPr>
             <a:r>
@@ -21330,7 +22317,7 @@
           <a:p>
             <a:pPr>
               <a:spcAft>
-                <a:spcPts val="1935"/>
+                <a:spcPts val="1671"/>
               </a:spcAft>
             </a:pPr>
             <a:r>
@@ -21364,7 +22351,7 @@
           <a:p>
             <a:pPr>
               <a:spcAft>
-                <a:spcPts val="1935"/>
+                <a:spcPts val="1671"/>
               </a:spcAft>
             </a:pPr>
             <a:r>
@@ -21398,7 +22385,7 @@
           <a:p>
             <a:pPr>
               <a:spcAft>
-                <a:spcPts val="1935"/>
+                <a:spcPts val="1671"/>
               </a:spcAft>
             </a:pPr>
             <a:r>
@@ -21432,7 +22419,7 @@
           <a:p>
             <a:pPr>
               <a:spcAft>
-                <a:spcPts val="1935"/>
+                <a:spcPts val="1671"/>
               </a:spcAft>
             </a:pPr>
             <a:r>
@@ -21466,7 +22453,7 @@
           <a:p>
             <a:pPr>
               <a:spcAft>
-                <a:spcPts val="1935"/>
+                <a:spcPts val="1671"/>
               </a:spcAft>
             </a:pPr>
             <a:r>
@@ -21500,7 +22487,7 @@
           <a:p>
             <a:pPr>
               <a:spcAft>
-                <a:spcPts val="1935"/>
+                <a:spcPts val="1671"/>
               </a:spcAft>
             </a:pPr>
             <a:r>
@@ -21534,7 +22521,7 @@
           <a:p>
             <a:pPr>
               <a:spcAft>
-                <a:spcPts val="1935"/>
+                <a:spcPts val="1671"/>
               </a:spcAft>
             </a:pPr>
             <a:r>
@@ -21568,7 +22555,7 @@
           <a:p>
             <a:pPr>
               <a:spcAft>
-                <a:spcPts val="1935"/>
+                <a:spcPts val="1671"/>
               </a:spcAft>
             </a:pPr>
             <a:r>
@@ -21597,6 +22584,40 @@
                 <a:latin typeface="Malgun Gothic"/>
               </a:rPr>
               <a:t>   ·  p.14</a:t>
+            </a:r>
+          </a:p>
+          <a:p>
+            <a:pPr>
+              <a:spcAft>
+                <a:spcPts val="1671"/>
+              </a:spcAft>
+            </a:pPr>
+            <a:r>
+              <a:rPr sz="1100" b="1">
+                <a:solidFill>
+                  <a:srgbClr val="4F46E5"/>
+                </a:solidFill>
+                <a:latin typeface="Malgun Gothic"/>
+              </a:rPr>
+              <a:t>12  </a:t>
+            </a:r>
+            <a:r>
+              <a:rPr sz="1100">
+                <a:solidFill>
+                  <a:srgbClr val="334155"/>
+                </a:solidFill>
+                <a:latin typeface="Malgun Gothic"/>
+              </a:rPr>
+              <a:t>💬 신규 상담·모객</a:t>
+            </a:r>
+            <a:r>
+              <a:rPr sz="950">
+                <a:solidFill>
+                  <a:srgbClr val="94A3B8"/>
+                </a:solidFill>
+                <a:latin typeface="Malgun Gothic"/>
+              </a:rPr>
+              <a:t>   ·  p.15</a:t>
             </a:r>
           </a:p>
         </p:txBody>
@@ -21625,7 +22646,7 @@
           <a:p>
             <a:pPr>
               <a:spcAft>
-                <a:spcPts val="1935"/>
+                <a:spcPts val="1671"/>
               </a:spcAft>
             </a:pPr>
             <a:r>
@@ -21635,7 +22656,7 @@
                 </a:solidFill>
                 <a:latin typeface="Malgun Gothic"/>
               </a:rPr>
-              <a:t>12  </a:t>
+              <a:t>13  </a:t>
             </a:r>
             <a:r>
               <a:rPr sz="1100">
@@ -21644,7 +22665,7 @@
                 </a:solidFill>
                 <a:latin typeface="Malgun Gothic"/>
               </a:rPr>
-              <a:t>💬 신규 상담·모객</a:t>
+              <a:t>🎧 고객센터·지원</a:t>
             </a:r>
             <a:r>
               <a:rPr sz="950">
@@ -21653,13 +22674,13 @@
                 </a:solidFill>
                 <a:latin typeface="Malgun Gothic"/>
               </a:rPr>
-              <a:t>   ·  p.15</a:t>
+              <a:t>   ·  p.16</a:t>
             </a:r>
           </a:p>
           <a:p>
             <a:pPr>
               <a:spcAft>
-                <a:spcPts val="1935"/>
+                <a:spcPts val="1671"/>
               </a:spcAft>
             </a:pPr>
             <a:r>
@@ -21669,7 +22690,7 @@
                 </a:solidFill>
                 <a:latin typeface="Malgun Gothic"/>
               </a:rPr>
-              <a:t>13  </a:t>
+              <a:t>14  </a:t>
             </a:r>
             <a:r>
               <a:rPr sz="1100">
@@ -21678,7 +22699,7 @@
                 </a:solidFill>
                 <a:latin typeface="Malgun Gothic"/>
               </a:rPr>
-              <a:t>🎧 고객센터·지원</a:t>
+              <a:t>🕐 한국·필리핀 듀얼 시계</a:t>
             </a:r>
             <a:r>
               <a:rPr sz="950">
@@ -21687,13 +22708,13 @@
                 </a:solidFill>
                 <a:latin typeface="Malgun Gothic"/>
               </a:rPr>
-              <a:t>   ·  p.16</a:t>
+              <a:t>   ·  p.17</a:t>
             </a:r>
           </a:p>
           <a:p>
             <a:pPr>
               <a:spcAft>
-                <a:spcPts val="1935"/>
+                <a:spcPts val="1671"/>
               </a:spcAft>
             </a:pPr>
             <a:r>
@@ -21703,7 +22724,7 @@
                 </a:solidFill>
                 <a:latin typeface="Malgun Gothic"/>
               </a:rPr>
-              <a:t>14  </a:t>
+              <a:t>15  </a:t>
             </a:r>
             <a:r>
               <a:rPr sz="1100">
@@ -21712,7 +22733,7 @@
                 </a:solidFill>
                 <a:latin typeface="Malgun Gothic"/>
               </a:rPr>
-              <a:t>🕐 한국·필리핀 듀얼 시계</a:t>
+              <a:t>🇨🇳 중국어 발음 코치</a:t>
             </a:r>
             <a:r>
               <a:rPr sz="950">
@@ -21721,13 +22742,13 @@
                 </a:solidFill>
                 <a:latin typeface="Malgun Gothic"/>
               </a:rPr>
-              <a:t>   ·  p.17</a:t>
+              <a:t>   ·  p.18</a:t>
             </a:r>
           </a:p>
           <a:p>
             <a:pPr>
               <a:spcAft>
-                <a:spcPts val="1935"/>
+                <a:spcPts val="1671"/>
               </a:spcAft>
             </a:pPr>
             <a:r>
@@ -21737,7 +22758,7 @@
                 </a:solidFill>
                 <a:latin typeface="Malgun Gothic"/>
               </a:rPr>
-              <a:t>15  </a:t>
+              <a:t>16  </a:t>
             </a:r>
             <a:r>
               <a:rPr sz="1100">
@@ -21746,7 +22767,7 @@
                 </a:solidFill>
                 <a:latin typeface="Malgun Gothic"/>
               </a:rPr>
-              <a:t>🇨🇳 중국어 발음 코치</a:t>
+              <a:t>🌟 수업 중 칭찬 포인트 (이해·활용)</a:t>
             </a:r>
             <a:r>
               <a:rPr sz="950">
@@ -21755,13 +22776,13 @@
                 </a:solidFill>
                 <a:latin typeface="Malgun Gothic"/>
               </a:rPr>
-              <a:t>   ·  p.18</a:t>
+              <a:t>   ·  p.19</a:t>
             </a:r>
           </a:p>
           <a:p>
             <a:pPr>
               <a:spcAft>
-                <a:spcPts val="1935"/>
+                <a:spcPts val="1671"/>
               </a:spcAft>
             </a:pPr>
             <a:r>
@@ -21771,7 +22792,7 @@
                 </a:solidFill>
                 <a:latin typeface="Malgun Gothic"/>
               </a:rPr>
-              <a:t>16  </a:t>
+              <a:t>17  </a:t>
             </a:r>
             <a:r>
               <a:rPr sz="1100">
@@ -21780,7 +22801,7 @@
                 </a:solidFill>
                 <a:latin typeface="Malgun Gothic"/>
               </a:rPr>
-              <a:t>🌟 수업 중 칭찬 포인트 (이해·활용)</a:t>
+              <a:t>📢 공지 스튜디오 (포스터 + 팝업)</a:t>
             </a:r>
             <a:r>
               <a:rPr sz="950">
@@ -21789,13 +22810,13 @@
                 </a:solidFill>
                 <a:latin typeface="Malgun Gothic"/>
               </a:rPr>
-              <a:t>   ·  p.19</a:t>
+              <a:t>   ·  p.20</a:t>
             </a:r>
           </a:p>
           <a:p>
             <a:pPr>
               <a:spcAft>
-                <a:spcPts val="1935"/>
+                <a:spcPts val="1671"/>
               </a:spcAft>
             </a:pPr>
             <a:r>
@@ -21805,7 +22826,7 @@
                 </a:solidFill>
                 <a:latin typeface="Malgun Gothic"/>
               </a:rPr>
-              <a:t>17  </a:t>
+              <a:t>18  </a:t>
             </a:r>
             <a:r>
               <a:rPr sz="1100">
@@ -21814,7 +22835,7 @@
                 </a:solidFill>
                 <a:latin typeface="Malgun Gothic"/>
               </a:rPr>
-              <a:t>📢 공지 스튜디오 (포스터 + 팝업)</a:t>
+              <a:t>🤖 AI 운영비서에게 시키기</a:t>
             </a:r>
             <a:r>
               <a:rPr sz="950">
@@ -21823,13 +22844,13 @@
                 </a:solidFill>
                 <a:latin typeface="Malgun Gothic"/>
               </a:rPr>
-              <a:t>   ·  p.20</a:t>
+              <a:t>   ·  p.21</a:t>
             </a:r>
           </a:p>
           <a:p>
             <a:pPr>
               <a:spcAft>
-                <a:spcPts val="1935"/>
+                <a:spcPts val="1671"/>
               </a:spcAft>
             </a:pPr>
             <a:r>
@@ -21839,7 +22860,7 @@
                 </a:solidFill>
                 <a:latin typeface="Malgun Gothic"/>
               </a:rPr>
-              <a:t>18  </a:t>
+              <a:t>19  </a:t>
             </a:r>
             <a:r>
               <a:rPr sz="1100">
@@ -21848,7 +22869,7 @@
                 </a:solidFill>
                 <a:latin typeface="Malgun Gothic"/>
               </a:rPr>
-              <a:t>🤖 AI 운영비서에게 시키기</a:t>
+              <a:t>💬 자료실 카카오톡 링크 공유</a:t>
             </a:r>
             <a:r>
               <a:rPr sz="950">
@@ -21857,13 +22878,13 @@
                 </a:solidFill>
                 <a:latin typeface="Malgun Gothic"/>
               </a:rPr>
-              <a:t>   ·  p.21</a:t>
+              <a:t>   ·  p.22</a:t>
             </a:r>
           </a:p>
           <a:p>
             <a:pPr>
               <a:spcAft>
-                <a:spcPts val="1935"/>
+                <a:spcPts val="1671"/>
               </a:spcAft>
             </a:pPr>
             <a:r>
@@ -21873,7 +22894,7 @@
                 </a:solidFill>
                 <a:latin typeface="Malgun Gothic"/>
               </a:rPr>
-              <a:t>19  </a:t>
+              <a:t>20  </a:t>
             </a:r>
             <a:r>
               <a:rPr sz="1100">
@@ -21891,13 +22912,13 @@
                 </a:solidFill>
                 <a:latin typeface="Malgun Gothic"/>
               </a:rPr>
-              <a:t>   ·  p.22</a:t>
+              <a:t>   ·  p.23</a:t>
             </a:r>
           </a:p>
           <a:p>
             <a:pPr>
               <a:spcAft>
-                <a:spcPts val="1935"/>
+                <a:spcPts val="1671"/>
               </a:spcAft>
             </a:pPr>
             <a:r>
@@ -21907,7 +22928,7 @@
                 </a:solidFill>
                 <a:latin typeface="Malgun Gothic"/>
               </a:rPr>
-              <a:t>20  </a:t>
+              <a:t>21  </a:t>
             </a:r>
             <a:r>
               <a:rPr sz="1100">
@@ -21925,13 +22946,13 @@
                 </a:solidFill>
                 <a:latin typeface="Malgun Gothic"/>
               </a:rPr>
-              <a:t>   ·  p.23</a:t>
+              <a:t>   ·  p.24</a:t>
             </a:r>
           </a:p>
           <a:p>
             <a:pPr>
               <a:spcAft>
-                <a:spcPts val="1935"/>
+                <a:spcPts val="1671"/>
               </a:spcAft>
             </a:pPr>
             <a:r>
@@ -21941,7 +22962,7 @@
                 </a:solidFill>
                 <a:latin typeface="Malgun Gothic"/>
               </a:rPr>
-              <a:t>21  </a:t>
+              <a:t>22  </a:t>
             </a:r>
             <a:r>
               <a:rPr sz="1100">
@@ -21959,13 +22980,13 @@
                 </a:solidFill>
                 <a:latin typeface="Malgun Gothic"/>
               </a:rPr>
-              <a:t>   ·  p.24</a:t>
+              <a:t>   ·  p.25</a:t>
             </a:r>
           </a:p>
           <a:p>
             <a:pPr>
               <a:spcAft>
-                <a:spcPts val="1935"/>
+                <a:spcPts val="1671"/>
               </a:spcAft>
             </a:pPr>
             <a:r>
@@ -21975,7 +22996,7 @@
                 </a:solidFill>
                 <a:latin typeface="Malgun Gothic"/>
               </a:rPr>
-              <a:t>22  </a:t>
+              <a:t>23  </a:t>
             </a:r>
             <a:r>
               <a:rPr sz="1100">
@@ -21993,13 +23014,13 @@
                 </a:solidFill>
                 <a:latin typeface="Malgun Gothic"/>
               </a:rPr>
-              <a:t>   ·  p.25</a:t>
+              <a:t>   ·  p.26</a:t>
             </a:r>
           </a:p>
           <a:p>
             <a:pPr>
               <a:spcAft>
-                <a:spcPts val="1935"/>
+                <a:spcPts val="1671"/>
               </a:spcAft>
             </a:pPr>
             <a:r>
@@ -22009,7 +23030,7 @@
                 </a:solidFill>
                 <a:latin typeface="Malgun Gothic"/>
               </a:rPr>
-              <a:t>23  </a:t>
+              <a:t>24  </a:t>
             </a:r>
             <a:r>
               <a:rPr sz="1100">
@@ -22027,7 +23048,7 @@
                 </a:solidFill>
                 <a:latin typeface="Malgun Gothic"/>
               </a:rPr>
-              <a:t>   ·  p.26</a:t>
+              <a:t>   ·  p.27</a:t>
             </a:r>
           </a:p>
         </p:txBody>
